--- a/ppts/InfraredSR_Datasets_Overview.pptx
+++ b/ppts/InfraredSR_Datasets_Overview.pptx
@@ -5,14 +5,16 @@
     <p:sldMasterId id="2147483648" r:id="rId1"/>
   </p:sldMasterIdLst>
   <p:sldIdLst>
-    <p:sldId id="256" r:id="rId2"/>
-    <p:sldId id="257" r:id="rId3"/>
-    <p:sldId id="258" r:id="rId4"/>
-    <p:sldId id="259" r:id="rId5"/>
-    <p:sldId id="260" r:id="rId6"/>
-    <p:sldId id="261" r:id="rId7"/>
+    <p:sldId id="256" r:id="rId7"/>
+    <p:sldId id="257" r:id="rId8"/>
+    <p:sldId id="258" r:id="rId9"/>
+    <p:sldId id="259" r:id="rId10"/>
+    <p:sldId id="260" r:id="rId11"/>
+    <p:sldId id="261" r:id="rId12"/>
+    <p:sldId id="262" r:id="rId13"/>
+    <p:sldId id="263" r:id="rId14"/>
   </p:sldIdLst>
-  <p:sldSz cx="12192000" cy="6858000"/>
+  <p:sldSz cx="12191695" cy="6858000" type="screen4x3"/>
   <p:notesSz cx="6858000" cy="9144000"/>
   <p:defaultTextStyle>
     <a:defPPr>
@@ -109,22 +111,6 @@
       </a:defRPr>
     </a:lvl9pPr>
   </p:defaultTextStyle>
-  <p:extLst>
-    <p:ext uri="{EFAFB233-063F-42B5-8137-9DF3F51BA10A}">
-      <p15:sldGuideLst xmlns:p15="http://schemas.microsoft.com/office/powerpoint/2012/main">
-        <p15:guide id="1" orient="horz" pos="2160">
-          <p15:clr>
-            <a:srgbClr val="A4A3A4"/>
-          </p15:clr>
-        </p15:guide>
-        <p15:guide id="2" pos="2880">
-          <p15:clr>
-            <a:srgbClr val="A4A3A4"/>
-          </p15:clr>
-        </p15:guide>
-      </p15:sldGuideLst>
-    </p:ext>
-  </p:extLst>
 </p:presentation>
 </file>
 
@@ -166,9 +152,10 @@
           <a:lstStyle/>
           <a:p>
             <a:r>
-              <a:rPr lang="en-US"/>
+              <a:rPr lang="en-US" smtClean="0"/>
               <a:t>Click to edit Master title style</a:t>
             </a:r>
+            <a:endParaRPr lang="en-US"/>
           </a:p>
         </p:txBody>
       </p:sp>
@@ -284,9 +271,10 @@
           </a:lstStyle>
           <a:p>
             <a:r>
-              <a:rPr lang="en-US"/>
+              <a:rPr lang="en-US" smtClean="0"/>
               <a:t>Click to edit Master subtitle style</a:t>
             </a:r>
+            <a:endParaRPr lang="en-US"/>
           </a:p>
         </p:txBody>
       </p:sp>
@@ -307,7 +295,7 @@
           <a:p>
             <a:fld id="{5BCAD085-E8A6-8845-BD4E-CB4CCA059FC4}" type="datetimeFigureOut">
               <a:rPr lang="en-US" smtClean="0"/>
-              <a:t>5/11/2026</a:t>
+              <a:t>1/27/13</a:t>
             </a:fld>
             <a:endParaRPr lang="en-US"/>
           </a:p>
@@ -401,9 +389,10 @@
           <a:lstStyle/>
           <a:p>
             <a:r>
-              <a:rPr lang="en-US"/>
+              <a:rPr lang="en-US" smtClean="0"/>
               <a:t>Click to edit Master title style</a:t>
             </a:r>
+            <a:endParaRPr lang="en-US"/>
           </a:p>
         </p:txBody>
       </p:sp>
@@ -424,37 +413,38 @@
           <a:p>
             <a:pPr lvl="0"/>
             <a:r>
-              <a:rPr lang="en-US"/>
+              <a:rPr lang="en-US" smtClean="0"/>
               <a:t>Click to edit Master text styles</a:t>
             </a:r>
           </a:p>
           <a:p>
             <a:pPr lvl="1"/>
             <a:r>
-              <a:rPr lang="en-US"/>
+              <a:rPr lang="en-US" smtClean="0"/>
               <a:t>Second level</a:t>
             </a:r>
           </a:p>
           <a:p>
             <a:pPr lvl="2"/>
             <a:r>
-              <a:rPr lang="en-US"/>
+              <a:rPr lang="en-US" smtClean="0"/>
               <a:t>Third level</a:t>
             </a:r>
           </a:p>
           <a:p>
             <a:pPr lvl="3"/>
             <a:r>
-              <a:rPr lang="en-US"/>
+              <a:rPr lang="en-US" smtClean="0"/>
               <a:t>Fourth level</a:t>
             </a:r>
           </a:p>
           <a:p>
             <a:pPr lvl="4"/>
             <a:r>
-              <a:rPr lang="en-US"/>
+              <a:rPr lang="en-US" smtClean="0"/>
               <a:t>Fifth level</a:t>
             </a:r>
+            <a:endParaRPr lang="en-US"/>
           </a:p>
         </p:txBody>
       </p:sp>
@@ -475,7 +465,7 @@
           <a:p>
             <a:fld id="{5BCAD085-E8A6-8845-BD4E-CB4CCA059FC4}" type="datetimeFigureOut">
               <a:rPr lang="en-US" smtClean="0"/>
-              <a:t>5/11/2026</a:t>
+              <a:t>1/27/13</a:t>
             </a:fld>
             <a:endParaRPr lang="en-US"/>
           </a:p>
@@ -574,9 +564,10 @@
           <a:lstStyle/>
           <a:p>
             <a:r>
-              <a:rPr lang="en-US"/>
+              <a:rPr lang="en-US" smtClean="0"/>
               <a:t>Click to edit Master title style</a:t>
             </a:r>
+            <a:endParaRPr lang="en-US"/>
           </a:p>
         </p:txBody>
       </p:sp>
@@ -602,37 +593,38 @@
           <a:p>
             <a:pPr lvl="0"/>
             <a:r>
-              <a:rPr lang="en-US"/>
+              <a:rPr lang="en-US" smtClean="0"/>
               <a:t>Click to edit Master text styles</a:t>
             </a:r>
           </a:p>
           <a:p>
             <a:pPr lvl="1"/>
             <a:r>
-              <a:rPr lang="en-US"/>
+              <a:rPr lang="en-US" smtClean="0"/>
               <a:t>Second level</a:t>
             </a:r>
           </a:p>
           <a:p>
             <a:pPr lvl="2"/>
             <a:r>
-              <a:rPr lang="en-US"/>
+              <a:rPr lang="en-US" smtClean="0"/>
               <a:t>Third level</a:t>
             </a:r>
           </a:p>
           <a:p>
             <a:pPr lvl="3"/>
             <a:r>
-              <a:rPr lang="en-US"/>
+              <a:rPr lang="en-US" smtClean="0"/>
               <a:t>Fourth level</a:t>
             </a:r>
           </a:p>
           <a:p>
             <a:pPr lvl="4"/>
             <a:r>
-              <a:rPr lang="en-US"/>
+              <a:rPr lang="en-US" smtClean="0"/>
               <a:t>Fifth level</a:t>
             </a:r>
+            <a:endParaRPr lang="en-US"/>
           </a:p>
         </p:txBody>
       </p:sp>
@@ -653,7 +645,7 @@
           <a:p>
             <a:fld id="{5BCAD085-E8A6-8845-BD4E-CB4CCA059FC4}" type="datetimeFigureOut">
               <a:rPr lang="en-US" smtClean="0"/>
-              <a:t>5/11/2026</a:t>
+              <a:t>1/27/13</a:t>
             </a:fld>
             <a:endParaRPr lang="en-US"/>
           </a:p>
@@ -747,9 +739,10 @@
           <a:lstStyle/>
           <a:p>
             <a:r>
-              <a:rPr lang="en-US"/>
+              <a:rPr lang="en-US" smtClean="0"/>
               <a:t>Click to edit Master title style</a:t>
             </a:r>
+            <a:endParaRPr lang="en-US"/>
           </a:p>
         </p:txBody>
       </p:sp>
@@ -770,37 +763,38 @@
           <a:p>
             <a:pPr lvl="0"/>
             <a:r>
-              <a:rPr lang="en-US"/>
+              <a:rPr lang="en-US" smtClean="0"/>
               <a:t>Click to edit Master text styles</a:t>
             </a:r>
           </a:p>
           <a:p>
             <a:pPr lvl="1"/>
             <a:r>
-              <a:rPr lang="en-US"/>
+              <a:rPr lang="en-US" smtClean="0"/>
               <a:t>Second level</a:t>
             </a:r>
           </a:p>
           <a:p>
             <a:pPr lvl="2"/>
             <a:r>
-              <a:rPr lang="en-US"/>
+              <a:rPr lang="en-US" smtClean="0"/>
               <a:t>Third level</a:t>
             </a:r>
           </a:p>
           <a:p>
             <a:pPr lvl="3"/>
             <a:r>
-              <a:rPr lang="en-US"/>
+              <a:rPr lang="en-US" smtClean="0"/>
               <a:t>Fourth level</a:t>
             </a:r>
           </a:p>
           <a:p>
             <a:pPr lvl="4"/>
             <a:r>
-              <a:rPr lang="en-US"/>
+              <a:rPr lang="en-US" smtClean="0"/>
               <a:t>Fifth level</a:t>
             </a:r>
+            <a:endParaRPr lang="en-US"/>
           </a:p>
         </p:txBody>
       </p:sp>
@@ -821,7 +815,7 @@
           <a:p>
             <a:fld id="{5BCAD085-E8A6-8845-BD4E-CB4CCA059FC4}" type="datetimeFigureOut">
               <a:rPr lang="en-US" smtClean="0"/>
-              <a:t>5/11/2026</a:t>
+              <a:t>1/27/13</a:t>
             </a:fld>
             <a:endParaRPr lang="en-US"/>
           </a:p>
@@ -924,9 +918,10 @@
           </a:lstStyle>
           <a:p>
             <a:r>
-              <a:rPr lang="en-US"/>
+              <a:rPr lang="en-US" smtClean="0"/>
               <a:t>Click to edit Master title style</a:t>
             </a:r>
+            <a:endParaRPr lang="en-US"/>
           </a:p>
         </p:txBody>
       </p:sp>
@@ -1043,7 +1038,7 @@
           <a:p>
             <a:pPr lvl="0"/>
             <a:r>
-              <a:rPr lang="en-US"/>
+              <a:rPr lang="en-US" smtClean="0"/>
               <a:t>Click to edit Master text styles</a:t>
             </a:r>
           </a:p>
@@ -1066,7 +1061,7 @@
           <a:p>
             <a:fld id="{5BCAD085-E8A6-8845-BD4E-CB4CCA059FC4}" type="datetimeFigureOut">
               <a:rPr lang="en-US" smtClean="0"/>
-              <a:t>5/11/2026</a:t>
+              <a:t>1/27/13</a:t>
             </a:fld>
             <a:endParaRPr lang="en-US"/>
           </a:p>
@@ -1160,9 +1155,10 @@
           <a:lstStyle/>
           <a:p>
             <a:r>
-              <a:rPr lang="en-US"/>
+              <a:rPr lang="en-US" smtClean="0"/>
               <a:t>Click to edit Master title style</a:t>
             </a:r>
+            <a:endParaRPr lang="en-US"/>
           </a:p>
         </p:txBody>
       </p:sp>
@@ -1216,37 +1212,38 @@
           <a:p>
             <a:pPr lvl="0"/>
             <a:r>
-              <a:rPr lang="en-US"/>
+              <a:rPr lang="en-US" smtClean="0"/>
               <a:t>Click to edit Master text styles</a:t>
             </a:r>
           </a:p>
           <a:p>
             <a:pPr lvl="1"/>
             <a:r>
-              <a:rPr lang="en-US"/>
+              <a:rPr lang="en-US" smtClean="0"/>
               <a:t>Second level</a:t>
             </a:r>
           </a:p>
           <a:p>
             <a:pPr lvl="2"/>
             <a:r>
-              <a:rPr lang="en-US"/>
+              <a:rPr lang="en-US" smtClean="0"/>
               <a:t>Third level</a:t>
             </a:r>
           </a:p>
           <a:p>
             <a:pPr lvl="3"/>
             <a:r>
-              <a:rPr lang="en-US"/>
+              <a:rPr lang="en-US" smtClean="0"/>
               <a:t>Fourth level</a:t>
             </a:r>
           </a:p>
           <a:p>
             <a:pPr lvl="4"/>
             <a:r>
-              <a:rPr lang="en-US"/>
+              <a:rPr lang="en-US" smtClean="0"/>
               <a:t>Fifth level</a:t>
             </a:r>
+            <a:endParaRPr lang="en-US"/>
           </a:p>
         </p:txBody>
       </p:sp>
@@ -1300,37 +1297,38 @@
           <a:p>
             <a:pPr lvl="0"/>
             <a:r>
-              <a:rPr lang="en-US"/>
+              <a:rPr lang="en-US" smtClean="0"/>
               <a:t>Click to edit Master text styles</a:t>
             </a:r>
           </a:p>
           <a:p>
             <a:pPr lvl="1"/>
             <a:r>
-              <a:rPr lang="en-US"/>
+              <a:rPr lang="en-US" smtClean="0"/>
               <a:t>Second level</a:t>
             </a:r>
           </a:p>
           <a:p>
             <a:pPr lvl="2"/>
             <a:r>
-              <a:rPr lang="en-US"/>
+              <a:rPr lang="en-US" smtClean="0"/>
               <a:t>Third level</a:t>
             </a:r>
           </a:p>
           <a:p>
             <a:pPr lvl="3"/>
             <a:r>
-              <a:rPr lang="en-US"/>
+              <a:rPr lang="en-US" smtClean="0"/>
               <a:t>Fourth level</a:t>
             </a:r>
           </a:p>
           <a:p>
             <a:pPr lvl="4"/>
             <a:r>
-              <a:rPr lang="en-US"/>
+              <a:rPr lang="en-US" smtClean="0"/>
               <a:t>Fifth level</a:t>
             </a:r>
+            <a:endParaRPr lang="en-US"/>
           </a:p>
         </p:txBody>
       </p:sp>
@@ -1351,7 +1349,7 @@
           <a:p>
             <a:fld id="{5BCAD085-E8A6-8845-BD4E-CB4CCA059FC4}" type="datetimeFigureOut">
               <a:rPr lang="en-US" smtClean="0"/>
-              <a:t>5/11/2026</a:t>
+              <a:t>1/27/13</a:t>
             </a:fld>
             <a:endParaRPr lang="en-US"/>
           </a:p>
@@ -1449,9 +1447,10 @@
           </a:lstStyle>
           <a:p>
             <a:r>
-              <a:rPr lang="en-US"/>
+              <a:rPr lang="en-US" smtClean="0"/>
               <a:t>Click to edit Master title style</a:t>
             </a:r>
+            <a:endParaRPr lang="en-US"/>
           </a:p>
         </p:txBody>
       </p:sp>
@@ -1514,7 +1513,7 @@
           <a:p>
             <a:pPr lvl="0"/>
             <a:r>
-              <a:rPr lang="en-US"/>
+              <a:rPr lang="en-US" smtClean="0"/>
               <a:t>Click to edit Master text styles</a:t>
             </a:r>
           </a:p>
@@ -1570,37 +1569,38 @@
           <a:p>
             <a:pPr lvl="0"/>
             <a:r>
-              <a:rPr lang="en-US"/>
+              <a:rPr lang="en-US" smtClean="0"/>
               <a:t>Click to edit Master text styles</a:t>
             </a:r>
           </a:p>
           <a:p>
             <a:pPr lvl="1"/>
             <a:r>
-              <a:rPr lang="en-US"/>
+              <a:rPr lang="en-US" smtClean="0"/>
               <a:t>Second level</a:t>
             </a:r>
           </a:p>
           <a:p>
             <a:pPr lvl="2"/>
             <a:r>
-              <a:rPr lang="en-US"/>
+              <a:rPr lang="en-US" smtClean="0"/>
               <a:t>Third level</a:t>
             </a:r>
           </a:p>
           <a:p>
             <a:pPr lvl="3"/>
             <a:r>
-              <a:rPr lang="en-US"/>
+              <a:rPr lang="en-US" smtClean="0"/>
               <a:t>Fourth level</a:t>
             </a:r>
           </a:p>
           <a:p>
             <a:pPr lvl="4"/>
             <a:r>
-              <a:rPr lang="en-US"/>
+              <a:rPr lang="en-US" smtClean="0"/>
               <a:t>Fifth level</a:t>
             </a:r>
+            <a:endParaRPr lang="en-US"/>
           </a:p>
         </p:txBody>
       </p:sp>
@@ -1663,7 +1663,7 @@
           <a:p>
             <a:pPr lvl="0"/>
             <a:r>
-              <a:rPr lang="en-US"/>
+              <a:rPr lang="en-US" smtClean="0"/>
               <a:t>Click to edit Master text styles</a:t>
             </a:r>
           </a:p>
@@ -1719,37 +1719,38 @@
           <a:p>
             <a:pPr lvl="0"/>
             <a:r>
-              <a:rPr lang="en-US"/>
+              <a:rPr lang="en-US" smtClean="0"/>
               <a:t>Click to edit Master text styles</a:t>
             </a:r>
           </a:p>
           <a:p>
             <a:pPr lvl="1"/>
             <a:r>
-              <a:rPr lang="en-US"/>
+              <a:rPr lang="en-US" smtClean="0"/>
               <a:t>Second level</a:t>
             </a:r>
           </a:p>
           <a:p>
             <a:pPr lvl="2"/>
             <a:r>
-              <a:rPr lang="en-US"/>
+              <a:rPr lang="en-US" smtClean="0"/>
               <a:t>Third level</a:t>
             </a:r>
           </a:p>
           <a:p>
             <a:pPr lvl="3"/>
             <a:r>
-              <a:rPr lang="en-US"/>
+              <a:rPr lang="en-US" smtClean="0"/>
               <a:t>Fourth level</a:t>
             </a:r>
           </a:p>
           <a:p>
             <a:pPr lvl="4"/>
             <a:r>
-              <a:rPr lang="en-US"/>
+              <a:rPr lang="en-US" smtClean="0"/>
               <a:t>Fifth level</a:t>
             </a:r>
+            <a:endParaRPr lang="en-US"/>
           </a:p>
         </p:txBody>
       </p:sp>
@@ -1770,7 +1771,7 @@
           <a:p>
             <a:fld id="{5BCAD085-E8A6-8845-BD4E-CB4CCA059FC4}" type="datetimeFigureOut">
               <a:rPr lang="en-US" smtClean="0"/>
-              <a:t>5/11/2026</a:t>
+              <a:t>1/27/13</a:t>
             </a:fld>
             <a:endParaRPr lang="en-US"/>
           </a:p>
@@ -1864,9 +1865,10 @@
           <a:lstStyle/>
           <a:p>
             <a:r>
-              <a:rPr lang="en-US"/>
+              <a:rPr lang="en-US" smtClean="0"/>
               <a:t>Click to edit Master title style</a:t>
             </a:r>
+            <a:endParaRPr lang="en-US"/>
           </a:p>
         </p:txBody>
       </p:sp>
@@ -1887,7 +1889,7 @@
           <a:p>
             <a:fld id="{5BCAD085-E8A6-8845-BD4E-CB4CCA059FC4}" type="datetimeFigureOut">
               <a:rPr lang="en-US" smtClean="0"/>
-              <a:t>5/11/2026</a:t>
+              <a:t>1/27/13</a:t>
             </a:fld>
             <a:endParaRPr lang="en-US"/>
           </a:p>
@@ -1982,7 +1984,7 @@
           <a:p>
             <a:fld id="{5BCAD085-E8A6-8845-BD4E-CB4CCA059FC4}" type="datetimeFigureOut">
               <a:rPr lang="en-US" smtClean="0"/>
-              <a:t>5/11/2026</a:t>
+              <a:t>1/27/13</a:t>
             </a:fld>
             <a:endParaRPr lang="en-US"/>
           </a:p>
@@ -2085,9 +2087,10 @@
           </a:lstStyle>
           <a:p>
             <a:r>
-              <a:rPr lang="en-US"/>
+              <a:rPr lang="en-US" smtClean="0"/>
               <a:t>Click to edit Master title style</a:t>
             </a:r>
+            <a:endParaRPr lang="en-US"/>
           </a:p>
         </p:txBody>
       </p:sp>
@@ -2141,37 +2144,38 @@
           <a:p>
             <a:pPr lvl="0"/>
             <a:r>
-              <a:rPr lang="en-US"/>
+              <a:rPr lang="en-US" smtClean="0"/>
               <a:t>Click to edit Master text styles</a:t>
             </a:r>
           </a:p>
           <a:p>
             <a:pPr lvl="1"/>
             <a:r>
-              <a:rPr lang="en-US"/>
+              <a:rPr lang="en-US" smtClean="0"/>
               <a:t>Second level</a:t>
             </a:r>
           </a:p>
           <a:p>
             <a:pPr lvl="2"/>
             <a:r>
-              <a:rPr lang="en-US"/>
+              <a:rPr lang="en-US" smtClean="0"/>
               <a:t>Third level</a:t>
             </a:r>
           </a:p>
           <a:p>
             <a:pPr lvl="3"/>
             <a:r>
-              <a:rPr lang="en-US"/>
+              <a:rPr lang="en-US" smtClean="0"/>
               <a:t>Fourth level</a:t>
             </a:r>
           </a:p>
           <a:p>
             <a:pPr lvl="4"/>
             <a:r>
-              <a:rPr lang="en-US"/>
+              <a:rPr lang="en-US" smtClean="0"/>
               <a:t>Fifth level</a:t>
             </a:r>
+            <a:endParaRPr lang="en-US"/>
           </a:p>
         </p:txBody>
       </p:sp>
@@ -2234,7 +2238,7 @@
           <a:p>
             <a:pPr lvl="0"/>
             <a:r>
-              <a:rPr lang="en-US"/>
+              <a:rPr lang="en-US" smtClean="0"/>
               <a:t>Click to edit Master text styles</a:t>
             </a:r>
           </a:p>
@@ -2257,7 +2261,7 @@
           <a:p>
             <a:fld id="{5BCAD085-E8A6-8845-BD4E-CB4CCA059FC4}" type="datetimeFigureOut">
               <a:rPr lang="en-US" smtClean="0"/>
-              <a:t>5/11/2026</a:t>
+              <a:t>1/27/13</a:t>
             </a:fld>
             <a:endParaRPr lang="en-US"/>
           </a:p>
@@ -2360,9 +2364,10 @@
           </a:lstStyle>
           <a:p>
             <a:r>
-              <a:rPr lang="en-US"/>
+              <a:rPr lang="en-US" smtClean="0"/>
               <a:t>Click to edit Master title style</a:t>
             </a:r>
+            <a:endParaRPr lang="en-US"/>
           </a:p>
         </p:txBody>
       </p:sp>
@@ -2486,7 +2491,7 @@
           <a:p>
             <a:pPr lvl="0"/>
             <a:r>
-              <a:rPr lang="en-US"/>
+              <a:rPr lang="en-US" smtClean="0"/>
               <a:t>Click to edit Master text styles</a:t>
             </a:r>
           </a:p>
@@ -2509,7 +2514,7 @@
           <a:p>
             <a:fld id="{5BCAD085-E8A6-8845-BD4E-CB4CCA059FC4}" type="datetimeFigureOut">
               <a:rPr lang="en-US" smtClean="0"/>
-              <a:t>5/11/2026</a:t>
+              <a:t>1/27/13</a:t>
             </a:fld>
             <a:endParaRPr lang="en-US"/>
           </a:p>
@@ -2618,9 +2623,10 @@
           <a:lstStyle/>
           <a:p>
             <a:r>
-              <a:rPr lang="en-US"/>
+              <a:rPr lang="en-US" smtClean="0"/>
               <a:t>Click to edit Master title style</a:t>
             </a:r>
+            <a:endParaRPr lang="en-US"/>
           </a:p>
         </p:txBody>
       </p:sp>
@@ -2651,37 +2657,38 @@
           <a:p>
             <a:pPr lvl="0"/>
             <a:r>
-              <a:rPr lang="en-US"/>
+              <a:rPr lang="en-US" smtClean="0"/>
               <a:t>Click to edit Master text styles</a:t>
             </a:r>
           </a:p>
           <a:p>
             <a:pPr lvl="1"/>
             <a:r>
-              <a:rPr lang="en-US"/>
+              <a:rPr lang="en-US" smtClean="0"/>
               <a:t>Second level</a:t>
             </a:r>
           </a:p>
           <a:p>
             <a:pPr lvl="2"/>
             <a:r>
-              <a:rPr lang="en-US"/>
+              <a:rPr lang="en-US" smtClean="0"/>
               <a:t>Third level</a:t>
             </a:r>
           </a:p>
           <a:p>
             <a:pPr lvl="3"/>
             <a:r>
-              <a:rPr lang="en-US"/>
+              <a:rPr lang="en-US" smtClean="0"/>
               <a:t>Fourth level</a:t>
             </a:r>
           </a:p>
           <a:p>
             <a:pPr lvl="4"/>
             <a:r>
-              <a:rPr lang="en-US"/>
+              <a:rPr lang="en-US" smtClean="0"/>
               <a:t>Fifth level</a:t>
             </a:r>
+            <a:endParaRPr lang="en-US"/>
           </a:p>
         </p:txBody>
       </p:sp>
@@ -2720,7 +2727,7 @@
           <a:p>
             <a:fld id="{5BCAD085-E8A6-8845-BD4E-CB4CCA059FC4}" type="datetimeFigureOut">
               <a:rPr lang="en-US" smtClean="0"/>
-              <a:t>5/11/2026</a:t>
+              <a:t>1/27/13</a:t>
             </a:fld>
             <a:endParaRPr lang="en-US"/>
           </a:p>
@@ -3079,7 +3086,7 @@
 </file>
 
 <file path=ppt/slides/slide1.xml><?xml version="1.0" encoding="utf-8"?>
-<p:sld xmlns:a="http://schemas.openxmlformats.org/drawingml/2006/main" xmlns:r="http://schemas.openxmlformats.org/officeDocument/2006/relationships" xmlns:p="http://schemas.openxmlformats.org/presentationml/2006/main">
+<p:sld xmlns:a="http://schemas.openxmlformats.org/drawingml/2006/main" xmlns:p="http://schemas.openxmlformats.org/presentationml/2006/main" xmlns:r="http://schemas.openxmlformats.org/officeDocument/2006/relationships">
   <p:cSld>
     <p:bg>
       <p:bgPr>
@@ -3095,14 +3102,7 @@
         <p:cNvGrpSpPr/>
         <p:nvPr/>
       </p:nvGrpSpPr>
-      <p:grpSpPr>
-        <a:xfrm>
-          <a:off x="0" y="0"/>
-          <a:ext cx="0" cy="0"/>
-          <a:chOff x="0" y="0"/>
-          <a:chExt cx="0" cy="0"/>
-        </a:xfrm>
-      </p:grpSpPr>
+      <p:grpSpPr/>
       <p:sp>
         <p:nvSpPr>
           <p:cNvPr id="2" name="TextBox 1"/>
@@ -3173,7 +3173,23 @@
               </a:defRPr>
             </a:pPr>
             <a:r>
-              <a:t>红外遥感方向三个数据集：超分辨率重建、航拍车辆检测、跨传感器图像翻译</a:t>
+              <a:t>红外遥感方向五个数据集：超分辨率重建、航拍车辆检测、</a:t>
+            </a:r>
+          </a:p>
+          <a:p>
+            <a:pPr>
+              <a:spcAft>
+                <a:spcPts val="600"/>
+              </a:spcAft>
+              <a:defRPr sz="1800">
+                <a:solidFill>
+                  <a:srgbClr val="444444"/>
+                </a:solidFill>
+                <a:latin typeface="Times New Roman"/>
+              </a:defRPr>
+            </a:pPr>
+            <a:r>
+              <a:t>跨传感器图像翻译、跨光谱配准与可见光引导超分</a:t>
             </a:r>
           </a:p>
         </p:txBody>
@@ -3187,7 +3203,7 @@
 </file>
 
 <file path=ppt/slides/slide2.xml><?xml version="1.0" encoding="utf-8"?>
-<p:sld xmlns:a="http://schemas.openxmlformats.org/drawingml/2006/main" xmlns:r="http://schemas.openxmlformats.org/officeDocument/2006/relationships" xmlns:p="http://schemas.openxmlformats.org/presentationml/2006/main">
+<p:sld xmlns:a="http://schemas.openxmlformats.org/drawingml/2006/main" xmlns:p="http://schemas.openxmlformats.org/presentationml/2006/main" xmlns:r="http://schemas.openxmlformats.org/officeDocument/2006/relationships">
   <p:cSld>
     <p:bg>
       <p:bgPr>
@@ -3203,14 +3219,7 @@
         <p:cNvGrpSpPr/>
         <p:nvPr/>
       </p:nvGrpSpPr>
-      <p:grpSpPr>
-        <a:xfrm>
-          <a:off x="0" y="0"/>
-          <a:ext cx="0" cy="0"/>
-          <a:chOff x="0" y="0"/>
-          <a:chExt cx="0" cy="0"/>
-        </a:xfrm>
-      </p:grpSpPr>
+      <p:grpSpPr/>
       <p:sp>
         <p:nvSpPr>
           <p:cNvPr id="2" name="TextBox 1"/>
@@ -3253,17 +3262,11 @@
           <p:cNvGraphicFramePr>
             <a:graphicFrameLocks noGrp="1"/>
           </p:cNvGraphicFramePr>
-          <p:nvPr>
-            <p:extLst>
-              <p:ext uri="{D42A27DB-BD31-4B8C-83A1-F6EECF244321}">
-                <p14:modId xmlns:p14="http://schemas.microsoft.com/office/powerpoint/2010/main" val="1396069491"/>
-              </p:ext>
-            </p:extLst>
-          </p:nvPr>
+          <p:nvPr/>
         </p:nvGraphicFramePr>
         <p:xfrm>
-          <a:off x="335280" y="1615857"/>
-          <a:ext cx="11521440" cy="4084320"/>
+          <a:off x="365760" y="1371600"/>
+          <a:ext cx="10424160" cy="4828032"/>
         </p:xfrm>
         <a:graphic>
           <a:graphicData uri="http://schemas.openxmlformats.org/drawingml/2006/table">
@@ -3272,50 +3275,20 @@
                 <a:tableStyleId>{5C22544A-7EE6-4342-B048-85BDC9FD1C3A}</a:tableStyleId>
               </a:tblPr>
               <a:tblGrid>
-                <a:gridCol w="1828800">
-                  <a:extLst>
-                    <a:ext uri="{9D8B030D-6E8A-4147-A177-3AD203B41FA5}">
-                      <a16:colId xmlns:a16="http://schemas.microsoft.com/office/drawing/2014/main" val="20000"/>
-                    </a:ext>
-                  </a:extLst>
-                </a:gridCol>
-                <a:gridCol w="2377440">
-                  <a:extLst>
-                    <a:ext uri="{9D8B030D-6E8A-4147-A177-3AD203B41FA5}">
-                      <a16:colId xmlns:a16="http://schemas.microsoft.com/office/drawing/2014/main" val="20001"/>
-                    </a:ext>
-                  </a:extLst>
-                </a:gridCol>
-                <a:gridCol w="2377440">
-                  <a:extLst>
-                    <a:ext uri="{9D8B030D-6E8A-4147-A177-3AD203B41FA5}">
-                      <a16:colId xmlns:a16="http://schemas.microsoft.com/office/drawing/2014/main" val="20002"/>
-                    </a:ext>
-                  </a:extLst>
-                </a:gridCol>
-                <a:gridCol w="2560320">
-                  <a:extLst>
-                    <a:ext uri="{9D8B030D-6E8A-4147-A177-3AD203B41FA5}">
-                      <a16:colId xmlns:a16="http://schemas.microsoft.com/office/drawing/2014/main" val="20003"/>
-                    </a:ext>
-                  </a:extLst>
-                </a:gridCol>
-                <a:gridCol w="2377440">
-                  <a:extLst>
-                    <a:ext uri="{9D8B030D-6E8A-4147-A177-3AD203B41FA5}">
-                      <a16:colId xmlns:a16="http://schemas.microsoft.com/office/drawing/2014/main" val="20004"/>
-                    </a:ext>
-                  </a:extLst>
-                </a:gridCol>
+                <a:gridCol w="1554480"/>
+                <a:gridCol w="2103120"/>
+                <a:gridCol w="2103120"/>
+                <a:gridCol w="2560320"/>
+                <a:gridCol w="2103120"/>
               </a:tblGrid>
-              <a:tr h="1005840">
-                <a:tc>
-                  <a:txBody>
-                    <a:bodyPr/>
-                    <a:lstStyle/>
-                    <a:p>
-                      <a:pPr algn="ctr">
-                        <a:defRPr sz="1600" b="1">
+              <a:tr h="804672">
+                <a:tc>
+                  <a:txBody>
+                    <a:bodyPr/>
+                    <a:lstStyle/>
+                    <a:p>
+                      <a:pPr algn="ctr">
+                        <a:defRPr sz="1300" b="1">
                           <a:solidFill>
                             <a:srgbClr val="000000"/>
                           </a:solidFill>
@@ -3346,7 +3319,7 @@
                     <a:lstStyle/>
                     <a:p>
                       <a:pPr algn="ctr">
-                        <a:defRPr sz="1600" b="1">
+                        <a:defRPr sz="1300" b="1">
                           <a:solidFill>
                             <a:srgbClr val="000000"/>
                           </a:solidFill>
@@ -3377,7 +3350,7 @@
                     <a:lstStyle/>
                     <a:p>
                       <a:pPr algn="ctr">
-                        <a:defRPr sz="1600" b="1">
+                        <a:defRPr sz="1300" b="1">
                           <a:solidFill>
                             <a:srgbClr val="000000"/>
                           </a:solidFill>
@@ -3408,18 +3381,16 @@
                     <a:lstStyle/>
                     <a:p>
                       <a:pPr algn="ctr">
-                        <a:defRPr sz="1600" b="1">
-                          <a:solidFill>
-                            <a:srgbClr val="000000"/>
-                          </a:solidFill>
-                          <a:latin typeface="Times New Roman"/>
-                        </a:defRPr>
-                      </a:pPr>
-                      <a:r>
-                        <a:rPr dirty="0" err="1"/>
-                        <a:t>分辨率</a:t>
-                      </a:r>
-                      <a:endParaRPr dirty="0"/>
+                        <a:defRPr sz="1300" b="1">
+                          <a:solidFill>
+                            <a:srgbClr val="000000"/>
+                          </a:solidFill>
+                          <a:latin typeface="Times New Roman"/>
+                        </a:defRPr>
+                      </a:pPr>
+                      <a:r>
+                        <a:t>分辨率 / 尺度</a:t>
+                      </a:r>
                     </a:p>
                   </a:txBody>
                   <a:tcPr anchor="ctr">
@@ -3441,7 +3412,7 @@
                     <a:lstStyle/>
                     <a:p>
                       <a:pPr algn="ctr">
-                        <a:defRPr sz="1600" b="1">
+                        <a:defRPr sz="1300" b="1">
                           <a:solidFill>
                             <a:srgbClr val="000000"/>
                           </a:solidFill>
@@ -3466,20 +3437,15 @@
                     </a:lnB>
                   </a:tcPr>
                 </a:tc>
-                <a:extLst>
-                  <a:ext uri="{0D108BD9-81ED-4DB2-BD59-A6C34878D82A}">
-                    <a16:rowId xmlns:a16="http://schemas.microsoft.com/office/drawing/2014/main" val="10000"/>
-                  </a:ext>
-                </a:extLst>
               </a:tr>
-              <a:tr h="1005840">
-                <a:tc>
-                  <a:txBody>
-                    <a:bodyPr/>
-                    <a:lstStyle/>
-                    <a:p>
-                      <a:pPr algn="ctr">
-                        <a:defRPr sz="1600" b="0">
+              <a:tr h="804672">
+                <a:tc>
+                  <a:txBody>
+                    <a:bodyPr/>
+                    <a:lstStyle/>
+                    <a:p>
+                      <a:pPr algn="ctr">
+                        <a:defRPr sz="1300" b="0">
                           <a:solidFill>
                             <a:srgbClr val="000000"/>
                           </a:solidFill>
@@ -3491,25 +3457,15 @@
                       </a:r>
                     </a:p>
                   </a:txBody>
-                  <a:tcPr anchor="ctr">
-                    <a:lnT w="9500" cap="flat" cmpd="sng" algn="ctr">
-                      <a:solidFill>
-                        <a:srgbClr val="000000"/>
-                      </a:solidFill>
-                      <a:prstDash val="solid"/>
-                      <a:round/>
-                      <a:headEnd type="none" w="med" len="med"/>
-                      <a:tailEnd type="none" w="med" len="med"/>
-                    </a:lnT>
-                  </a:tcPr>
-                </a:tc>
-                <a:tc>
-                  <a:txBody>
-                    <a:bodyPr/>
-                    <a:lstStyle/>
-                    <a:p>
-                      <a:pPr algn="ctr">
-                        <a:defRPr sz="1600" b="0">
+                  <a:tcPr anchor="ctr"/>
+                </a:tc>
+                <a:tc>
+                  <a:txBody>
+                    <a:bodyPr/>
+                    <a:lstStyle/>
+                    <a:p>
+                      <a:pPr algn="ctr">
+                        <a:defRPr sz="1300" b="0">
                           <a:solidFill>
                             <a:srgbClr val="000000"/>
                           </a:solidFill>
@@ -3522,7 +3478,7 @@
                     </a:p>
                     <a:p>
                       <a:pPr algn="ctr">
-                        <a:defRPr sz="1600" b="0">
+                        <a:defRPr sz="1300" b="0">
                           <a:solidFill>
                             <a:srgbClr val="000000"/>
                           </a:solidFill>
@@ -3534,25 +3490,15 @@
                       </a:r>
                     </a:p>
                   </a:txBody>
-                  <a:tcPr anchor="ctr">
-                    <a:lnT w="9500" cap="flat" cmpd="sng" algn="ctr">
-                      <a:solidFill>
-                        <a:srgbClr val="000000"/>
-                      </a:solidFill>
-                      <a:prstDash val="solid"/>
-                      <a:round/>
-                      <a:headEnd type="none" w="med" len="med"/>
-                      <a:tailEnd type="none" w="med" len="med"/>
-                    </a:lnT>
-                  </a:tcPr>
-                </a:tc>
-                <a:tc>
-                  <a:txBody>
-                    <a:bodyPr/>
-                    <a:lstStyle/>
-                    <a:p>
-                      <a:pPr algn="ctr">
-                        <a:defRPr sz="1600" b="0">
+                  <a:tcPr anchor="ctr"/>
+                </a:tc>
+                <a:tc>
+                  <a:txBody>
+                    <a:bodyPr/>
+                    <a:lstStyle/>
+                    <a:p>
+                      <a:pPr algn="ctr">
+                        <a:defRPr sz="1300" b="0">
                           <a:solidFill>
                             <a:srgbClr val="000000"/>
                           </a:solidFill>
@@ -3565,7 +3511,7 @@
                     </a:p>
                     <a:p>
                       <a:pPr algn="ctr">
-                        <a:defRPr sz="1600" b="0">
+                        <a:defRPr sz="1300" b="0">
                           <a:solidFill>
                             <a:srgbClr val="000000"/>
                           </a:solidFill>
@@ -3577,25 +3523,15 @@
                       </a:r>
                     </a:p>
                   </a:txBody>
-                  <a:tcPr anchor="ctr">
-                    <a:lnT w="9500" cap="flat" cmpd="sng" algn="ctr">
-                      <a:solidFill>
-                        <a:srgbClr val="000000"/>
-                      </a:solidFill>
-                      <a:prstDash val="solid"/>
-                      <a:round/>
-                      <a:headEnd type="none" w="med" len="med"/>
-                      <a:tailEnd type="none" w="med" len="med"/>
-                    </a:lnT>
-                  </a:tcPr>
-                </a:tc>
-                <a:tc>
-                  <a:txBody>
-                    <a:bodyPr/>
-                    <a:lstStyle/>
-                    <a:p>
-                      <a:pPr algn="ctr">
-                        <a:defRPr sz="1600" b="0">
+                  <a:tcPr anchor="ctr"/>
+                </a:tc>
+                <a:tc>
+                  <a:txBody>
+                    <a:bodyPr/>
+                    <a:lstStyle/>
+                    <a:p>
+                      <a:pPr algn="ctr">
+                        <a:defRPr sz="1300" b="0">
                           <a:solidFill>
                             <a:srgbClr val="000000"/>
                           </a:solidFill>
@@ -3608,50 +3544,27 @@
                     </a:p>
                     <a:p>
                       <a:pPr algn="ctr">
-                        <a:defRPr sz="1600" b="0">
-                          <a:solidFill>
-                            <a:srgbClr val="000000"/>
-                          </a:solidFill>
-                          <a:latin typeface="Times New Roman"/>
-                        </a:defRPr>
-                      </a:pPr>
-                      <a:r>
-                        <a:t>LR×2 320×256</a:t>
-                      </a:r>
-                    </a:p>
-                    <a:p>
-                      <a:pPr algn="ctr">
-                        <a:defRPr sz="1600" b="0">
-                          <a:solidFill>
-                            <a:srgbClr val="000000"/>
-                          </a:solidFill>
-                          <a:latin typeface="Times New Roman"/>
-                        </a:defRPr>
-                      </a:pPr>
-                      <a:r>
-                        <a:t>LR×4 160×128</a:t>
-                      </a:r>
-                    </a:p>
-                  </a:txBody>
-                  <a:tcPr anchor="ctr">
-                    <a:lnT w="9500" cap="flat" cmpd="sng" algn="ctr">
-                      <a:solidFill>
-                        <a:srgbClr val="000000"/>
-                      </a:solidFill>
-                      <a:prstDash val="solid"/>
-                      <a:round/>
-                      <a:headEnd type="none" w="med" len="med"/>
-                      <a:tailEnd type="none" w="med" len="med"/>
-                    </a:lnT>
-                  </a:tcPr>
-                </a:tc>
-                <a:tc>
-                  <a:txBody>
-                    <a:bodyPr/>
-                    <a:lstStyle/>
-                    <a:p>
-                      <a:pPr algn="ctr">
-                        <a:defRPr sz="1600" b="0">
+                        <a:defRPr sz="1300" b="0">
+                          <a:solidFill>
+                            <a:srgbClr val="000000"/>
+                          </a:solidFill>
+                          <a:latin typeface="Times New Roman"/>
+                        </a:defRPr>
+                      </a:pPr>
+                      <a:r>
+                        <a:t>LR×2 320×256 / LR×4 160×128</a:t>
+                      </a:r>
+                    </a:p>
+                  </a:txBody>
+                  <a:tcPr anchor="ctr"/>
+                </a:tc>
+                <a:tc>
+                  <a:txBody>
+                    <a:bodyPr/>
+                    <a:lstStyle/>
+                    <a:p>
+                      <a:pPr algn="ctr">
+                        <a:defRPr sz="1300" b="0">
                           <a:solidFill>
                             <a:srgbClr val="000000"/>
                           </a:solidFill>
@@ -3664,7 +3577,7 @@
                     </a:p>
                     <a:p>
                       <a:pPr algn="ctr">
-                        <a:defRPr sz="1600" b="0">
+                        <a:defRPr sz="1300" b="0">
                           <a:solidFill>
                             <a:srgbClr val="000000"/>
                           </a:solidFill>
@@ -3677,7 +3590,7 @@
                     </a:p>
                     <a:p>
                       <a:pPr algn="ctr">
-                        <a:defRPr sz="1600" b="0">
+                        <a:defRPr sz="1300" b="0">
                           <a:solidFill>
                             <a:srgbClr val="000000"/>
                           </a:solidFill>
@@ -3690,7 +3603,7 @@
                     </a:p>
                     <a:p>
                       <a:pPr algn="ctr">
-                        <a:defRPr sz="1600" b="0">
+                        <a:defRPr sz="1300" b="0">
                           <a:solidFill>
                             <a:srgbClr val="000000"/>
                           </a:solidFill>
@@ -3702,32 +3615,17 @@
                       </a:r>
                     </a:p>
                   </a:txBody>
-                  <a:tcPr anchor="ctr">
-                    <a:lnT w="9500" cap="flat" cmpd="sng" algn="ctr">
-                      <a:solidFill>
-                        <a:srgbClr val="000000"/>
-                      </a:solidFill>
-                      <a:prstDash val="solid"/>
-                      <a:round/>
-                      <a:headEnd type="none" w="med" len="med"/>
-                      <a:tailEnd type="none" w="med" len="med"/>
-                    </a:lnT>
-                  </a:tcPr>
-                </a:tc>
-                <a:extLst>
-                  <a:ext uri="{0D108BD9-81ED-4DB2-BD59-A6C34878D82A}">
-                    <a16:rowId xmlns:a16="http://schemas.microsoft.com/office/drawing/2014/main" val="10001"/>
-                  </a:ext>
-                </a:extLst>
+                  <a:tcPr anchor="ctr"/>
+                </a:tc>
               </a:tr>
-              <a:tr h="1005840">
-                <a:tc>
-                  <a:txBody>
-                    <a:bodyPr/>
-                    <a:lstStyle/>
-                    <a:p>
-                      <a:pPr algn="ctr">
-                        <a:defRPr sz="1600" b="0">
+              <a:tr h="804672">
+                <a:tc>
+                  <a:txBody>
+                    <a:bodyPr/>
+                    <a:lstStyle/>
+                    <a:p>
+                      <a:pPr algn="ctr">
+                        <a:defRPr sz="1300" b="0">
                           <a:solidFill>
                             <a:srgbClr val="000000"/>
                           </a:solidFill>
@@ -3747,7 +3645,7 @@
                     <a:lstStyle/>
                     <a:p>
                       <a:pPr algn="ctr">
-                        <a:defRPr sz="1600" b="0">
+                        <a:defRPr sz="1300" b="0">
                           <a:solidFill>
                             <a:srgbClr val="000000"/>
                           </a:solidFill>
@@ -3760,7 +3658,7 @@
                     </a:p>
                     <a:p>
                       <a:pPr algn="ctr">
-                        <a:defRPr sz="1600" b="0">
+                        <a:defRPr sz="1300" b="0">
                           <a:solidFill>
                             <a:srgbClr val="000000"/>
                           </a:solidFill>
@@ -3780,7 +3678,7 @@
                     <a:lstStyle/>
                     <a:p>
                       <a:pPr algn="ctr">
-                        <a:defRPr sz="1600" b="0">
+                        <a:defRPr sz="1300" b="0">
                           <a:solidFill>
                             <a:srgbClr val="000000"/>
                           </a:solidFill>
@@ -3793,7 +3691,7 @@
                     </a:p>
                     <a:p>
                       <a:pPr algn="ctr">
-                        <a:defRPr sz="1600" b="0">
+                        <a:defRPr sz="1300" b="0">
                           <a:solidFill>
                             <a:srgbClr val="000000"/>
                           </a:solidFill>
@@ -3813,7 +3711,7 @@
                     <a:lstStyle/>
                     <a:p>
                       <a:pPr algn="ctr">
-                        <a:defRPr sz="1600" b="0">
+                        <a:defRPr sz="1300" b="0">
                           <a:solidFill>
                             <a:srgbClr val="000000"/>
                           </a:solidFill>
@@ -3826,7 +3724,7 @@
                     </a:p>
                     <a:p>
                       <a:pPr algn="ctr">
-                        <a:defRPr sz="1600" b="0">
+                        <a:defRPr sz="1300" b="0">
                           <a:solidFill>
                             <a:srgbClr val="000000"/>
                           </a:solidFill>
@@ -3846,7 +3744,7 @@
                     <a:lstStyle/>
                     <a:p>
                       <a:pPr algn="ctr">
-                        <a:defRPr sz="1600" b="0">
+                        <a:defRPr sz="1300" b="0">
                           <a:solidFill>
                             <a:srgbClr val="000000"/>
                           </a:solidFill>
@@ -3859,7 +3757,7 @@
                     </a:p>
                     <a:p>
                       <a:pPr algn="ctr">
-                        <a:defRPr sz="1600" b="0">
+                        <a:defRPr sz="1300" b="0">
                           <a:solidFill>
                             <a:srgbClr val="000000"/>
                           </a:solidFill>
@@ -3872,7 +3770,7 @@
                     </a:p>
                     <a:p>
                       <a:pPr algn="ctr">
-                        <a:defRPr sz="1600" b="0">
+                        <a:defRPr sz="1300" b="0">
                           <a:solidFill>
                             <a:srgbClr val="000000"/>
                           </a:solidFill>
@@ -3886,20 +3784,15 @@
                   </a:txBody>
                   <a:tcPr anchor="ctr"/>
                 </a:tc>
-                <a:extLst>
-                  <a:ext uri="{0D108BD9-81ED-4DB2-BD59-A6C34878D82A}">
-                    <a16:rowId xmlns:a16="http://schemas.microsoft.com/office/drawing/2014/main" val="10002"/>
-                  </a:ext>
-                </a:extLst>
               </a:tr>
-              <a:tr h="1005840">
-                <a:tc>
-                  <a:txBody>
-                    <a:bodyPr/>
-                    <a:lstStyle/>
-                    <a:p>
-                      <a:pPr algn="ctr">
-                        <a:defRPr sz="1600" b="0">
+              <a:tr h="804672">
+                <a:tc>
+                  <a:txBody>
+                    <a:bodyPr/>
+                    <a:lstStyle/>
+                    <a:p>
+                      <a:pPr algn="ctr">
+                        <a:defRPr sz="1300" b="0">
                           <a:solidFill>
                             <a:srgbClr val="000000"/>
                           </a:solidFill>
@@ -3908,6 +3801,366 @@
                       </a:pPr>
                       <a:r>
                         <a:t>OLI2MSI</a:t>
+                      </a:r>
+                    </a:p>
+                  </a:txBody>
+                  <a:tcPr anchor="ctr"/>
+                </a:tc>
+                <a:tc>
+                  <a:txBody>
+                    <a:bodyPr/>
+                    <a:lstStyle/>
+                    <a:p>
+                      <a:pPr algn="ctr">
+                        <a:defRPr sz="1300" b="0">
+                          <a:solidFill>
+                            <a:srgbClr val="000000"/>
+                          </a:solidFill>
+                          <a:latin typeface="Times New Roman"/>
+                        </a:defRPr>
+                      </a:pPr>
+                      <a:r>
+                        <a:t>跨传感器图像翻译</a:t>
+                      </a:r>
+                    </a:p>
+                    <a:p>
+                      <a:pPr algn="ctr">
+                        <a:defRPr sz="1300" b="0">
+                          <a:solidFill>
+                            <a:srgbClr val="000000"/>
+                          </a:solidFill>
+                          <a:latin typeface="Times New Roman"/>
+                        </a:defRPr>
+                      </a:pPr>
+                      <a:r>
+                        <a:t>(Landsat-8 → Sentinel-2)</a:t>
+                      </a:r>
+                    </a:p>
+                  </a:txBody>
+                  <a:tcPr anchor="ctr"/>
+                </a:tc>
+                <a:tc>
+                  <a:txBody>
+                    <a:bodyPr/>
+                    <a:lstStyle/>
+                    <a:p>
+                      <a:pPr algn="ctr">
+                        <a:defRPr sz="1300" b="0">
+                          <a:solidFill>
+                            <a:srgbClr val="000000"/>
+                          </a:solidFill>
+                          <a:latin typeface="Times New Roman"/>
+                        </a:defRPr>
+                      </a:pPr>
+                      <a:r>
+                        <a:t>多光谱卫星遥感</a:t>
+                      </a:r>
+                    </a:p>
+                    <a:p>
+                      <a:pPr algn="ctr">
+                        <a:defRPr sz="1300" b="0">
+                          <a:solidFill>
+                            <a:srgbClr val="000000"/>
+                          </a:solidFill>
+                          <a:latin typeface="Times New Roman"/>
+                        </a:defRPr>
+                      </a:pPr>
+                      <a:r>
+                        <a:t>(GeoTIFF)</a:t>
+                      </a:r>
+                    </a:p>
+                  </a:txBody>
+                  <a:tcPr anchor="ctr"/>
+                </a:tc>
+                <a:tc>
+                  <a:txBody>
+                    <a:bodyPr/>
+                    <a:lstStyle/>
+                    <a:p>
+                      <a:pPr algn="ctr">
+                        <a:defRPr sz="1300" b="0">
+                          <a:solidFill>
+                            <a:srgbClr val="000000"/>
+                          </a:solidFill>
+                          <a:latin typeface="Times New Roman"/>
+                        </a:defRPr>
+                      </a:pPr>
+                      <a:r>
+                        <a:t>LR: 30m</a:t>
+                      </a:r>
+                    </a:p>
+                    <a:p>
+                      <a:pPr algn="ctr">
+                        <a:defRPr sz="1300" b="0">
+                          <a:solidFill>
+                            <a:srgbClr val="000000"/>
+                          </a:solidFill>
+                          <a:latin typeface="Times New Roman"/>
+                        </a:defRPr>
+                      </a:pPr>
+                      <a:r>
+                        <a:t>HR: 10m</a:t>
+                      </a:r>
+                    </a:p>
+                  </a:txBody>
+                  <a:tcPr anchor="ctr"/>
+                </a:tc>
+                <a:tc>
+                  <a:txBody>
+                    <a:bodyPr/>
+                    <a:lstStyle/>
+                    <a:p>
+                      <a:pPr algn="ctr">
+                        <a:defRPr sz="1300" b="0">
+                          <a:solidFill>
+                            <a:srgbClr val="000000"/>
+                          </a:solidFill>
+                          <a:latin typeface="Times New Roman"/>
+                        </a:defRPr>
+                      </a:pPr>
+                      <a:r>
+                        <a:t>5,325 对</a:t>
+                      </a:r>
+                    </a:p>
+                    <a:p>
+                      <a:pPr algn="ctr">
+                        <a:defRPr sz="1300" b="0">
+                          <a:solidFill>
+                            <a:srgbClr val="000000"/>
+                          </a:solidFill>
+                          <a:latin typeface="Times New Roman"/>
+                        </a:defRPr>
+                      </a:pPr>
+                      <a:r>
+                        <a:t>训练 5,225</a:t>
+                      </a:r>
+                    </a:p>
+                    <a:p>
+                      <a:pPr algn="ctr">
+                        <a:defRPr sz="1300" b="0">
+                          <a:solidFill>
+                            <a:srgbClr val="000000"/>
+                          </a:solidFill>
+                          <a:latin typeface="Times New Roman"/>
+                        </a:defRPr>
+                      </a:pPr>
+                      <a:r>
+                        <a:t>测试 100</a:t>
+                      </a:r>
+                    </a:p>
+                  </a:txBody>
+                  <a:tcPr anchor="ctr"/>
+                </a:tc>
+              </a:tr>
+              <a:tr h="804672">
+                <a:tc>
+                  <a:txBody>
+                    <a:bodyPr/>
+                    <a:lstStyle/>
+                    <a:p>
+                      <a:pPr algn="ctr">
+                        <a:defRPr sz="1300" b="0">
+                          <a:solidFill>
+                            <a:srgbClr val="000000"/>
+                          </a:solidFill>
+                          <a:latin typeface="Times New Roman"/>
+                        </a:defRPr>
+                      </a:pPr>
+                      <a:r>
+                        <a:t>CIDIS</a:t>
+                      </a:r>
+                    </a:p>
+                  </a:txBody>
+                  <a:tcPr anchor="ctr"/>
+                </a:tc>
+                <a:tc>
+                  <a:txBody>
+                    <a:bodyPr/>
+                    <a:lstStyle/>
+                    <a:p>
+                      <a:pPr algn="ctr">
+                        <a:defRPr sz="1300" b="0">
+                          <a:solidFill>
+                            <a:srgbClr val="000000"/>
+                          </a:solidFill>
+                          <a:latin typeface="Times New Roman"/>
+                        </a:defRPr>
+                      </a:pPr>
+                      <a:r>
+                        <a:t>跨光谱图像配准</a:t>
+                      </a:r>
+                    </a:p>
+                    <a:p>
+                      <a:pPr algn="ctr">
+                        <a:defRPr sz="1300" b="0">
+                          <a:solidFill>
+                            <a:srgbClr val="000000"/>
+                          </a:solidFill>
+                          <a:latin typeface="Times New Roman"/>
+                        </a:defRPr>
+                      </a:pPr>
+                      <a:r>
+                        <a:t>(热红外 ↔ 可见光)</a:t>
+                      </a:r>
+                    </a:p>
+                  </a:txBody>
+                  <a:tcPr anchor="ctr"/>
+                </a:tc>
+                <a:tc>
+                  <a:txBody>
+                    <a:bodyPr/>
+                    <a:lstStyle/>
+                    <a:p>
+                      <a:pPr algn="ctr">
+                        <a:defRPr sz="1300" b="0">
+                          <a:solidFill>
+                            <a:srgbClr val="000000"/>
+                          </a:solidFill>
+                          <a:latin typeface="Times New Roman"/>
+                        </a:defRPr>
+                      </a:pPr>
+                      <a:r>
+                        <a:t>热红外 + 可见光</a:t>
+                      </a:r>
+                    </a:p>
+                    <a:p>
+                      <a:pPr algn="ctr">
+                        <a:defRPr sz="1300" b="0">
+                          <a:solidFill>
+                            <a:srgbClr val="000000"/>
+                          </a:solidFill>
+                          <a:latin typeface="Times New Roman"/>
+                        </a:defRPr>
+                      </a:pPr>
+                      <a:r>
+                        <a:t>(配对)</a:t>
+                      </a:r>
+                    </a:p>
+                  </a:txBody>
+                  <a:tcPr anchor="ctr"/>
+                </a:tc>
+                <a:tc>
+                  <a:txBody>
+                    <a:bodyPr/>
+                    <a:lstStyle/>
+                    <a:p>
+                      <a:pPr algn="ctr">
+                        <a:defRPr sz="1300" b="0">
+                          <a:solidFill>
+                            <a:srgbClr val="000000"/>
+                          </a:solidFill>
+                          <a:latin typeface="Times New Roman"/>
+                        </a:defRPr>
+                      </a:pPr>
+                      <a:r>
+                        <a:t>640×448</a:t>
+                      </a:r>
+                    </a:p>
+                    <a:p>
+                      <a:pPr algn="ctr">
+                        <a:defRPr sz="1300" b="0">
+                          <a:solidFill>
+                            <a:srgbClr val="000000"/>
+                          </a:solidFill>
+                          <a:latin typeface="Times New Roman"/>
+                        </a:defRPr>
+                      </a:pPr>
+                      <a:r>
+                        <a:t>(RGB)</a:t>
+                      </a:r>
+                    </a:p>
+                  </a:txBody>
+                  <a:tcPr anchor="ctr"/>
+                </a:tc>
+                <a:tc>
+                  <a:txBody>
+                    <a:bodyPr/>
+                    <a:lstStyle/>
+                    <a:p>
+                      <a:pPr algn="ctr">
+                        <a:defRPr sz="1300" b="0">
+                          <a:solidFill>
+                            <a:srgbClr val="000000"/>
+                          </a:solidFill>
+                          <a:latin typeface="Times New Roman"/>
+                        </a:defRPr>
+                      </a:pPr>
+                      <a:r>
+                        <a:t>1,000 对</a:t>
+                      </a:r>
+                    </a:p>
+                    <a:p>
+                      <a:pPr algn="ctr">
+                        <a:defRPr sz="1300" b="0">
+                          <a:solidFill>
+                            <a:srgbClr val="000000"/>
+                          </a:solidFill>
+                          <a:latin typeface="Times New Roman"/>
+                        </a:defRPr>
+                      </a:pPr>
+                      <a:r>
+                        <a:t>训练 700</a:t>
+                      </a:r>
+                    </a:p>
+                    <a:p>
+                      <a:pPr algn="ctr">
+                        <a:defRPr sz="1300" b="0">
+                          <a:solidFill>
+                            <a:srgbClr val="000000"/>
+                          </a:solidFill>
+                          <a:latin typeface="Times New Roman"/>
+                        </a:defRPr>
+                      </a:pPr>
+                      <a:r>
+                        <a:t>验证 200</a:t>
+                      </a:r>
+                    </a:p>
+                    <a:p>
+                      <a:pPr algn="ctr">
+                        <a:defRPr sz="1300" b="0">
+                          <a:solidFill>
+                            <a:srgbClr val="000000"/>
+                          </a:solidFill>
+                          <a:latin typeface="Times New Roman"/>
+                        </a:defRPr>
+                      </a:pPr>
+                      <a:r>
+                        <a:t>测试 100</a:t>
+                      </a:r>
+                    </a:p>
+                  </a:txBody>
+                  <a:tcPr anchor="ctr"/>
+                </a:tc>
+              </a:tr>
+              <a:tr h="804672">
+                <a:tc>
+                  <a:txBody>
+                    <a:bodyPr/>
+                    <a:lstStyle/>
+                    <a:p>
+                      <a:pPr algn="ctr">
+                        <a:defRPr sz="1300" b="0">
+                          <a:solidFill>
+                            <a:srgbClr val="000000"/>
+                          </a:solidFill>
+                          <a:latin typeface="Times New Roman"/>
+                        </a:defRPr>
+                      </a:pPr>
+                      <a:r>
+                        <a:t>CIDIS_guided</a:t>
+                      </a:r>
+                    </a:p>
+                    <a:p>
+                      <a:pPr algn="ctr">
+                        <a:defRPr sz="1300" b="0">
+                          <a:solidFill>
+                            <a:srgbClr val="000000"/>
+                          </a:solidFill>
+                          <a:latin typeface="Times New Roman"/>
+                        </a:defRPr>
+                      </a:pPr>
+                      <a:r>
+                        <a:t>x8 x16</a:t>
                       </a:r>
                     </a:p>
                   </a:txBody>
@@ -3925,28 +4178,28 @@
                     <a:lstStyle/>
                     <a:p>
                       <a:pPr algn="ctr">
-                        <a:defRPr sz="1600" b="0">
-                          <a:solidFill>
-                            <a:srgbClr val="000000"/>
-                          </a:solidFill>
-                          <a:latin typeface="Times New Roman"/>
-                        </a:defRPr>
-                      </a:pPr>
-                      <a:r>
-                        <a:t>跨传感器图像翻译</a:t>
-                      </a:r>
-                    </a:p>
-                    <a:p>
-                      <a:pPr algn="ctr">
-                        <a:defRPr sz="1600" b="0">
-                          <a:solidFill>
-                            <a:srgbClr val="000000"/>
-                          </a:solidFill>
-                          <a:latin typeface="Times New Roman"/>
-                        </a:defRPr>
-                      </a:pPr>
-                      <a:r>
-                        <a:t>(Landsat-8 → Sentinel-2)</a:t>
+                        <a:defRPr sz="1300" b="0">
+                          <a:solidFill>
+                            <a:srgbClr val="000000"/>
+                          </a:solidFill>
+                          <a:latin typeface="Times New Roman"/>
+                        </a:defRPr>
+                      </a:pPr>
+                      <a:r>
+                        <a:t>可见光引导红外</a:t>
+                      </a:r>
+                    </a:p>
+                    <a:p>
+                      <a:pPr algn="ctr">
+                        <a:defRPr sz="1300" b="0">
+                          <a:solidFill>
+                            <a:srgbClr val="000000"/>
+                          </a:solidFill>
+                          <a:latin typeface="Times New Roman"/>
+                        </a:defRPr>
+                      </a:pPr>
+                      <a:r>
+                        <a:t>超分辨率 (×8, ×16)</a:t>
                       </a:r>
                     </a:p>
                   </a:txBody>
@@ -3964,39 +4217,28 @@
                     <a:lstStyle/>
                     <a:p>
                       <a:pPr algn="ctr">
-                        <a:defRPr sz="1600" b="0">
-                          <a:solidFill>
-                            <a:srgbClr val="000000"/>
-                          </a:solidFill>
-                          <a:latin typeface="Times New Roman"/>
-                        </a:defRPr>
-                      </a:pPr>
-                      <a:r>
-                        <a:rPr dirty="0" err="1"/>
-                        <a:t>多光谱卫星遥感</a:t>
-                      </a:r>
-                      <a:endParaRPr dirty="0"/>
-                    </a:p>
-                    <a:p>
-                      <a:pPr algn="ctr">
-                        <a:defRPr sz="1600" b="0">
-                          <a:solidFill>
-                            <a:srgbClr val="000000"/>
-                          </a:solidFill>
-                          <a:latin typeface="Times New Roman"/>
-                        </a:defRPr>
-                      </a:pPr>
-                      <a:r>
-                        <a:rPr dirty="0"/>
-                        <a:t>(</a:t>
-                      </a:r>
-                      <a:r>
-                        <a:rPr dirty="0" err="1"/>
-                        <a:t>GeoTIFF</a:t>
-                      </a:r>
-                      <a:r>
-                        <a:rPr dirty="0"/>
-                        <a:t>)</a:t>
+                        <a:defRPr sz="1300" b="0">
+                          <a:solidFill>
+                            <a:srgbClr val="000000"/>
+                          </a:solidFill>
+                          <a:latin typeface="Times New Roman"/>
+                        </a:defRPr>
+                      </a:pPr>
+                      <a:r>
+                        <a:t>热红外 + 可见光引导</a:t>
+                      </a:r>
+                    </a:p>
+                    <a:p>
+                      <a:pPr algn="ctr">
+                        <a:defRPr sz="1300" b="0">
+                          <a:solidFill>
+                            <a:srgbClr val="000000"/>
+                          </a:solidFill>
+                          <a:latin typeface="Times New Roman"/>
+                        </a:defRPr>
+                      </a:pPr>
+                      <a:r>
+                        <a:t>(配对)</a:t>
                       </a:r>
                     </a:p>
                   </a:txBody>
@@ -4014,28 +4256,41 @@
                     <a:lstStyle/>
                     <a:p>
                       <a:pPr algn="ctr">
-                        <a:defRPr sz="1600" b="0">
-                          <a:solidFill>
-                            <a:srgbClr val="000000"/>
-                          </a:solidFill>
-                          <a:latin typeface="Times New Roman"/>
-                        </a:defRPr>
-                      </a:pPr>
-                      <a:r>
-                        <a:t>LR: 30m</a:t>
-                      </a:r>
-                    </a:p>
-                    <a:p>
-                      <a:pPr algn="ctr">
-                        <a:defRPr sz="1600" b="0">
-                          <a:solidFill>
-                            <a:srgbClr val="000000"/>
-                          </a:solidFill>
-                          <a:latin typeface="Times New Roman"/>
-                        </a:defRPr>
-                      </a:pPr>
-                      <a:r>
-                        <a:t>HR: 10m</a:t>
+                        <a:defRPr sz="1300" b="0">
+                          <a:solidFill>
+                            <a:srgbClr val="000000"/>
+                          </a:solidFill>
+                          <a:latin typeface="Times New Roman"/>
+                        </a:defRPr>
+                      </a:pPr>
+                      <a:r>
+                        <a:t>GT 640×448</a:t>
+                      </a:r>
+                    </a:p>
+                    <a:p>
+                      <a:pPr algn="ctr">
+                        <a:defRPr sz="1300" b="0">
+                          <a:solidFill>
+                            <a:srgbClr val="000000"/>
+                          </a:solidFill>
+                          <a:latin typeface="Times New Roman"/>
+                        </a:defRPr>
+                      </a:pPr>
+                      <a:r>
+                        <a:t>LR×8 80×56</a:t>
+                      </a:r>
+                    </a:p>
+                    <a:p>
+                      <a:pPr algn="ctr">
+                        <a:defRPr sz="1300" b="0">
+                          <a:solidFill>
+                            <a:srgbClr val="000000"/>
+                          </a:solidFill>
+                          <a:latin typeface="Times New Roman"/>
+                        </a:defRPr>
+                      </a:pPr>
+                      <a:r>
+                        <a:t>LR×16 40×28</a:t>
                       </a:r>
                     </a:p>
                   </a:txBody>
@@ -4053,52 +4308,41 @@
                     <a:lstStyle/>
                     <a:p>
                       <a:pPr algn="ctr">
-                        <a:defRPr sz="1600" b="0">
-                          <a:solidFill>
-                            <a:srgbClr val="000000"/>
-                          </a:solidFill>
-                          <a:latin typeface="Times New Roman"/>
-                        </a:defRPr>
-                      </a:pPr>
-                      <a:r>
-                        <a:rPr dirty="0"/>
-                        <a:t>5,325 对</a:t>
-                      </a:r>
-                    </a:p>
-                    <a:p>
-                      <a:pPr algn="ctr">
-                        <a:defRPr sz="1600" b="0">
-                          <a:solidFill>
-                            <a:srgbClr val="000000"/>
-                          </a:solidFill>
-                          <a:latin typeface="Times New Roman"/>
-                        </a:defRPr>
-                      </a:pPr>
-                      <a:r>
-                        <a:rPr dirty="0" err="1"/>
-                        <a:t>训练</a:t>
-                      </a:r>
-                      <a:r>
-                        <a:rPr dirty="0"/>
-                        <a:t> 5,225</a:t>
-                      </a:r>
-                    </a:p>
-                    <a:p>
-                      <a:pPr algn="ctr">
-                        <a:defRPr sz="1600" b="0">
-                          <a:solidFill>
-                            <a:srgbClr val="000000"/>
-                          </a:solidFill>
-                          <a:latin typeface="Times New Roman"/>
-                        </a:defRPr>
-                      </a:pPr>
-                      <a:r>
-                        <a:rPr dirty="0" err="1"/>
-                        <a:t>测试</a:t>
-                      </a:r>
-                      <a:r>
-                        <a:rPr dirty="0"/>
-                        <a:t> 100</a:t>
+                        <a:defRPr sz="1300" b="0">
+                          <a:solidFill>
+                            <a:srgbClr val="000000"/>
+                          </a:solidFill>
+                          <a:latin typeface="Times New Roman"/>
+                        </a:defRPr>
+                      </a:pPr>
+                      <a:r>
+                        <a:t>700 对训练</a:t>
+                      </a:r>
+                    </a:p>
+                    <a:p>
+                      <a:pPr algn="ctr">
+                        <a:defRPr sz="1300" b="0">
+                          <a:solidFill>
+                            <a:srgbClr val="000000"/>
+                          </a:solidFill>
+                          <a:latin typeface="Times New Roman"/>
+                        </a:defRPr>
+                      </a:pPr>
+                      <a:r>
+                        <a:t>200 对验证</a:t>
+                      </a:r>
+                    </a:p>
+                    <a:p>
+                      <a:pPr algn="ctr">
+                        <a:defRPr sz="1300" b="0">
+                          <a:solidFill>
+                            <a:srgbClr val="000000"/>
+                          </a:solidFill>
+                          <a:latin typeface="Times New Roman"/>
+                        </a:defRPr>
+                      </a:pPr>
+                      <a:r>
+                        <a:t>40 对测试</a:t>
                       </a:r>
                     </a:p>
                   </a:txBody>
@@ -4110,11 +4354,6 @@
                     </a:lnB>
                   </a:tcPr>
                 </a:tc>
-                <a:extLst>
-                  <a:ext uri="{0D108BD9-81ED-4DB2-BD59-A6C34878D82A}">
-                    <a16:rowId xmlns:a16="http://schemas.microsoft.com/office/drawing/2014/main" val="10003"/>
-                  </a:ext>
-                </a:extLst>
               </a:tr>
             </a:tbl>
           </a:graphicData>
@@ -4129,7 +4368,7 @@
 </file>
 
 <file path=ppt/slides/slide3.xml><?xml version="1.0" encoding="utf-8"?>
-<p:sld xmlns:a="http://schemas.openxmlformats.org/drawingml/2006/main" xmlns:r="http://schemas.openxmlformats.org/officeDocument/2006/relationships" xmlns:p="http://schemas.openxmlformats.org/presentationml/2006/main">
+<p:sld xmlns:a="http://schemas.openxmlformats.org/drawingml/2006/main" xmlns:p="http://schemas.openxmlformats.org/presentationml/2006/main" xmlns:r="http://schemas.openxmlformats.org/officeDocument/2006/relationships">
   <p:cSld>
     <p:bg>
       <p:bgPr>
@@ -4145,14 +4384,7 @@
         <p:cNvGrpSpPr/>
         <p:nvPr/>
       </p:nvGrpSpPr>
-      <p:grpSpPr>
-        <a:xfrm>
-          <a:off x="0" y="0"/>
-          <a:ext cx="0" cy="0"/>
-          <a:chOff x="0" y="0"/>
-          <a:chExt cx="0" cy="0"/>
-        </a:xfrm>
-      </p:grpSpPr>
+      <p:grpSpPr/>
       <p:sp>
         <p:nvSpPr>
           <p:cNvPr id="2" name="TextBox 1"/>
@@ -4255,7 +4487,7 @@
               </a:defRPr>
             </a:pPr>
             <a:r>
-              <a:t>• 目录结构：{trainsets, valsets, testsets} / {HR, LRx2, LRx4}</a:t>
+              <a:t>• 目录：{trainsets, valsets, testsets} / {HR, LRx2, LRx4}</a:t>
             </a:r>
           </a:p>
           <a:p>
@@ -4308,7 +4540,7 @@
         </p:nvSpPr>
         <p:spPr>
           <a:xfrm>
-            <a:off x="662627" y="5669280"/>
+            <a:off x="731520" y="4800600"/>
             <a:ext cx="2743200" cy="274320"/>
           </a:xfrm>
           <a:prstGeom prst="rect">
@@ -4334,7 +4566,6 @@
               </a:defRPr>
             </a:pPr>
             <a:r>
-              <a:rPr dirty="0"/>
               <a:t>HR 640×512</a:t>
             </a:r>
           </a:p>
@@ -4372,7 +4603,7 @@
         </p:nvSpPr>
         <p:spPr>
           <a:xfrm>
-            <a:off x="3941941" y="4572313"/>
+            <a:off x="4023360" y="4046220"/>
             <a:ext cx="1371600" cy="274320"/>
           </a:xfrm>
           <a:prstGeom prst="rect">
@@ -4398,7 +4629,6 @@
               </a:defRPr>
             </a:pPr>
             <a:r>
-              <a:rPr dirty="0"/>
               <a:t>LR×2 320×256</a:t>
             </a:r>
           </a:p>
@@ -4436,8 +4666,8 @@
         </p:nvSpPr>
         <p:spPr>
           <a:xfrm>
-            <a:off x="5943600" y="3968245"/>
-            <a:ext cx="1158658" cy="274320"/>
+            <a:off x="5943600" y="3669030"/>
+            <a:ext cx="685800" cy="274320"/>
           </a:xfrm>
           <a:prstGeom prst="rect">
             <a:avLst/>
@@ -4462,7 +4692,6 @@
               </a:defRPr>
             </a:pPr>
             <a:r>
-              <a:rPr dirty="0"/>
               <a:t>LR×4 160×128</a:t>
             </a:r>
           </a:p>
@@ -4474,16 +4703,10 @@
           <p:cNvGraphicFramePr>
             <a:graphicFrameLocks noGrp="1"/>
           </p:cNvGraphicFramePr>
-          <p:nvPr>
-            <p:extLst>
-              <p:ext uri="{D42A27DB-BD31-4B8C-83A1-F6EECF244321}">
-                <p14:modId xmlns:p14="http://schemas.microsoft.com/office/powerpoint/2010/main" val="3062210141"/>
-              </p:ext>
-            </p:extLst>
-          </p:nvPr>
+          <p:nvPr/>
         </p:nvGraphicFramePr>
         <p:xfrm>
-          <a:off x="7396620" y="1295191"/>
+          <a:off x="7772400" y="1280160"/>
           <a:ext cx="3657600" cy="1536192"/>
         </p:xfrm>
         <a:graphic>
@@ -4493,34 +4716,10 @@
                 <a:tableStyleId>{5C22544A-7EE6-4342-B048-85BDC9FD1C3A}</a:tableStyleId>
               </a:tblPr>
               <a:tblGrid>
-                <a:gridCol w="914400">
-                  <a:extLst>
-                    <a:ext uri="{9D8B030D-6E8A-4147-A177-3AD203B41FA5}">
-                      <a16:colId xmlns:a16="http://schemas.microsoft.com/office/drawing/2014/main" val="20000"/>
-                    </a:ext>
-                  </a:extLst>
-                </a:gridCol>
-                <a:gridCol w="914400">
-                  <a:extLst>
-                    <a:ext uri="{9D8B030D-6E8A-4147-A177-3AD203B41FA5}">
-                      <a16:colId xmlns:a16="http://schemas.microsoft.com/office/drawing/2014/main" val="20001"/>
-                    </a:ext>
-                  </a:extLst>
-                </a:gridCol>
-                <a:gridCol w="914400">
-                  <a:extLst>
-                    <a:ext uri="{9D8B030D-6E8A-4147-A177-3AD203B41FA5}">
-                      <a16:colId xmlns:a16="http://schemas.microsoft.com/office/drawing/2014/main" val="20002"/>
-                    </a:ext>
-                  </a:extLst>
-                </a:gridCol>
-                <a:gridCol w="914400">
-                  <a:extLst>
-                    <a:ext uri="{9D8B030D-6E8A-4147-A177-3AD203B41FA5}">
-                      <a16:colId xmlns:a16="http://schemas.microsoft.com/office/drawing/2014/main" val="20003"/>
-                    </a:ext>
-                  </a:extLst>
-                </a:gridCol>
+                <a:gridCol w="914400"/>
+                <a:gridCol w="914400"/>
+                <a:gridCol w="914400"/>
+                <a:gridCol w="914400"/>
               </a:tblGrid>
               <a:tr h="384048">
                 <a:tc>
@@ -4647,11 +4846,6 @@
                     </a:lnB>
                   </a:tcPr>
                 </a:tc>
-                <a:extLst>
-                  <a:ext uri="{0D108BD9-81ED-4DB2-BD59-A6C34878D82A}">
-                    <a16:rowId xmlns:a16="http://schemas.microsoft.com/office/drawing/2014/main" val="10000"/>
-                  </a:ext>
-                </a:extLst>
               </a:tr>
               <a:tr h="384048">
                 <a:tc>
@@ -4672,17 +4866,7 @@
                       </a:r>
                     </a:p>
                   </a:txBody>
-                  <a:tcPr anchor="ctr">
-                    <a:lnT w="9500" cap="flat" cmpd="sng" algn="ctr">
-                      <a:solidFill>
-                        <a:srgbClr val="000000"/>
-                      </a:solidFill>
-                      <a:prstDash val="solid"/>
-                      <a:round/>
-                      <a:headEnd type="none" w="med" len="med"/>
-                      <a:tailEnd type="none" w="med" len="med"/>
-                    </a:lnT>
-                  </a:tcPr>
+                  <a:tcPr anchor="ctr"/>
                 </a:tc>
                 <a:tc>
                   <a:txBody>
@@ -4702,17 +4886,7 @@
                       </a:r>
                     </a:p>
                   </a:txBody>
-                  <a:tcPr anchor="ctr">
-                    <a:lnT w="9500" cap="flat" cmpd="sng" algn="ctr">
-                      <a:solidFill>
-                        <a:srgbClr val="000000"/>
-                      </a:solidFill>
-                      <a:prstDash val="solid"/>
-                      <a:round/>
-                      <a:headEnd type="none" w="med" len="med"/>
-                      <a:tailEnd type="none" w="med" len="med"/>
-                    </a:lnT>
-                  </a:tcPr>
+                  <a:tcPr anchor="ctr"/>
                 </a:tc>
                 <a:tc>
                   <a:txBody>
@@ -4732,17 +4906,7 @@
                       </a:r>
                     </a:p>
                   </a:txBody>
-                  <a:tcPr anchor="ctr">
-                    <a:lnT w="9500" cap="flat" cmpd="sng" algn="ctr">
-                      <a:solidFill>
-                        <a:srgbClr val="000000"/>
-                      </a:solidFill>
-                      <a:prstDash val="solid"/>
-                      <a:round/>
-                      <a:headEnd type="none" w="med" len="med"/>
-                      <a:tailEnd type="none" w="med" len="med"/>
-                    </a:lnT>
-                  </a:tcPr>
+                  <a:tcPr anchor="ctr"/>
                 </a:tc>
                 <a:tc>
                   <a:txBody>
@@ -4762,23 +4926,8 @@
                       </a:r>
                     </a:p>
                   </a:txBody>
-                  <a:tcPr anchor="ctr">
-                    <a:lnT w="9500" cap="flat" cmpd="sng" algn="ctr">
-                      <a:solidFill>
-                        <a:srgbClr val="000000"/>
-                      </a:solidFill>
-                      <a:prstDash val="solid"/>
-                      <a:round/>
-                      <a:headEnd type="none" w="med" len="med"/>
-                      <a:tailEnd type="none" w="med" len="med"/>
-                    </a:lnT>
-                  </a:tcPr>
-                </a:tc>
-                <a:extLst>
-                  <a:ext uri="{0D108BD9-81ED-4DB2-BD59-A6C34878D82A}">
-                    <a16:rowId xmlns:a16="http://schemas.microsoft.com/office/drawing/2014/main" val="10001"/>
-                  </a:ext>
-                </a:extLst>
+                  <a:tcPr anchor="ctr"/>
+                </a:tc>
               </a:tr>
               <a:tr h="384048">
                 <a:tc>
@@ -4861,11 +5010,6 @@
                   </a:txBody>
                   <a:tcPr anchor="ctr"/>
                 </a:tc>
-                <a:extLst>
-                  <a:ext uri="{0D108BD9-81ED-4DB2-BD59-A6C34878D82A}">
-                    <a16:rowId xmlns:a16="http://schemas.microsoft.com/office/drawing/2014/main" val="10002"/>
-                  </a:ext>
-                </a:extLst>
               </a:tr>
               <a:tr h="384048">
                 <a:tc>
@@ -4960,7 +5104,6 @@
                         </a:defRPr>
                       </a:pPr>
                       <a:r>
-                        <a:rPr dirty="0"/>
                         <a:t>1,069</a:t>
                       </a:r>
                     </a:p>
@@ -4973,11 +5116,6 @@
                     </a:lnB>
                   </a:tcPr>
                 </a:tc>
-                <a:extLst>
-                  <a:ext uri="{0D108BD9-81ED-4DB2-BD59-A6C34878D82A}">
-                    <a16:rowId xmlns:a16="http://schemas.microsoft.com/office/drawing/2014/main" val="10003"/>
-                  </a:ext>
-                </a:extLst>
               </a:tr>
             </a:tbl>
           </a:graphicData>
@@ -5031,7 +5169,7 @@
 </file>
 
 <file path=ppt/slides/slide4.xml><?xml version="1.0" encoding="utf-8"?>
-<p:sld xmlns:a="http://schemas.openxmlformats.org/drawingml/2006/main" xmlns:r="http://schemas.openxmlformats.org/officeDocument/2006/relationships" xmlns:p="http://schemas.openxmlformats.org/presentationml/2006/main">
+<p:sld xmlns:a="http://schemas.openxmlformats.org/drawingml/2006/main" xmlns:p="http://schemas.openxmlformats.org/presentationml/2006/main" xmlns:r="http://schemas.openxmlformats.org/officeDocument/2006/relationships">
   <p:cSld>
     <p:bg>
       <p:bgPr>
@@ -5047,14 +5185,7 @@
         <p:cNvGrpSpPr/>
         <p:nvPr/>
       </p:nvGrpSpPr>
-      <p:grpSpPr>
-        <a:xfrm>
-          <a:off x="0" y="0"/>
-          <a:ext cx="0" cy="0"/>
-          <a:chOff x="0" y="0"/>
-          <a:chExt cx="0" cy="0"/>
-        </a:xfrm>
-      </p:grpSpPr>
+      <p:grpSpPr/>
       <p:sp>
         <p:nvSpPr>
           <p:cNvPr id="2" name="TextBox 1"/>
@@ -5141,7 +5272,7 @@
               </a:defRPr>
             </a:pPr>
             <a:r>
-              <a:t>• 格式：PNG 图像（*_co.png 为可见光，*_ir.png 为红外） + YOLO 格式 TXT 标注</a:t>
+              <a:t>• 格式：PNG 图像（*_co.png 为可见光，*_ir.png 为红外）+ YOLO 格式 TXT 标注</a:t>
             </a:r>
           </a:p>
           <a:p>
@@ -5173,7 +5304,7 @@
               </a:defRPr>
             </a:pPr>
             <a:r>
-              <a:t>• 划分：提供 5 折交叉验证文件（fold01~fold05.txt）</a:t>
+              <a:t>• 划分：5 折交叉验证（fold01~fold05.txt）</a:t>
             </a:r>
           </a:p>
           <a:p>
@@ -5189,7 +5320,7 @@
               </a:defRPr>
             </a:pPr>
             <a:r>
-              <a:t>• 标注格式：class_id  x_center  y_center  width  height（归一化坐标）</a:t>
+              <a:t>• 标注：class_id  x_center  y_center  width  height（归一化坐标）</a:t>
             </a:r>
           </a:p>
         </p:txBody>
@@ -5326,16 +5457,10 @@
           <p:cNvGraphicFramePr>
             <a:graphicFrameLocks noGrp="1"/>
           </p:cNvGraphicFramePr>
-          <p:nvPr>
-            <p:extLst>
-              <p:ext uri="{D42A27DB-BD31-4B8C-83A1-F6EECF244321}">
-                <p14:modId xmlns:p14="http://schemas.microsoft.com/office/powerpoint/2010/main" val="95891275"/>
-              </p:ext>
-            </p:extLst>
-          </p:nvPr>
+          <p:nvPr/>
         </p:nvGraphicFramePr>
         <p:xfrm>
-          <a:off x="6096000" y="4260352"/>
+          <a:off x="6583680" y="3474720"/>
           <a:ext cx="5715000" cy="768096"/>
         </p:xfrm>
         <a:graphic>
@@ -5345,69 +5470,15 @@
                 <a:tableStyleId>{5C22544A-7EE6-4342-B048-85BDC9FD1C3A}</a:tableStyleId>
               </a:tblPr>
               <a:tblGrid>
-                <a:gridCol w="822960">
-                  <a:extLst>
-                    <a:ext uri="{9D8B030D-6E8A-4147-A177-3AD203B41FA5}">
-                      <a16:colId xmlns:a16="http://schemas.microsoft.com/office/drawing/2014/main" val="20000"/>
-                    </a:ext>
-                  </a:extLst>
-                </a:gridCol>
-                <a:gridCol w="594360">
-                  <a:extLst>
-                    <a:ext uri="{9D8B030D-6E8A-4147-A177-3AD203B41FA5}">
-                      <a16:colId xmlns:a16="http://schemas.microsoft.com/office/drawing/2014/main" val="20001"/>
-                    </a:ext>
-                  </a:extLst>
-                </a:gridCol>
-                <a:gridCol w="594360">
-                  <a:extLst>
-                    <a:ext uri="{9D8B030D-6E8A-4147-A177-3AD203B41FA5}">
-                      <a16:colId xmlns:a16="http://schemas.microsoft.com/office/drawing/2014/main" val="20002"/>
-                    </a:ext>
-                  </a:extLst>
-                </a:gridCol>
-                <a:gridCol w="594360">
-                  <a:extLst>
-                    <a:ext uri="{9D8B030D-6E8A-4147-A177-3AD203B41FA5}">
-                      <a16:colId xmlns:a16="http://schemas.microsoft.com/office/drawing/2014/main" val="20003"/>
-                    </a:ext>
-                  </a:extLst>
-                </a:gridCol>
-                <a:gridCol w="640080">
-                  <a:extLst>
-                    <a:ext uri="{9D8B030D-6E8A-4147-A177-3AD203B41FA5}">
-                      <a16:colId xmlns:a16="http://schemas.microsoft.com/office/drawing/2014/main" val="20004"/>
-                    </a:ext>
-                  </a:extLst>
-                </a:gridCol>
-                <a:gridCol w="594360">
-                  <a:extLst>
-                    <a:ext uri="{9D8B030D-6E8A-4147-A177-3AD203B41FA5}">
-                      <a16:colId xmlns:a16="http://schemas.microsoft.com/office/drawing/2014/main" val="20005"/>
-                    </a:ext>
-                  </a:extLst>
-                </a:gridCol>
-                <a:gridCol w="502920">
-                  <a:extLst>
-                    <a:ext uri="{9D8B030D-6E8A-4147-A177-3AD203B41FA5}">
-                      <a16:colId xmlns:a16="http://schemas.microsoft.com/office/drawing/2014/main" val="20006"/>
-                    </a:ext>
-                  </a:extLst>
-                </a:gridCol>
-                <a:gridCol w="731520">
-                  <a:extLst>
-                    <a:ext uri="{9D8B030D-6E8A-4147-A177-3AD203B41FA5}">
-                      <a16:colId xmlns:a16="http://schemas.microsoft.com/office/drawing/2014/main" val="20007"/>
-                    </a:ext>
-                  </a:extLst>
-                </a:gridCol>
-                <a:gridCol w="640080">
-                  <a:extLst>
-                    <a:ext uri="{9D8B030D-6E8A-4147-A177-3AD203B41FA5}">
-                      <a16:colId xmlns:a16="http://schemas.microsoft.com/office/drawing/2014/main" val="20008"/>
-                    </a:ext>
-                  </a:extLst>
-                </a:gridCol>
+                <a:gridCol w="822960"/>
+                <a:gridCol w="594360"/>
+                <a:gridCol w="594360"/>
+                <a:gridCol w="594360"/>
+                <a:gridCol w="640080"/>
+                <a:gridCol w="594360"/>
+                <a:gridCol w="502920"/>
+                <a:gridCol w="731520"/>
+                <a:gridCol w="640080"/>
               </a:tblGrid>
               <a:tr h="384048">
                 <a:tc>
@@ -5689,11 +5760,6 @@
                     </a:lnB>
                   </a:tcPr>
                 </a:tc>
-                <a:extLst>
-                  <a:ext uri="{0D108BD9-81ED-4DB2-BD59-A6C34878D82A}">
-                    <a16:rowId xmlns:a16="http://schemas.microsoft.com/office/drawing/2014/main" val="10000"/>
-                  </a:ext>
-                </a:extLst>
               </a:tr>
               <a:tr h="384048">
                 <a:tc>
@@ -5715,15 +5781,6 @@
                     </a:p>
                   </a:txBody>
                   <a:tcPr anchor="ctr">
-                    <a:lnT w="9500" cap="flat" cmpd="sng" algn="ctr">
-                      <a:solidFill>
-                        <a:srgbClr val="000000"/>
-                      </a:solidFill>
-                      <a:prstDash val="solid"/>
-                      <a:round/>
-                      <a:headEnd type="none" w="med" len="med"/>
-                      <a:tailEnd type="none" w="med" len="med"/>
-                    </a:lnT>
                     <a:lnB w="19000">
                       <a:solidFill>
                         <a:srgbClr val="000000"/>
@@ -5750,15 +5807,6 @@
                     </a:p>
                   </a:txBody>
                   <a:tcPr anchor="ctr">
-                    <a:lnT w="9500" cap="flat" cmpd="sng" algn="ctr">
-                      <a:solidFill>
-                        <a:srgbClr val="000000"/>
-                      </a:solidFill>
-                      <a:prstDash val="solid"/>
-                      <a:round/>
-                      <a:headEnd type="none" w="med" len="med"/>
-                      <a:tailEnd type="none" w="med" len="med"/>
-                    </a:lnT>
                     <a:lnB w="19000">
                       <a:solidFill>
                         <a:srgbClr val="000000"/>
@@ -5785,15 +5833,6 @@
                     </a:p>
                   </a:txBody>
                   <a:tcPr anchor="ctr">
-                    <a:lnT w="9500" cap="flat" cmpd="sng" algn="ctr">
-                      <a:solidFill>
-                        <a:srgbClr val="000000"/>
-                      </a:solidFill>
-                      <a:prstDash val="solid"/>
-                      <a:round/>
-                      <a:headEnd type="none" w="med" len="med"/>
-                      <a:tailEnd type="none" w="med" len="med"/>
-                    </a:lnT>
                     <a:lnB w="19000">
                       <a:solidFill>
                         <a:srgbClr val="000000"/>
@@ -5820,15 +5859,6 @@
                     </a:p>
                   </a:txBody>
                   <a:tcPr anchor="ctr">
-                    <a:lnT w="9500" cap="flat" cmpd="sng" algn="ctr">
-                      <a:solidFill>
-                        <a:srgbClr val="000000"/>
-                      </a:solidFill>
-                      <a:prstDash val="solid"/>
-                      <a:round/>
-                      <a:headEnd type="none" w="med" len="med"/>
-                      <a:tailEnd type="none" w="med" len="med"/>
-                    </a:lnT>
                     <a:lnB w="19000">
                       <a:solidFill>
                         <a:srgbClr val="000000"/>
@@ -5855,15 +5885,6 @@
                     </a:p>
                   </a:txBody>
                   <a:tcPr anchor="ctr">
-                    <a:lnT w="9500" cap="flat" cmpd="sng" algn="ctr">
-                      <a:solidFill>
-                        <a:srgbClr val="000000"/>
-                      </a:solidFill>
-                      <a:prstDash val="solid"/>
-                      <a:round/>
-                      <a:headEnd type="none" w="med" len="med"/>
-                      <a:tailEnd type="none" w="med" len="med"/>
-                    </a:lnT>
                     <a:lnB w="19000">
                       <a:solidFill>
                         <a:srgbClr val="000000"/>
@@ -5890,15 +5911,6 @@
                     </a:p>
                   </a:txBody>
                   <a:tcPr anchor="ctr">
-                    <a:lnT w="9500" cap="flat" cmpd="sng" algn="ctr">
-                      <a:solidFill>
-                        <a:srgbClr val="000000"/>
-                      </a:solidFill>
-                      <a:prstDash val="solid"/>
-                      <a:round/>
-                      <a:headEnd type="none" w="med" len="med"/>
-                      <a:tailEnd type="none" w="med" len="med"/>
-                    </a:lnT>
                     <a:lnB w="19000">
                       <a:solidFill>
                         <a:srgbClr val="000000"/>
@@ -5925,15 +5937,6 @@
                     </a:p>
                   </a:txBody>
                   <a:tcPr anchor="ctr">
-                    <a:lnT w="9500" cap="flat" cmpd="sng" algn="ctr">
-                      <a:solidFill>
-                        <a:srgbClr val="000000"/>
-                      </a:solidFill>
-                      <a:prstDash val="solid"/>
-                      <a:round/>
-                      <a:headEnd type="none" w="med" len="med"/>
-                      <a:tailEnd type="none" w="med" len="med"/>
-                    </a:lnT>
                     <a:lnB w="19000">
                       <a:solidFill>
                         <a:srgbClr val="000000"/>
@@ -5960,15 +5963,6 @@
                     </a:p>
                   </a:txBody>
                   <a:tcPr anchor="ctr">
-                    <a:lnT w="9500" cap="flat" cmpd="sng" algn="ctr">
-                      <a:solidFill>
-                        <a:srgbClr val="000000"/>
-                      </a:solidFill>
-                      <a:prstDash val="solid"/>
-                      <a:round/>
-                      <a:headEnd type="none" w="med" len="med"/>
-                      <a:tailEnd type="none" w="med" len="med"/>
-                    </a:lnT>
                     <a:lnB w="19000">
                       <a:solidFill>
                         <a:srgbClr val="000000"/>
@@ -5990,21 +5984,11 @@
                         </a:defRPr>
                       </a:pPr>
                       <a:r>
-                        <a:rPr dirty="0"/>
                         <a:t>1,377</a:t>
                       </a:r>
                     </a:p>
                   </a:txBody>
                   <a:tcPr anchor="ctr">
-                    <a:lnT w="9500" cap="flat" cmpd="sng" algn="ctr">
-                      <a:solidFill>
-                        <a:srgbClr val="000000"/>
-                      </a:solidFill>
-                      <a:prstDash val="solid"/>
-                      <a:round/>
-                      <a:headEnd type="none" w="med" len="med"/>
-                      <a:tailEnd type="none" w="med" len="med"/>
-                    </a:lnT>
                     <a:lnB w="19000">
                       <a:solidFill>
                         <a:srgbClr val="000000"/>
@@ -6012,11 +5996,6 @@
                     </a:lnB>
                   </a:tcPr>
                 </a:tc>
-                <a:extLst>
-                  <a:ext uri="{0D108BD9-81ED-4DB2-BD59-A6C34878D82A}">
-                    <a16:rowId xmlns:a16="http://schemas.microsoft.com/office/drawing/2014/main" val="10001"/>
-                  </a:ext>
-                </a:extLst>
               </a:tr>
             </a:tbl>
           </a:graphicData>
@@ -6031,7 +6010,7 @@
 </file>
 
 <file path=ppt/slides/slide5.xml><?xml version="1.0" encoding="utf-8"?>
-<p:sld xmlns:a="http://schemas.openxmlformats.org/drawingml/2006/main" xmlns:r="http://schemas.openxmlformats.org/officeDocument/2006/relationships" xmlns:p="http://schemas.openxmlformats.org/presentationml/2006/main">
+<p:sld xmlns:a="http://schemas.openxmlformats.org/drawingml/2006/main" xmlns:p="http://schemas.openxmlformats.org/presentationml/2006/main" xmlns:r="http://schemas.openxmlformats.org/officeDocument/2006/relationships">
   <p:cSld>
     <p:bg>
       <p:bgPr>
@@ -6047,14 +6026,7 @@
         <p:cNvGrpSpPr/>
         <p:nvPr/>
       </p:nvGrpSpPr>
-      <p:grpSpPr>
-        <a:xfrm>
-          <a:off x="0" y="0"/>
-          <a:ext cx="0" cy="0"/>
-          <a:chOff x="0" y="0"/>
-          <a:chExt cx="0" cy="0"/>
-        </a:xfrm>
-      </p:grpSpPr>
+      <p:grpSpPr/>
       <p:sp>
         <p:nvSpPr>
           <p:cNvPr id="2" name="TextBox 1"/>
@@ -6205,7 +6177,7 @@
               </a:defRPr>
             </a:pPr>
             <a:r>
-              <a:t>• 命名规则：L8_{场景ID}_{日期}_S2B_{日期}_T{瓦片号}_N{块号}.TIF</a:t>
+              <a:t>• 命名：L8_{场景ID}_{日期}_S2B_{日期}_T{瓦片号}_N{块号}.TIF</a:t>
             </a:r>
           </a:p>
           <a:p>
@@ -6221,7 +6193,7 @@
               </a:defRPr>
             </a:pPr>
             <a:r>
-              <a:t>    例：L8_126038_20190923_S2B_20190923_T49RBQ_N0008.TIF</a:t>
+              <a:t>• 5 个地理场景，2019-09-23 同日采集，按网格切分</a:t>
             </a:r>
           </a:p>
           <a:p>
@@ -6237,22 +6209,6 @@
               </a:defRPr>
             </a:pPr>
             <a:r>
-              <a:t>• 5 个地理场景，2019-09-23 同日采集，按网格切分为小图像块</a:t>
-            </a:r>
-          </a:p>
-          <a:p>
-            <a:pPr>
-              <a:spcAft>
-                <a:spcPts val="600"/>
-              </a:spcAft>
-              <a:defRPr sz="1600">
-                <a:solidFill>
-                  <a:srgbClr val="000000"/>
-                </a:solidFill>
-                <a:latin typeface="Times New Roman"/>
-              </a:defRPr>
-            </a:pPr>
-            <a:r>
               <a:t>    场景 ID：126038, 126039, 126040, 126041, 126042</a:t>
             </a:r>
           </a:p>
@@ -6264,16 +6220,10 @@
           <p:cNvGraphicFramePr>
             <a:graphicFrameLocks noGrp="1"/>
           </p:cNvGraphicFramePr>
-          <p:nvPr>
-            <p:extLst>
-              <p:ext uri="{D42A27DB-BD31-4B8C-83A1-F6EECF244321}">
-                <p14:modId xmlns:p14="http://schemas.microsoft.com/office/powerpoint/2010/main" val="4050683428"/>
-              </p:ext>
-            </p:extLst>
-          </p:nvPr>
+          <p:nvPr/>
         </p:nvGraphicFramePr>
         <p:xfrm>
-          <a:off x="548640" y="4612083"/>
+          <a:off x="8229600" y="1280160"/>
           <a:ext cx="6217920" cy="1536192"/>
         </p:xfrm>
         <a:graphic>
@@ -6283,34 +6233,10 @@
                 <a:tableStyleId>{5C22544A-7EE6-4342-B048-85BDC9FD1C3A}</a:tableStyleId>
               </a:tblPr>
               <a:tblGrid>
-                <a:gridCol w="1097280">
-                  <a:extLst>
-                    <a:ext uri="{9D8B030D-6E8A-4147-A177-3AD203B41FA5}">
-                      <a16:colId xmlns:a16="http://schemas.microsoft.com/office/drawing/2014/main" val="20000"/>
-                    </a:ext>
-                  </a:extLst>
-                </a:gridCol>
-                <a:gridCol w="1280160">
-                  <a:extLst>
-                    <a:ext uri="{9D8B030D-6E8A-4147-A177-3AD203B41FA5}">
-                      <a16:colId xmlns:a16="http://schemas.microsoft.com/office/drawing/2014/main" val="20001"/>
-                    </a:ext>
-                  </a:extLst>
-                </a:gridCol>
-                <a:gridCol w="914400">
-                  <a:extLst>
-                    <a:ext uri="{9D8B030D-6E8A-4147-A177-3AD203B41FA5}">
-                      <a16:colId xmlns:a16="http://schemas.microsoft.com/office/drawing/2014/main" val="20002"/>
-                    </a:ext>
-                  </a:extLst>
-                </a:gridCol>
-                <a:gridCol w="2926080">
-                  <a:extLst>
-                    <a:ext uri="{9D8B030D-6E8A-4147-A177-3AD203B41FA5}">
-                      <a16:colId xmlns:a16="http://schemas.microsoft.com/office/drawing/2014/main" val="20003"/>
-                    </a:ext>
-                  </a:extLst>
-                </a:gridCol>
+                <a:gridCol w="1097280"/>
+                <a:gridCol w="1280160"/>
+                <a:gridCol w="914400"/>
+                <a:gridCol w="2926080"/>
               </a:tblGrid>
               <a:tr h="384048">
                 <a:tc>
@@ -6420,7 +6346,7 @@
                         </a:defRPr>
                       </a:pPr>
                       <a:r>
-                        <a:t>说  明</a:t>
+                        <a:t>说明</a:t>
                       </a:r>
                     </a:p>
                   </a:txBody>
@@ -6437,11 +6363,6 @@
                     </a:lnB>
                   </a:tcPr>
                 </a:tc>
-                <a:extLst>
-                  <a:ext uri="{0D108BD9-81ED-4DB2-BD59-A6C34878D82A}">
-                    <a16:rowId xmlns:a16="http://schemas.microsoft.com/office/drawing/2014/main" val="10000"/>
-                  </a:ext>
-                </a:extLst>
               </a:tr>
               <a:tr h="384048">
                 <a:tc>
@@ -6462,17 +6383,7 @@
                       </a:r>
                     </a:p>
                   </a:txBody>
-                  <a:tcPr anchor="ctr">
-                    <a:lnT w="9500" cap="flat" cmpd="sng" algn="ctr">
-                      <a:solidFill>
-                        <a:srgbClr val="000000"/>
-                      </a:solidFill>
-                      <a:prstDash val="solid"/>
-                      <a:round/>
-                      <a:headEnd type="none" w="med" len="med"/>
-                      <a:tailEnd type="none" w="med" len="med"/>
-                    </a:lnT>
-                  </a:tcPr>
+                  <a:tcPr anchor="ctr"/>
                 </a:tc>
                 <a:tc>
                   <a:txBody>
@@ -6492,17 +6403,7 @@
                       </a:r>
                     </a:p>
                   </a:txBody>
-                  <a:tcPr anchor="ctr">
-                    <a:lnT w="9500" cap="flat" cmpd="sng" algn="ctr">
-                      <a:solidFill>
-                        <a:srgbClr val="000000"/>
-                      </a:solidFill>
-                      <a:prstDash val="solid"/>
-                      <a:round/>
-                      <a:headEnd type="none" w="med" len="med"/>
-                      <a:tailEnd type="none" w="med" len="med"/>
-                    </a:lnT>
-                  </a:tcPr>
+                  <a:tcPr anchor="ctr"/>
                 </a:tc>
                 <a:tc>
                   <a:txBody>
@@ -6522,17 +6423,7 @@
                       </a:r>
                     </a:p>
                   </a:txBody>
-                  <a:tcPr anchor="ctr">
-                    <a:lnT w="9500" cap="flat" cmpd="sng" algn="ctr">
-                      <a:solidFill>
-                        <a:srgbClr val="000000"/>
-                      </a:solidFill>
-                      <a:prstDash val="solid"/>
-                      <a:round/>
-                      <a:headEnd type="none" w="med" len="med"/>
-                      <a:tailEnd type="none" w="med" len="med"/>
-                    </a:lnT>
-                  </a:tcPr>
+                  <a:tcPr anchor="ctr"/>
                 </a:tc>
                 <a:tc>
                   <a:txBody>
@@ -6552,23 +6443,8 @@
                       </a:r>
                     </a:p>
                   </a:txBody>
-                  <a:tcPr anchor="ctr">
-                    <a:lnT w="9500" cap="flat" cmpd="sng" algn="ctr">
-                      <a:solidFill>
-                        <a:srgbClr val="000000"/>
-                      </a:solidFill>
-                      <a:prstDash val="solid"/>
-                      <a:round/>
-                      <a:headEnd type="none" w="med" len="med"/>
-                      <a:tailEnd type="none" w="med" len="med"/>
-                    </a:lnT>
-                  </a:tcPr>
-                </a:tc>
-                <a:extLst>
-                  <a:ext uri="{0D108BD9-81ED-4DB2-BD59-A6C34878D82A}">
-                    <a16:rowId xmlns:a16="http://schemas.microsoft.com/office/drawing/2014/main" val="10001"/>
-                  </a:ext>
-                </a:extLst>
+                  <a:tcPr anchor="ctr"/>
+                </a:tc>
               </a:tr>
               <a:tr h="384048">
                 <a:tc>
@@ -6651,11 +6527,6 @@
                   </a:txBody>
                   <a:tcPr anchor="ctr"/>
                 </a:tc>
-                <a:extLst>
-                  <a:ext uri="{0D108BD9-81ED-4DB2-BD59-A6C34878D82A}">
-                    <a16:rowId xmlns:a16="http://schemas.microsoft.com/office/drawing/2014/main" val="10002"/>
-                  </a:ext>
-                </a:extLst>
               </a:tr>
               <a:tr h="384048">
                 <a:tc>
@@ -6750,14 +6621,8 @@
                         </a:defRPr>
                       </a:pPr>
                       <a:r>
-                        <a:rPr dirty="0"/>
-                        <a:t>Landsat-8 → Sentinel-2 </a:t>
-                      </a:r>
-                      <a:r>
-                        <a:rPr dirty="0" err="1"/>
-                        <a:t>一一配对</a:t>
-                      </a:r>
-                      <a:endParaRPr dirty="0"/>
+                        <a:t>Landsat-8 → Sentinel-2 一一配对</a:t>
+                      </a:r>
                     </a:p>
                   </a:txBody>
                   <a:tcPr anchor="ctr">
@@ -6768,11 +6633,6 @@
                     </a:lnB>
                   </a:tcPr>
                 </a:tc>
-                <a:extLst>
-                  <a:ext uri="{0D108BD9-81ED-4DB2-BD59-A6C34878D82A}">
-                    <a16:rowId xmlns:a16="http://schemas.microsoft.com/office/drawing/2014/main" val="10003"/>
-                  </a:ext>
-                </a:extLst>
               </a:tr>
             </a:tbl>
           </a:graphicData>
@@ -6787,7 +6647,7 @@
 </file>
 
 <file path=ppt/slides/slide6.xml><?xml version="1.0" encoding="utf-8"?>
-<p:sld xmlns:a="http://schemas.openxmlformats.org/drawingml/2006/main" xmlns:r="http://schemas.openxmlformats.org/officeDocument/2006/relationships" xmlns:p="http://schemas.openxmlformats.org/presentationml/2006/main">
+<p:sld xmlns:a="http://schemas.openxmlformats.org/drawingml/2006/main" xmlns:p="http://schemas.openxmlformats.org/presentationml/2006/main" xmlns:r="http://schemas.openxmlformats.org/officeDocument/2006/relationships">
   <p:cSld>
     <p:bg>
       <p:bgPr>
@@ -6803,14 +6663,7 @@
         <p:cNvGrpSpPr/>
         <p:nvPr/>
       </p:nvGrpSpPr>
-      <p:grpSpPr>
-        <a:xfrm>
-          <a:off x="0" y="0"/>
-          <a:ext cx="0" cy="0"/>
-          <a:chOff x="0" y="0"/>
-          <a:chExt cx="0" cy="0"/>
-        </a:xfrm>
-      </p:grpSpPr>
+      <p:grpSpPr/>
       <p:sp>
         <p:nvSpPr>
           <p:cNvPr id="2" name="TextBox 1"/>
@@ -6842,6 +6695,1623 @@
               </a:defRPr>
             </a:pPr>
             <a:r>
+              <a:t>CIDIS — 跨光谱图像配准数据集</a:t>
+            </a:r>
+          </a:p>
+        </p:txBody>
+      </p:sp>
+      <p:sp>
+        <p:nvSpPr>
+          <p:cNvPr id="3" name="TextBox 2"/>
+          <p:cNvSpPr txBox="1"/>
+          <p:nvPr/>
+        </p:nvSpPr>
+        <p:spPr>
+          <a:xfrm>
+            <a:off x="457200" y="1280160"/>
+            <a:ext cx="6858000" cy="3200400"/>
+          </a:xfrm>
+          <a:prstGeom prst="rect">
+            <a:avLst/>
+          </a:prstGeom>
+          <a:noFill/>
+        </p:spPr>
+        <p:txBody>
+          <a:bodyPr wrap="square">
+            <a:spAutoFit/>
+          </a:bodyPr>
+          <a:lstStyle/>
+          <a:p>
+            <a:pPr>
+              <a:spcAft>
+                <a:spcPts val="600"/>
+              </a:spcAft>
+              <a:defRPr sz="1600">
+                <a:solidFill>
+                  <a:srgbClr val="000000"/>
+                </a:solidFill>
+                <a:latin typeface="Times New Roman"/>
+              </a:defRPr>
+            </a:pPr>
+            <a:r>
+              <a:t>• 任务：热红外与可见光图像的跨光谱特征匹配与配准</a:t>
+            </a:r>
+          </a:p>
+          <a:p>
+            <a:pPr>
+              <a:spcAft>
+                <a:spcPts val="600"/>
+              </a:spcAft>
+              <a:defRPr sz="1600">
+                <a:solidFill>
+                  <a:srgbClr val="000000"/>
+                </a:solidFill>
+                <a:latin typeface="Times New Roman"/>
+              </a:defRPr>
+            </a:pPr>
+            <a:r>
+              <a:t>• 来源：Rivadeneira et al., 2024, "Cross-Spectral Image Registration:</a:t>
+            </a:r>
+          </a:p>
+          <a:p>
+            <a:pPr>
+              <a:spcAft>
+                <a:spcPts val="600"/>
+              </a:spcAft>
+              <a:defRPr sz="1600">
+                <a:solidFill>
+                  <a:srgbClr val="000000"/>
+                </a:solidFill>
+                <a:latin typeface="Times New Roman"/>
+              </a:defRPr>
+            </a:pPr>
+            <a:r>
+              <a:t>    a Comparative Study and a New Benchmark Dataset"</a:t>
+            </a:r>
+          </a:p>
+          <a:p>
+            <a:pPr>
+              <a:spcAft>
+                <a:spcPts val="600"/>
+              </a:spcAft>
+              <a:defRPr sz="1600">
+                <a:solidFill>
+                  <a:srgbClr val="000000"/>
+                </a:solidFill>
+                <a:latin typeface="Times New Roman"/>
+              </a:defRPr>
+            </a:pPr>
+            <a:r>
+              <a:t>• 格式：热红外 + 可见光配对图像，均为 640×448，RGB</a:t>
+            </a:r>
+          </a:p>
+          <a:p>
+            <a:pPr>
+              <a:spcAft>
+                <a:spcPts val="600"/>
+              </a:spcAft>
+              <a:defRPr sz="1600">
+                <a:solidFill>
+                  <a:srgbClr val="000000"/>
+                </a:solidFill>
+                <a:latin typeface="Times New Roman"/>
+              </a:defRPr>
+            </a:pPr>
+            <a:r>
+              <a:t>• 共 1,000 对：训练 700 / 验证 200 / 测试 100</a:t>
+            </a:r>
+          </a:p>
+          <a:p>
+            <a:pPr>
+              <a:spcAft>
+                <a:spcPts val="600"/>
+              </a:spcAft>
+              <a:defRPr sz="1600">
+                <a:solidFill>
+                  <a:srgbClr val="000000"/>
+                </a:solidFill>
+                <a:latin typeface="Times New Roman"/>
+              </a:defRPr>
+            </a:pPr>
+            <a:r>
+              <a:t>• 目录：{thermal, visible} / {train, val, test}</a:t>
+            </a:r>
+          </a:p>
+          <a:p>
+            <a:pPr>
+              <a:spcAft>
+                <a:spcPts val="600"/>
+              </a:spcAft>
+              <a:defRPr sz="1600">
+                <a:solidFill>
+                  <a:srgbClr val="000000"/>
+                </a:solidFill>
+                <a:latin typeface="Times New Roman"/>
+              </a:defRPr>
+            </a:pPr>
+            <a:r>
+              <a:t>• 场景涵盖多种真实环境，用于评估跨光谱配准算法性能</a:t>
+            </a:r>
+          </a:p>
+        </p:txBody>
+      </p:sp>
+      <p:pic>
+        <p:nvPicPr>
+          <p:cNvPr id="4" name="Picture 3" descr="cidis_th.png"/>
+          <p:cNvPicPr>
+            <a:picLocks noChangeAspect="1"/>
+          </p:cNvPicPr>
+          <p:nvPr/>
+        </p:nvPicPr>
+        <p:blipFill>
+          <a:blip r:embed="rId2"/>
+          <a:stretch>
+            <a:fillRect/>
+          </a:stretch>
+        </p:blipFill>
+        <p:spPr>
+          <a:xfrm>
+            <a:off x="7772400" y="1280160"/>
+            <a:ext cx="1828800" cy="1280160"/>
+          </a:xfrm>
+          <a:prstGeom prst="rect">
+            <a:avLst/>
+          </a:prstGeom>
+        </p:spPr>
+      </p:pic>
+      <p:sp>
+        <p:nvSpPr>
+          <p:cNvPr id="5" name="TextBox 4"/>
+          <p:cNvSpPr txBox="1"/>
+          <p:nvPr/>
+        </p:nvSpPr>
+        <p:spPr>
+          <a:xfrm>
+            <a:off x="7772400" y="2743200"/>
+            <a:ext cx="1828800" cy="274320"/>
+          </a:xfrm>
+          <a:prstGeom prst="rect">
+            <a:avLst/>
+          </a:prstGeom>
+          <a:noFill/>
+        </p:spPr>
+        <p:txBody>
+          <a:bodyPr wrap="square">
+            <a:spAutoFit/>
+          </a:bodyPr>
+          <a:lstStyle/>
+          <a:p>
+            <a:pPr>
+              <a:spcAft>
+                <a:spcPts val="600"/>
+              </a:spcAft>
+              <a:defRPr sz="1200">
+                <a:solidFill>
+                  <a:srgbClr val="444444"/>
+                </a:solidFill>
+                <a:latin typeface="Times New Roman"/>
+              </a:defRPr>
+            </a:pPr>
+            <a:r>
+              <a:t>热红外</a:t>
+            </a:r>
+          </a:p>
+        </p:txBody>
+      </p:sp>
+      <p:pic>
+        <p:nvPicPr>
+          <p:cNvPr id="6" name="Picture 5" descr="cidis_vi.png"/>
+          <p:cNvPicPr>
+            <a:picLocks noChangeAspect="1"/>
+          </p:cNvPicPr>
+          <p:nvPr/>
+        </p:nvPicPr>
+        <p:blipFill>
+          <a:blip r:embed="rId3"/>
+          <a:stretch>
+            <a:fillRect/>
+          </a:stretch>
+        </p:blipFill>
+        <p:spPr>
+          <a:xfrm>
+            <a:off x="10058400" y="1280160"/>
+            <a:ext cx="1828800" cy="1280160"/>
+          </a:xfrm>
+          <a:prstGeom prst="rect">
+            <a:avLst/>
+          </a:prstGeom>
+        </p:spPr>
+      </p:pic>
+      <p:sp>
+        <p:nvSpPr>
+          <p:cNvPr id="7" name="TextBox 6"/>
+          <p:cNvSpPr txBox="1"/>
+          <p:nvPr/>
+        </p:nvSpPr>
+        <p:spPr>
+          <a:xfrm>
+            <a:off x="10058400" y="2743200"/>
+            <a:ext cx="1828800" cy="274320"/>
+          </a:xfrm>
+          <a:prstGeom prst="rect">
+            <a:avLst/>
+          </a:prstGeom>
+          <a:noFill/>
+        </p:spPr>
+        <p:txBody>
+          <a:bodyPr wrap="square">
+            <a:spAutoFit/>
+          </a:bodyPr>
+          <a:lstStyle/>
+          <a:p>
+            <a:pPr>
+              <a:spcAft>
+                <a:spcPts val="600"/>
+              </a:spcAft>
+              <a:defRPr sz="1200">
+                <a:solidFill>
+                  <a:srgbClr val="444444"/>
+                </a:solidFill>
+                <a:latin typeface="Times New Roman"/>
+              </a:defRPr>
+            </a:pPr>
+            <a:r>
+              <a:t>可见光</a:t>
+            </a:r>
+          </a:p>
+        </p:txBody>
+      </p:sp>
+      <p:graphicFrame>
+        <p:nvGraphicFramePr>
+          <p:cNvPr id="8" name="Table 7"/>
+          <p:cNvGraphicFramePr>
+            <a:graphicFrameLocks noGrp="1"/>
+          </p:cNvGraphicFramePr>
+          <p:nvPr/>
+        </p:nvGraphicFramePr>
+        <p:xfrm>
+          <a:off x="457200" y="5303520"/>
+          <a:ext cx="4389120" cy="1536192"/>
+        </p:xfrm>
+        <a:graphic>
+          <a:graphicData uri="http://schemas.openxmlformats.org/drawingml/2006/table">
+            <a:tbl>
+              <a:tblPr firstRow="1" bandRow="1">
+                <a:tableStyleId>{5C22544A-7EE6-4342-B048-85BDC9FD1C3A}</a:tableStyleId>
+              </a:tblPr>
+              <a:tblGrid>
+                <a:gridCol w="1097280"/>
+                <a:gridCol w="1097280"/>
+                <a:gridCol w="1097280"/>
+                <a:gridCol w="1097280"/>
+              </a:tblGrid>
+              <a:tr h="384048">
+                <a:tc>
+                  <a:txBody>
+                    <a:bodyPr/>
+                    <a:lstStyle/>
+                    <a:p>
+                      <a:pPr algn="ctr">
+                        <a:defRPr sz="1300" b="1">
+                          <a:solidFill>
+                            <a:srgbClr val="000000"/>
+                          </a:solidFill>
+                          <a:latin typeface="Times New Roman"/>
+                        </a:defRPr>
+                      </a:pPr>
+                      <a:r>
+                        <a:t>集合</a:t>
+                      </a:r>
+                    </a:p>
+                  </a:txBody>
+                  <a:tcPr anchor="ctr">
+                    <a:lnT w="19000">
+                      <a:solidFill>
+                        <a:srgbClr val="000000"/>
+                      </a:solidFill>
+                    </a:lnT>
+                    <a:lnB w="9500">
+                      <a:solidFill>
+                        <a:srgbClr val="000000"/>
+                      </a:solidFill>
+                    </a:lnB>
+                  </a:tcPr>
+                </a:tc>
+                <a:tc>
+                  <a:txBody>
+                    <a:bodyPr/>
+                    <a:lstStyle/>
+                    <a:p>
+                      <a:pPr algn="ctr">
+                        <a:defRPr sz="1300" b="1">
+                          <a:solidFill>
+                            <a:srgbClr val="000000"/>
+                          </a:solidFill>
+                          <a:latin typeface="Times New Roman"/>
+                        </a:defRPr>
+                      </a:pPr>
+                      <a:r>
+                        <a:t>热红外</a:t>
+                      </a:r>
+                    </a:p>
+                  </a:txBody>
+                  <a:tcPr anchor="ctr">
+                    <a:lnT w="19000">
+                      <a:solidFill>
+                        <a:srgbClr val="000000"/>
+                      </a:solidFill>
+                    </a:lnT>
+                    <a:lnB w="9500">
+                      <a:solidFill>
+                        <a:srgbClr val="000000"/>
+                      </a:solidFill>
+                    </a:lnB>
+                  </a:tcPr>
+                </a:tc>
+                <a:tc>
+                  <a:txBody>
+                    <a:bodyPr/>
+                    <a:lstStyle/>
+                    <a:p>
+                      <a:pPr algn="ctr">
+                        <a:defRPr sz="1300" b="1">
+                          <a:solidFill>
+                            <a:srgbClr val="000000"/>
+                          </a:solidFill>
+                          <a:latin typeface="Times New Roman"/>
+                        </a:defRPr>
+                      </a:pPr>
+                      <a:r>
+                        <a:t>可见光</a:t>
+                      </a:r>
+                    </a:p>
+                  </a:txBody>
+                  <a:tcPr anchor="ctr">
+                    <a:lnT w="19000">
+                      <a:solidFill>
+                        <a:srgbClr val="000000"/>
+                      </a:solidFill>
+                    </a:lnT>
+                    <a:lnB w="9500">
+                      <a:solidFill>
+                        <a:srgbClr val="000000"/>
+                      </a:solidFill>
+                    </a:lnB>
+                  </a:tcPr>
+                </a:tc>
+                <a:tc>
+                  <a:txBody>
+                    <a:bodyPr/>
+                    <a:lstStyle/>
+                    <a:p>
+                      <a:pPr algn="ctr">
+                        <a:defRPr sz="1300" b="1">
+                          <a:solidFill>
+                            <a:srgbClr val="000000"/>
+                          </a:solidFill>
+                          <a:latin typeface="Times New Roman"/>
+                        </a:defRPr>
+                      </a:pPr>
+                      <a:r>
+                        <a:t>总计</a:t>
+                      </a:r>
+                    </a:p>
+                  </a:txBody>
+                  <a:tcPr anchor="ctr">
+                    <a:lnT w="19000">
+                      <a:solidFill>
+                        <a:srgbClr val="000000"/>
+                      </a:solidFill>
+                    </a:lnT>
+                    <a:lnB w="9500">
+                      <a:solidFill>
+                        <a:srgbClr val="000000"/>
+                      </a:solidFill>
+                    </a:lnB>
+                  </a:tcPr>
+                </a:tc>
+              </a:tr>
+              <a:tr h="384048">
+                <a:tc>
+                  <a:txBody>
+                    <a:bodyPr/>
+                    <a:lstStyle/>
+                    <a:p>
+                      <a:pPr algn="ctr">
+                        <a:defRPr sz="1300" b="0">
+                          <a:solidFill>
+                            <a:srgbClr val="000000"/>
+                          </a:solidFill>
+                          <a:latin typeface="Times New Roman"/>
+                        </a:defRPr>
+                      </a:pPr>
+                      <a:r>
+                        <a:t>训练</a:t>
+                      </a:r>
+                    </a:p>
+                  </a:txBody>
+                  <a:tcPr anchor="ctr"/>
+                </a:tc>
+                <a:tc>
+                  <a:txBody>
+                    <a:bodyPr/>
+                    <a:lstStyle/>
+                    <a:p>
+                      <a:pPr algn="ctr">
+                        <a:defRPr sz="1300" b="0">
+                          <a:solidFill>
+                            <a:srgbClr val="000000"/>
+                          </a:solidFill>
+                          <a:latin typeface="Times New Roman"/>
+                        </a:defRPr>
+                      </a:pPr>
+                      <a:r>
+                        <a:t>700</a:t>
+                      </a:r>
+                    </a:p>
+                  </a:txBody>
+                  <a:tcPr anchor="ctr"/>
+                </a:tc>
+                <a:tc>
+                  <a:txBody>
+                    <a:bodyPr/>
+                    <a:lstStyle/>
+                    <a:p>
+                      <a:pPr algn="ctr">
+                        <a:defRPr sz="1300" b="0">
+                          <a:solidFill>
+                            <a:srgbClr val="000000"/>
+                          </a:solidFill>
+                          <a:latin typeface="Times New Roman"/>
+                        </a:defRPr>
+                      </a:pPr>
+                      <a:r>
+                        <a:t>700</a:t>
+                      </a:r>
+                    </a:p>
+                  </a:txBody>
+                  <a:tcPr anchor="ctr"/>
+                </a:tc>
+                <a:tc>
+                  <a:txBody>
+                    <a:bodyPr/>
+                    <a:lstStyle/>
+                    <a:p>
+                      <a:pPr algn="ctr">
+                        <a:defRPr sz="1300" b="0">
+                          <a:solidFill>
+                            <a:srgbClr val="000000"/>
+                          </a:solidFill>
+                          <a:latin typeface="Times New Roman"/>
+                        </a:defRPr>
+                      </a:pPr>
+                      <a:r>
+                        <a:t>700 对</a:t>
+                      </a:r>
+                    </a:p>
+                  </a:txBody>
+                  <a:tcPr anchor="ctr"/>
+                </a:tc>
+              </a:tr>
+              <a:tr h="384048">
+                <a:tc>
+                  <a:txBody>
+                    <a:bodyPr/>
+                    <a:lstStyle/>
+                    <a:p>
+                      <a:pPr algn="ctr">
+                        <a:defRPr sz="1300" b="0">
+                          <a:solidFill>
+                            <a:srgbClr val="000000"/>
+                          </a:solidFill>
+                          <a:latin typeface="Times New Roman"/>
+                        </a:defRPr>
+                      </a:pPr>
+                      <a:r>
+                        <a:t>验证</a:t>
+                      </a:r>
+                    </a:p>
+                  </a:txBody>
+                  <a:tcPr anchor="ctr"/>
+                </a:tc>
+                <a:tc>
+                  <a:txBody>
+                    <a:bodyPr/>
+                    <a:lstStyle/>
+                    <a:p>
+                      <a:pPr algn="ctr">
+                        <a:defRPr sz="1300" b="0">
+                          <a:solidFill>
+                            <a:srgbClr val="000000"/>
+                          </a:solidFill>
+                          <a:latin typeface="Times New Roman"/>
+                        </a:defRPr>
+                      </a:pPr>
+                      <a:r>
+                        <a:t>200</a:t>
+                      </a:r>
+                    </a:p>
+                  </a:txBody>
+                  <a:tcPr anchor="ctr"/>
+                </a:tc>
+                <a:tc>
+                  <a:txBody>
+                    <a:bodyPr/>
+                    <a:lstStyle/>
+                    <a:p>
+                      <a:pPr algn="ctr">
+                        <a:defRPr sz="1300" b="0">
+                          <a:solidFill>
+                            <a:srgbClr val="000000"/>
+                          </a:solidFill>
+                          <a:latin typeface="Times New Roman"/>
+                        </a:defRPr>
+                      </a:pPr>
+                      <a:r>
+                        <a:t>200</a:t>
+                      </a:r>
+                    </a:p>
+                  </a:txBody>
+                  <a:tcPr anchor="ctr"/>
+                </a:tc>
+                <a:tc>
+                  <a:txBody>
+                    <a:bodyPr/>
+                    <a:lstStyle/>
+                    <a:p>
+                      <a:pPr algn="ctr">
+                        <a:defRPr sz="1300" b="0">
+                          <a:solidFill>
+                            <a:srgbClr val="000000"/>
+                          </a:solidFill>
+                          <a:latin typeface="Times New Roman"/>
+                        </a:defRPr>
+                      </a:pPr>
+                      <a:r>
+                        <a:t>200 对</a:t>
+                      </a:r>
+                    </a:p>
+                  </a:txBody>
+                  <a:tcPr anchor="ctr"/>
+                </a:tc>
+              </a:tr>
+              <a:tr h="384048">
+                <a:tc>
+                  <a:txBody>
+                    <a:bodyPr/>
+                    <a:lstStyle/>
+                    <a:p>
+                      <a:pPr algn="ctr">
+                        <a:defRPr sz="1300" b="0">
+                          <a:solidFill>
+                            <a:srgbClr val="000000"/>
+                          </a:solidFill>
+                          <a:latin typeface="Times New Roman"/>
+                        </a:defRPr>
+                      </a:pPr>
+                      <a:r>
+                        <a:t>测试</a:t>
+                      </a:r>
+                    </a:p>
+                  </a:txBody>
+                  <a:tcPr anchor="ctr">
+                    <a:lnB w="19000">
+                      <a:solidFill>
+                        <a:srgbClr val="000000"/>
+                      </a:solidFill>
+                    </a:lnB>
+                  </a:tcPr>
+                </a:tc>
+                <a:tc>
+                  <a:txBody>
+                    <a:bodyPr/>
+                    <a:lstStyle/>
+                    <a:p>
+                      <a:pPr algn="ctr">
+                        <a:defRPr sz="1300" b="0">
+                          <a:solidFill>
+                            <a:srgbClr val="000000"/>
+                          </a:solidFill>
+                          <a:latin typeface="Times New Roman"/>
+                        </a:defRPr>
+                      </a:pPr>
+                      <a:r>
+                        <a:t>100</a:t>
+                      </a:r>
+                    </a:p>
+                  </a:txBody>
+                  <a:tcPr anchor="ctr">
+                    <a:lnB w="19000">
+                      <a:solidFill>
+                        <a:srgbClr val="000000"/>
+                      </a:solidFill>
+                    </a:lnB>
+                  </a:tcPr>
+                </a:tc>
+                <a:tc>
+                  <a:txBody>
+                    <a:bodyPr/>
+                    <a:lstStyle/>
+                    <a:p>
+                      <a:pPr algn="ctr">
+                        <a:defRPr sz="1300" b="0">
+                          <a:solidFill>
+                            <a:srgbClr val="000000"/>
+                          </a:solidFill>
+                          <a:latin typeface="Times New Roman"/>
+                        </a:defRPr>
+                      </a:pPr>
+                      <a:r>
+                        <a:t>100</a:t>
+                      </a:r>
+                    </a:p>
+                  </a:txBody>
+                  <a:tcPr anchor="ctr">
+                    <a:lnB w="19000">
+                      <a:solidFill>
+                        <a:srgbClr val="000000"/>
+                      </a:solidFill>
+                    </a:lnB>
+                  </a:tcPr>
+                </a:tc>
+                <a:tc>
+                  <a:txBody>
+                    <a:bodyPr/>
+                    <a:lstStyle/>
+                    <a:p>
+                      <a:pPr algn="ctr">
+                        <a:defRPr sz="1300" b="0">
+                          <a:solidFill>
+                            <a:srgbClr val="000000"/>
+                          </a:solidFill>
+                          <a:latin typeface="Times New Roman"/>
+                        </a:defRPr>
+                      </a:pPr>
+                      <a:r>
+                        <a:t>100 对</a:t>
+                      </a:r>
+                    </a:p>
+                  </a:txBody>
+                  <a:tcPr anchor="ctr">
+                    <a:lnB w="19000">
+                      <a:solidFill>
+                        <a:srgbClr val="000000"/>
+                      </a:solidFill>
+                    </a:lnB>
+                  </a:tcPr>
+                </a:tc>
+              </a:tr>
+            </a:tbl>
+          </a:graphicData>
+        </a:graphic>
+      </p:graphicFrame>
+    </p:spTree>
+  </p:cSld>
+  <p:clrMapOvr>
+    <a:masterClrMapping/>
+  </p:clrMapOvr>
+</p:sld>
+</file>
+
+<file path=ppt/slides/slide7.xml><?xml version="1.0" encoding="utf-8"?>
+<p:sld xmlns:a="http://schemas.openxmlformats.org/drawingml/2006/main" xmlns:p="http://schemas.openxmlformats.org/presentationml/2006/main" xmlns:r="http://schemas.openxmlformats.org/officeDocument/2006/relationships">
+  <p:cSld>
+    <p:bg>
+      <p:bgPr>
+        <a:solidFill>
+          <a:srgbClr val="FFFFFF"/>
+        </a:solidFill>
+        <a:effectLst/>
+      </p:bgPr>
+    </p:bg>
+    <p:spTree>
+      <p:nvGrpSpPr>
+        <p:cNvPr id="1" name=""/>
+        <p:cNvGrpSpPr/>
+        <p:nvPr/>
+      </p:nvGrpSpPr>
+      <p:grpSpPr/>
+      <p:sp>
+        <p:nvSpPr>
+          <p:cNvPr id="2" name="TextBox 1"/>
+          <p:cNvSpPr txBox="1"/>
+          <p:nvPr/>
+        </p:nvSpPr>
+        <p:spPr>
+          <a:xfrm>
+            <a:off x="548640" y="320040"/>
+            <a:ext cx="10972800" cy="640080"/>
+          </a:xfrm>
+          <a:prstGeom prst="rect">
+            <a:avLst/>
+          </a:prstGeom>
+          <a:noFill/>
+        </p:spPr>
+        <p:txBody>
+          <a:bodyPr wrap="square">
+            <a:spAutoFit/>
+          </a:bodyPr>
+          <a:lstStyle/>
+          <a:p>
+            <a:pPr>
+              <a:defRPr sz="3000" b="1">
+                <a:solidFill>
+                  <a:srgbClr val="000000"/>
+                </a:solidFill>
+                <a:latin typeface="Times New Roman"/>
+              </a:defRPr>
+            </a:pPr>
+            <a:r>
+              <a:t>CIDIS_guided_x8x16 — 可见光引导红外超分辨率数据集</a:t>
+            </a:r>
+          </a:p>
+        </p:txBody>
+      </p:sp>
+      <p:sp>
+        <p:nvSpPr>
+          <p:cNvPr id="3" name="TextBox 2"/>
+          <p:cNvSpPr txBox="1"/>
+          <p:nvPr/>
+        </p:nvSpPr>
+        <p:spPr>
+          <a:xfrm>
+            <a:off x="457200" y="1280160"/>
+            <a:ext cx="6858000" cy="3657600"/>
+          </a:xfrm>
+          <a:prstGeom prst="rect">
+            <a:avLst/>
+          </a:prstGeom>
+          <a:noFill/>
+        </p:spPr>
+        <p:txBody>
+          <a:bodyPr wrap="square">
+            <a:spAutoFit/>
+          </a:bodyPr>
+          <a:lstStyle/>
+          <a:p>
+            <a:pPr>
+              <a:spcAft>
+                <a:spcPts val="600"/>
+              </a:spcAft>
+              <a:defRPr sz="1600">
+                <a:solidFill>
+                  <a:srgbClr val="000000"/>
+                </a:solidFill>
+                <a:latin typeface="Times New Roman"/>
+              </a:defRPr>
+            </a:pPr>
+            <a:r>
+              <a:t>• 任务：以可见光图像为引导，对热红外图像进行 ×8 和 ×16 超分辨率重建</a:t>
+            </a:r>
+          </a:p>
+          <a:p>
+            <a:pPr>
+              <a:spcAft>
+                <a:spcPts val="600"/>
+              </a:spcAft>
+              <a:defRPr sz="1600">
+                <a:solidFill>
+                  <a:srgbClr val="000000"/>
+                </a:solidFill>
+                <a:latin typeface="Times New Roman"/>
+              </a:defRPr>
+            </a:pPr>
+            <a:r>
+              <a:t>• 基于 CIDIS 数据集构建，添加合成退化（下采样）生成 LR 图像</a:t>
+            </a:r>
+          </a:p>
+          <a:p>
+            <a:pPr>
+              <a:spcAft>
+                <a:spcPts val="600"/>
+              </a:spcAft>
+              <a:defRPr sz="1600">
+                <a:solidFill>
+                  <a:srgbClr val="000000"/>
+                </a:solidFill>
+                <a:latin typeface="Times New Roman"/>
+              </a:defRPr>
+            </a:pPr>
+            <a:r>
+              <a:t>• 热红外 GT：640×448，LR×8：80×56，LR×16：40×28</a:t>
+            </a:r>
+          </a:p>
+          <a:p>
+            <a:pPr>
+              <a:spcAft>
+                <a:spcPts val="600"/>
+              </a:spcAft>
+              <a:defRPr sz="1600">
+                <a:solidFill>
+                  <a:srgbClr val="000000"/>
+                </a:solidFill>
+                <a:latin typeface="Times New Roman"/>
+              </a:defRPr>
+            </a:pPr>
+            <a:r>
+              <a:t>• 可见光引导图：640×448（与 GT 同尺寸，提供高频纹理引导）</a:t>
+            </a:r>
+          </a:p>
+          <a:p>
+            <a:pPr>
+              <a:spcAft>
+                <a:spcPts val="600"/>
+              </a:spcAft>
+              <a:defRPr sz="1600">
+                <a:solidFill>
+                  <a:srgbClr val="000000"/>
+                </a:solidFill>
+                <a:latin typeface="Times New Roman"/>
+              </a:defRPr>
+            </a:pPr>
+            <a:r>
+              <a:t>• 目录结构：{thermal, visible} / {train, val, test}</a:t>
+            </a:r>
+          </a:p>
+          <a:p>
+            <a:pPr>
+              <a:spcAft>
+                <a:spcPts val="600"/>
+              </a:spcAft>
+              <a:defRPr sz="1600">
+                <a:solidFill>
+                  <a:srgbClr val="000000"/>
+                </a:solidFill>
+                <a:latin typeface="Times New Roman"/>
+              </a:defRPr>
+            </a:pPr>
+            <a:r>
+              <a:t>    thermal 内含 {GT, LR_x8, LR_x16} 子目录</a:t>
+            </a:r>
+          </a:p>
+          <a:p>
+            <a:pPr>
+              <a:spcAft>
+                <a:spcPts val="600"/>
+              </a:spcAft>
+              <a:defRPr sz="1600">
+                <a:solidFill>
+                  <a:srgbClr val="000000"/>
+                </a:solidFill>
+                <a:latin typeface="Times New Roman"/>
+              </a:defRPr>
+            </a:pPr>
+            <a:r>
+              <a:t>• 训练 700 对 / 验证 200 对 / 测试 40 对（×8 和 ×16 各 40 张）</a:t>
+            </a:r>
+          </a:p>
+        </p:txBody>
+      </p:sp>
+      <p:pic>
+        <p:nvPicPr>
+          <p:cNvPr id="4" name="Picture 3" descr="cg_GT 640.png"/>
+          <p:cNvPicPr>
+            <a:picLocks noChangeAspect="1"/>
+          </p:cNvPicPr>
+          <p:nvPr/>
+        </p:nvPicPr>
+        <p:blipFill>
+          <a:blip r:embed="rId2"/>
+          <a:stretch>
+            <a:fillRect/>
+          </a:stretch>
+        </p:blipFill>
+        <p:spPr>
+          <a:xfrm>
+            <a:off x="7772400" y="1280160"/>
+            <a:ext cx="2194560" cy="1536192"/>
+          </a:xfrm>
+          <a:prstGeom prst="rect">
+            <a:avLst/>
+          </a:prstGeom>
+        </p:spPr>
+      </p:pic>
+      <p:sp>
+        <p:nvSpPr>
+          <p:cNvPr id="5" name="TextBox 4"/>
+          <p:cNvSpPr txBox="1"/>
+          <p:nvPr/>
+        </p:nvSpPr>
+        <p:spPr>
+          <a:xfrm>
+            <a:off x="7772400" y="2487168"/>
+            <a:ext cx="2194560" cy="274320"/>
+          </a:xfrm>
+          <a:prstGeom prst="rect">
+            <a:avLst/>
+          </a:prstGeom>
+          <a:noFill/>
+        </p:spPr>
+        <p:txBody>
+          <a:bodyPr wrap="square">
+            <a:spAutoFit/>
+          </a:bodyPr>
+          <a:lstStyle/>
+          <a:p>
+            <a:pPr>
+              <a:spcAft>
+                <a:spcPts val="600"/>
+              </a:spcAft>
+              <a:defRPr sz="1100">
+                <a:solidFill>
+                  <a:srgbClr val="444444"/>
+                </a:solidFill>
+                <a:latin typeface="Times New Roman"/>
+              </a:defRPr>
+            </a:pPr>
+            <a:r>
+              <a:t>GT 640×448</a:t>
+            </a:r>
+          </a:p>
+        </p:txBody>
+      </p:sp>
+      <p:pic>
+        <p:nvPicPr>
+          <p:cNvPr id="6" name="Picture 5" descr="cg_可见光引导 .png"/>
+          <p:cNvPicPr>
+            <a:picLocks noChangeAspect="1"/>
+          </p:cNvPicPr>
+          <p:nvPr/>
+        </p:nvPicPr>
+        <p:blipFill>
+          <a:blip r:embed="rId3"/>
+          <a:stretch>
+            <a:fillRect/>
+          </a:stretch>
+        </p:blipFill>
+        <p:spPr>
+          <a:xfrm>
+            <a:off x="7772400" y="3840480"/>
+            <a:ext cx="2194560" cy="1536192"/>
+          </a:xfrm>
+          <a:prstGeom prst="rect">
+            <a:avLst/>
+          </a:prstGeom>
+        </p:spPr>
+      </p:pic>
+      <p:sp>
+        <p:nvSpPr>
+          <p:cNvPr id="7" name="TextBox 6"/>
+          <p:cNvSpPr txBox="1"/>
+          <p:nvPr/>
+        </p:nvSpPr>
+        <p:spPr>
+          <a:xfrm>
+            <a:off x="7772400" y="5047488"/>
+            <a:ext cx="2194560" cy="274320"/>
+          </a:xfrm>
+          <a:prstGeom prst="rect">
+            <a:avLst/>
+          </a:prstGeom>
+          <a:noFill/>
+        </p:spPr>
+        <p:txBody>
+          <a:bodyPr wrap="square">
+            <a:spAutoFit/>
+          </a:bodyPr>
+          <a:lstStyle/>
+          <a:p>
+            <a:pPr>
+              <a:spcAft>
+                <a:spcPts val="600"/>
+              </a:spcAft>
+              <a:defRPr sz="1100">
+                <a:solidFill>
+                  <a:srgbClr val="444444"/>
+                </a:solidFill>
+                <a:latin typeface="Times New Roman"/>
+              </a:defRPr>
+            </a:pPr>
+            <a:r>
+              <a:t>可见光引导 640×448</a:t>
+            </a:r>
+          </a:p>
+        </p:txBody>
+      </p:sp>
+      <p:pic>
+        <p:nvPicPr>
+          <p:cNvPr id="8" name="Picture 7" descr="cg_LR×8 8.png"/>
+          <p:cNvPicPr>
+            <a:picLocks noChangeAspect="1"/>
+          </p:cNvPicPr>
+          <p:nvPr/>
+        </p:nvPicPr>
+        <p:blipFill>
+          <a:blip r:embed="rId4"/>
+          <a:stretch>
+            <a:fillRect/>
+          </a:stretch>
+        </p:blipFill>
+        <p:spPr>
+          <a:xfrm>
+            <a:off x="7772400" y="4663440"/>
+            <a:ext cx="640080" cy="448056"/>
+          </a:xfrm>
+          <a:prstGeom prst="rect">
+            <a:avLst/>
+          </a:prstGeom>
+        </p:spPr>
+      </p:pic>
+      <p:sp>
+        <p:nvSpPr>
+          <p:cNvPr id="9" name="TextBox 8"/>
+          <p:cNvSpPr txBox="1"/>
+          <p:nvPr/>
+        </p:nvSpPr>
+        <p:spPr>
+          <a:xfrm>
+            <a:off x="7772400" y="5015484"/>
+            <a:ext cx="640080" cy="274320"/>
+          </a:xfrm>
+          <a:prstGeom prst="rect">
+            <a:avLst/>
+          </a:prstGeom>
+          <a:noFill/>
+        </p:spPr>
+        <p:txBody>
+          <a:bodyPr wrap="square">
+            <a:spAutoFit/>
+          </a:bodyPr>
+          <a:lstStyle/>
+          <a:p>
+            <a:pPr>
+              <a:spcAft>
+                <a:spcPts val="600"/>
+              </a:spcAft>
+              <a:defRPr sz="1100">
+                <a:solidFill>
+                  <a:srgbClr val="444444"/>
+                </a:solidFill>
+                <a:latin typeface="Times New Roman"/>
+              </a:defRPr>
+            </a:pPr>
+            <a:r>
+              <a:t>LR×8 80×56</a:t>
+            </a:r>
+          </a:p>
+        </p:txBody>
+      </p:sp>
+      <p:pic>
+        <p:nvPicPr>
+          <p:cNvPr id="10" name="Picture 9" descr="cg_LR×16 .png"/>
+          <p:cNvPicPr>
+            <a:picLocks noChangeAspect="1"/>
+          </p:cNvPicPr>
+          <p:nvPr/>
+        </p:nvPicPr>
+        <p:blipFill>
+          <a:blip r:embed="rId5"/>
+          <a:stretch>
+            <a:fillRect/>
+          </a:stretch>
+        </p:blipFill>
+        <p:spPr>
+          <a:xfrm>
+            <a:off x="7772400" y="5943600"/>
+            <a:ext cx="320040" cy="224028"/>
+          </a:xfrm>
+          <a:prstGeom prst="rect">
+            <a:avLst/>
+          </a:prstGeom>
+        </p:spPr>
+      </p:pic>
+      <p:sp>
+        <p:nvSpPr>
+          <p:cNvPr id="11" name="TextBox 10"/>
+          <p:cNvSpPr txBox="1"/>
+          <p:nvPr/>
+        </p:nvSpPr>
+        <p:spPr>
+          <a:xfrm>
+            <a:off x="7772400" y="6119622"/>
+            <a:ext cx="320040" cy="274320"/>
+          </a:xfrm>
+          <a:prstGeom prst="rect">
+            <a:avLst/>
+          </a:prstGeom>
+          <a:noFill/>
+        </p:spPr>
+        <p:txBody>
+          <a:bodyPr wrap="square">
+            <a:spAutoFit/>
+          </a:bodyPr>
+          <a:lstStyle/>
+          <a:p>
+            <a:pPr>
+              <a:spcAft>
+                <a:spcPts val="600"/>
+              </a:spcAft>
+              <a:defRPr sz="1100">
+                <a:solidFill>
+                  <a:srgbClr val="444444"/>
+                </a:solidFill>
+                <a:latin typeface="Times New Roman"/>
+              </a:defRPr>
+            </a:pPr>
+            <a:r>
+              <a:t>LR×16 40×28</a:t>
+            </a:r>
+          </a:p>
+        </p:txBody>
+      </p:sp>
+      <p:graphicFrame>
+        <p:nvGraphicFramePr>
+          <p:cNvPr id="12" name="Table 11"/>
+          <p:cNvGraphicFramePr>
+            <a:graphicFrameLocks noGrp="1"/>
+          </p:cNvGraphicFramePr>
+          <p:nvPr/>
+        </p:nvGraphicFramePr>
+        <p:xfrm>
+          <a:off x="457200" y="5303520"/>
+          <a:ext cx="7589520" cy="1536192"/>
+        </p:xfrm>
+        <a:graphic>
+          <a:graphicData uri="http://schemas.openxmlformats.org/drawingml/2006/table">
+            <a:tbl>
+              <a:tblPr firstRow="1" bandRow="1">
+                <a:tableStyleId>{5C22544A-7EE6-4342-B048-85BDC9FD1C3A}</a:tableStyleId>
+              </a:tblPr>
+              <a:tblGrid>
+                <a:gridCol w="1097280"/>
+                <a:gridCol w="2560320"/>
+                <a:gridCol w="1645920"/>
+                <a:gridCol w="2286000"/>
+              </a:tblGrid>
+              <a:tr h="384048">
+                <a:tc>
+                  <a:txBody>
+                    <a:bodyPr/>
+                    <a:lstStyle/>
+                    <a:p>
+                      <a:pPr algn="ctr">
+                        <a:defRPr sz="1200" b="1">
+                          <a:solidFill>
+                            <a:srgbClr val="000000"/>
+                          </a:solidFill>
+                          <a:latin typeface="Times New Roman"/>
+                        </a:defRPr>
+                      </a:pPr>
+                      <a:r>
+                        <a:t>集合</a:t>
+                      </a:r>
+                    </a:p>
+                  </a:txBody>
+                  <a:tcPr anchor="ctr">
+                    <a:lnT w="19000">
+                      <a:solidFill>
+                        <a:srgbClr val="000000"/>
+                      </a:solidFill>
+                    </a:lnT>
+                    <a:lnB w="9500">
+                      <a:solidFill>
+                        <a:srgbClr val="000000"/>
+                      </a:solidFill>
+                    </a:lnB>
+                  </a:tcPr>
+                </a:tc>
+                <a:tc>
+                  <a:txBody>
+                    <a:bodyPr/>
+                    <a:lstStyle/>
+                    <a:p>
+                      <a:pPr algn="ctr">
+                        <a:defRPr sz="1200" b="1">
+                          <a:solidFill>
+                            <a:srgbClr val="000000"/>
+                          </a:solidFill>
+                          <a:latin typeface="Times New Roman"/>
+                        </a:defRPr>
+                      </a:pPr>
+                      <a:r>
+                        <a:t>热红外 (GT/LR×8/LR×16)</a:t>
+                      </a:r>
+                    </a:p>
+                  </a:txBody>
+                  <a:tcPr anchor="ctr">
+                    <a:lnT w="19000">
+                      <a:solidFill>
+                        <a:srgbClr val="000000"/>
+                      </a:solidFill>
+                    </a:lnT>
+                    <a:lnB w="9500">
+                      <a:solidFill>
+                        <a:srgbClr val="000000"/>
+                      </a:solidFill>
+                    </a:lnB>
+                  </a:tcPr>
+                </a:tc>
+                <a:tc>
+                  <a:txBody>
+                    <a:bodyPr/>
+                    <a:lstStyle/>
+                    <a:p>
+                      <a:pPr algn="ctr">
+                        <a:defRPr sz="1200" b="1">
+                          <a:solidFill>
+                            <a:srgbClr val="000000"/>
+                          </a:solidFill>
+                          <a:latin typeface="Times New Roman"/>
+                        </a:defRPr>
+                      </a:pPr>
+                      <a:r>
+                        <a:t>可见光引导</a:t>
+                      </a:r>
+                    </a:p>
+                  </a:txBody>
+                  <a:tcPr anchor="ctr">
+                    <a:lnT w="19000">
+                      <a:solidFill>
+                        <a:srgbClr val="000000"/>
+                      </a:solidFill>
+                    </a:lnT>
+                    <a:lnB w="9500">
+                      <a:solidFill>
+                        <a:srgbClr val="000000"/>
+                      </a:solidFill>
+                    </a:lnB>
+                  </a:tcPr>
+                </a:tc>
+                <a:tc>
+                  <a:txBody>
+                    <a:bodyPr/>
+                    <a:lstStyle/>
+                    <a:p>
+                      <a:pPr algn="ctr">
+                        <a:defRPr sz="1200" b="1">
+                          <a:solidFill>
+                            <a:srgbClr val="000000"/>
+                          </a:solidFill>
+                          <a:latin typeface="Times New Roman"/>
+                        </a:defRPr>
+                      </a:pPr>
+                      <a:r>
+                        <a:t>分辨率变化</a:t>
+                      </a:r>
+                    </a:p>
+                  </a:txBody>
+                  <a:tcPr anchor="ctr">
+                    <a:lnT w="19000">
+                      <a:solidFill>
+                        <a:srgbClr val="000000"/>
+                      </a:solidFill>
+                    </a:lnT>
+                    <a:lnB w="9500">
+                      <a:solidFill>
+                        <a:srgbClr val="000000"/>
+                      </a:solidFill>
+                    </a:lnB>
+                  </a:tcPr>
+                </a:tc>
+              </a:tr>
+              <a:tr h="384048">
+                <a:tc>
+                  <a:txBody>
+                    <a:bodyPr/>
+                    <a:lstStyle/>
+                    <a:p>
+                      <a:pPr algn="ctr">
+                        <a:defRPr sz="1200" b="0">
+                          <a:solidFill>
+                            <a:srgbClr val="000000"/>
+                          </a:solidFill>
+                          <a:latin typeface="Times New Roman"/>
+                        </a:defRPr>
+                      </a:pPr>
+                      <a:r>
+                        <a:t>训练</a:t>
+                      </a:r>
+                    </a:p>
+                  </a:txBody>
+                  <a:tcPr anchor="ctr"/>
+                </a:tc>
+                <a:tc>
+                  <a:txBody>
+                    <a:bodyPr/>
+                    <a:lstStyle/>
+                    <a:p>
+                      <a:pPr algn="ctr">
+                        <a:defRPr sz="1200" b="0">
+                          <a:solidFill>
+                            <a:srgbClr val="000000"/>
+                          </a:solidFill>
+                          <a:latin typeface="Times New Roman"/>
+                        </a:defRPr>
+                      </a:pPr>
+                      <a:r>
+                        <a:t>700×3 = 2,100</a:t>
+                      </a:r>
+                    </a:p>
+                  </a:txBody>
+                  <a:tcPr anchor="ctr"/>
+                </a:tc>
+                <a:tc>
+                  <a:txBody>
+                    <a:bodyPr/>
+                    <a:lstStyle/>
+                    <a:p>
+                      <a:pPr algn="ctr">
+                        <a:defRPr sz="1200" b="0">
+                          <a:solidFill>
+                            <a:srgbClr val="000000"/>
+                          </a:solidFill>
+                          <a:latin typeface="Times New Roman"/>
+                        </a:defRPr>
+                      </a:pPr>
+                      <a:r>
+                        <a:t>700</a:t>
+                      </a:r>
+                    </a:p>
+                  </a:txBody>
+                  <a:tcPr anchor="ctr"/>
+                </a:tc>
+                <a:tc>
+                  <a:txBody>
+                    <a:bodyPr/>
+                    <a:lstStyle/>
+                    <a:p>
+                      <a:pPr algn="ctr">
+                        <a:defRPr sz="1200" b="0">
+                          <a:solidFill>
+                            <a:srgbClr val="000000"/>
+                          </a:solidFill>
+                          <a:latin typeface="Times New Roman"/>
+                        </a:defRPr>
+                      </a:pPr>
+                      <a:r>
+                        <a:t>640×448 → 80×56 / 40×28</a:t>
+                      </a:r>
+                    </a:p>
+                  </a:txBody>
+                  <a:tcPr anchor="ctr"/>
+                </a:tc>
+              </a:tr>
+              <a:tr h="384048">
+                <a:tc>
+                  <a:txBody>
+                    <a:bodyPr/>
+                    <a:lstStyle/>
+                    <a:p>
+                      <a:pPr algn="ctr">
+                        <a:defRPr sz="1200" b="0">
+                          <a:solidFill>
+                            <a:srgbClr val="000000"/>
+                          </a:solidFill>
+                          <a:latin typeface="Times New Roman"/>
+                        </a:defRPr>
+                      </a:pPr>
+                      <a:r>
+                        <a:t>验证</a:t>
+                      </a:r>
+                    </a:p>
+                  </a:txBody>
+                  <a:tcPr anchor="ctr"/>
+                </a:tc>
+                <a:tc>
+                  <a:txBody>
+                    <a:bodyPr/>
+                    <a:lstStyle/>
+                    <a:p>
+                      <a:pPr algn="ctr">
+                        <a:defRPr sz="1200" b="0">
+                          <a:solidFill>
+                            <a:srgbClr val="000000"/>
+                          </a:solidFill>
+                          <a:latin typeface="Times New Roman"/>
+                        </a:defRPr>
+                      </a:pPr>
+                      <a:r>
+                        <a:t>200×3 = 600</a:t>
+                      </a:r>
+                    </a:p>
+                  </a:txBody>
+                  <a:tcPr anchor="ctr"/>
+                </a:tc>
+                <a:tc>
+                  <a:txBody>
+                    <a:bodyPr/>
+                    <a:lstStyle/>
+                    <a:p>
+                      <a:pPr algn="ctr">
+                        <a:defRPr sz="1200" b="0">
+                          <a:solidFill>
+                            <a:srgbClr val="000000"/>
+                          </a:solidFill>
+                          <a:latin typeface="Times New Roman"/>
+                        </a:defRPr>
+                      </a:pPr>
+                      <a:r>
+                        <a:t>200</a:t>
+                      </a:r>
+                    </a:p>
+                  </a:txBody>
+                  <a:tcPr anchor="ctr"/>
+                </a:tc>
+                <a:tc>
+                  <a:txBody>
+                    <a:bodyPr/>
+                    <a:lstStyle/>
+                    <a:p>
+                      <a:pPr algn="ctr">
+                        <a:defRPr sz="1200" b="0">
+                          <a:solidFill>
+                            <a:srgbClr val="000000"/>
+                          </a:solidFill>
+                          <a:latin typeface="Times New Roman"/>
+                        </a:defRPr>
+                      </a:pPr>
+                    </a:p>
+                  </a:txBody>
+                  <a:tcPr anchor="ctr"/>
+                </a:tc>
+              </a:tr>
+              <a:tr h="384048">
+                <a:tc>
+                  <a:txBody>
+                    <a:bodyPr/>
+                    <a:lstStyle/>
+                    <a:p>
+                      <a:pPr algn="ctr">
+                        <a:defRPr sz="1200" b="0">
+                          <a:solidFill>
+                            <a:srgbClr val="000000"/>
+                          </a:solidFill>
+                          <a:latin typeface="Times New Roman"/>
+                        </a:defRPr>
+                      </a:pPr>
+                      <a:r>
+                        <a:t>测试</a:t>
+                      </a:r>
+                    </a:p>
+                  </a:txBody>
+                  <a:tcPr anchor="ctr">
+                    <a:lnB w="19000">
+                      <a:solidFill>
+                        <a:srgbClr val="000000"/>
+                      </a:solidFill>
+                    </a:lnB>
+                  </a:tcPr>
+                </a:tc>
+                <a:tc>
+                  <a:txBody>
+                    <a:bodyPr/>
+                    <a:lstStyle/>
+                    <a:p>
+                      <a:pPr algn="ctr">
+                        <a:defRPr sz="1200" b="0">
+                          <a:solidFill>
+                            <a:srgbClr val="000000"/>
+                          </a:solidFill>
+                          <a:latin typeface="Times New Roman"/>
+                        </a:defRPr>
+                      </a:pPr>
+                      <a:r>
+                        <a:t>40×2 = 80</a:t>
+                      </a:r>
+                    </a:p>
+                  </a:txBody>
+                  <a:tcPr anchor="ctr">
+                    <a:lnB w="19000">
+                      <a:solidFill>
+                        <a:srgbClr val="000000"/>
+                      </a:solidFill>
+                    </a:lnB>
+                  </a:tcPr>
+                </a:tc>
+                <a:tc>
+                  <a:txBody>
+                    <a:bodyPr/>
+                    <a:lstStyle/>
+                    <a:p>
+                      <a:pPr algn="ctr">
+                        <a:defRPr sz="1200" b="0">
+                          <a:solidFill>
+                            <a:srgbClr val="000000"/>
+                          </a:solidFill>
+                          <a:latin typeface="Times New Roman"/>
+                        </a:defRPr>
+                      </a:pPr>
+                      <a:r>
+                        <a:t>40</a:t>
+                      </a:r>
+                    </a:p>
+                  </a:txBody>
+                  <a:tcPr anchor="ctr">
+                    <a:lnB w="19000">
+                      <a:solidFill>
+                        <a:srgbClr val="000000"/>
+                      </a:solidFill>
+                    </a:lnB>
+                  </a:tcPr>
+                </a:tc>
+                <a:tc>
+                  <a:txBody>
+                    <a:bodyPr/>
+                    <a:lstStyle/>
+                    <a:p>
+                      <a:pPr algn="ctr">
+                        <a:defRPr sz="1200" b="0">
+                          <a:solidFill>
+                            <a:srgbClr val="000000"/>
+                          </a:solidFill>
+                          <a:latin typeface="Times New Roman"/>
+                        </a:defRPr>
+                      </a:pPr>
+                      <a:r>
+                        <a:t>×8 / ×16 各 40 张</a:t>
+                      </a:r>
+                    </a:p>
+                  </a:txBody>
+                  <a:tcPr anchor="ctr">
+                    <a:lnB w="19000">
+                      <a:solidFill>
+                        <a:srgbClr val="000000"/>
+                      </a:solidFill>
+                    </a:lnB>
+                  </a:tcPr>
+                </a:tc>
+              </a:tr>
+            </a:tbl>
+          </a:graphicData>
+        </a:graphic>
+      </p:graphicFrame>
+    </p:spTree>
+  </p:cSld>
+  <p:clrMapOvr>
+    <a:masterClrMapping/>
+  </p:clrMapOvr>
+</p:sld>
+</file>
+
+<file path=ppt/slides/slide8.xml><?xml version="1.0" encoding="utf-8"?>
+<p:sld xmlns:a="http://schemas.openxmlformats.org/drawingml/2006/main" xmlns:p="http://schemas.openxmlformats.org/presentationml/2006/main" xmlns:r="http://schemas.openxmlformats.org/officeDocument/2006/relationships">
+  <p:cSld>
+    <p:bg>
+      <p:bgPr>
+        <a:solidFill>
+          <a:srgbClr val="FFFFFF"/>
+        </a:solidFill>
+        <a:effectLst/>
+      </p:bgPr>
+    </p:bg>
+    <p:spTree>
+      <p:nvGrpSpPr>
+        <p:cNvPr id="1" name=""/>
+        <p:cNvGrpSpPr/>
+        <p:nvPr/>
+      </p:nvGrpSpPr>
+      <p:grpSpPr/>
+      <p:sp>
+        <p:nvSpPr>
+          <p:cNvPr id="2" name="TextBox 1"/>
+          <p:cNvSpPr txBox="1"/>
+          <p:nvPr/>
+        </p:nvSpPr>
+        <p:spPr>
+          <a:xfrm>
+            <a:off x="548640" y="320040"/>
+            <a:ext cx="10972800" cy="640080"/>
+          </a:xfrm>
+          <a:prstGeom prst="rect">
+            <a:avLst/>
+          </a:prstGeom>
+          <a:noFill/>
+        </p:spPr>
+        <p:txBody>
+          <a:bodyPr wrap="square">
+            <a:spAutoFit/>
+          </a:bodyPr>
+          <a:lstStyle/>
+          <a:p>
+            <a:pPr>
+              <a:defRPr sz="3000" b="1">
+                <a:solidFill>
+                  <a:srgbClr val="000000"/>
+                </a:solidFill>
+                <a:latin typeface="Times New Roman"/>
+              </a:defRPr>
+            </a:pPr>
+            <a:r>
               <a:t>总结与对比</a:t>
             </a:r>
           </a:p>
@@ -6856,8 +8326,8 @@
           <p:nvPr/>
         </p:nvGraphicFramePr>
         <p:xfrm>
-          <a:off x="457200" y="1371600"/>
-          <a:ext cx="10972800" cy="4160520"/>
+          <a:off x="274320" y="1371600"/>
+          <a:ext cx="10789920" cy="3968496"/>
         </p:xfrm>
         <a:graphic>
           <a:graphicData uri="http://schemas.openxmlformats.org/drawingml/2006/table">
@@ -6866,50 +8336,27 @@
                 <a:tableStyleId>{5C22544A-7EE6-4342-B048-85BDC9FD1C3A}</a:tableStyleId>
               </a:tblPr>
               <a:tblGrid>
-                <a:gridCol w="1371600">
-                  <a:extLst>
-                    <a:ext uri="{9D8B030D-6E8A-4147-A177-3AD203B41FA5}">
-                      <a16:colId xmlns:a16="http://schemas.microsoft.com/office/drawing/2014/main" val="20000"/>
-                    </a:ext>
-                  </a:extLst>
-                </a:gridCol>
-                <a:gridCol w="2743200">
-                  <a:extLst>
-                    <a:ext uri="{9D8B030D-6E8A-4147-A177-3AD203B41FA5}">
-                      <a16:colId xmlns:a16="http://schemas.microsoft.com/office/drawing/2014/main" val="20001"/>
-                    </a:ext>
-                  </a:extLst>
-                </a:gridCol>
-                <a:gridCol w="3200400">
-                  <a:extLst>
-                    <a:ext uri="{9D8B030D-6E8A-4147-A177-3AD203B41FA5}">
-                      <a16:colId xmlns:a16="http://schemas.microsoft.com/office/drawing/2014/main" val="20002"/>
-                    </a:ext>
-                  </a:extLst>
-                </a:gridCol>
-                <a:gridCol w="3657600">
-                  <a:extLst>
-                    <a:ext uri="{9D8B030D-6E8A-4147-A177-3AD203B41FA5}">
-                      <a16:colId xmlns:a16="http://schemas.microsoft.com/office/drawing/2014/main" val="20003"/>
-                    </a:ext>
-                  </a:extLst>
-                </a:gridCol>
+                <a:gridCol w="1097280"/>
+                <a:gridCol w="1828800"/>
+                <a:gridCol w="2011680"/>
+                <a:gridCol w="1828800"/>
+                <a:gridCol w="1828800"/>
+                <a:gridCol w="2194560"/>
               </a:tblGrid>
-              <a:tr h="594360">
-                <a:tc>
-                  <a:txBody>
-                    <a:bodyPr/>
-                    <a:lstStyle/>
-                    <a:p>
-                      <a:pPr algn="ctr">
-                        <a:defRPr sz="1400" b="1">
-                          <a:solidFill>
-                            <a:srgbClr val="000000"/>
-                          </a:solidFill>
-                          <a:latin typeface="Times New Roman"/>
-                        </a:defRPr>
-                      </a:pPr>
-                      <a:endParaRPr/>
+              <a:tr h="566928">
+                <a:tc>
+                  <a:txBody>
+                    <a:bodyPr/>
+                    <a:lstStyle/>
+                    <a:p>
+                      <a:pPr algn="ctr">
+                        <a:defRPr sz="1200" b="1">
+                          <a:solidFill>
+                            <a:srgbClr val="000000"/>
+                          </a:solidFill>
+                          <a:latin typeface="Times New Roman"/>
+                        </a:defRPr>
+                      </a:pPr>
                     </a:p>
                   </a:txBody>
                   <a:tcPr anchor="ctr">
@@ -6931,7 +8378,7 @@
                     <a:lstStyle/>
                     <a:p>
                       <a:pPr algn="ctr">
-                        <a:defRPr sz="1400" b="1">
+                        <a:defRPr sz="1200" b="1">
                           <a:solidFill>
                             <a:srgbClr val="000000"/>
                           </a:solidFill>
@@ -6962,7 +8409,7 @@
                     <a:lstStyle/>
                     <a:p>
                       <a:pPr algn="ctr">
-                        <a:defRPr sz="1400" b="1">
+                        <a:defRPr sz="1200" b="1">
                           <a:solidFill>
                             <a:srgbClr val="000000"/>
                           </a:solidFill>
@@ -6993,7 +8440,7 @@
                     <a:lstStyle/>
                     <a:p>
                       <a:pPr algn="ctr">
-                        <a:defRPr sz="1400" b="1">
+                        <a:defRPr sz="1200" b="1">
                           <a:solidFill>
                             <a:srgbClr val="000000"/>
                           </a:solidFill>
@@ -7018,20 +8465,77 @@
                     </a:lnB>
                   </a:tcPr>
                 </a:tc>
-                <a:extLst>
-                  <a:ext uri="{0D108BD9-81ED-4DB2-BD59-A6C34878D82A}">
-                    <a16:rowId xmlns:a16="http://schemas.microsoft.com/office/drawing/2014/main" val="10000"/>
-                  </a:ext>
-                </a:extLst>
+                <a:tc>
+                  <a:txBody>
+                    <a:bodyPr/>
+                    <a:lstStyle/>
+                    <a:p>
+                      <a:pPr algn="ctr">
+                        <a:defRPr sz="1200" b="1">
+                          <a:solidFill>
+                            <a:srgbClr val="000000"/>
+                          </a:solidFill>
+                          <a:latin typeface="Times New Roman"/>
+                        </a:defRPr>
+                      </a:pPr>
+                      <a:r>
+                        <a:t>CIDIS</a:t>
+                      </a:r>
+                    </a:p>
+                  </a:txBody>
+                  <a:tcPr anchor="ctr">
+                    <a:lnT w="19000">
+                      <a:solidFill>
+                        <a:srgbClr val="000000"/>
+                      </a:solidFill>
+                    </a:lnT>
+                    <a:lnB w="9500">
+                      <a:solidFill>
+                        <a:srgbClr val="000000"/>
+                      </a:solidFill>
+                    </a:lnB>
+                  </a:tcPr>
+                </a:tc>
+                <a:tc>
+                  <a:txBody>
+                    <a:bodyPr/>
+                    <a:lstStyle/>
+                    <a:p>
+                      <a:pPr algn="ctr">
+                        <a:defRPr sz="1200" b="1">
+                          <a:solidFill>
+                            <a:srgbClr val="000000"/>
+                          </a:solidFill>
+                          <a:latin typeface="Times New Roman"/>
+                        </a:defRPr>
+                      </a:pPr>
+                      <a:r>
+                        <a:t>CIDIS_guided</a:t>
+                      </a:r>
+                    </a:p>
+                  </a:txBody>
+                  <a:tcPr anchor="ctr">
+                    <a:lnT w="19000">
+                      <a:solidFill>
+                        <a:srgbClr val="000000"/>
+                      </a:solidFill>
+                    </a:lnT>
+                    <a:lnB w="9500">
+                      <a:solidFill>
+                        <a:srgbClr val="000000"/>
+                      </a:solidFill>
+                    </a:lnB>
+                  </a:tcPr>
+                </a:tc>
               </a:tr>
-              <a:tr h="594360">
-                <a:tc>
-                  <a:txBody>
-                    <a:bodyPr/>
-                    <a:lstStyle/>
-                    <a:p>
-                      <a:pPr algn="ctr">
-                        <a:defRPr sz="1400" b="0">
+              <a:tr h="566928">
+                <a:tc>
+                  <a:txBody>
+                    <a:bodyPr/>
+                    <a:lstStyle/>
+                    <a:p>
+                      <a:pPr algn="ctr">
+                        <a:defRPr sz="1200" b="0">
                           <a:solidFill>
                             <a:srgbClr val="000000"/>
                           </a:solidFill>
@@ -7043,25 +8547,15 @@
                       </a:r>
                     </a:p>
                   </a:txBody>
-                  <a:tcPr anchor="ctr">
-                    <a:lnT w="9500" cap="flat" cmpd="sng" algn="ctr">
-                      <a:solidFill>
-                        <a:srgbClr val="000000"/>
-                      </a:solidFill>
-                      <a:prstDash val="solid"/>
-                      <a:round/>
-                      <a:headEnd type="none" w="med" len="med"/>
-                      <a:tailEnd type="none" w="med" len="med"/>
-                    </a:lnT>
-                  </a:tcPr>
-                </a:tc>
-                <a:tc>
-                  <a:txBody>
-                    <a:bodyPr/>
-                    <a:lstStyle/>
-                    <a:p>
-                      <a:pPr algn="ctr">
-                        <a:defRPr sz="1400" b="0">
+                  <a:tcPr anchor="ctr"/>
+                </a:tc>
+                <a:tc>
+                  <a:txBody>
+                    <a:bodyPr/>
+                    <a:lstStyle/>
+                    <a:p>
+                      <a:pPr algn="ctr">
+                        <a:defRPr sz="1200" b="0">
                           <a:solidFill>
                             <a:srgbClr val="000000"/>
                           </a:solidFill>
@@ -7073,92 +8567,97 @@
                       </a:r>
                     </a:p>
                   </a:txBody>
-                  <a:tcPr anchor="ctr">
-                    <a:lnT w="9500" cap="flat" cmpd="sng" algn="ctr">
-                      <a:solidFill>
-                        <a:srgbClr val="000000"/>
-                      </a:solidFill>
-                      <a:prstDash val="solid"/>
-                      <a:round/>
-                      <a:headEnd type="none" w="med" len="med"/>
-                      <a:tailEnd type="none" w="med" len="med"/>
-                    </a:lnT>
-                  </a:tcPr>
-                </a:tc>
-                <a:tc>
-                  <a:txBody>
-                    <a:bodyPr/>
-                    <a:lstStyle/>
-                    <a:p>
-                      <a:pPr algn="ctr">
-                        <a:defRPr sz="1400" b="0">
-                          <a:solidFill>
-                            <a:srgbClr val="000000"/>
-                          </a:solidFill>
-                          <a:latin typeface="Times New Roman"/>
-                        </a:defRPr>
-                      </a:pPr>
-                      <a:r>
-                        <a:t>多类车辆目标检测</a:t>
-                      </a:r>
-                    </a:p>
-                  </a:txBody>
-                  <a:tcPr anchor="ctr">
-                    <a:lnT w="9500" cap="flat" cmpd="sng" algn="ctr">
-                      <a:solidFill>
-                        <a:srgbClr val="000000"/>
-                      </a:solidFill>
-                      <a:prstDash val="solid"/>
-                      <a:round/>
-                      <a:headEnd type="none" w="med" len="med"/>
-                      <a:tailEnd type="none" w="med" len="med"/>
-                    </a:lnT>
-                  </a:tcPr>
-                </a:tc>
-                <a:tc>
-                  <a:txBody>
-                    <a:bodyPr/>
-                    <a:lstStyle/>
-                    <a:p>
-                      <a:pPr algn="ctr">
-                        <a:defRPr sz="1400" b="0">
-                          <a:solidFill>
-                            <a:srgbClr val="000000"/>
-                          </a:solidFill>
-                          <a:latin typeface="Times New Roman"/>
-                        </a:defRPr>
-                      </a:pPr>
-                      <a:r>
-                        <a:t>跨传感器图像翻译</a:t>
-                      </a:r>
-                    </a:p>
-                  </a:txBody>
-                  <a:tcPr anchor="ctr">
-                    <a:lnT w="9500" cap="flat" cmpd="sng" algn="ctr">
-                      <a:solidFill>
-                        <a:srgbClr val="000000"/>
-                      </a:solidFill>
-                      <a:prstDash val="solid"/>
-                      <a:round/>
-                      <a:headEnd type="none" w="med" len="med"/>
-                      <a:tailEnd type="none" w="med" len="med"/>
-                    </a:lnT>
-                  </a:tcPr>
-                </a:tc>
-                <a:extLst>
-                  <a:ext uri="{0D108BD9-81ED-4DB2-BD59-A6C34878D82A}">
-                    <a16:rowId xmlns:a16="http://schemas.microsoft.com/office/drawing/2014/main" val="10001"/>
-                  </a:ext>
-                </a:extLst>
+                  <a:tcPr anchor="ctr"/>
+                </a:tc>
+                <a:tc>
+                  <a:txBody>
+                    <a:bodyPr/>
+                    <a:lstStyle/>
+                    <a:p>
+                      <a:pPr algn="ctr">
+                        <a:defRPr sz="1200" b="0">
+                          <a:solidFill>
+                            <a:srgbClr val="000000"/>
+                          </a:solidFill>
+                          <a:latin typeface="Times New Roman"/>
+                        </a:defRPr>
+                      </a:pPr>
+                      <a:r>
+                        <a:t>车辆目标检测</a:t>
+                      </a:r>
+                    </a:p>
+                  </a:txBody>
+                  <a:tcPr anchor="ctr"/>
+                </a:tc>
+                <a:tc>
+                  <a:txBody>
+                    <a:bodyPr/>
+                    <a:lstStyle/>
+                    <a:p>
+                      <a:pPr algn="ctr">
+                        <a:defRPr sz="1200" b="0">
+                          <a:solidFill>
+                            <a:srgbClr val="000000"/>
+                          </a:solidFill>
+                          <a:latin typeface="Times New Roman"/>
+                        </a:defRPr>
+                      </a:pPr>
+                      <a:r>
+                        <a:t>跨传感器翻译</a:t>
+                      </a:r>
+                    </a:p>
+                  </a:txBody>
+                  <a:tcPr anchor="ctr"/>
+                </a:tc>
+                <a:tc>
+                  <a:txBody>
+                    <a:bodyPr/>
+                    <a:lstStyle/>
+                    <a:p>
+                      <a:pPr algn="ctr">
+                        <a:defRPr sz="1200" b="0">
+                          <a:solidFill>
+                            <a:srgbClr val="000000"/>
+                          </a:solidFill>
+                          <a:latin typeface="Times New Roman"/>
+                        </a:defRPr>
+                      </a:pPr>
+                      <a:r>
+                        <a:t>跨光谱配准</a:t>
+                      </a:r>
+                    </a:p>
+                  </a:txBody>
+                  <a:tcPr anchor="ctr"/>
+                </a:tc>
+                <a:tc>
+                  <a:txBody>
+                    <a:bodyPr/>
+                    <a:lstStyle/>
+                    <a:p>
+                      <a:pPr algn="ctr">
+                        <a:defRPr sz="1200" b="0">
+                          <a:solidFill>
+                            <a:srgbClr val="000000"/>
+                          </a:solidFill>
+                          <a:latin typeface="Times New Roman"/>
+                        </a:defRPr>
+                      </a:pPr>
+                      <a:r>
+                        <a:t>引导式超分辨率</a:t>
+                      </a:r>
+                    </a:p>
+                  </a:txBody>
+                  <a:tcPr anchor="ctr"/>
+                </a:tc>
               </a:tr>
-              <a:tr h="594360">
-                <a:tc>
-                  <a:txBody>
-                    <a:bodyPr/>
-                    <a:lstStyle/>
-                    <a:p>
-                      <a:pPr algn="ctr">
-                        <a:defRPr sz="1400" b="0">
+              <a:tr h="566928">
+                <a:tc>
+                  <a:txBody>
+                    <a:bodyPr/>
+                    <a:lstStyle/>
+                    <a:p>
+                      <a:pPr algn="ctr">
+                        <a:defRPr sz="1200" b="0">
                           <a:solidFill>
                             <a:srgbClr val="000000"/>
                           </a:solidFill>
@@ -7178,15 +8677,28 @@
                     <a:lstStyle/>
                     <a:p>
                       <a:pPr algn="ctr">
-                        <a:defRPr sz="1400" b="0">
-                          <a:solidFill>
-                            <a:srgbClr val="000000"/>
-                          </a:solidFill>
-                          <a:latin typeface="Times New Roman"/>
-                        </a:defRPr>
-                      </a:pPr>
-                      <a:r>
-                        <a:t>红外热成像 (灰度)</a:t>
+                        <a:defRPr sz="1200" b="0">
+                          <a:solidFill>
+                            <a:srgbClr val="000000"/>
+                          </a:solidFill>
+                          <a:latin typeface="Times New Roman"/>
+                        </a:defRPr>
+                      </a:pPr>
+                      <a:r>
+                        <a:t>红外热成像</a:t>
+                      </a:r>
+                    </a:p>
+                    <a:p>
+                      <a:pPr algn="ctr">
+                        <a:defRPr sz="1200" b="0">
+                          <a:solidFill>
+                            <a:srgbClr val="000000"/>
+                          </a:solidFill>
+                          <a:latin typeface="Times New Roman"/>
+                        </a:defRPr>
+                      </a:pPr>
+                      <a:r>
+                        <a:t>(灰度)</a:t>
                       </a:r>
                     </a:p>
                   </a:txBody>
@@ -7198,15 +8710,28 @@
                     <a:lstStyle/>
                     <a:p>
                       <a:pPr algn="ctr">
-                        <a:defRPr sz="1400" b="0">
-                          <a:solidFill>
-                            <a:srgbClr val="000000"/>
-                          </a:solidFill>
-                          <a:latin typeface="Times New Roman"/>
-                        </a:defRPr>
-                      </a:pPr>
-                      <a:r>
-                        <a:t>可见光 + 红外 (双模态)</a:t>
+                        <a:defRPr sz="1200" b="0">
+                          <a:solidFill>
+                            <a:srgbClr val="000000"/>
+                          </a:solidFill>
+                          <a:latin typeface="Times New Roman"/>
+                        </a:defRPr>
+                      </a:pPr>
+                      <a:r>
+                        <a:t>RGB + IR</a:t>
+                      </a:r>
+                    </a:p>
+                    <a:p>
+                      <a:pPr algn="ctr">
+                        <a:defRPr sz="1200" b="0">
+                          <a:solidFill>
+                            <a:srgbClr val="000000"/>
+                          </a:solidFill>
+                          <a:latin typeface="Times New Roman"/>
+                        </a:defRPr>
+                      </a:pPr>
+                      <a:r>
+                        <a:t>(双模态)</a:t>
                       </a:r>
                     </a:p>
                   </a:txBody>
@@ -7218,34 +8743,108 @@
                     <a:lstStyle/>
                     <a:p>
                       <a:pPr algn="ctr">
-                        <a:defRPr sz="1400" b="0">
-                          <a:solidFill>
-                            <a:srgbClr val="000000"/>
-                          </a:solidFill>
-                          <a:latin typeface="Times New Roman"/>
-                        </a:defRPr>
-                      </a:pPr>
-                      <a:r>
-                        <a:t>Landsat-8 + Sentinel-2 多光谱</a:t>
+                        <a:defRPr sz="1200" b="0">
+                          <a:solidFill>
+                            <a:srgbClr val="000000"/>
+                          </a:solidFill>
+                          <a:latin typeface="Times New Roman"/>
+                        </a:defRPr>
+                      </a:pPr>
+                      <a:r>
+                        <a:t>L8 + S2</a:t>
+                      </a:r>
+                    </a:p>
+                    <a:p>
+                      <a:pPr algn="ctr">
+                        <a:defRPr sz="1200" b="0">
+                          <a:solidFill>
+                            <a:srgbClr val="000000"/>
+                          </a:solidFill>
+                          <a:latin typeface="Times New Roman"/>
+                        </a:defRPr>
+                      </a:pPr>
+                      <a:r>
+                        <a:t>多光谱</a:t>
                       </a:r>
                     </a:p>
                   </a:txBody>
                   <a:tcPr anchor="ctr"/>
                 </a:tc>
-                <a:extLst>
-                  <a:ext uri="{0D108BD9-81ED-4DB2-BD59-A6C34878D82A}">
-                    <a16:rowId xmlns:a16="http://schemas.microsoft.com/office/drawing/2014/main" val="10002"/>
-                  </a:ext>
-                </a:extLst>
+                <a:tc>
+                  <a:txBody>
+                    <a:bodyPr/>
+                    <a:lstStyle/>
+                    <a:p>
+                      <a:pPr algn="ctr">
+                        <a:defRPr sz="1200" b="0">
+                          <a:solidFill>
+                            <a:srgbClr val="000000"/>
+                          </a:solidFill>
+                          <a:latin typeface="Times New Roman"/>
+                        </a:defRPr>
+                      </a:pPr>
+                      <a:r>
+                        <a:t>热红外 +</a:t>
+                      </a:r>
+                    </a:p>
+                    <a:p>
+                      <a:pPr algn="ctr">
+                        <a:defRPr sz="1200" b="0">
+                          <a:solidFill>
+                            <a:srgbClr val="000000"/>
+                          </a:solidFill>
+                          <a:latin typeface="Times New Roman"/>
+                        </a:defRPr>
+                      </a:pPr>
+                      <a:r>
+                        <a:t>可见光</a:t>
+                      </a:r>
+                    </a:p>
+                  </a:txBody>
+                  <a:tcPr anchor="ctr"/>
+                </a:tc>
+                <a:tc>
+                  <a:txBody>
+                    <a:bodyPr/>
+                    <a:lstStyle/>
+                    <a:p>
+                      <a:pPr algn="ctr">
+                        <a:defRPr sz="1200" b="0">
+                          <a:solidFill>
+                            <a:srgbClr val="000000"/>
+                          </a:solidFill>
+                          <a:latin typeface="Times New Roman"/>
+                        </a:defRPr>
+                      </a:pPr>
+                      <a:r>
+                        <a:t>热红外 +</a:t>
+                      </a:r>
+                    </a:p>
+                    <a:p>
+                      <a:pPr algn="ctr">
+                        <a:defRPr sz="1200" b="0">
+                          <a:solidFill>
+                            <a:srgbClr val="000000"/>
+                          </a:solidFill>
+                          <a:latin typeface="Times New Roman"/>
+                        </a:defRPr>
+                      </a:pPr>
+                      <a:r>
+                        <a:t>可见光引导</a:t>
+                      </a:r>
+                    </a:p>
+                  </a:txBody>
+                  <a:tcPr anchor="ctr"/>
+                </a:tc>
               </a:tr>
-              <a:tr h="594360">
-                <a:tc>
-                  <a:txBody>
-                    <a:bodyPr/>
-                    <a:lstStyle/>
-                    <a:p>
-                      <a:pPr algn="ctr">
-                        <a:defRPr sz="1400" b="0">
+              <a:tr h="566928">
+                <a:tc>
+                  <a:txBody>
+                    <a:bodyPr/>
+                    <a:lstStyle/>
+                    <a:p>
+                      <a:pPr algn="ctr">
+                        <a:defRPr sz="1200" b="0">
                           <a:solidFill>
                             <a:srgbClr val="000000"/>
                           </a:solidFill>
@@ -7265,7 +8864,7 @@
                     <a:lstStyle/>
                     <a:p>
                       <a:pPr algn="ctr">
-                        <a:defRPr sz="1400" b="0">
+                        <a:defRPr sz="1200" b="0">
                           <a:solidFill>
                             <a:srgbClr val="000000"/>
                           </a:solidFill>
@@ -7278,15 +8877,15 @@
                     </a:p>
                     <a:p>
                       <a:pPr algn="ctr">
-                        <a:defRPr sz="1400" b="0">
-                          <a:solidFill>
-                            <a:srgbClr val="000000"/>
-                          </a:solidFill>
-                          <a:latin typeface="Times New Roman"/>
-                        </a:defRPr>
-                      </a:pPr>
-                      <a:r>
-                        <a:t>LR×4 160×128</a:t>
+                        <a:defRPr sz="1200" b="0">
+                          <a:solidFill>
+                            <a:srgbClr val="000000"/>
+                          </a:solidFill>
+                          <a:latin typeface="Times New Roman"/>
+                        </a:defRPr>
+                      </a:pPr>
+                      <a:r>
+                        <a:t>LR 160×128</a:t>
                       </a:r>
                     </a:p>
                   </a:txBody>
@@ -7298,15 +8897,15 @@
                     <a:lstStyle/>
                     <a:p>
                       <a:pPr algn="ctr">
-                        <a:defRPr sz="1400" b="0">
-                          <a:solidFill>
-                            <a:srgbClr val="000000"/>
-                          </a:solidFill>
-                          <a:latin typeface="Times New Roman"/>
-                        </a:defRPr>
-                      </a:pPr>
-                      <a:r>
-                        <a:t>512×512 / 1024×1024</a:t>
+                        <a:defRPr sz="1200" b="0">
+                          <a:solidFill>
+                            <a:srgbClr val="000000"/>
+                          </a:solidFill>
+                          <a:latin typeface="Times New Roman"/>
+                        </a:defRPr>
+                      </a:pPr>
+                      <a:r>
+                        <a:t>512 / 1024</a:t>
                       </a:r>
                     </a:p>
                   </a:txBody>
@@ -7318,34 +8917,95 @@
                     <a:lstStyle/>
                     <a:p>
                       <a:pPr algn="ctr">
-                        <a:defRPr sz="1400" b="0">
-                          <a:solidFill>
-                            <a:srgbClr val="000000"/>
-                          </a:solidFill>
-                          <a:latin typeface="Times New Roman"/>
-                        </a:defRPr>
-                      </a:pPr>
-                      <a:r>
-                        <a:t>LR 30m → HR 10m</a:t>
+                        <a:defRPr sz="1200" b="0">
+                          <a:solidFill>
+                            <a:srgbClr val="000000"/>
+                          </a:solidFill>
+                          <a:latin typeface="Times New Roman"/>
+                        </a:defRPr>
+                      </a:pPr>
+                      <a:r>
+                        <a:t>LR 30m</a:t>
+                      </a:r>
+                    </a:p>
+                    <a:p>
+                      <a:pPr algn="ctr">
+                        <a:defRPr sz="1200" b="0">
+                          <a:solidFill>
+                            <a:srgbClr val="000000"/>
+                          </a:solidFill>
+                          <a:latin typeface="Times New Roman"/>
+                        </a:defRPr>
+                      </a:pPr>
+                      <a:r>
+                        <a:t>HR 10m</a:t>
                       </a:r>
                     </a:p>
                   </a:txBody>
                   <a:tcPr anchor="ctr"/>
                 </a:tc>
-                <a:extLst>
-                  <a:ext uri="{0D108BD9-81ED-4DB2-BD59-A6C34878D82A}">
-                    <a16:rowId xmlns:a16="http://schemas.microsoft.com/office/drawing/2014/main" val="10003"/>
-                  </a:ext>
-                </a:extLst>
+                <a:tc>
+                  <a:txBody>
+                    <a:bodyPr/>
+                    <a:lstStyle/>
+                    <a:p>
+                      <a:pPr algn="ctr">
+                        <a:defRPr sz="1200" b="0">
+                          <a:solidFill>
+                            <a:srgbClr val="000000"/>
+                          </a:solidFill>
+                          <a:latin typeface="Times New Roman"/>
+                        </a:defRPr>
+                      </a:pPr>
+                      <a:r>
+                        <a:t>640×448</a:t>
+                      </a:r>
+                    </a:p>
+                  </a:txBody>
+                  <a:tcPr anchor="ctr"/>
+                </a:tc>
+                <a:tc>
+                  <a:txBody>
+                    <a:bodyPr/>
+                    <a:lstStyle/>
+                    <a:p>
+                      <a:pPr algn="ctr">
+                        <a:defRPr sz="1200" b="0">
+                          <a:solidFill>
+                            <a:srgbClr val="000000"/>
+                          </a:solidFill>
+                          <a:latin typeface="Times New Roman"/>
+                        </a:defRPr>
+                      </a:pPr>
+                      <a:r>
+                        <a:t>GT 640×448</a:t>
+                      </a:r>
+                    </a:p>
+                    <a:p>
+                      <a:pPr algn="ctr">
+                        <a:defRPr sz="1200" b="0">
+                          <a:solidFill>
+                            <a:srgbClr val="000000"/>
+                          </a:solidFill>
+                          <a:latin typeface="Times New Roman"/>
+                        </a:defRPr>
+                      </a:pPr>
+                      <a:r>
+                        <a:t>LR×16 40×28</a:t>
+                      </a:r>
+                    </a:p>
+                  </a:txBody>
+                  <a:tcPr anchor="ctr"/>
+                </a:tc>
               </a:tr>
-              <a:tr h="594360">
-                <a:tc>
-                  <a:txBody>
-                    <a:bodyPr/>
-                    <a:lstStyle/>
-                    <a:p>
-                      <a:pPr algn="ctr">
-                        <a:defRPr sz="1400" b="0">
+              <a:tr h="566928">
+                <a:tc>
+                  <a:txBody>
+                    <a:bodyPr/>
+                    <a:lstStyle/>
+                    <a:p>
+                      <a:pPr algn="ctr">
+                        <a:defRPr sz="1200" b="0">
                           <a:solidFill>
                             <a:srgbClr val="000000"/>
                           </a:solidFill>
@@ -7365,7 +9025,7 @@
                     <a:lstStyle/>
                     <a:p>
                       <a:pPr algn="ctr">
-                        <a:defRPr sz="1400" b="0">
+                        <a:defRPr sz="1200" b="0">
                           <a:solidFill>
                             <a:srgbClr val="000000"/>
                           </a:solidFill>
@@ -7385,15 +9045,15 @@
                     <a:lstStyle/>
                     <a:p>
                       <a:pPr algn="ctr">
-                        <a:defRPr sz="1400" b="0">
-                          <a:solidFill>
-                            <a:srgbClr val="000000"/>
-                          </a:solidFill>
-                          <a:latin typeface="Times New Roman"/>
-                        </a:defRPr>
-                      </a:pPr>
-                      <a:r>
-                        <a:t>PNG + TXT (YOLO)</a:t>
+                        <a:defRPr sz="1200" b="0">
+                          <a:solidFill>
+                            <a:srgbClr val="000000"/>
+                          </a:solidFill>
+                          <a:latin typeface="Times New Roman"/>
+                        </a:defRPr>
+                      </a:pPr>
+                      <a:r>
+                        <a:t>PNG + TXT</a:t>
                       </a:r>
                     </a:p>
                   </a:txBody>
@@ -7405,7 +9065,7 @@
                     <a:lstStyle/>
                     <a:p>
                       <a:pPr algn="ctr">
-                        <a:defRPr sz="1400" b="0">
+                        <a:defRPr sz="1200" b="0">
                           <a:solidFill>
                             <a:srgbClr val="000000"/>
                           </a:solidFill>
@@ -7419,20 +9079,55 @@
                   </a:txBody>
                   <a:tcPr anchor="ctr"/>
                 </a:tc>
-                <a:extLst>
-                  <a:ext uri="{0D108BD9-81ED-4DB2-BD59-A6C34878D82A}">
-                    <a16:rowId xmlns:a16="http://schemas.microsoft.com/office/drawing/2014/main" val="10004"/>
-                  </a:ext>
-                </a:extLst>
+                <a:tc>
+                  <a:txBody>
+                    <a:bodyPr/>
+                    <a:lstStyle/>
+                    <a:p>
+                      <a:pPr algn="ctr">
+                        <a:defRPr sz="1200" b="0">
+                          <a:solidFill>
+                            <a:srgbClr val="000000"/>
+                          </a:solidFill>
+                          <a:latin typeface="Times New Roman"/>
+                        </a:defRPr>
+                      </a:pPr>
+                      <a:r>
+                        <a:t>图像文件</a:t>
+                      </a:r>
+                    </a:p>
+                  </a:txBody>
+                  <a:tcPr anchor="ctr"/>
+                </a:tc>
+                <a:tc>
+                  <a:txBody>
+                    <a:bodyPr/>
+                    <a:lstStyle/>
+                    <a:p>
+                      <a:pPr algn="ctr">
+                        <a:defRPr sz="1200" b="0">
+                          <a:solidFill>
+                            <a:srgbClr val="000000"/>
+                          </a:solidFill>
+                          <a:latin typeface="Times New Roman"/>
+                        </a:defRPr>
+                      </a:pPr>
+                      <a:r>
+                        <a:t>图像文件</a:t>
+                      </a:r>
+                    </a:p>
+                  </a:txBody>
+                  <a:tcPr anchor="ctr"/>
+                </a:tc>
               </a:tr>
-              <a:tr h="594360">
-                <a:tc>
-                  <a:txBody>
-                    <a:bodyPr/>
-                    <a:lstStyle/>
-                    <a:p>
-                      <a:pPr algn="ctr">
-                        <a:defRPr sz="1400" b="0">
+              <a:tr h="566928">
+                <a:tc>
+                  <a:txBody>
+                    <a:bodyPr/>
+                    <a:lstStyle/>
+                    <a:p>
+                      <a:pPr algn="ctr">
+                        <a:defRPr sz="1200" b="0">
                           <a:solidFill>
                             <a:srgbClr val="000000"/>
                           </a:solidFill>
@@ -7452,15 +9147,15 @@
                     <a:lstStyle/>
                     <a:p>
                       <a:pPr algn="ctr">
-                        <a:defRPr sz="1400" b="0">
-                          <a:solidFill>
-                            <a:srgbClr val="000000"/>
-                          </a:solidFill>
-                          <a:latin typeface="Times New Roman"/>
-                        </a:defRPr>
-                      </a:pPr>
-                      <a:r>
-                        <a:t>7,121 对图像</a:t>
+                        <a:defRPr sz="1200" b="0">
+                          <a:solidFill>
+                            <a:srgbClr val="000000"/>
+                          </a:solidFill>
+                          <a:latin typeface="Times New Roman"/>
+                        </a:defRPr>
+                      </a:pPr>
+                      <a:r>
+                        <a:t>7,121 对</a:t>
                       </a:r>
                     </a:p>
                   </a:txBody>
@@ -7472,15 +9167,28 @@
                     <a:lstStyle/>
                     <a:p>
                       <a:pPr algn="ctr">
-                        <a:defRPr sz="1400" b="0">
-                          <a:solidFill>
-                            <a:srgbClr val="000000"/>
-                          </a:solidFill>
-                          <a:latin typeface="Times New Roman"/>
-                        </a:defRPr>
-                      </a:pPr>
-                      <a:r>
-                        <a:t>1,246 张图 + 3,706 框</a:t>
+                        <a:defRPr sz="1200" b="0">
+                          <a:solidFill>
+                            <a:srgbClr val="000000"/>
+                          </a:solidFill>
+                          <a:latin typeface="Times New Roman"/>
+                        </a:defRPr>
+                      </a:pPr>
+                      <a:r>
+                        <a:t>1,246 张</a:t>
+                      </a:r>
+                    </a:p>
+                    <a:p>
+                      <a:pPr algn="ctr">
+                        <a:defRPr sz="1200" b="0">
+                          <a:solidFill>
+                            <a:srgbClr val="000000"/>
+                          </a:solidFill>
+                          <a:latin typeface="Times New Roman"/>
+                        </a:defRPr>
+                      </a:pPr>
+                      <a:r>
+                        <a:t>3,706 框</a:t>
                       </a:r>
                     </a:p>
                   </a:txBody>
@@ -7492,34 +9200,69 @@
                     <a:lstStyle/>
                     <a:p>
                       <a:pPr algn="ctr">
-                        <a:defRPr sz="1400" b="0">
-                          <a:solidFill>
-                            <a:srgbClr val="000000"/>
-                          </a:solidFill>
-                          <a:latin typeface="Times New Roman"/>
-                        </a:defRPr>
-                      </a:pPr>
-                      <a:r>
-                        <a:t>5,325 对图像块</a:t>
+                        <a:defRPr sz="1200" b="0">
+                          <a:solidFill>
+                            <a:srgbClr val="000000"/>
+                          </a:solidFill>
+                          <a:latin typeface="Times New Roman"/>
+                        </a:defRPr>
+                      </a:pPr>
+                      <a:r>
+                        <a:t>5,325 对</a:t>
                       </a:r>
                     </a:p>
                   </a:txBody>
                   <a:tcPr anchor="ctr"/>
                 </a:tc>
-                <a:extLst>
-                  <a:ext uri="{0D108BD9-81ED-4DB2-BD59-A6C34878D82A}">
-                    <a16:rowId xmlns:a16="http://schemas.microsoft.com/office/drawing/2014/main" val="10005"/>
-                  </a:ext>
-                </a:extLst>
+                <a:tc>
+                  <a:txBody>
+                    <a:bodyPr/>
+                    <a:lstStyle/>
+                    <a:p>
+                      <a:pPr algn="ctr">
+                        <a:defRPr sz="1200" b="0">
+                          <a:solidFill>
+                            <a:srgbClr val="000000"/>
+                          </a:solidFill>
+                          <a:latin typeface="Times New Roman"/>
+                        </a:defRPr>
+                      </a:pPr>
+                      <a:r>
+                        <a:t>1,000 对</a:t>
+                      </a:r>
+                    </a:p>
+                  </a:txBody>
+                  <a:tcPr anchor="ctr"/>
+                </a:tc>
+                <a:tc>
+                  <a:txBody>
+                    <a:bodyPr/>
+                    <a:lstStyle/>
+                    <a:p>
+                      <a:pPr algn="ctr">
+                        <a:defRPr sz="1200" b="0">
+                          <a:solidFill>
+                            <a:srgbClr val="000000"/>
+                          </a:solidFill>
+                          <a:latin typeface="Times New Roman"/>
+                        </a:defRPr>
+                      </a:pPr>
+                      <a:r>
+                        <a:t>700+200+40</a:t>
+                      </a:r>
+                    </a:p>
+                  </a:txBody>
+                  <a:tcPr anchor="ctr"/>
+                </a:tc>
               </a:tr>
-              <a:tr h="594360">
-                <a:tc>
-                  <a:txBody>
-                    <a:bodyPr/>
-                    <a:lstStyle/>
-                    <a:p>
-                      <a:pPr algn="ctr">
-                        <a:defRPr sz="1400" b="0">
+              <a:tr h="566928">
+                <a:tc>
+                  <a:txBody>
+                    <a:bodyPr/>
+                    <a:lstStyle/>
+                    <a:p>
+                      <a:pPr algn="ctr">
+                        <a:defRPr sz="1200" b="0">
                           <a:solidFill>
                             <a:srgbClr val="000000"/>
                           </a:solidFill>
@@ -7545,15 +9288,15 @@
                     <a:lstStyle/>
                     <a:p>
                       <a:pPr algn="ctr">
-                        <a:defRPr sz="1400" b="0">
-                          <a:solidFill>
-                            <a:srgbClr val="000000"/>
-                          </a:solidFill>
-                          <a:latin typeface="Times New Roman"/>
-                        </a:defRPr>
-                      </a:pPr>
-                      <a:r>
-                        <a:t>预划分 train/val/test</a:t>
+                        <a:defRPr sz="1200" b="0">
+                          <a:solidFill>
+                            <a:srgbClr val="000000"/>
+                          </a:solidFill>
+                          <a:latin typeface="Times New Roman"/>
+                        </a:defRPr>
+                      </a:pPr>
+                      <a:r>
+                        <a:t>train/val/test</a:t>
                       </a:r>
                     </a:p>
                   </a:txBody>
@@ -7571,15 +9314,15 @@
                     <a:lstStyle/>
                     <a:p>
                       <a:pPr algn="ctr">
-                        <a:defRPr sz="1400" b="0">
-                          <a:solidFill>
-                            <a:srgbClr val="000000"/>
-                          </a:solidFill>
-                          <a:latin typeface="Times New Roman"/>
-                        </a:defRPr>
-                      </a:pPr>
-                      <a:r>
-                        <a:t>5 折交叉验证</a:t>
+                        <a:defRPr sz="1200" b="0">
+                          <a:solidFill>
+                            <a:srgbClr val="000000"/>
+                          </a:solidFill>
+                          <a:latin typeface="Times New Roman"/>
+                        </a:defRPr>
+                      </a:pPr>
+                      <a:r>
+                        <a:t>5 折 CV</a:t>
                       </a:r>
                     </a:p>
                   </a:txBody>
@@ -7597,15 +9340,15 @@
                     <a:lstStyle/>
                     <a:p>
                       <a:pPr algn="ctr">
-                        <a:defRPr sz="1400" b="0">
-                          <a:solidFill>
-                            <a:srgbClr val="000000"/>
-                          </a:solidFill>
-                          <a:latin typeface="Times New Roman"/>
-                        </a:defRPr>
-                      </a:pPr>
-                      <a:r>
-                        <a:t>预划分 train/test</a:t>
+                        <a:defRPr sz="1200" b="0">
+                          <a:solidFill>
+                            <a:srgbClr val="000000"/>
+                          </a:solidFill>
+                          <a:latin typeface="Times New Roman"/>
+                        </a:defRPr>
+                      </a:pPr>
+                      <a:r>
+                        <a:t>train/test</a:t>
                       </a:r>
                     </a:p>
                   </a:txBody>
@@ -7617,11 +9360,58 @@
                     </a:lnB>
                   </a:tcPr>
                 </a:tc>
-                <a:extLst>
-                  <a:ext uri="{0D108BD9-81ED-4DB2-BD59-A6C34878D82A}">
-                    <a16:rowId xmlns:a16="http://schemas.microsoft.com/office/drawing/2014/main" val="10006"/>
-                  </a:ext>
-                </a:extLst>
+                <a:tc>
+                  <a:txBody>
+                    <a:bodyPr/>
+                    <a:lstStyle/>
+                    <a:p>
+                      <a:pPr algn="ctr">
+                        <a:defRPr sz="1200" b="0">
+                          <a:solidFill>
+                            <a:srgbClr val="000000"/>
+                          </a:solidFill>
+                          <a:latin typeface="Times New Roman"/>
+                        </a:defRPr>
+                      </a:pPr>
+                      <a:r>
+                        <a:t>train/val/test</a:t>
+                      </a:r>
+                    </a:p>
+                  </a:txBody>
+                  <a:tcPr anchor="ctr">
+                    <a:lnB w="19000">
+                      <a:solidFill>
+                        <a:srgbClr val="000000"/>
+                      </a:solidFill>
+                    </a:lnB>
+                  </a:tcPr>
+                </a:tc>
+                <a:tc>
+                  <a:txBody>
+                    <a:bodyPr/>
+                    <a:lstStyle/>
+                    <a:p>
+                      <a:pPr algn="ctr">
+                        <a:defRPr sz="1200" b="0">
+                          <a:solidFill>
+                            <a:srgbClr val="000000"/>
+                          </a:solidFill>
+                          <a:latin typeface="Times New Roman"/>
+                        </a:defRPr>
+                      </a:pPr>
+                      <a:r>
+                        <a:t>train/val/test</a:t>
+                      </a:r>
+                    </a:p>
+                  </a:txBody>
+                  <a:tcPr anchor="ctr">
+                    <a:lnB w="19000">
+                      <a:solidFill>
+                        <a:srgbClr val="000000"/>
+                      </a:solidFill>
+                    </a:lnB>
+                  </a:tcPr>
+                </a:tc>
               </a:tr>
             </a:tbl>
           </a:graphicData>
@@ -7661,7 +9451,7 @@
               </a:defRPr>
             </a:pPr>
             <a:r>
-              <a:t>三个数据集覆盖了红外遥感领域从像素级重建、目标检测到跨传感器增强的完整任务链。</a:t>
+              <a:t>五个数据集覆盖了红外遥感领域从像素级重建、目标检测、跨传感器增强、跨光谱配准到引导式超分的完整任务链。</a:t>
             </a:r>
           </a:p>
         </p:txBody>

--- a/ppts/InfraredSR_Datasets_Overview.pptx
+++ b/ppts/InfraredSR_Datasets_Overview.pptx
@@ -3111,8 +3111,8 @@
         </p:nvSpPr>
         <p:spPr>
           <a:xfrm>
-            <a:off x="548640" y="2560320"/>
-            <a:ext cx="10972800" cy="640080"/>
+            <a:off x="822960" y="2377440"/>
+            <a:ext cx="10515600" cy="594360"/>
           </a:xfrm>
           <a:prstGeom prst="rect">
             <a:avLst/>
@@ -3126,7 +3126,7 @@
           <a:lstStyle/>
           <a:p>
             <a:pPr>
-              <a:defRPr sz="3000" b="1">
+              <a:defRPr sz="2800" b="1">
                 <a:solidFill>
                   <a:srgbClr val="000000"/>
                 </a:solidFill>
@@ -3147,8 +3147,8 @@
         </p:nvSpPr>
         <p:spPr>
           <a:xfrm>
-            <a:off x="548640" y="3840480"/>
-            <a:ext cx="10972800" cy="914400"/>
+            <a:off x="822960" y="3657600"/>
+            <a:ext cx="10515600" cy="1097280"/>
           </a:xfrm>
           <a:prstGeom prst="rect">
             <a:avLst/>
@@ -3163,33 +3163,33 @@
           <a:p>
             <a:pPr>
               <a:spcAft>
-                <a:spcPts val="600"/>
+                <a:spcPts val="400"/>
               </a:spcAft>
               <a:defRPr sz="1800">
                 <a:solidFill>
-                  <a:srgbClr val="444444"/>
+                  <a:srgbClr val="555555"/>
                 </a:solidFill>
                 <a:latin typeface="Times New Roman"/>
               </a:defRPr>
             </a:pPr>
             <a:r>
-              <a:t>红外遥感方向五个数据集：超分辨率重建、航拍车辆检测、</a:t>
+              <a:t>红外遥感方向五个数据集</a:t>
             </a:r>
           </a:p>
           <a:p>
             <a:pPr>
               <a:spcAft>
-                <a:spcPts val="600"/>
+                <a:spcPts val="400"/>
               </a:spcAft>
               <a:defRPr sz="1800">
                 <a:solidFill>
-                  <a:srgbClr val="444444"/>
+                  <a:srgbClr val="555555"/>
                 </a:solidFill>
                 <a:latin typeface="Times New Roman"/>
               </a:defRPr>
             </a:pPr>
             <a:r>
-              <a:t>跨传感器图像翻译、跨光谱配准与可见光引导超分</a:t>
+              <a:t>超分辨率重建 · 航拍车辆检测 · 跨传感器图像翻译 · 跨光谱配准 · 可见光引导超分</a:t>
             </a:r>
           </a:p>
         </p:txBody>
@@ -3228,8 +3228,8 @@
         </p:nvSpPr>
         <p:spPr>
           <a:xfrm>
-            <a:off x="548640" y="320040"/>
-            <a:ext cx="10972800" cy="640080"/>
+            <a:off x="822960" y="274320"/>
+            <a:ext cx="10515600" cy="594360"/>
           </a:xfrm>
           <a:prstGeom prst="rect">
             <a:avLst/>
@@ -3243,7 +3243,7 @@
           <a:lstStyle/>
           <a:p>
             <a:pPr>
-              <a:defRPr sz="3000" b="1">
+              <a:defRPr sz="2800" b="1">
                 <a:solidFill>
                   <a:srgbClr val="000000"/>
                 </a:solidFill>
@@ -3265,8 +3265,8 @@
           <p:nvPr/>
         </p:nvGraphicFramePr>
         <p:xfrm>
-          <a:off x="365760" y="1371600"/>
-          <a:ext cx="10424160" cy="4828032"/>
+          <a:off x="822960.0" y="1188720"/>
+          <a:ext cx="10515600" cy="4498848"/>
         </p:xfrm>
         <a:graphic>
           <a:graphicData uri="http://schemas.openxmlformats.org/drawingml/2006/table">
@@ -3275,20 +3275,20 @@
                 <a:tableStyleId>{5C22544A-7EE6-4342-B048-85BDC9FD1C3A}</a:tableStyleId>
               </a:tblPr>
               <a:tblGrid>
-                <a:gridCol w="1554480"/>
-                <a:gridCol w="2103120"/>
-                <a:gridCol w="2103120"/>
-                <a:gridCol w="2560320"/>
-                <a:gridCol w="2103120"/>
+                <a:gridCol w="1463040"/>
+                <a:gridCol w="2194560"/>
+                <a:gridCol w="2011680"/>
+                <a:gridCol w="2377440"/>
+                <a:gridCol w="2468880"/>
               </a:tblGrid>
-              <a:tr h="804672">
-                <a:tc>
-                  <a:txBody>
-                    <a:bodyPr/>
-                    <a:lstStyle/>
-                    <a:p>
-                      <a:pPr algn="ctr">
-                        <a:defRPr sz="1300" b="1">
+              <a:tr h="749808">
+                <a:tc>
+                  <a:txBody>
+                    <a:bodyPr/>
+                    <a:lstStyle/>
+                    <a:p>
+                      <a:pPr algn="ctr">
+                        <a:defRPr sz="1200" b="1">
                           <a:solidFill>
                             <a:srgbClr val="000000"/>
                           </a:solidFill>
@@ -3319,7 +3319,7 @@
                     <a:lstStyle/>
                     <a:p>
                       <a:pPr algn="ctr">
-                        <a:defRPr sz="1300" b="1">
+                        <a:defRPr sz="1200" b="1">
                           <a:solidFill>
                             <a:srgbClr val="000000"/>
                           </a:solidFill>
@@ -3350,7 +3350,7 @@
                     <a:lstStyle/>
                     <a:p>
                       <a:pPr algn="ctr">
-                        <a:defRPr sz="1300" b="1">
+                        <a:defRPr sz="1200" b="1">
                           <a:solidFill>
                             <a:srgbClr val="000000"/>
                           </a:solidFill>
@@ -3381,7 +3381,7 @@
                     <a:lstStyle/>
                     <a:p>
                       <a:pPr algn="ctr">
-                        <a:defRPr sz="1300" b="1">
+                        <a:defRPr sz="1200" b="1">
                           <a:solidFill>
                             <a:srgbClr val="000000"/>
                           </a:solidFill>
@@ -3412,7 +3412,7 @@
                     <a:lstStyle/>
                     <a:p>
                       <a:pPr algn="ctr">
-                        <a:defRPr sz="1300" b="1">
+                        <a:defRPr sz="1200" b="1">
                           <a:solidFill>
                             <a:srgbClr val="000000"/>
                           </a:solidFill>
@@ -3438,14 +3438,14 @@
                   </a:tcPr>
                 </a:tc>
               </a:tr>
-              <a:tr h="804672">
-                <a:tc>
-                  <a:txBody>
-                    <a:bodyPr/>
-                    <a:lstStyle/>
-                    <a:p>
-                      <a:pPr algn="ctr">
-                        <a:defRPr sz="1300" b="0">
+              <a:tr h="749808">
+                <a:tc>
+                  <a:txBody>
+                    <a:bodyPr/>
+                    <a:lstStyle/>
+                    <a:p>
+                      <a:pPr algn="ctr">
+                        <a:defRPr sz="1200" b="0">
                           <a:solidFill>
                             <a:srgbClr val="000000"/>
                           </a:solidFill>
@@ -3465,28 +3465,15 @@
                     <a:lstStyle/>
                     <a:p>
                       <a:pPr algn="ctr">
-                        <a:defRPr sz="1300" b="0">
-                          <a:solidFill>
-                            <a:srgbClr val="000000"/>
-                          </a:solidFill>
-                          <a:latin typeface="Times New Roman"/>
-                        </a:defRPr>
-                      </a:pPr>
-                      <a:r>
-                        <a:t>红外图像超分辨率</a:t>
-                      </a:r>
-                    </a:p>
-                    <a:p>
-                      <a:pPr algn="ctr">
-                        <a:defRPr sz="1300" b="0">
-                          <a:solidFill>
-                            <a:srgbClr val="000000"/>
-                          </a:solidFill>
-                          <a:latin typeface="Times New Roman"/>
-                        </a:defRPr>
-                      </a:pPr>
-                      <a:r>
-                        <a:t>(×2, ×4)</a:t>
+                        <a:defRPr sz="1200" b="0">
+                          <a:solidFill>
+                            <a:srgbClr val="000000"/>
+                          </a:solidFill>
+                          <a:latin typeface="Times New Roman"/>
+                        </a:defRPr>
+                      </a:pPr>
+                      <a:r>
+                        <a:t>红外图像超分辨率 (×2, ×4)</a:t>
                       </a:r>
                     </a:p>
                   </a:txBody>
@@ -3498,7 +3485,7 @@
                     <a:lstStyle/>
                     <a:p>
                       <a:pPr algn="ctr">
-                        <a:defRPr sz="1300" b="0">
+                        <a:defRPr sz="1200" b="0">
                           <a:solidFill>
                             <a:srgbClr val="000000"/>
                           </a:solidFill>
@@ -3511,7 +3498,7 @@
                     </a:p>
                     <a:p>
                       <a:pPr algn="ctr">
-                        <a:defRPr sz="1300" b="0">
+                        <a:defRPr sz="1200" b="0">
                           <a:solidFill>
                             <a:srgbClr val="000000"/>
                           </a:solidFill>
@@ -3531,7 +3518,7 @@
                     <a:lstStyle/>
                     <a:p>
                       <a:pPr algn="ctr">
-                        <a:defRPr sz="1300" b="0">
+                        <a:defRPr sz="1200" b="0">
                           <a:solidFill>
                             <a:srgbClr val="000000"/>
                           </a:solidFill>
@@ -3544,7 +3531,7 @@
                     </a:p>
                     <a:p>
                       <a:pPr algn="ctr">
-                        <a:defRPr sz="1300" b="0">
+                        <a:defRPr sz="1200" b="0">
                           <a:solidFill>
                             <a:srgbClr val="000000"/>
                           </a:solidFill>
@@ -3564,7 +3551,7 @@
                     <a:lstStyle/>
                     <a:p>
                       <a:pPr algn="ctr">
-                        <a:defRPr sz="1300" b="0">
+                        <a:defRPr sz="1200" b="0">
                           <a:solidFill>
                             <a:srgbClr val="000000"/>
                           </a:solidFill>
@@ -3577,55 +3564,29 @@
                     </a:p>
                     <a:p>
                       <a:pPr algn="ctr">
-                        <a:defRPr sz="1300" b="0">
-                          <a:solidFill>
-                            <a:srgbClr val="000000"/>
-                          </a:solidFill>
-                          <a:latin typeface="Times New Roman"/>
-                        </a:defRPr>
-                      </a:pPr>
-                      <a:r>
-                        <a:t>训练 4,983</a:t>
-                      </a:r>
-                    </a:p>
-                    <a:p>
-                      <a:pPr algn="ctr">
-                        <a:defRPr sz="1300" b="0">
-                          <a:solidFill>
-                            <a:srgbClr val="000000"/>
-                          </a:solidFill>
-                          <a:latin typeface="Times New Roman"/>
-                        </a:defRPr>
-                      </a:pPr>
-                      <a:r>
-                        <a:t>验证 1,069</a:t>
-                      </a:r>
-                    </a:p>
-                    <a:p>
-                      <a:pPr algn="ctr">
-                        <a:defRPr sz="1300" b="0">
-                          <a:solidFill>
-                            <a:srgbClr val="000000"/>
-                          </a:solidFill>
-                          <a:latin typeface="Times New Roman"/>
-                        </a:defRPr>
-                      </a:pPr>
-                      <a:r>
-                        <a:t>测试 1,069</a:t>
+                        <a:defRPr sz="1200" b="0">
+                          <a:solidFill>
+                            <a:srgbClr val="000000"/>
+                          </a:solidFill>
+                          <a:latin typeface="Times New Roman"/>
+                        </a:defRPr>
+                      </a:pPr>
+                      <a:r>
+                        <a:t>训练 4,983 / 验证 1,069 / 测试 1,069</a:t>
                       </a:r>
                     </a:p>
                   </a:txBody>
                   <a:tcPr anchor="ctr"/>
                 </a:tc>
               </a:tr>
-              <a:tr h="804672">
-                <a:tc>
-                  <a:txBody>
-                    <a:bodyPr/>
-                    <a:lstStyle/>
-                    <a:p>
-                      <a:pPr algn="ctr">
-                        <a:defRPr sz="1300" b="0">
+              <a:tr h="749808">
+                <a:tc>
+                  <a:txBody>
+                    <a:bodyPr/>
+                    <a:lstStyle/>
+                    <a:p>
+                      <a:pPr algn="ctr">
+                        <a:defRPr sz="1200" b="0">
                           <a:solidFill>
                             <a:srgbClr val="000000"/>
                           </a:solidFill>
@@ -3645,28 +3606,15 @@
                     <a:lstStyle/>
                     <a:p>
                       <a:pPr algn="ctr">
-                        <a:defRPr sz="1300" b="0">
-                          <a:solidFill>
-                            <a:srgbClr val="000000"/>
-                          </a:solidFill>
-                          <a:latin typeface="Times New Roman"/>
-                        </a:defRPr>
-                      </a:pPr>
-                      <a:r>
-                        <a:t>航拍车辆检测</a:t>
-                      </a:r>
-                    </a:p>
-                    <a:p>
-                      <a:pPr algn="ctr">
-                        <a:defRPr sz="1300" b="0">
-                          <a:solidFill>
-                            <a:srgbClr val="000000"/>
-                          </a:solidFill>
-                          <a:latin typeface="Times New Roman"/>
-                        </a:defRPr>
-                      </a:pPr>
-                      <a:r>
-                        <a:t>(8 类)</a:t>
+                        <a:defRPr sz="1200" b="0">
+                          <a:solidFill>
+                            <a:srgbClr val="000000"/>
+                          </a:solidFill>
+                          <a:latin typeface="Times New Roman"/>
+                        </a:defRPr>
+                      </a:pPr>
+                      <a:r>
+                        <a:t>航拍车辆检测 (8 类)</a:t>
                       </a:r>
                     </a:p>
                   </a:txBody>
@@ -3678,7 +3626,7 @@
                     <a:lstStyle/>
                     <a:p>
                       <a:pPr algn="ctr">
-                        <a:defRPr sz="1300" b="0">
+                        <a:defRPr sz="1200" b="0">
                           <a:solidFill>
                             <a:srgbClr val="000000"/>
                           </a:solidFill>
@@ -3691,7 +3639,7 @@
                     </a:p>
                     <a:p>
                       <a:pPr algn="ctr">
-                        <a:defRPr sz="1300" b="0">
+                        <a:defRPr sz="1200" b="0">
                           <a:solidFill>
                             <a:srgbClr val="000000"/>
                           </a:solidFill>
@@ -3711,28 +3659,15 @@
                     <a:lstStyle/>
                     <a:p>
                       <a:pPr algn="ctr">
-                        <a:defRPr sz="1300" b="0">
-                          <a:solidFill>
-                            <a:srgbClr val="000000"/>
-                          </a:solidFill>
-                          <a:latin typeface="Times New Roman"/>
-                        </a:defRPr>
-                      </a:pPr>
-                      <a:r>
-                        <a:t>512×512</a:t>
-                      </a:r>
-                    </a:p>
-                    <a:p>
-                      <a:pPr algn="ctr">
-                        <a:defRPr sz="1300" b="0">
-                          <a:solidFill>
-                            <a:srgbClr val="000000"/>
-                          </a:solidFill>
-                          <a:latin typeface="Times New Roman"/>
-                        </a:defRPr>
-                      </a:pPr>
-                      <a:r>
-                        <a:t>1024×1024</a:t>
+                        <a:defRPr sz="1200" b="0">
+                          <a:solidFill>
+                            <a:srgbClr val="000000"/>
+                          </a:solidFill>
+                          <a:latin typeface="Times New Roman"/>
+                        </a:defRPr>
+                      </a:pPr>
+                      <a:r>
+                        <a:t>512×512 / 1024×1024</a:t>
                       </a:r>
                     </a:p>
                   </a:txBody>
@@ -3744,55 +3679,42 @@
                     <a:lstStyle/>
                     <a:p>
                       <a:pPr algn="ctr">
-                        <a:defRPr sz="1300" b="0">
-                          <a:solidFill>
-                            <a:srgbClr val="000000"/>
-                          </a:solidFill>
-                          <a:latin typeface="Times New Roman"/>
-                        </a:defRPr>
-                      </a:pPr>
-                      <a:r>
-                        <a:t>1,246 张标注图像</a:t>
-                      </a:r>
-                    </a:p>
-                    <a:p>
-                      <a:pPr algn="ctr">
-                        <a:defRPr sz="1300" b="0">
-                          <a:solidFill>
-                            <a:srgbClr val="000000"/>
-                          </a:solidFill>
-                          <a:latin typeface="Times New Roman"/>
-                        </a:defRPr>
-                      </a:pPr>
-                      <a:r>
-                        <a:t>3,706 个目标框</a:t>
-                      </a:r>
-                    </a:p>
-                    <a:p>
-                      <a:pPr algn="ctr">
-                        <a:defRPr sz="1300" b="0">
-                          <a:solidFill>
-                            <a:srgbClr val="000000"/>
-                          </a:solidFill>
-                          <a:latin typeface="Times New Roman"/>
-                        </a:defRPr>
-                      </a:pPr>
-                      <a:r>
-                        <a:t>5 折交叉验证</a:t>
+                        <a:defRPr sz="1200" b="0">
+                          <a:solidFill>
+                            <a:srgbClr val="000000"/>
+                          </a:solidFill>
+                          <a:latin typeface="Times New Roman"/>
+                        </a:defRPr>
+                      </a:pPr>
+                      <a:r>
+                        <a:t>1,246 张</a:t>
+                      </a:r>
+                    </a:p>
+                    <a:p>
+                      <a:pPr algn="ctr">
+                        <a:defRPr sz="1200" b="0">
+                          <a:solidFill>
+                            <a:srgbClr val="000000"/>
+                          </a:solidFill>
+                          <a:latin typeface="Times New Roman"/>
+                        </a:defRPr>
+                      </a:pPr>
+                      <a:r>
+                        <a:t>3,706 目标框 / 5 折交叉验证</a:t>
                       </a:r>
                     </a:p>
                   </a:txBody>
                   <a:tcPr anchor="ctr"/>
                 </a:tc>
               </a:tr>
-              <a:tr h="804672">
-                <a:tc>
-                  <a:txBody>
-                    <a:bodyPr/>
-                    <a:lstStyle/>
-                    <a:p>
-                      <a:pPr algn="ctr">
-                        <a:defRPr sz="1300" b="0">
+              <a:tr h="749808">
+                <a:tc>
+                  <a:txBody>
+                    <a:bodyPr/>
+                    <a:lstStyle/>
+                    <a:p>
+                      <a:pPr algn="ctr">
+                        <a:defRPr sz="1200" b="0">
                           <a:solidFill>
                             <a:srgbClr val="000000"/>
                           </a:solidFill>
@@ -3812,7 +3734,7 @@
                     <a:lstStyle/>
                     <a:p>
                       <a:pPr algn="ctr">
-                        <a:defRPr sz="1300" b="0">
+                        <a:defRPr sz="1200" b="0">
                           <a:solidFill>
                             <a:srgbClr val="000000"/>
                           </a:solidFill>
@@ -3825,7 +3747,7 @@
                     </a:p>
                     <a:p>
                       <a:pPr algn="ctr">
-                        <a:defRPr sz="1300" b="0">
+                        <a:defRPr sz="1200" b="0">
                           <a:solidFill>
                             <a:srgbClr val="000000"/>
                           </a:solidFill>
@@ -3845,7 +3767,7 @@
                     <a:lstStyle/>
                     <a:p>
                       <a:pPr algn="ctr">
-                        <a:defRPr sz="1300" b="0">
+                        <a:defRPr sz="1200" b="0">
                           <a:solidFill>
                             <a:srgbClr val="000000"/>
                           </a:solidFill>
@@ -3858,7 +3780,7 @@
                     </a:p>
                     <a:p>
                       <a:pPr algn="ctr">
-                        <a:defRPr sz="1300" b="0">
+                        <a:defRPr sz="1200" b="0">
                           <a:solidFill>
                             <a:srgbClr val="000000"/>
                           </a:solidFill>
@@ -3878,28 +3800,15 @@
                     <a:lstStyle/>
                     <a:p>
                       <a:pPr algn="ctr">
-                        <a:defRPr sz="1300" b="0">
-                          <a:solidFill>
-                            <a:srgbClr val="000000"/>
-                          </a:solidFill>
-                          <a:latin typeface="Times New Roman"/>
-                        </a:defRPr>
-                      </a:pPr>
-                      <a:r>
-                        <a:t>LR: 30m</a:t>
-                      </a:r>
-                    </a:p>
-                    <a:p>
-                      <a:pPr algn="ctr">
-                        <a:defRPr sz="1300" b="0">
-                          <a:solidFill>
-                            <a:srgbClr val="000000"/>
-                          </a:solidFill>
-                          <a:latin typeface="Times New Roman"/>
-                        </a:defRPr>
-                      </a:pPr>
-                      <a:r>
-                        <a:t>HR: 10m</a:t>
+                        <a:defRPr sz="1200" b="0">
+                          <a:solidFill>
+                            <a:srgbClr val="000000"/>
+                          </a:solidFill>
+                          <a:latin typeface="Times New Roman"/>
+                        </a:defRPr>
+                      </a:pPr>
+                      <a:r>
+                        <a:t>LR 30m → HR 10m</a:t>
                       </a:r>
                     </a:p>
                   </a:txBody>
@@ -3911,7 +3820,7 @@
                     <a:lstStyle/>
                     <a:p>
                       <a:pPr algn="ctr">
-                        <a:defRPr sz="1300" b="0">
+                        <a:defRPr sz="1200" b="0">
                           <a:solidFill>
                             <a:srgbClr val="000000"/>
                           </a:solidFill>
@@ -3924,42 +3833,29 @@
                     </a:p>
                     <a:p>
                       <a:pPr algn="ctr">
-                        <a:defRPr sz="1300" b="0">
-                          <a:solidFill>
-                            <a:srgbClr val="000000"/>
-                          </a:solidFill>
-                          <a:latin typeface="Times New Roman"/>
-                        </a:defRPr>
-                      </a:pPr>
-                      <a:r>
-                        <a:t>训练 5,225</a:t>
-                      </a:r>
-                    </a:p>
-                    <a:p>
-                      <a:pPr algn="ctr">
-                        <a:defRPr sz="1300" b="0">
-                          <a:solidFill>
-                            <a:srgbClr val="000000"/>
-                          </a:solidFill>
-                          <a:latin typeface="Times New Roman"/>
-                        </a:defRPr>
-                      </a:pPr>
-                      <a:r>
-                        <a:t>测试 100</a:t>
+                        <a:defRPr sz="1200" b="0">
+                          <a:solidFill>
+                            <a:srgbClr val="000000"/>
+                          </a:solidFill>
+                          <a:latin typeface="Times New Roman"/>
+                        </a:defRPr>
+                      </a:pPr>
+                      <a:r>
+                        <a:t>训练 5,225 / 测试 100</a:t>
                       </a:r>
                     </a:p>
                   </a:txBody>
                   <a:tcPr anchor="ctr"/>
                 </a:tc>
               </a:tr>
-              <a:tr h="804672">
-                <a:tc>
-                  <a:txBody>
-                    <a:bodyPr/>
-                    <a:lstStyle/>
-                    <a:p>
-                      <a:pPr algn="ctr">
-                        <a:defRPr sz="1300" b="0">
+              <a:tr h="749808">
+                <a:tc>
+                  <a:txBody>
+                    <a:bodyPr/>
+                    <a:lstStyle/>
+                    <a:p>
+                      <a:pPr algn="ctr">
+                        <a:defRPr sz="1200" b="0">
                           <a:solidFill>
                             <a:srgbClr val="000000"/>
                           </a:solidFill>
@@ -3979,7 +3875,7 @@
                     <a:lstStyle/>
                     <a:p>
                       <a:pPr algn="ctr">
-                        <a:defRPr sz="1300" b="0">
+                        <a:defRPr sz="1200" b="0">
                           <a:solidFill>
                             <a:srgbClr val="000000"/>
                           </a:solidFill>
@@ -3992,7 +3888,7 @@
                     </a:p>
                     <a:p>
                       <a:pPr algn="ctr">
-                        <a:defRPr sz="1300" b="0">
+                        <a:defRPr sz="1200" b="0">
                           <a:solidFill>
                             <a:srgbClr val="000000"/>
                           </a:solidFill>
@@ -4012,7 +3908,7 @@
                     <a:lstStyle/>
                     <a:p>
                       <a:pPr algn="ctr">
-                        <a:defRPr sz="1300" b="0">
+                        <a:defRPr sz="1200" b="0">
                           <a:solidFill>
                             <a:srgbClr val="000000"/>
                           </a:solidFill>
@@ -4025,7 +3921,7 @@
                     </a:p>
                     <a:p>
                       <a:pPr algn="ctr">
-                        <a:defRPr sz="1300" b="0">
+                        <a:defRPr sz="1200" b="0">
                           <a:solidFill>
                             <a:srgbClr val="000000"/>
                           </a:solidFill>
@@ -4045,7 +3941,7 @@
                     <a:lstStyle/>
                     <a:p>
                       <a:pPr algn="ctr">
-                        <a:defRPr sz="1300" b="0">
+                        <a:defRPr sz="1200" b="0">
                           <a:solidFill>
                             <a:srgbClr val="000000"/>
                           </a:solidFill>
@@ -4056,19 +3952,6 @@
                         <a:t>640×448</a:t>
                       </a:r>
                     </a:p>
-                    <a:p>
-                      <a:pPr algn="ctr">
-                        <a:defRPr sz="1300" b="0">
-                          <a:solidFill>
-                            <a:srgbClr val="000000"/>
-                          </a:solidFill>
-                          <a:latin typeface="Times New Roman"/>
-                        </a:defRPr>
-                      </a:pPr>
-                      <a:r>
-                        <a:t>(RGB)</a:t>
-                      </a:r>
-                    </a:p>
                   </a:txBody>
                   <a:tcPr anchor="ctr"/>
                 </a:tc>
@@ -4078,7 +3961,7 @@
                     <a:lstStyle/>
                     <a:p>
                       <a:pPr algn="ctr">
-                        <a:defRPr sz="1300" b="0">
+                        <a:defRPr sz="1200" b="0">
                           <a:solidFill>
                             <a:srgbClr val="000000"/>
                           </a:solidFill>
@@ -4091,55 +3974,29 @@
                     </a:p>
                     <a:p>
                       <a:pPr algn="ctr">
-                        <a:defRPr sz="1300" b="0">
-                          <a:solidFill>
-                            <a:srgbClr val="000000"/>
-                          </a:solidFill>
-                          <a:latin typeface="Times New Roman"/>
-                        </a:defRPr>
-                      </a:pPr>
-                      <a:r>
-                        <a:t>训练 700</a:t>
-                      </a:r>
-                    </a:p>
-                    <a:p>
-                      <a:pPr algn="ctr">
-                        <a:defRPr sz="1300" b="0">
-                          <a:solidFill>
-                            <a:srgbClr val="000000"/>
-                          </a:solidFill>
-                          <a:latin typeface="Times New Roman"/>
-                        </a:defRPr>
-                      </a:pPr>
-                      <a:r>
-                        <a:t>验证 200</a:t>
-                      </a:r>
-                    </a:p>
-                    <a:p>
-                      <a:pPr algn="ctr">
-                        <a:defRPr sz="1300" b="0">
-                          <a:solidFill>
-                            <a:srgbClr val="000000"/>
-                          </a:solidFill>
-                          <a:latin typeface="Times New Roman"/>
-                        </a:defRPr>
-                      </a:pPr>
-                      <a:r>
-                        <a:t>测试 100</a:t>
+                        <a:defRPr sz="1200" b="0">
+                          <a:solidFill>
+                            <a:srgbClr val="000000"/>
+                          </a:solidFill>
+                          <a:latin typeface="Times New Roman"/>
+                        </a:defRPr>
+                      </a:pPr>
+                      <a:r>
+                        <a:t>训练 700 / 验证 200 / 测试 100</a:t>
                       </a:r>
                     </a:p>
                   </a:txBody>
                   <a:tcPr anchor="ctr"/>
                 </a:tc>
               </a:tr>
-              <a:tr h="804672">
-                <a:tc>
-                  <a:txBody>
-                    <a:bodyPr/>
-                    <a:lstStyle/>
-                    <a:p>
-                      <a:pPr algn="ctr">
-                        <a:defRPr sz="1300" b="0">
+              <a:tr h="749808">
+                <a:tc>
+                  <a:txBody>
+                    <a:bodyPr/>
+                    <a:lstStyle/>
+                    <a:p>
+                      <a:pPr algn="ctr">
+                        <a:defRPr sz="1200" b="0">
                           <a:solidFill>
                             <a:srgbClr val="000000"/>
                           </a:solidFill>
@@ -4148,19 +4005,6 @@
                       </a:pPr>
                       <a:r>
                         <a:t>CIDIS_guided</a:t>
-                      </a:r>
-                    </a:p>
-                    <a:p>
-                      <a:pPr algn="ctr">
-                        <a:defRPr sz="1300" b="0">
-                          <a:solidFill>
-                            <a:srgbClr val="000000"/>
-                          </a:solidFill>
-                          <a:latin typeface="Times New Roman"/>
-                        </a:defRPr>
-                      </a:pPr>
-                      <a:r>
-                        <a:t>x8 x16</a:t>
                       </a:r>
                     </a:p>
                   </a:txBody>
@@ -4178,28 +4022,28 @@
                     <a:lstStyle/>
                     <a:p>
                       <a:pPr algn="ctr">
-                        <a:defRPr sz="1300" b="0">
-                          <a:solidFill>
-                            <a:srgbClr val="000000"/>
-                          </a:solidFill>
-                          <a:latin typeface="Times New Roman"/>
-                        </a:defRPr>
-                      </a:pPr>
-                      <a:r>
-                        <a:t>可见光引导红外</a:t>
-                      </a:r>
-                    </a:p>
-                    <a:p>
-                      <a:pPr algn="ctr">
-                        <a:defRPr sz="1300" b="0">
-                          <a:solidFill>
-                            <a:srgbClr val="000000"/>
-                          </a:solidFill>
-                          <a:latin typeface="Times New Roman"/>
-                        </a:defRPr>
-                      </a:pPr>
-                      <a:r>
-                        <a:t>超分辨率 (×8, ×16)</a:t>
+                        <a:defRPr sz="1200" b="0">
+                          <a:solidFill>
+                            <a:srgbClr val="000000"/>
+                          </a:solidFill>
+                          <a:latin typeface="Times New Roman"/>
+                        </a:defRPr>
+                      </a:pPr>
+                      <a:r>
+                        <a:t>可见光引导红外超分</a:t>
+                      </a:r>
+                    </a:p>
+                    <a:p>
+                      <a:pPr algn="ctr">
+                        <a:defRPr sz="1200" b="0">
+                          <a:solidFill>
+                            <a:srgbClr val="000000"/>
+                          </a:solidFill>
+                          <a:latin typeface="Times New Roman"/>
+                        </a:defRPr>
+                      </a:pPr>
+                      <a:r>
+                        <a:t>(×8, ×16)</a:t>
                       </a:r>
                     </a:p>
                   </a:txBody>
@@ -4217,7 +4061,7 @@
                     <a:lstStyle/>
                     <a:p>
                       <a:pPr algn="ctr">
-                        <a:defRPr sz="1300" b="0">
+                        <a:defRPr sz="1200" b="0">
                           <a:solidFill>
                             <a:srgbClr val="000000"/>
                           </a:solidFill>
@@ -4230,7 +4074,7 @@
                     </a:p>
                     <a:p>
                       <a:pPr algn="ctr">
-                        <a:defRPr sz="1300" b="0">
+                        <a:defRPr sz="1200" b="0">
                           <a:solidFill>
                             <a:srgbClr val="000000"/>
                           </a:solidFill>
@@ -4256,7 +4100,7 @@
                     <a:lstStyle/>
                     <a:p>
                       <a:pPr algn="ctr">
-                        <a:defRPr sz="1300" b="0">
+                        <a:defRPr sz="1200" b="0">
                           <a:solidFill>
                             <a:srgbClr val="000000"/>
                           </a:solidFill>
@@ -4269,28 +4113,15 @@
                     </a:p>
                     <a:p>
                       <a:pPr algn="ctr">
-                        <a:defRPr sz="1300" b="0">
-                          <a:solidFill>
-                            <a:srgbClr val="000000"/>
-                          </a:solidFill>
-                          <a:latin typeface="Times New Roman"/>
-                        </a:defRPr>
-                      </a:pPr>
-                      <a:r>
-                        <a:t>LR×8 80×56</a:t>
-                      </a:r>
-                    </a:p>
-                    <a:p>
-                      <a:pPr algn="ctr">
-                        <a:defRPr sz="1300" b="0">
-                          <a:solidFill>
-                            <a:srgbClr val="000000"/>
-                          </a:solidFill>
-                          <a:latin typeface="Times New Roman"/>
-                        </a:defRPr>
-                      </a:pPr>
-                      <a:r>
-                        <a:t>LR×16 40×28</a:t>
+                        <a:defRPr sz="1200" b="0">
+                          <a:solidFill>
+                            <a:srgbClr val="000000"/>
+                          </a:solidFill>
+                          <a:latin typeface="Times New Roman"/>
+                        </a:defRPr>
+                      </a:pPr>
+                      <a:r>
+                        <a:t>LR×8 80×56 / LR×16 40×28</a:t>
                       </a:r>
                     </a:p>
                   </a:txBody>
@@ -4308,41 +4139,28 @@
                     <a:lstStyle/>
                     <a:p>
                       <a:pPr algn="ctr">
-                        <a:defRPr sz="1300" b="0">
-                          <a:solidFill>
-                            <a:srgbClr val="000000"/>
-                          </a:solidFill>
-                          <a:latin typeface="Times New Roman"/>
-                        </a:defRPr>
-                      </a:pPr>
-                      <a:r>
-                        <a:t>700 对训练</a:t>
-                      </a:r>
-                    </a:p>
-                    <a:p>
-                      <a:pPr algn="ctr">
-                        <a:defRPr sz="1300" b="0">
-                          <a:solidFill>
-                            <a:srgbClr val="000000"/>
-                          </a:solidFill>
-                          <a:latin typeface="Times New Roman"/>
-                        </a:defRPr>
-                      </a:pPr>
-                      <a:r>
-                        <a:t>200 对验证</a:t>
-                      </a:r>
-                    </a:p>
-                    <a:p>
-                      <a:pPr algn="ctr">
-                        <a:defRPr sz="1300" b="0">
-                          <a:solidFill>
-                            <a:srgbClr val="000000"/>
-                          </a:solidFill>
-                          <a:latin typeface="Times New Roman"/>
-                        </a:defRPr>
-                      </a:pPr>
-                      <a:r>
-                        <a:t>40 对测试</a:t>
+                        <a:defRPr sz="1200" b="0">
+                          <a:solidFill>
+                            <a:srgbClr val="000000"/>
+                          </a:solidFill>
+                          <a:latin typeface="Times New Roman"/>
+                        </a:defRPr>
+                      </a:pPr>
+                      <a:r>
+                        <a:t>训练 700 / 验证 200</a:t>
+                      </a:r>
+                    </a:p>
+                    <a:p>
+                      <a:pPr algn="ctr">
+                        <a:defRPr sz="1200" b="0">
+                          <a:solidFill>
+                            <a:srgbClr val="000000"/>
+                          </a:solidFill>
+                          <a:latin typeface="Times New Roman"/>
+                        </a:defRPr>
+                      </a:pPr>
+                      <a:r>
+                        <a:t>测试 40 (×8 + ×16)</a:t>
                       </a:r>
                     </a:p>
                   </a:txBody>
@@ -4393,8 +4211,8 @@
         </p:nvSpPr>
         <p:spPr>
           <a:xfrm>
-            <a:off x="548640" y="320040"/>
-            <a:ext cx="10972800" cy="640080"/>
+            <a:off x="822960" y="274320"/>
+            <a:ext cx="10515600" cy="594360"/>
           </a:xfrm>
           <a:prstGeom prst="rect">
             <a:avLst/>
@@ -4408,7 +4226,7 @@
           <a:lstStyle/>
           <a:p>
             <a:pPr>
-              <a:defRPr sz="3000" b="1">
+              <a:defRPr sz="2800" b="1">
                 <a:solidFill>
                   <a:srgbClr val="000000"/>
                 </a:solidFill>
@@ -4429,8 +4247,8 @@
         </p:nvSpPr>
         <p:spPr>
           <a:xfrm>
-            <a:off x="457200" y="1280160"/>
-            <a:ext cx="6400800" cy="1828800"/>
+            <a:off x="822960" y="1188720"/>
+            <a:ext cx="6858000" cy="1463040"/>
           </a:xfrm>
           <a:prstGeom prst="rect">
             <a:avLst/>
@@ -4445,9 +4263,9 @@
           <a:p>
             <a:pPr>
               <a:spcAft>
-                <a:spcPts val="600"/>
+                <a:spcPts val="400"/>
               </a:spcAft>
-              <a:defRPr sz="1600">
+              <a:defRPr sz="1500">
                 <a:solidFill>
                   <a:srgbClr val="000000"/>
                 </a:solidFill>
@@ -4455,15 +4273,15 @@
               </a:defRPr>
             </a:pPr>
             <a:r>
-              <a:t>• 任务：单帧红外图像超分辨率重建，包含 ×2 和 ×4 两种放大倍率</a:t>
+              <a:t>• 任务：单帧红外图像超分辨率重建 (×2, ×4)</a:t>
             </a:r>
           </a:p>
           <a:p>
             <a:pPr>
               <a:spcAft>
-                <a:spcPts val="600"/>
+                <a:spcPts val="400"/>
               </a:spcAft>
-              <a:defRPr sz="1600">
+              <a:defRPr sz="1500">
                 <a:solidFill>
                   <a:srgbClr val="000000"/>
                 </a:solidFill>
@@ -4471,15 +4289,15 @@
               </a:defRPr>
             </a:pPr>
             <a:r>
-              <a:t>• 格式：JPEG 灰度图像（8-bit 单通道），HR 与 LR 文件名一一对应</a:t>
+              <a:t>• 格式：JPEG 灰度图像 (8-bit)，HR 与 LR 文件名一一对应</a:t>
             </a:r>
           </a:p>
           <a:p>
             <a:pPr>
               <a:spcAft>
-                <a:spcPts val="600"/>
+                <a:spcPts val="400"/>
               </a:spcAft>
-              <a:defRPr sz="1600">
+              <a:defRPr sz="1500">
                 <a:solidFill>
                   <a:srgbClr val="000000"/>
                 </a:solidFill>
@@ -4487,15 +4305,15 @@
               </a:defRPr>
             </a:pPr>
             <a:r>
-              <a:t>• 目录：{trainsets, valsets, testsets} / {HR, LRx2, LRx4}</a:t>
+              <a:t>• 分辨率：HR 640×512，LR×2 320×256，LR×4 160×128</a:t>
             </a:r>
           </a:p>
           <a:p>
             <a:pPr>
               <a:spcAft>
-                <a:spcPts val="600"/>
+                <a:spcPts val="400"/>
               </a:spcAft>
-              <a:defRPr sz="1600">
+              <a:defRPr sz="1500">
                 <a:solidFill>
                   <a:srgbClr val="000000"/>
                 </a:solidFill>
@@ -4503,14 +4321,14 @@
               </a:defRPr>
             </a:pPr>
             <a:r>
-              <a:t>• 分辨率：HR 640×512，LR×2 320×256，LR×4 160×128</a:t>
+              <a:t>• 目录：{trainsets, valsets, testsets} / {HR, LRx2, LRx4}</a:t>
             </a:r>
           </a:p>
         </p:txBody>
       </p:sp>
       <p:pic>
         <p:nvPicPr>
-          <p:cNvPr id="4" name="Picture 3" descr="irsr_HR 6.png"/>
+          <p:cNvPr id="4" name="Picture 3" descr="img_6814629905344362178.png"/>
           <p:cNvPicPr>
             <a:picLocks noChangeAspect="1"/>
           </p:cNvPicPr>
@@ -4524,7 +4342,7 @@
         </p:blipFill>
         <p:spPr>
           <a:xfrm>
-            <a:off x="731520" y="3291840"/>
+            <a:off x="822960" y="2926080"/>
             <a:ext cx="2743200" cy="2194560"/>
           </a:xfrm>
           <a:prstGeom prst="rect">
@@ -4540,8 +4358,8 @@
         </p:nvSpPr>
         <p:spPr>
           <a:xfrm>
-            <a:off x="731520" y="4800600"/>
-            <a:ext cx="2743200" cy="274320"/>
+            <a:off x="822960" y="5193792"/>
+            <a:ext cx="2743200" cy="228600"/>
           </a:xfrm>
           <a:prstGeom prst="rect">
             <a:avLst/>
@@ -4556,11 +4374,11 @@
           <a:p>
             <a:pPr>
               <a:spcAft>
-                <a:spcPts val="600"/>
+                <a:spcPts val="400"/>
               </a:spcAft>
-              <a:defRPr sz="1200">
+              <a:defRPr sz="1100">
                 <a:solidFill>
-                  <a:srgbClr val="444444"/>
+                  <a:srgbClr val="555555"/>
                 </a:solidFill>
                 <a:latin typeface="Times New Roman"/>
               </a:defRPr>
@@ -4573,7 +4391,7 @@
       </p:sp>
       <p:pic>
         <p:nvPicPr>
-          <p:cNvPr id="6" name="Picture 5" descr="irsr_LR×2.png"/>
+          <p:cNvPr id="6" name="Picture 5" descr="img_8630387960221989387.png"/>
           <p:cNvPicPr>
             <a:picLocks noChangeAspect="1"/>
           </p:cNvPicPr>
@@ -4587,7 +4405,7 @@
         </p:blipFill>
         <p:spPr>
           <a:xfrm>
-            <a:off x="4023360" y="3291840"/>
+            <a:off x="4023360" y="2926080"/>
             <a:ext cx="1371600" cy="1097280"/>
           </a:xfrm>
           <a:prstGeom prst="rect">
@@ -4603,8 +4421,8 @@
         </p:nvSpPr>
         <p:spPr>
           <a:xfrm>
-            <a:off x="4023360" y="4046220"/>
-            <a:ext cx="1371600" cy="274320"/>
+            <a:off x="4023360" y="4096512"/>
+            <a:ext cx="1371600" cy="228600"/>
           </a:xfrm>
           <a:prstGeom prst="rect">
             <a:avLst/>
@@ -4619,11 +4437,11 @@
           <a:p>
             <a:pPr>
               <a:spcAft>
-                <a:spcPts val="600"/>
+                <a:spcPts val="400"/>
               </a:spcAft>
-              <a:defRPr sz="1200">
+              <a:defRPr sz="1100">
                 <a:solidFill>
-                  <a:srgbClr val="444444"/>
+                  <a:srgbClr val="555555"/>
                 </a:solidFill>
                 <a:latin typeface="Times New Roman"/>
               </a:defRPr>
@@ -4636,7 +4454,7 @@
       </p:sp>
       <p:pic>
         <p:nvPicPr>
-          <p:cNvPr id="8" name="Picture 7" descr="irsr_LR×4.png"/>
+          <p:cNvPr id="8" name="Picture 7" descr="img_989089033396071308.png"/>
           <p:cNvPicPr>
             <a:picLocks noChangeAspect="1"/>
           </p:cNvPicPr>
@@ -4650,7 +4468,7 @@
         </p:blipFill>
         <p:spPr>
           <a:xfrm>
-            <a:off x="5943600" y="3291840"/>
+            <a:off x="5852160" y="2926080"/>
             <a:ext cx="685800" cy="548640"/>
           </a:xfrm>
           <a:prstGeom prst="rect">
@@ -4666,8 +4484,8 @@
         </p:nvSpPr>
         <p:spPr>
           <a:xfrm>
-            <a:off x="5943600" y="3669030"/>
-            <a:ext cx="685800" cy="274320"/>
+            <a:off x="5852160" y="3547872"/>
+            <a:ext cx="685800" cy="228600"/>
           </a:xfrm>
           <a:prstGeom prst="rect">
             <a:avLst/>
@@ -4682,11 +4500,11 @@
           <a:p>
             <a:pPr>
               <a:spcAft>
-                <a:spcPts val="600"/>
+                <a:spcPts val="400"/>
               </a:spcAft>
-              <a:defRPr sz="1200">
+              <a:defRPr sz="1100">
                 <a:solidFill>
-                  <a:srgbClr val="444444"/>
+                  <a:srgbClr val="555555"/>
                 </a:solidFill>
                 <a:latin typeface="Times New Roman"/>
               </a:defRPr>
@@ -4706,8 +4524,8 @@
           <p:nvPr/>
         </p:nvGraphicFramePr>
         <p:xfrm>
-          <a:off x="7772400" y="1280160"/>
-          <a:ext cx="3657600" cy="1536192"/>
+          <a:off x="3749040.0" y="5669280"/>
+          <a:ext cx="4663440" cy="1389888"/>
         </p:xfrm>
         <a:graphic>
           <a:graphicData uri="http://schemas.openxmlformats.org/drawingml/2006/table">
@@ -4716,12 +4534,12 @@
                 <a:tableStyleId>{5C22544A-7EE6-4342-B048-85BDC9FD1C3A}</a:tableStyleId>
               </a:tblPr>
               <a:tblGrid>
-                <a:gridCol w="914400"/>
-                <a:gridCol w="914400"/>
-                <a:gridCol w="914400"/>
-                <a:gridCol w="914400"/>
+                <a:gridCol w="1097280"/>
+                <a:gridCol w="1188720"/>
+                <a:gridCol w="1188720"/>
+                <a:gridCol w="1188720"/>
               </a:tblGrid>
-              <a:tr h="384048">
+              <a:tr h="347472">
                 <a:tc>
                   <a:txBody>
                     <a:bodyPr/>
@@ -4847,7 +4665,7 @@
                   </a:tcPr>
                 </a:tc>
               </a:tr>
-              <a:tr h="384048">
+              <a:tr h="347472">
                 <a:tc>
                   <a:txBody>
                     <a:bodyPr/>
@@ -4929,7 +4747,7 @@
                   <a:tcPr anchor="ctr"/>
                 </a:tc>
               </a:tr>
-              <a:tr h="384048">
+              <a:tr h="347472">
                 <a:tc>
                   <a:txBody>
                     <a:bodyPr/>
@@ -5011,7 +4829,7 @@
                   <a:tcPr anchor="ctr"/>
                 </a:tc>
               </a:tr>
-              <a:tr h="384048">
+              <a:tr h="347472">
                 <a:tc>
                   <a:txBody>
                     <a:bodyPr/>
@@ -5121,45 +4939,6 @@
           </a:graphicData>
         </a:graphic>
       </p:graphicFrame>
-      <p:sp>
-        <p:nvSpPr>
-          <p:cNvPr id="11" name="TextBox 10"/>
-          <p:cNvSpPr txBox="1"/>
-          <p:nvPr/>
-        </p:nvSpPr>
-        <p:spPr>
-          <a:xfrm>
-            <a:off x="457200" y="6126480"/>
-            <a:ext cx="7315200" cy="365760"/>
-          </a:xfrm>
-          <a:prstGeom prst="rect">
-            <a:avLst/>
-          </a:prstGeom>
-          <a:noFill/>
-        </p:spPr>
-        <p:txBody>
-          <a:bodyPr wrap="square">
-            <a:spAutoFit/>
-          </a:bodyPr>
-          <a:lstStyle/>
-          <a:p>
-            <a:pPr>
-              <a:spcAft>
-                <a:spcPts val="600"/>
-              </a:spcAft>
-              <a:defRPr sz="1300">
-                <a:solidFill>
-                  <a:srgbClr val="444444"/>
-                </a:solidFill>
-                <a:latin typeface="Times New Roman"/>
-              </a:defRPr>
-            </a:pPr>
-            <a:r>
-              <a:t>示例图像 0002.jpg：同一场景在三种分辨率下的对照</a:t>
-            </a:r>
-          </a:p>
-        </p:txBody>
-      </p:sp>
     </p:spTree>
   </p:cSld>
   <p:clrMapOvr>
@@ -5194,8 +4973,8 @@
         </p:nvSpPr>
         <p:spPr>
           <a:xfrm>
-            <a:off x="548640" y="320040"/>
-            <a:ext cx="10972800" cy="640080"/>
+            <a:off x="822960" y="274320"/>
+            <a:ext cx="10515600" cy="594360"/>
           </a:xfrm>
           <a:prstGeom prst="rect">
             <a:avLst/>
@@ -5209,7 +4988,7 @@
           <a:lstStyle/>
           <a:p>
             <a:pPr>
-              <a:defRPr sz="3000" b="1">
+              <a:defRPr sz="2800" b="1">
                 <a:solidFill>
                   <a:srgbClr val="000000"/>
                 </a:solidFill>
@@ -5230,8 +5009,8 @@
         </p:nvSpPr>
         <p:spPr>
           <a:xfrm>
-            <a:off x="457200" y="1280160"/>
-            <a:ext cx="10972800" cy="2011680"/>
+            <a:off x="822960" y="1188720"/>
+            <a:ext cx="6400800" cy="1645920"/>
           </a:xfrm>
           <a:prstGeom prst="rect">
             <a:avLst/>
@@ -5246,9 +5025,9 @@
           <a:p>
             <a:pPr>
               <a:spcAft>
-                <a:spcPts val="600"/>
+                <a:spcPts val="400"/>
               </a:spcAft>
-              <a:defRPr sz="1600">
+              <a:defRPr sz="1500">
                 <a:solidFill>
                   <a:srgbClr val="000000"/>
                 </a:solidFill>
@@ -5256,15 +5035,15 @@
               </a:defRPr>
             </a:pPr>
             <a:r>
-              <a:t>• 任务：航拍视角下的多类车辆目标检测，提供配对的可见光与红外图像</a:t>
+              <a:t>• 任务：航拍视角多类车辆目标检测，提供配对可见光与红外图像</a:t>
             </a:r>
           </a:p>
           <a:p>
             <a:pPr>
               <a:spcAft>
-                <a:spcPts val="600"/>
+                <a:spcPts val="400"/>
               </a:spcAft>
-              <a:defRPr sz="1600">
+              <a:defRPr sz="1500">
                 <a:solidFill>
                   <a:srgbClr val="000000"/>
                 </a:solidFill>
@@ -5272,15 +5051,15 @@
               </a:defRPr>
             </a:pPr>
             <a:r>
-              <a:t>• 格式：PNG 图像（*_co.png 为可见光，*_ir.png 为红外）+ YOLO 格式 TXT 标注</a:t>
+              <a:t>• 格式：PNG 图像 (*_co.png 可见光, *_ir.png 红外) + YOLO 标注</a:t>
             </a:r>
           </a:p>
           <a:p>
             <a:pPr>
               <a:spcAft>
-                <a:spcPts val="600"/>
+                <a:spcPts val="400"/>
               </a:spcAft>
-              <a:defRPr sz="1600">
+              <a:defRPr sz="1500">
                 <a:solidFill>
                   <a:srgbClr val="000000"/>
                 </a:solidFill>
@@ -5288,15 +5067,15 @@
               </a:defRPr>
             </a:pPr>
             <a:r>
-              <a:t>• 版本：VEDAI (512×512) 和 VEDAI_1024 (1024×1024)，标注文件 1,246 个</a:t>
+              <a:t>• 版本：VEDAI (512×512) 和 VEDAI_1024 (1024×1024)</a:t>
             </a:r>
           </a:p>
           <a:p>
             <a:pPr>
               <a:spcAft>
-                <a:spcPts val="600"/>
+                <a:spcPts val="400"/>
               </a:spcAft>
-              <a:defRPr sz="1600">
+              <a:defRPr sz="1500">
                 <a:solidFill>
                   <a:srgbClr val="000000"/>
                 </a:solidFill>
@@ -5304,30 +5083,14 @@
               </a:defRPr>
             </a:pPr>
             <a:r>
-              <a:t>• 划分：5 折交叉验证（fold01~fold05.txt）</a:t>
-            </a:r>
-          </a:p>
-          <a:p>
-            <a:pPr>
-              <a:spcAft>
-                <a:spcPts val="600"/>
-              </a:spcAft>
-              <a:defRPr sz="1600">
-                <a:solidFill>
-                  <a:srgbClr val="000000"/>
-                </a:solidFill>
-                <a:latin typeface="Times New Roman"/>
-              </a:defRPr>
-            </a:pPr>
-            <a:r>
-              <a:t>• 标注：class_id  x_center  y_center  width  height（归一化坐标）</a:t>
+              <a:t>• 划分：5 折交叉验证 (fold01~fold05.txt)，1,246 张标注图</a:t>
             </a:r>
           </a:p>
         </p:txBody>
       </p:sp>
       <p:pic>
         <p:nvPicPr>
-          <p:cNvPr id="4" name="Picture 3" descr="vedai_co.png"/>
+          <p:cNvPr id="4" name="Picture 3" descr="img_243526651754600519.png"/>
           <p:cNvPicPr>
             <a:picLocks noChangeAspect="1"/>
           </p:cNvPicPr>
@@ -5341,7 +5104,7 @@
         </p:blipFill>
         <p:spPr>
           <a:xfrm>
-            <a:off x="914400" y="3474720"/>
+            <a:off x="1097280" y="3017520"/>
             <a:ext cx="2286000" cy="2286000"/>
           </a:xfrm>
           <a:prstGeom prst="rect">
@@ -5357,8 +5120,8 @@
         </p:nvSpPr>
         <p:spPr>
           <a:xfrm>
-            <a:off x="914400" y="5852160"/>
-            <a:ext cx="2286000" cy="274320"/>
+            <a:off x="1097280" y="5376672"/>
+            <a:ext cx="2286000" cy="228600"/>
           </a:xfrm>
           <a:prstGeom prst="rect">
             <a:avLst/>
@@ -5373,24 +5136,24 @@
           <a:p>
             <a:pPr>
               <a:spcAft>
-                <a:spcPts val="600"/>
+                <a:spcPts val="400"/>
               </a:spcAft>
-              <a:defRPr sz="1200">
+              <a:defRPr sz="1100">
                 <a:solidFill>
-                  <a:srgbClr val="444444"/>
+                  <a:srgbClr val="555555"/>
                 </a:solidFill>
                 <a:latin typeface="Times New Roman"/>
               </a:defRPr>
             </a:pPr>
             <a:r>
-              <a:t>可见光 RGB（00000000_co.png）</a:t>
+              <a:t>可见光 RGB (00000000_co.png)</a:t>
             </a:r>
           </a:p>
         </p:txBody>
       </p:sp>
       <p:pic>
         <p:nvPicPr>
-          <p:cNvPr id="6" name="Picture 5" descr="vedai_ir.png"/>
+          <p:cNvPr id="6" name="Picture 5" descr="img_7401487859787263619.png"/>
           <p:cNvPicPr>
             <a:picLocks noChangeAspect="1"/>
           </p:cNvPicPr>
@@ -5404,7 +5167,7 @@
         </p:blipFill>
         <p:spPr>
           <a:xfrm>
-            <a:off x="3657600" y="3474720"/>
+            <a:off x="3840480" y="3017520"/>
             <a:ext cx="2286000" cy="2286000"/>
           </a:xfrm>
           <a:prstGeom prst="rect">
@@ -5420,8 +5183,8 @@
         </p:nvSpPr>
         <p:spPr>
           <a:xfrm>
-            <a:off x="3657600" y="5852160"/>
-            <a:ext cx="2286000" cy="274320"/>
+            <a:off x="3840480" y="5376672"/>
+            <a:ext cx="2286000" cy="228600"/>
           </a:xfrm>
           <a:prstGeom prst="rect">
             <a:avLst/>
@@ -5436,17 +5199,17 @@
           <a:p>
             <a:pPr>
               <a:spcAft>
-                <a:spcPts val="600"/>
+                <a:spcPts val="400"/>
               </a:spcAft>
-              <a:defRPr sz="1200">
+              <a:defRPr sz="1100">
                 <a:solidFill>
-                  <a:srgbClr val="444444"/>
+                  <a:srgbClr val="555555"/>
                 </a:solidFill>
                 <a:latin typeface="Times New Roman"/>
               </a:defRPr>
             </a:pPr>
             <a:r>
-              <a:t>红外 IR（00000000_ir.png）</a:t>
+              <a:t>红外 IR (00000000_ir.png)</a:t>
             </a:r>
           </a:p>
         </p:txBody>
@@ -5460,8 +5223,8 @@
           <p:nvPr/>
         </p:nvGraphicFramePr>
         <p:xfrm>
-          <a:off x="6583680" y="3474720"/>
-          <a:ext cx="5715000" cy="768096"/>
+          <a:off x="2811780.0" y="5303520"/>
+          <a:ext cx="6537960" cy="694944"/>
         </p:xfrm>
         <a:graphic>
           <a:graphicData uri="http://schemas.openxmlformats.org/drawingml/2006/table">
@@ -5470,24 +5233,23 @@
                 <a:tableStyleId>{5C22544A-7EE6-4342-B048-85BDC9FD1C3A}</a:tableStyleId>
               </a:tblPr>
               <a:tblGrid>
-                <a:gridCol w="822960"/>
-                <a:gridCol w="594360"/>
-                <a:gridCol w="594360"/>
-                <a:gridCol w="594360"/>
-                <a:gridCol w="640080"/>
-                <a:gridCol w="594360"/>
-                <a:gridCol w="502920"/>
-                <a:gridCol w="731520"/>
-                <a:gridCol w="640080"/>
+                <a:gridCol w="1097280"/>
+                <a:gridCol w="777240"/>
+                <a:gridCol w="777240"/>
+                <a:gridCol w="777240"/>
+                <a:gridCol w="777240"/>
+                <a:gridCol w="777240"/>
+                <a:gridCol w="777240"/>
+                <a:gridCol w="777240"/>
               </a:tblGrid>
-              <a:tr h="384048">
-                <a:tc>
-                  <a:txBody>
-                    <a:bodyPr/>
-                    <a:lstStyle/>
-                    <a:p>
-                      <a:pPr algn="ctr">
-                        <a:defRPr sz="1200" b="1">
+              <a:tr h="347472">
+                <a:tc>
+                  <a:txBody>
+                    <a:bodyPr/>
+                    <a:lstStyle/>
+                    <a:p>
+                      <a:pPr algn="ctr">
+                        <a:defRPr sz="1300" b="1">
                           <a:solidFill>
                             <a:srgbClr val="000000"/>
                           </a:solidFill>
@@ -5518,7 +5280,7 @@
                     <a:lstStyle/>
                     <a:p>
                       <a:pPr algn="ctr">
-                        <a:defRPr sz="1200" b="1">
+                        <a:defRPr sz="1300" b="1">
                           <a:solidFill>
                             <a:srgbClr val="000000"/>
                           </a:solidFill>
@@ -5549,7 +5311,7 @@
                     <a:lstStyle/>
                     <a:p>
                       <a:pPr algn="ctr">
-                        <a:defRPr sz="1200" b="1">
+                        <a:defRPr sz="1300" b="1">
                           <a:solidFill>
                             <a:srgbClr val="000000"/>
                           </a:solidFill>
@@ -5580,7 +5342,7 @@
                     <a:lstStyle/>
                     <a:p>
                       <a:pPr algn="ctr">
-                        <a:defRPr sz="1200" b="1">
+                        <a:defRPr sz="1300" b="1">
                           <a:solidFill>
                             <a:srgbClr val="000000"/>
                           </a:solidFill>
@@ -5611,7 +5373,7 @@
                     <a:lstStyle/>
                     <a:p>
                       <a:pPr algn="ctr">
-                        <a:defRPr sz="1200" b="1">
+                        <a:defRPr sz="1300" b="1">
                           <a:solidFill>
                             <a:srgbClr val="000000"/>
                           </a:solidFill>
@@ -5642,7 +5404,7 @@
                     <a:lstStyle/>
                     <a:p>
                       <a:pPr algn="ctr">
-                        <a:defRPr sz="1200" b="1">
+                        <a:defRPr sz="1300" b="1">
                           <a:solidFill>
                             <a:srgbClr val="000000"/>
                           </a:solidFill>
@@ -5673,7 +5435,7 @@
                     <a:lstStyle/>
                     <a:p>
                       <a:pPr algn="ctr">
-                        <a:defRPr sz="1200" b="1">
+                        <a:defRPr sz="1300" b="1">
                           <a:solidFill>
                             <a:srgbClr val="000000"/>
                           </a:solidFill>
@@ -5704,15 +5466,15 @@
                     <a:lstStyle/>
                     <a:p>
                       <a:pPr algn="ctr">
-                        <a:defRPr sz="1200" b="1">
-                          <a:solidFill>
-                            <a:srgbClr val="000000"/>
-                          </a:solidFill>
-                          <a:latin typeface="Times New Roman"/>
-                        </a:defRPr>
-                      </a:pPr>
-                      <a:r>
-                        <a:t>摩托车</a:t>
+                        <a:defRPr sz="1300" b="1">
+                          <a:solidFill>
+                            <a:srgbClr val="000000"/>
+                          </a:solidFill>
+                          <a:latin typeface="Times New Roman"/>
+                        </a:defRPr>
+                      </a:pPr>
+                      <a:r>
+                        <a:t>其他</a:t>
                       </a:r>
                     </a:p>
                   </a:txBody>
@@ -5729,54 +5491,49 @@
                     </a:lnB>
                   </a:tcPr>
                 </a:tc>
-                <a:tc>
-                  <a:txBody>
-                    <a:bodyPr/>
-                    <a:lstStyle/>
-                    <a:p>
-                      <a:pPr algn="ctr">
-                        <a:defRPr sz="1200" b="1">
-                          <a:solidFill>
-                            <a:srgbClr val="000000"/>
-                          </a:solidFill>
-                          <a:latin typeface="Times New Roman"/>
-                        </a:defRPr>
-                      </a:pPr>
-                      <a:r>
-                        <a:t>其他</a:t>
+              </a:tr>
+              <a:tr h="347472">
+                <a:tc>
+                  <a:txBody>
+                    <a:bodyPr/>
+                    <a:lstStyle/>
+                    <a:p>
+                      <a:pPr algn="ctr">
+                        <a:defRPr sz="1300" b="0">
+                          <a:solidFill>
+                            <a:srgbClr val="000000"/>
+                          </a:solidFill>
+                          <a:latin typeface="Times New Roman"/>
+                        </a:defRPr>
+                      </a:pPr>
+                      <a:r>
+                        <a:t>数量</a:t>
                       </a:r>
                     </a:p>
                   </a:txBody>
                   <a:tcPr anchor="ctr">
-                    <a:lnT w="19000">
-                      <a:solidFill>
-                        <a:srgbClr val="000000"/>
-                      </a:solidFill>
-                    </a:lnT>
-                    <a:lnB w="9500">
+                    <a:lnB w="19000">
                       <a:solidFill>
                         <a:srgbClr val="000000"/>
                       </a:solidFill>
                     </a:lnB>
                   </a:tcPr>
                 </a:tc>
-              </a:tr>
-              <a:tr h="384048">
-                <a:tc>
-                  <a:txBody>
-                    <a:bodyPr/>
-                    <a:lstStyle/>
-                    <a:p>
-                      <a:pPr algn="ctr">
-                        <a:defRPr sz="1200" b="0">
-                          <a:solidFill>
-                            <a:srgbClr val="000000"/>
-                          </a:solidFill>
-                          <a:latin typeface="Times New Roman"/>
-                        </a:defRPr>
-                      </a:pPr>
-                      <a:r>
-                        <a:t>数量</a:t>
+                <a:tc>
+                  <a:txBody>
+                    <a:bodyPr/>
+                    <a:lstStyle/>
+                    <a:p>
+                      <a:pPr algn="ctr">
+                        <a:defRPr sz="1300" b="0">
+                          <a:solidFill>
+                            <a:srgbClr val="000000"/>
+                          </a:solidFill>
+                          <a:latin typeface="Times New Roman"/>
+                        </a:defRPr>
+                      </a:pPr>
+                      <a:r>
+                        <a:t>955</a:t>
                       </a:r>
                     </a:p>
                   </a:txBody>
@@ -5794,15 +5551,15 @@
                     <a:lstStyle/>
                     <a:p>
                       <a:pPr algn="ctr">
-                        <a:defRPr sz="1200" b="0">
-                          <a:solidFill>
-                            <a:srgbClr val="000000"/>
-                          </a:solidFill>
-                          <a:latin typeface="Times New Roman"/>
-                        </a:defRPr>
-                      </a:pPr>
-                      <a:r>
-                        <a:t>955</a:t>
+                        <a:defRPr sz="1300" b="0">
+                          <a:solidFill>
+                            <a:srgbClr val="000000"/>
+                          </a:solidFill>
+                          <a:latin typeface="Times New Roman"/>
+                        </a:defRPr>
+                      </a:pPr>
+                      <a:r>
+                        <a:t>397</a:t>
                       </a:r>
                     </a:p>
                   </a:txBody>
@@ -5820,15 +5577,15 @@
                     <a:lstStyle/>
                     <a:p>
                       <a:pPr algn="ctr">
-                        <a:defRPr sz="1200" b="0">
-                          <a:solidFill>
-                            <a:srgbClr val="000000"/>
-                          </a:solidFill>
-                          <a:latin typeface="Times New Roman"/>
-                        </a:defRPr>
-                      </a:pPr>
-                      <a:r>
-                        <a:t>397</a:t>
+                        <a:defRPr sz="1300" b="0">
+                          <a:solidFill>
+                            <a:srgbClr val="000000"/>
+                          </a:solidFill>
+                          <a:latin typeface="Times New Roman"/>
+                        </a:defRPr>
+                      </a:pPr>
+                      <a:r>
+                        <a:t>307</a:t>
                       </a:r>
                     </a:p>
                   </a:txBody>
@@ -5846,15 +5603,15 @@
                     <a:lstStyle/>
                     <a:p>
                       <a:pPr algn="ctr">
-                        <a:defRPr sz="1200" b="0">
-                          <a:solidFill>
-                            <a:srgbClr val="000000"/>
-                          </a:solidFill>
-                          <a:latin typeface="Times New Roman"/>
-                        </a:defRPr>
-                      </a:pPr>
-                      <a:r>
-                        <a:t>307</a:t>
+                        <a:defRPr sz="1300" b="0">
+                          <a:solidFill>
+                            <a:srgbClr val="000000"/>
+                          </a:solidFill>
+                          <a:latin typeface="Times New Roman"/>
+                        </a:defRPr>
+                      </a:pPr>
+                      <a:r>
+                        <a:t>204</a:t>
                       </a:r>
                     </a:p>
                   </a:txBody>
@@ -5872,15 +5629,15 @@
                     <a:lstStyle/>
                     <a:p>
                       <a:pPr algn="ctr">
-                        <a:defRPr sz="1200" b="0">
-                          <a:solidFill>
-                            <a:srgbClr val="000000"/>
-                          </a:solidFill>
-                          <a:latin typeface="Times New Roman"/>
-                        </a:defRPr>
-                      </a:pPr>
-                      <a:r>
-                        <a:t>204</a:t>
+                        <a:defRPr sz="1300" b="0">
+                          <a:solidFill>
+                            <a:srgbClr val="000000"/>
+                          </a:solidFill>
+                          <a:latin typeface="Times New Roman"/>
+                        </a:defRPr>
+                      </a:pPr>
+                      <a:r>
+                        <a:t>190</a:t>
                       </a:r>
                     </a:p>
                   </a:txBody>
@@ -5898,15 +5655,15 @@
                     <a:lstStyle/>
                     <a:p>
                       <a:pPr algn="ctr">
-                        <a:defRPr sz="1200" b="0">
-                          <a:solidFill>
-                            <a:srgbClr val="000000"/>
-                          </a:solidFill>
-                          <a:latin typeface="Times New Roman"/>
-                        </a:defRPr>
-                      </a:pPr>
-                      <a:r>
-                        <a:t>190</a:t>
+                        <a:defRPr sz="1300" b="0">
+                          <a:solidFill>
+                            <a:srgbClr val="000000"/>
+                          </a:solidFill>
+                          <a:latin typeface="Times New Roman"/>
+                        </a:defRPr>
+                      </a:pPr>
+                      <a:r>
+                        <a:t>171</a:t>
                       </a:r>
                     </a:p>
                   </a:txBody>
@@ -5924,59 +5681,7 @@
                     <a:lstStyle/>
                     <a:p>
                       <a:pPr algn="ctr">
-                        <a:defRPr sz="1200" b="0">
-                          <a:solidFill>
-                            <a:srgbClr val="000000"/>
-                          </a:solidFill>
-                          <a:latin typeface="Times New Roman"/>
-                        </a:defRPr>
-                      </a:pPr>
-                      <a:r>
-                        <a:t>171</a:t>
-                      </a:r>
-                    </a:p>
-                  </a:txBody>
-                  <a:tcPr anchor="ctr">
-                    <a:lnB w="19000">
-                      <a:solidFill>
-                        <a:srgbClr val="000000"/>
-                      </a:solidFill>
-                    </a:lnB>
-                  </a:tcPr>
-                </a:tc>
-                <a:tc>
-                  <a:txBody>
-                    <a:bodyPr/>
-                    <a:lstStyle/>
-                    <a:p>
-                      <a:pPr algn="ctr">
-                        <a:defRPr sz="1200" b="0">
-                          <a:solidFill>
-                            <a:srgbClr val="000000"/>
-                          </a:solidFill>
-                          <a:latin typeface="Times New Roman"/>
-                        </a:defRPr>
-                      </a:pPr>
-                      <a:r>
-                        <a:t>105</a:t>
-                      </a:r>
-                    </a:p>
-                  </a:txBody>
-                  <a:tcPr anchor="ctr">
-                    <a:lnB w="19000">
-                      <a:solidFill>
-                        <a:srgbClr val="000000"/>
-                      </a:solidFill>
-                    </a:lnB>
-                  </a:tcPr>
-                </a:tc>
-                <a:tc>
-                  <a:txBody>
-                    <a:bodyPr/>
-                    <a:lstStyle/>
-                    <a:p>
-                      <a:pPr algn="ctr">
-                        <a:defRPr sz="1200" b="0">
+                        <a:defRPr sz="1300" b="0">
                           <a:solidFill>
                             <a:srgbClr val="000000"/>
                           </a:solidFill>
@@ -6035,8 +5740,8 @@
         </p:nvSpPr>
         <p:spPr>
           <a:xfrm>
-            <a:off x="548640" y="320040"/>
-            <a:ext cx="10972800" cy="640080"/>
+            <a:off x="822960" y="274320"/>
+            <a:ext cx="10515600" cy="594360"/>
           </a:xfrm>
           <a:prstGeom prst="rect">
             <a:avLst/>
@@ -6050,7 +5755,7 @@
           <a:lstStyle/>
           <a:p>
             <a:pPr>
-              <a:defRPr sz="3000" b="1">
+              <a:defRPr sz="2800" b="1">
                 <a:solidFill>
                   <a:srgbClr val="000000"/>
                 </a:solidFill>
@@ -6058,7 +5763,7 @@
               </a:defRPr>
             </a:pPr>
             <a:r>
-              <a:t>OLI2MSI — Landsat-8 → Sentinel-2 跨传感器图像翻译数据集</a:t>
+              <a:t>OLI2MSI — Landsat-8 → Sentinel-2 跨传感器图像翻译</a:t>
             </a:r>
           </a:p>
         </p:txBody>
@@ -6071,8 +5776,8 @@
         </p:nvSpPr>
         <p:spPr>
           <a:xfrm>
-            <a:off x="457200" y="1280160"/>
-            <a:ext cx="7498079" cy="4389120"/>
+            <a:off x="822960" y="1097280"/>
+            <a:ext cx="6400800" cy="2743200"/>
           </a:xfrm>
           <a:prstGeom prst="rect">
             <a:avLst/>
@@ -6087,9 +5792,9 @@
           <a:p>
             <a:pPr>
               <a:spcAft>
-                <a:spcPts val="600"/>
+                <a:spcPts val="400"/>
               </a:spcAft>
-              <a:defRPr sz="1600">
+              <a:defRPr sz="1500">
                 <a:solidFill>
                   <a:srgbClr val="000000"/>
                 </a:solidFill>
@@ -6097,15 +5802,15 @@
               </a:defRPr>
             </a:pPr>
             <a:r>
-              <a:t>• 任务：将 Landsat-8 OLI (30m) 图像翻译为 Sentinel-2 MSI (10m) 高质量图像</a:t>
+              <a:t>• 任务：Landsat-8 OLI (30m) 翻译为 Sentinel-2 MSI (10m)，带域迁移的超分重建</a:t>
             </a:r>
           </a:p>
           <a:p>
             <a:pPr>
               <a:spcAft>
-                <a:spcPts val="600"/>
+                <a:spcPts val="400"/>
               </a:spcAft>
-              <a:defRPr sz="1600">
+              <a:defRPr sz="1500">
                 <a:solidFill>
                   <a:srgbClr val="000000"/>
                 </a:solidFill>
@@ -6113,15 +5818,15 @@
               </a:defRPr>
             </a:pPr>
             <a:r>
-              <a:t>    本质为带域迁移的超分辨率重建</a:t>
+              <a:t>• 格式：GeoTIFF (.TIF) 多波段遥感图像</a:t>
             </a:r>
           </a:p>
           <a:p>
             <a:pPr>
               <a:spcAft>
-                <a:spcPts val="600"/>
+                <a:spcPts val="400"/>
               </a:spcAft>
-              <a:defRPr sz="1600">
+              <a:defRPr sz="1500">
                 <a:solidFill>
                   <a:srgbClr val="000000"/>
                 </a:solidFill>
@@ -6129,15 +5834,15 @@
               </a:defRPr>
             </a:pPr>
             <a:r>
-              <a:t>• 格式：GeoTIFF (.TIF) 多波段遥感图像</a:t>
+              <a:t>• LR 输入：Landsat-8 OLI, 30m, 单文件约 265 KB</a:t>
             </a:r>
           </a:p>
           <a:p>
             <a:pPr>
               <a:spcAft>
-                <a:spcPts val="600"/>
+                <a:spcPts val="400"/>
               </a:spcAft>
-              <a:defRPr sz="1600">
+              <a:defRPr sz="1500">
                 <a:solidFill>
                   <a:srgbClr val="000000"/>
                 </a:solidFill>
@@ -6145,15 +5850,15 @@
               </a:defRPr>
             </a:pPr>
             <a:r>
-              <a:t>• LR 输入：Landsat-8 OLI，30m 空间分辨率，单文件约 265 KB</a:t>
+              <a:t>• HR 真值：Sentinel-2 MSI, 10m, 单文件约 1.1 MB</a:t>
             </a:r>
           </a:p>
           <a:p>
             <a:pPr>
               <a:spcAft>
-                <a:spcPts val="600"/>
+                <a:spcPts val="400"/>
               </a:spcAft>
-              <a:defRPr sz="1600">
+              <a:defRPr sz="1500">
                 <a:solidFill>
                   <a:srgbClr val="000000"/>
                 </a:solidFill>
@@ -6161,15 +5866,15 @@
               </a:defRPr>
             </a:pPr>
             <a:r>
-              <a:t>• HR 真值：Sentinel-2 MSI，10m 空间分辨率，单文件约 1.1 MB</a:t>
+              <a:t>• 5 个地理场景 (ID: 126038~126042)，2019-09-23 同日采集，网格切分</a:t>
             </a:r>
           </a:p>
           <a:p>
             <a:pPr>
               <a:spcAft>
-                <a:spcPts val="600"/>
+                <a:spcPts val="400"/>
               </a:spcAft>
-              <a:defRPr sz="1600">
+              <a:defRPr sz="1500">
                 <a:solidFill>
                   <a:srgbClr val="000000"/>
                 </a:solidFill>
@@ -6178,38 +5883,6 @@
             </a:pPr>
             <a:r>
               <a:t>• 命名：L8_{场景ID}_{日期}_S2B_{日期}_T{瓦片号}_N{块号}.TIF</a:t>
-            </a:r>
-          </a:p>
-          <a:p>
-            <a:pPr>
-              <a:spcAft>
-                <a:spcPts val="600"/>
-              </a:spcAft>
-              <a:defRPr sz="1600">
-                <a:solidFill>
-                  <a:srgbClr val="000000"/>
-                </a:solidFill>
-                <a:latin typeface="Times New Roman"/>
-              </a:defRPr>
-            </a:pPr>
-            <a:r>
-              <a:t>• 5 个地理场景，2019-09-23 同日采集，按网格切分</a:t>
-            </a:r>
-          </a:p>
-          <a:p>
-            <a:pPr>
-              <a:spcAft>
-                <a:spcPts val="600"/>
-              </a:spcAft>
-              <a:defRPr sz="1600">
-                <a:solidFill>
-                  <a:srgbClr val="000000"/>
-                </a:solidFill>
-                <a:latin typeface="Times New Roman"/>
-              </a:defRPr>
-            </a:pPr>
-            <a:r>
-              <a:t>    场景 ID：126038, 126039, 126040, 126041, 126042</a:t>
             </a:r>
           </a:p>
         </p:txBody>
@@ -6223,8 +5896,8 @@
           <p:nvPr/>
         </p:nvGraphicFramePr>
         <p:xfrm>
-          <a:off x="8229600" y="1280160"/>
-          <a:ext cx="6217920" cy="1536192"/>
+          <a:off x="2926080.0" y="4114800"/>
+          <a:ext cx="6309360" cy="1389888"/>
         </p:xfrm>
         <a:graphic>
           <a:graphicData uri="http://schemas.openxmlformats.org/drawingml/2006/table">
@@ -6234,18 +5907,18 @@
               </a:tblPr>
               <a:tblGrid>
                 <a:gridCol w="1097280"/>
-                <a:gridCol w="1280160"/>
+                <a:gridCol w="1097280"/>
                 <a:gridCol w="914400"/>
-                <a:gridCol w="2926080"/>
+                <a:gridCol w="3200400"/>
               </a:tblGrid>
-              <a:tr h="384048">
-                <a:tc>
-                  <a:txBody>
-                    <a:bodyPr/>
-                    <a:lstStyle/>
-                    <a:p>
-                      <a:pPr algn="ctr">
-                        <a:defRPr sz="1400" b="1">
+              <a:tr h="347472">
+                <a:tc>
+                  <a:txBody>
+                    <a:bodyPr/>
+                    <a:lstStyle/>
+                    <a:p>
+                      <a:pPr algn="ctr">
+                        <a:defRPr sz="1300" b="1">
                           <a:solidFill>
                             <a:srgbClr val="000000"/>
                           </a:solidFill>
@@ -6276,15 +5949,15 @@
                     <a:lstStyle/>
                     <a:p>
                       <a:pPr algn="ctr">
-                        <a:defRPr sz="1400" b="1">
-                          <a:solidFill>
-                            <a:srgbClr val="000000"/>
-                          </a:solidFill>
-                          <a:latin typeface="Times New Roman"/>
-                        </a:defRPr>
-                      </a:pPr>
-                      <a:r>
-                        <a:t>图像对数量</a:t>
+                        <a:defRPr sz="1300" b="1">
+                          <a:solidFill>
+                            <a:srgbClr val="000000"/>
+                          </a:solidFill>
+                          <a:latin typeface="Times New Roman"/>
+                        </a:defRPr>
+                      </a:pPr>
+                      <a:r>
+                        <a:t>图像对</a:t>
                       </a:r>
                     </a:p>
                   </a:txBody>
@@ -6307,7 +5980,7 @@
                     <a:lstStyle/>
                     <a:p>
                       <a:pPr algn="ctr">
-                        <a:defRPr sz="1400" b="1">
+                        <a:defRPr sz="1300" b="1">
                           <a:solidFill>
                             <a:srgbClr val="000000"/>
                           </a:solidFill>
@@ -6338,7 +6011,7 @@
                     <a:lstStyle/>
                     <a:p>
                       <a:pPr algn="ctr">
-                        <a:defRPr sz="1400" b="1">
+                        <a:defRPr sz="1300" b="1">
                           <a:solidFill>
                             <a:srgbClr val="000000"/>
                           </a:solidFill>
@@ -6364,22 +6037,22 @@
                   </a:tcPr>
                 </a:tc>
               </a:tr>
-              <a:tr h="384048">
-                <a:tc>
-                  <a:txBody>
-                    <a:bodyPr/>
-                    <a:lstStyle/>
-                    <a:p>
-                      <a:pPr algn="ctr">
-                        <a:defRPr sz="1400" b="0">
-                          <a:solidFill>
-                            <a:srgbClr val="000000"/>
-                          </a:solidFill>
-                          <a:latin typeface="Times New Roman"/>
-                        </a:defRPr>
-                      </a:pPr>
-                      <a:r>
-                        <a:t>训练集</a:t>
+              <a:tr h="347472">
+                <a:tc>
+                  <a:txBody>
+                    <a:bodyPr/>
+                    <a:lstStyle/>
+                    <a:p>
+                      <a:pPr algn="ctr">
+                        <a:defRPr sz="1300" b="0">
+                          <a:solidFill>
+                            <a:srgbClr val="000000"/>
+                          </a:solidFill>
+                          <a:latin typeface="Times New Roman"/>
+                        </a:defRPr>
+                      </a:pPr>
+                      <a:r>
+                        <a:t>训练</a:t>
                       </a:r>
                     </a:p>
                   </a:txBody>
@@ -6391,7 +6064,7 @@
                     <a:lstStyle/>
                     <a:p>
                       <a:pPr algn="ctr">
-                        <a:defRPr sz="1400" b="0">
+                        <a:defRPr sz="1300" b="0">
                           <a:solidFill>
                             <a:srgbClr val="000000"/>
                           </a:solidFill>
@@ -6411,7 +6084,7 @@
                     <a:lstStyle/>
                     <a:p>
                       <a:pPr algn="ctr">
-                        <a:defRPr sz="1400" b="0">
+                        <a:defRPr sz="1300" b="0">
                           <a:solidFill>
                             <a:srgbClr val="000000"/>
                           </a:solidFill>
@@ -6431,7 +6104,7 @@
                     <a:lstStyle/>
                     <a:p>
                       <a:pPr algn="ctr">
-                        <a:defRPr sz="1400" b="0">
+                        <a:defRPr sz="1300" b="0">
                           <a:solidFill>
                             <a:srgbClr val="000000"/>
                           </a:solidFill>
@@ -6446,22 +6119,22 @@
                   <a:tcPr anchor="ctr"/>
                 </a:tc>
               </a:tr>
-              <a:tr h="384048">
-                <a:tc>
-                  <a:txBody>
-                    <a:bodyPr/>
-                    <a:lstStyle/>
-                    <a:p>
-                      <a:pPr algn="ctr">
-                        <a:defRPr sz="1400" b="0">
-                          <a:solidFill>
-                            <a:srgbClr val="000000"/>
-                          </a:solidFill>
-                          <a:latin typeface="Times New Roman"/>
-                        </a:defRPr>
-                      </a:pPr>
-                      <a:r>
-                        <a:t>测试集</a:t>
+              <a:tr h="347472">
+                <a:tc>
+                  <a:txBody>
+                    <a:bodyPr/>
+                    <a:lstStyle/>
+                    <a:p>
+                      <a:pPr algn="ctr">
+                        <a:defRPr sz="1300" b="0">
+                          <a:solidFill>
+                            <a:srgbClr val="000000"/>
+                          </a:solidFill>
+                          <a:latin typeface="Times New Roman"/>
+                        </a:defRPr>
+                      </a:pPr>
+                      <a:r>
+                        <a:t>测试</a:t>
                       </a:r>
                     </a:p>
                   </a:txBody>
@@ -6473,7 +6146,7 @@
                     <a:lstStyle/>
                     <a:p>
                       <a:pPr algn="ctr">
-                        <a:defRPr sz="1400" b="0">
+                        <a:defRPr sz="1300" b="0">
                           <a:solidFill>
                             <a:srgbClr val="000000"/>
                           </a:solidFill>
@@ -6493,7 +6166,7 @@
                     <a:lstStyle/>
                     <a:p>
                       <a:pPr algn="ctr">
-                        <a:defRPr sz="1400" b="0">
+                        <a:defRPr sz="1300" b="0">
                           <a:solidFill>
                             <a:srgbClr val="000000"/>
                           </a:solidFill>
@@ -6513,7 +6186,7 @@
                     <a:lstStyle/>
                     <a:p>
                       <a:pPr algn="ctr">
-                        <a:defRPr sz="1400" b="0">
+                        <a:defRPr sz="1300" b="0">
                           <a:solidFill>
                             <a:srgbClr val="000000"/>
                           </a:solidFill>
@@ -6528,14 +6201,14 @@
                   <a:tcPr anchor="ctr"/>
                 </a:tc>
               </a:tr>
-              <a:tr h="384048">
-                <a:tc>
-                  <a:txBody>
-                    <a:bodyPr/>
-                    <a:lstStyle/>
-                    <a:p>
-                      <a:pPr algn="ctr">
-                        <a:defRPr sz="1400" b="0">
+              <a:tr h="347472">
+                <a:tc>
+                  <a:txBody>
+                    <a:bodyPr/>
+                    <a:lstStyle/>
+                    <a:p>
+                      <a:pPr algn="ctr">
+                        <a:defRPr sz="1300" b="0">
                           <a:solidFill>
                             <a:srgbClr val="000000"/>
                           </a:solidFill>
@@ -6561,7 +6234,7 @@
                     <a:lstStyle/>
                     <a:p>
                       <a:pPr algn="ctr">
-                        <a:defRPr sz="1400" b="0">
+                        <a:defRPr sz="1300" b="0">
                           <a:solidFill>
                             <a:srgbClr val="000000"/>
                           </a:solidFill>
@@ -6587,7 +6260,7 @@
                     <a:lstStyle/>
                     <a:p>
                       <a:pPr algn="ctr">
-                        <a:defRPr sz="1400" b="0">
+                        <a:defRPr sz="1300" b="0">
                           <a:solidFill>
                             <a:srgbClr val="000000"/>
                           </a:solidFill>
@@ -6613,7 +6286,7 @@
                     <a:lstStyle/>
                     <a:p>
                       <a:pPr algn="ctr">
-                        <a:defRPr sz="1400" b="0">
+                        <a:defRPr sz="1300" b="0">
                           <a:solidFill>
                             <a:srgbClr val="000000"/>
                           </a:solidFill>
@@ -6672,8 +6345,8 @@
         </p:nvSpPr>
         <p:spPr>
           <a:xfrm>
-            <a:off x="548640" y="320040"/>
-            <a:ext cx="10972800" cy="640080"/>
+            <a:off x="822960" y="274320"/>
+            <a:ext cx="10515600" cy="594360"/>
           </a:xfrm>
           <a:prstGeom prst="rect">
             <a:avLst/>
@@ -6687,7 +6360,7 @@
           <a:lstStyle/>
           <a:p>
             <a:pPr>
-              <a:defRPr sz="3000" b="1">
+              <a:defRPr sz="2800" b="1">
                 <a:solidFill>
                   <a:srgbClr val="000000"/>
                 </a:solidFill>
@@ -6708,8 +6381,8 @@
         </p:nvSpPr>
         <p:spPr>
           <a:xfrm>
-            <a:off x="457200" y="1280160"/>
-            <a:ext cx="6858000" cy="3200400"/>
+            <a:off x="822960" y="1188720"/>
+            <a:ext cx="6858000" cy="2011680"/>
           </a:xfrm>
           <a:prstGeom prst="rect">
             <a:avLst/>
@@ -6724,9 +6397,9 @@
           <a:p>
             <a:pPr>
               <a:spcAft>
-                <a:spcPts val="600"/>
+                <a:spcPts val="400"/>
               </a:spcAft>
-              <a:defRPr sz="1600">
+              <a:defRPr sz="1500">
                 <a:solidFill>
                   <a:srgbClr val="000000"/>
                 </a:solidFill>
@@ -6740,9 +6413,9 @@
           <a:p>
             <a:pPr>
               <a:spcAft>
-                <a:spcPts val="600"/>
+                <a:spcPts val="400"/>
               </a:spcAft>
-              <a:defRPr sz="1600">
+              <a:defRPr sz="1500">
                 <a:solidFill>
                   <a:srgbClr val="000000"/>
                 </a:solidFill>
@@ -6750,15 +6423,15 @@
               </a:defRPr>
             </a:pPr>
             <a:r>
-              <a:t>• 来源：Rivadeneira et al., 2024, "Cross-Spectral Image Registration:</a:t>
+              <a:t>• 来源：Rivadeneira et al., 2024, Cross-Spectral Image Registration</a:t>
             </a:r>
           </a:p>
           <a:p>
             <a:pPr>
               <a:spcAft>
-                <a:spcPts val="600"/>
+                <a:spcPts val="400"/>
               </a:spcAft>
-              <a:defRPr sz="1600">
+              <a:defRPr sz="1500">
                 <a:solidFill>
                   <a:srgbClr val="000000"/>
                 </a:solidFill>
@@ -6766,15 +6439,15 @@
               </a:defRPr>
             </a:pPr>
             <a:r>
-              <a:t>    a Comparative Study and a New Benchmark Dataset"</a:t>
+              <a:t>• 格式：热红外 + 可见光配对图像，均为 640×448</a:t>
             </a:r>
           </a:p>
           <a:p>
             <a:pPr>
               <a:spcAft>
-                <a:spcPts val="600"/>
+                <a:spcPts val="400"/>
               </a:spcAft>
-              <a:defRPr sz="1600">
+              <a:defRPr sz="1500">
                 <a:solidFill>
                   <a:srgbClr val="000000"/>
                 </a:solidFill>
@@ -6782,15 +6455,15 @@
               </a:defRPr>
             </a:pPr>
             <a:r>
-              <a:t>• 格式：热红外 + 可见光配对图像，均为 640×448，RGB</a:t>
+              <a:t>• 共 1,000 对：训练 700 / 验证 200 / 测试 100</a:t>
             </a:r>
           </a:p>
           <a:p>
             <a:pPr>
               <a:spcAft>
-                <a:spcPts val="600"/>
+                <a:spcPts val="400"/>
               </a:spcAft>
-              <a:defRPr sz="1600">
+              <a:defRPr sz="1500">
                 <a:solidFill>
                   <a:srgbClr val="000000"/>
                 </a:solidFill>
@@ -6798,46 +6471,14 @@
               </a:defRPr>
             </a:pPr>
             <a:r>
-              <a:t>• 共 1,000 对：训练 700 / 验证 200 / 测试 100</a:t>
-            </a:r>
-          </a:p>
-          <a:p>
-            <a:pPr>
-              <a:spcAft>
-                <a:spcPts val="600"/>
-              </a:spcAft>
-              <a:defRPr sz="1600">
-                <a:solidFill>
-                  <a:srgbClr val="000000"/>
-                </a:solidFill>
-                <a:latin typeface="Times New Roman"/>
-              </a:defRPr>
-            </a:pPr>
-            <a:r>
               <a:t>• 目录：{thermal, visible} / {train, val, test}</a:t>
-            </a:r>
-          </a:p>
-          <a:p>
-            <a:pPr>
-              <a:spcAft>
-                <a:spcPts val="600"/>
-              </a:spcAft>
-              <a:defRPr sz="1600">
-                <a:solidFill>
-                  <a:srgbClr val="000000"/>
-                </a:solidFill>
-                <a:latin typeface="Times New Roman"/>
-              </a:defRPr>
-            </a:pPr>
-            <a:r>
-              <a:t>• 场景涵盖多种真实环境，用于评估跨光谱配准算法性能</a:t>
             </a:r>
           </a:p>
         </p:txBody>
       </p:sp>
       <p:pic>
         <p:nvPicPr>
-          <p:cNvPr id="4" name="Picture 3" descr="cidis_th.png"/>
+          <p:cNvPr id="4" name="Picture 3" descr="img_169433663470330091.png"/>
           <p:cNvPicPr>
             <a:picLocks noChangeAspect="1"/>
           </p:cNvPicPr>
@@ -6851,8 +6492,8 @@
         </p:blipFill>
         <p:spPr>
           <a:xfrm>
-            <a:off x="7772400" y="1280160"/>
-            <a:ext cx="1828800" cy="1280160"/>
+            <a:off x="1371600" y="3291840"/>
+            <a:ext cx="2286000" cy="1600200"/>
           </a:xfrm>
           <a:prstGeom prst="rect">
             <a:avLst/>
@@ -6867,8 +6508,8 @@
         </p:nvSpPr>
         <p:spPr>
           <a:xfrm>
-            <a:off x="7772400" y="2743200"/>
-            <a:ext cx="1828800" cy="274320"/>
+            <a:off x="1371600" y="4965192"/>
+            <a:ext cx="2286000" cy="228600"/>
           </a:xfrm>
           <a:prstGeom prst="rect">
             <a:avLst/>
@@ -6883,24 +6524,24 @@
           <a:p>
             <a:pPr>
               <a:spcAft>
-                <a:spcPts val="600"/>
+                <a:spcPts val="400"/>
               </a:spcAft>
-              <a:defRPr sz="1200">
+              <a:defRPr sz="1100">
                 <a:solidFill>
-                  <a:srgbClr val="444444"/>
+                  <a:srgbClr val="555555"/>
                 </a:solidFill>
                 <a:latin typeface="Times New Roman"/>
               </a:defRPr>
             </a:pPr>
             <a:r>
-              <a:t>热红外</a:t>
+              <a:t>热红外示例</a:t>
             </a:r>
           </a:p>
         </p:txBody>
       </p:sp>
       <p:pic>
         <p:nvPicPr>
-          <p:cNvPr id="6" name="Picture 5" descr="cidis_vi.png"/>
+          <p:cNvPr id="6" name="Picture 5" descr="img_5649456737001813785.png"/>
           <p:cNvPicPr>
             <a:picLocks noChangeAspect="1"/>
           </p:cNvPicPr>
@@ -6914,8 +6555,8 @@
         </p:blipFill>
         <p:spPr>
           <a:xfrm>
-            <a:off x="10058400" y="1280160"/>
-            <a:ext cx="1828800" cy="1280160"/>
+            <a:off x="4114800" y="3291840"/>
+            <a:ext cx="2286000" cy="1600200"/>
           </a:xfrm>
           <a:prstGeom prst="rect">
             <a:avLst/>
@@ -6930,8 +6571,8 @@
         </p:nvSpPr>
         <p:spPr>
           <a:xfrm>
-            <a:off x="10058400" y="2743200"/>
-            <a:ext cx="1828800" cy="274320"/>
+            <a:off x="4114800" y="4965192"/>
+            <a:ext cx="2286000" cy="228600"/>
           </a:xfrm>
           <a:prstGeom prst="rect">
             <a:avLst/>
@@ -6946,17 +6587,17 @@
           <a:p>
             <a:pPr>
               <a:spcAft>
-                <a:spcPts val="600"/>
+                <a:spcPts val="400"/>
               </a:spcAft>
-              <a:defRPr sz="1200">
+              <a:defRPr sz="1100">
                 <a:solidFill>
-                  <a:srgbClr val="444444"/>
+                  <a:srgbClr val="555555"/>
                 </a:solidFill>
                 <a:latin typeface="Times New Roman"/>
               </a:defRPr>
             </a:pPr>
             <a:r>
-              <a:t>可见光</a:t>
+              <a:t>可见光示例</a:t>
             </a:r>
           </a:p>
         </p:txBody>
@@ -6970,8 +6611,8 @@
           <p:nvPr/>
         </p:nvGraphicFramePr>
         <p:xfrm>
-          <a:off x="457200" y="5303520"/>
-          <a:ext cx="4389120" cy="1536192"/>
+          <a:off x="3886200.0" y="5669280"/>
+          <a:ext cx="4389120" cy="1389888"/>
         </p:xfrm>
         <a:graphic>
           <a:graphicData uri="http://schemas.openxmlformats.org/drawingml/2006/table">
@@ -6985,7 +6626,7 @@
                 <a:gridCol w="1097280"/>
                 <a:gridCol w="1097280"/>
               </a:tblGrid>
-              <a:tr h="384048">
+              <a:tr h="347472">
                 <a:tc>
                   <a:txBody>
                     <a:bodyPr/>
@@ -7111,7 +6752,7 @@
                   </a:tcPr>
                 </a:tc>
               </a:tr>
-              <a:tr h="384048">
+              <a:tr h="347472">
                 <a:tc>
                   <a:txBody>
                     <a:bodyPr/>
@@ -7193,7 +6834,7 @@
                   <a:tcPr anchor="ctr"/>
                 </a:tc>
               </a:tr>
-              <a:tr h="384048">
+              <a:tr h="347472">
                 <a:tc>
                   <a:txBody>
                     <a:bodyPr/>
@@ -7275,7 +6916,7 @@
                   <a:tcPr anchor="ctr"/>
                 </a:tc>
               </a:tr>
-              <a:tr h="384048">
+              <a:tr h="347472">
                 <a:tc>
                   <a:txBody>
                     <a:bodyPr/>
@@ -7419,8 +7060,8 @@
         </p:nvSpPr>
         <p:spPr>
           <a:xfrm>
-            <a:off x="548640" y="320040"/>
-            <a:ext cx="10972800" cy="640080"/>
+            <a:off x="822960" y="274320"/>
+            <a:ext cx="10515600" cy="594360"/>
           </a:xfrm>
           <a:prstGeom prst="rect">
             <a:avLst/>
@@ -7434,7 +7075,7 @@
           <a:lstStyle/>
           <a:p>
             <a:pPr>
-              <a:defRPr sz="3000" b="1">
+              <a:defRPr sz="2800" b="1">
                 <a:solidFill>
                   <a:srgbClr val="000000"/>
                 </a:solidFill>
@@ -7455,8 +7096,8 @@
         </p:nvSpPr>
         <p:spPr>
           <a:xfrm>
-            <a:off x="457200" y="1280160"/>
-            <a:ext cx="6858000" cy="3657600"/>
+            <a:off x="822960" y="1097280"/>
+            <a:ext cx="6858000" cy="1645920"/>
           </a:xfrm>
           <a:prstGeom prst="rect">
             <a:avLst/>
@@ -7471,9 +7112,9 @@
           <a:p>
             <a:pPr>
               <a:spcAft>
-                <a:spcPts val="600"/>
+                <a:spcPts val="400"/>
               </a:spcAft>
-              <a:defRPr sz="1600">
+              <a:defRPr sz="1500">
                 <a:solidFill>
                   <a:srgbClr val="000000"/>
                 </a:solidFill>
@@ -7481,15 +7122,15 @@
               </a:defRPr>
             </a:pPr>
             <a:r>
-              <a:t>• 任务：以可见光图像为引导，对热红外图像进行 ×8 和 ×16 超分辨率重建</a:t>
+              <a:t>• 任务：以可见光为引导，对热红外图像进行 ×8 和 ×16 超分辨率重建</a:t>
             </a:r>
           </a:p>
           <a:p>
             <a:pPr>
               <a:spcAft>
-                <a:spcPts val="600"/>
+                <a:spcPts val="400"/>
               </a:spcAft>
-              <a:defRPr sz="1600">
+              <a:defRPr sz="1500">
                 <a:solidFill>
                   <a:srgbClr val="000000"/>
                 </a:solidFill>
@@ -7497,15 +7138,15 @@
               </a:defRPr>
             </a:pPr>
             <a:r>
-              <a:t>• 基于 CIDIS 数据集构建，添加合成退化（下采样）生成 LR 图像</a:t>
+              <a:t>• 基于 CIDIS 构建，合成退化生成 LR；GT 640×448, LR×8 80×56, LR×16 40×28</a:t>
             </a:r>
           </a:p>
           <a:p>
             <a:pPr>
               <a:spcAft>
-                <a:spcPts val="600"/>
+                <a:spcPts val="400"/>
               </a:spcAft>
-              <a:defRPr sz="1600">
+              <a:defRPr sz="1500">
                 <a:solidFill>
                   <a:srgbClr val="000000"/>
                 </a:solidFill>
@@ -7513,15 +7154,15 @@
               </a:defRPr>
             </a:pPr>
             <a:r>
-              <a:t>• 热红外 GT：640×448，LR×8：80×56，LR×16：40×28</a:t>
+              <a:t>• 可见光引导图 640×448 (提供高频纹理引导)</a:t>
             </a:r>
           </a:p>
           <a:p>
             <a:pPr>
               <a:spcAft>
-                <a:spcPts val="600"/>
+                <a:spcPts val="400"/>
               </a:spcAft>
-              <a:defRPr sz="1600">
+              <a:defRPr sz="1500">
                 <a:solidFill>
                   <a:srgbClr val="000000"/>
                 </a:solidFill>
@@ -7529,62 +7170,14 @@
               </a:defRPr>
             </a:pPr>
             <a:r>
-              <a:t>• 可见光引导图：640×448（与 GT 同尺寸，提供高频纹理引导）</a:t>
-            </a:r>
-          </a:p>
-          <a:p>
-            <a:pPr>
-              <a:spcAft>
-                <a:spcPts val="600"/>
-              </a:spcAft>
-              <a:defRPr sz="1600">
-                <a:solidFill>
-                  <a:srgbClr val="000000"/>
-                </a:solidFill>
-                <a:latin typeface="Times New Roman"/>
-              </a:defRPr>
-            </a:pPr>
-            <a:r>
-              <a:t>• 目录结构：{thermal, visible} / {train, val, test}</a:t>
-            </a:r>
-          </a:p>
-          <a:p>
-            <a:pPr>
-              <a:spcAft>
-                <a:spcPts val="600"/>
-              </a:spcAft>
-              <a:defRPr sz="1600">
-                <a:solidFill>
-                  <a:srgbClr val="000000"/>
-                </a:solidFill>
-                <a:latin typeface="Times New Roman"/>
-              </a:defRPr>
-            </a:pPr>
-            <a:r>
-              <a:t>    thermal 内含 {GT, LR_x8, LR_x16} 子目录</a:t>
-            </a:r>
-          </a:p>
-          <a:p>
-            <a:pPr>
-              <a:spcAft>
-                <a:spcPts val="600"/>
-              </a:spcAft>
-              <a:defRPr sz="1600">
-                <a:solidFill>
-                  <a:srgbClr val="000000"/>
-                </a:solidFill>
-                <a:latin typeface="Times New Roman"/>
-              </a:defRPr>
-            </a:pPr>
-            <a:r>
-              <a:t>• 训练 700 对 / 验证 200 对 / 测试 40 对（×8 和 ×16 各 40 张）</a:t>
+              <a:t>• 训练 700 对 / 验证 200 对 / 测试 40 对 (×8 和 ×16 各 40 张)</a:t>
             </a:r>
           </a:p>
         </p:txBody>
       </p:sp>
       <p:pic>
         <p:nvPicPr>
-          <p:cNvPr id="4" name="Picture 3" descr="cg_GT 640.png"/>
+          <p:cNvPr id="4" name="Picture 3" descr="img_169433663470330091.png"/>
           <p:cNvPicPr>
             <a:picLocks noChangeAspect="1"/>
           </p:cNvPicPr>
@@ -7598,8 +7191,8 @@
         </p:blipFill>
         <p:spPr>
           <a:xfrm>
-            <a:off x="7772400" y="1280160"/>
-            <a:ext cx="2194560" cy="1536192"/>
+            <a:off x="822960" y="3017520"/>
+            <a:ext cx="2011680" cy="1408176"/>
           </a:xfrm>
           <a:prstGeom prst="rect">
             <a:avLst/>
@@ -7614,8 +7207,8 @@
         </p:nvSpPr>
         <p:spPr>
           <a:xfrm>
-            <a:off x="7772400" y="2487168"/>
-            <a:ext cx="2194560" cy="274320"/>
+            <a:off x="822960" y="4498848"/>
+            <a:ext cx="2011680" cy="228600"/>
           </a:xfrm>
           <a:prstGeom prst="rect">
             <a:avLst/>
@@ -7630,11 +7223,11 @@
           <a:p>
             <a:pPr>
               <a:spcAft>
-                <a:spcPts val="600"/>
+                <a:spcPts val="400"/>
               </a:spcAft>
-              <a:defRPr sz="1100">
+              <a:defRPr sz="1000">
                 <a:solidFill>
-                  <a:srgbClr val="444444"/>
+                  <a:srgbClr val="555555"/>
                 </a:solidFill>
                 <a:latin typeface="Times New Roman"/>
               </a:defRPr>
@@ -7647,7 +7240,7 @@
       </p:sp>
       <p:pic>
         <p:nvPicPr>
-          <p:cNvPr id="6" name="Picture 5" descr="cg_可见光引导 .png"/>
+          <p:cNvPr id="6" name="Picture 5" descr="img_5649456737001813785.png"/>
           <p:cNvPicPr>
             <a:picLocks noChangeAspect="1"/>
           </p:cNvPicPr>
@@ -7661,8 +7254,8 @@
         </p:blipFill>
         <p:spPr>
           <a:xfrm>
-            <a:off x="7772400" y="3840480"/>
-            <a:ext cx="2194560" cy="1536192"/>
+            <a:off x="3108960" y="3017520"/>
+            <a:ext cx="2011680" cy="1408176"/>
           </a:xfrm>
           <a:prstGeom prst="rect">
             <a:avLst/>
@@ -7677,8 +7270,8 @@
         </p:nvSpPr>
         <p:spPr>
           <a:xfrm>
-            <a:off x="7772400" y="5047488"/>
-            <a:ext cx="2194560" cy="274320"/>
+            <a:off x="3108960" y="4498848"/>
+            <a:ext cx="2011680" cy="228600"/>
           </a:xfrm>
           <a:prstGeom prst="rect">
             <a:avLst/>
@@ -7693,11 +7286,11 @@
           <a:p>
             <a:pPr>
               <a:spcAft>
-                <a:spcPts val="600"/>
+                <a:spcPts val="400"/>
               </a:spcAft>
-              <a:defRPr sz="1100">
+              <a:defRPr sz="1000">
                 <a:solidFill>
-                  <a:srgbClr val="444444"/>
+                  <a:srgbClr val="555555"/>
                 </a:solidFill>
                 <a:latin typeface="Times New Roman"/>
               </a:defRPr>
@@ -7710,7 +7303,7 @@
       </p:sp>
       <p:pic>
         <p:nvPicPr>
-          <p:cNvPr id="8" name="Picture 7" descr="cg_LR×8 8.png"/>
+          <p:cNvPr id="8" name="Picture 7" descr="img_8787645141089860416.png"/>
           <p:cNvPicPr>
             <a:picLocks noChangeAspect="1"/>
           </p:cNvPicPr>
@@ -7724,7 +7317,7 @@
         </p:blipFill>
         <p:spPr>
           <a:xfrm>
-            <a:off x="7772400" y="4663440"/>
+            <a:off x="5394960" y="3017520"/>
             <a:ext cx="640080" cy="448056"/>
           </a:xfrm>
           <a:prstGeom prst="rect">
@@ -7740,8 +7333,8 @@
         </p:nvSpPr>
         <p:spPr>
           <a:xfrm>
-            <a:off x="7772400" y="5015484"/>
-            <a:ext cx="640080" cy="274320"/>
+            <a:off x="5394960" y="3538728"/>
+            <a:ext cx="640080" cy="228600"/>
           </a:xfrm>
           <a:prstGeom prst="rect">
             <a:avLst/>
@@ -7756,24 +7349,40 @@
           <a:p>
             <a:pPr>
               <a:spcAft>
-                <a:spcPts val="600"/>
+                <a:spcPts val="400"/>
               </a:spcAft>
-              <a:defRPr sz="1100">
+              <a:defRPr sz="1000">
                 <a:solidFill>
-                  <a:srgbClr val="444444"/>
+                  <a:srgbClr val="555555"/>
                 </a:solidFill>
                 <a:latin typeface="Times New Roman"/>
               </a:defRPr>
             </a:pPr>
             <a:r>
-              <a:t>LR×8 80×56</a:t>
+              <a:t>LR×8</a:t>
+            </a:r>
+          </a:p>
+          <a:p>
+            <a:pPr>
+              <a:spcAft>
+                <a:spcPts val="400"/>
+              </a:spcAft>
+              <a:defRPr sz="1000">
+                <a:solidFill>
+                  <a:srgbClr val="555555"/>
+                </a:solidFill>
+                <a:latin typeface="Times New Roman"/>
+              </a:defRPr>
+            </a:pPr>
+            <a:r>
+              <a:t>80×56</a:t>
             </a:r>
           </a:p>
         </p:txBody>
       </p:sp>
       <p:pic>
         <p:nvPicPr>
-          <p:cNvPr id="10" name="Picture 9" descr="cg_LR×16 .png"/>
+          <p:cNvPr id="10" name="Picture 9" descr="img_6596410817323242674.png"/>
           <p:cNvPicPr>
             <a:picLocks noChangeAspect="1"/>
           </p:cNvPicPr>
@@ -7787,7 +7396,7 @@
         </p:blipFill>
         <p:spPr>
           <a:xfrm>
-            <a:off x="7772400" y="5943600"/>
+            <a:off x="6400800" y="3017520"/>
             <a:ext cx="320040" cy="224028"/>
           </a:xfrm>
           <a:prstGeom prst="rect">
@@ -7803,8 +7412,8 @@
         </p:nvSpPr>
         <p:spPr>
           <a:xfrm>
-            <a:off x="7772400" y="6119622"/>
-            <a:ext cx="320040" cy="274320"/>
+            <a:off x="6400800" y="3314700"/>
+            <a:ext cx="320040" cy="228600"/>
           </a:xfrm>
           <a:prstGeom prst="rect">
             <a:avLst/>
@@ -7819,17 +7428,33 @@
           <a:p>
             <a:pPr>
               <a:spcAft>
-                <a:spcPts val="600"/>
+                <a:spcPts val="400"/>
               </a:spcAft>
-              <a:defRPr sz="1100">
+              <a:defRPr sz="1000">
                 <a:solidFill>
-                  <a:srgbClr val="444444"/>
+                  <a:srgbClr val="555555"/>
                 </a:solidFill>
                 <a:latin typeface="Times New Roman"/>
               </a:defRPr>
             </a:pPr>
             <a:r>
-              <a:t>LR×16 40×28</a:t>
+              <a:t>LR×16</a:t>
+            </a:r>
+          </a:p>
+          <a:p>
+            <a:pPr>
+              <a:spcAft>
+                <a:spcPts val="400"/>
+              </a:spcAft>
+              <a:defRPr sz="1000">
+                <a:solidFill>
+                  <a:srgbClr val="555555"/>
+                </a:solidFill>
+                <a:latin typeface="Times New Roman"/>
+              </a:defRPr>
+            </a:pPr>
+            <a:r>
+              <a:t>40×28</a:t>
             </a:r>
           </a:p>
         </p:txBody>
@@ -7843,8 +7468,8 @@
           <p:nvPr/>
         </p:nvGraphicFramePr>
         <p:xfrm>
-          <a:off x="457200" y="5303520"/>
-          <a:ext cx="7589520" cy="1536192"/>
+          <a:off x="2286000.0" y="5029200"/>
+          <a:ext cx="7589520" cy="1389888"/>
         </p:xfrm>
         <a:graphic>
           <a:graphicData uri="http://schemas.openxmlformats.org/drawingml/2006/table">
@@ -7858,7 +7483,7 @@
                 <a:gridCol w="1645920"/>
                 <a:gridCol w="2286000"/>
               </a:tblGrid>
-              <a:tr h="384048">
+              <a:tr h="347472">
                 <a:tc>
                   <a:txBody>
                     <a:bodyPr/>
@@ -7966,7 +7591,7 @@
                         </a:defRPr>
                       </a:pPr>
                       <a:r>
-                        <a:t>分辨率变化</a:t>
+                        <a:t>分辨率</a:t>
                       </a:r>
                     </a:p>
                   </a:txBody>
@@ -7984,7 +7609,7 @@
                   </a:tcPr>
                 </a:tc>
               </a:tr>
-              <a:tr h="384048">
+              <a:tr h="347472">
                 <a:tc>
                   <a:txBody>
                     <a:bodyPr/>
@@ -8066,7 +7691,7 @@
                   <a:tcPr anchor="ctr"/>
                 </a:tc>
               </a:tr>
-              <a:tr h="384048">
+              <a:tr h="347472">
                 <a:tc>
                   <a:txBody>
                     <a:bodyPr/>
@@ -8145,7 +7770,7 @@
                   <a:tcPr anchor="ctr"/>
                 </a:tc>
               </a:tr>
-              <a:tr h="384048">
+              <a:tr h="347472">
                 <a:tc>
                   <a:txBody>
                     <a:bodyPr/>
@@ -8289,8 +7914,8 @@
         </p:nvSpPr>
         <p:spPr>
           <a:xfrm>
-            <a:off x="548640" y="320040"/>
-            <a:ext cx="10972800" cy="640080"/>
+            <a:off x="822960" y="274320"/>
+            <a:ext cx="10515600" cy="594360"/>
           </a:xfrm>
           <a:prstGeom prst="rect">
             <a:avLst/>
@@ -8304,7 +7929,7 @@
           <a:lstStyle/>
           <a:p>
             <a:pPr>
-              <a:defRPr sz="3000" b="1">
+              <a:defRPr sz="2800" b="1">
                 <a:solidFill>
                   <a:srgbClr val="000000"/>
                 </a:solidFill>
@@ -8326,8 +7951,8 @@
           <p:nvPr/>
         </p:nvGraphicFramePr>
         <p:xfrm>
-          <a:off x="274320" y="1371600"/>
-          <a:ext cx="10789920" cy="3968496"/>
+          <a:off x="914400.0" y="1280160"/>
+          <a:ext cx="10332720" cy="3712464"/>
         </p:xfrm>
         <a:graphic>
           <a:graphicData uri="http://schemas.openxmlformats.org/drawingml/2006/table">
@@ -8337,20 +7962,20 @@
               </a:tblPr>
               <a:tblGrid>
                 <a:gridCol w="1097280"/>
+                <a:gridCol w="1737360"/>
+                <a:gridCol w="1828800"/>
+                <a:gridCol w="1828800"/>
                 <a:gridCol w="1828800"/>
                 <a:gridCol w="2011680"/>
-                <a:gridCol w="1828800"/>
-                <a:gridCol w="1828800"/>
-                <a:gridCol w="2194560"/>
               </a:tblGrid>
-              <a:tr h="566928">
-                <a:tc>
-                  <a:txBody>
-                    <a:bodyPr/>
-                    <a:lstStyle/>
-                    <a:p>
-                      <a:pPr algn="ctr">
-                        <a:defRPr sz="1200" b="1">
+              <a:tr h="530352">
+                <a:tc>
+                  <a:txBody>
+                    <a:bodyPr/>
+                    <a:lstStyle/>
+                    <a:p>
+                      <a:pPr algn="ctr">
+                        <a:defRPr sz="1100" b="1">
                           <a:solidFill>
                             <a:srgbClr val="000000"/>
                           </a:solidFill>
@@ -8378,7 +8003,7 @@
                     <a:lstStyle/>
                     <a:p>
                       <a:pPr algn="ctr">
-                        <a:defRPr sz="1200" b="1">
+                        <a:defRPr sz="1100" b="1">
                           <a:solidFill>
                             <a:srgbClr val="000000"/>
                           </a:solidFill>
@@ -8409,7 +8034,7 @@
                     <a:lstStyle/>
                     <a:p>
                       <a:pPr algn="ctr">
-                        <a:defRPr sz="1200" b="1">
+                        <a:defRPr sz="1100" b="1">
                           <a:solidFill>
                             <a:srgbClr val="000000"/>
                           </a:solidFill>
@@ -8440,7 +8065,7 @@
                     <a:lstStyle/>
                     <a:p>
                       <a:pPr algn="ctr">
-                        <a:defRPr sz="1200" b="1">
+                        <a:defRPr sz="1100" b="1">
                           <a:solidFill>
                             <a:srgbClr val="000000"/>
                           </a:solidFill>
@@ -8471,7 +8096,7 @@
                     <a:lstStyle/>
                     <a:p>
                       <a:pPr algn="ctr">
-                        <a:defRPr sz="1200" b="1">
+                        <a:defRPr sz="1100" b="1">
                           <a:solidFill>
                             <a:srgbClr val="000000"/>
                           </a:solidFill>
@@ -8502,7 +8127,7 @@
                     <a:lstStyle/>
                     <a:p>
                       <a:pPr algn="ctr">
-                        <a:defRPr sz="1200" b="1">
+                        <a:defRPr sz="1100" b="1">
                           <a:solidFill>
                             <a:srgbClr val="000000"/>
                           </a:solidFill>
@@ -8528,14 +8153,14 @@
                   </a:tcPr>
                 </a:tc>
               </a:tr>
-              <a:tr h="566928">
-                <a:tc>
-                  <a:txBody>
-                    <a:bodyPr/>
-                    <a:lstStyle/>
-                    <a:p>
-                      <a:pPr algn="ctr">
-                        <a:defRPr sz="1200" b="0">
+              <a:tr h="530352">
+                <a:tc>
+                  <a:txBody>
+                    <a:bodyPr/>
+                    <a:lstStyle/>
+                    <a:p>
+                      <a:pPr algn="ctr">
+                        <a:defRPr sz="1100" b="0">
                           <a:solidFill>
                             <a:srgbClr val="000000"/>
                           </a:solidFill>
@@ -8555,7 +8180,7 @@
                     <a:lstStyle/>
                     <a:p>
                       <a:pPr algn="ctr">
-                        <a:defRPr sz="1200" b="0">
+                        <a:defRPr sz="1100" b="0">
                           <a:solidFill>
                             <a:srgbClr val="000000"/>
                           </a:solidFill>
@@ -8575,7 +8200,7 @@
                     <a:lstStyle/>
                     <a:p>
                       <a:pPr algn="ctr">
-                        <a:defRPr sz="1200" b="0">
+                        <a:defRPr sz="1100" b="0">
                           <a:solidFill>
                             <a:srgbClr val="000000"/>
                           </a:solidFill>
@@ -8595,7 +8220,7 @@
                     <a:lstStyle/>
                     <a:p>
                       <a:pPr algn="ctr">
-                        <a:defRPr sz="1200" b="0">
+                        <a:defRPr sz="1100" b="0">
                           <a:solidFill>
                             <a:srgbClr val="000000"/>
                           </a:solidFill>
@@ -8615,7 +8240,7 @@
                     <a:lstStyle/>
                     <a:p>
                       <a:pPr algn="ctr">
-                        <a:defRPr sz="1200" b="0">
+                        <a:defRPr sz="1100" b="0">
                           <a:solidFill>
                             <a:srgbClr val="000000"/>
                           </a:solidFill>
@@ -8635,29 +8260,29 @@
                     <a:lstStyle/>
                     <a:p>
                       <a:pPr algn="ctr">
-                        <a:defRPr sz="1200" b="0">
-                          <a:solidFill>
-                            <a:srgbClr val="000000"/>
-                          </a:solidFill>
-                          <a:latin typeface="Times New Roman"/>
-                        </a:defRPr>
-                      </a:pPr>
-                      <a:r>
-                        <a:t>引导式超分辨率</a:t>
+                        <a:defRPr sz="1100" b="0">
+                          <a:solidFill>
+                            <a:srgbClr val="000000"/>
+                          </a:solidFill>
+                          <a:latin typeface="Times New Roman"/>
+                        </a:defRPr>
+                      </a:pPr>
+                      <a:r>
+                        <a:t>引导式超分</a:t>
                       </a:r>
                     </a:p>
                   </a:txBody>
                   <a:tcPr anchor="ctr"/>
                 </a:tc>
               </a:tr>
-              <a:tr h="566928">
-                <a:tc>
-                  <a:txBody>
-                    <a:bodyPr/>
-                    <a:lstStyle/>
-                    <a:p>
-                      <a:pPr algn="ctr">
-                        <a:defRPr sz="1200" b="0">
+              <a:tr h="530352">
+                <a:tc>
+                  <a:txBody>
+                    <a:bodyPr/>
+                    <a:lstStyle/>
+                    <a:p>
+                      <a:pPr algn="ctr">
+                        <a:defRPr sz="1100" b="0">
                           <a:solidFill>
                             <a:srgbClr val="000000"/>
                           </a:solidFill>
@@ -8677,7 +8302,7 @@
                     <a:lstStyle/>
                     <a:p>
                       <a:pPr algn="ctr">
-                        <a:defRPr sz="1200" b="0">
+                        <a:defRPr sz="1100" b="0">
                           <a:solidFill>
                             <a:srgbClr val="000000"/>
                           </a:solidFill>
@@ -8688,19 +8313,6 @@
                         <a:t>红外热成像</a:t>
                       </a:r>
                     </a:p>
-                    <a:p>
-                      <a:pPr algn="ctr">
-                        <a:defRPr sz="1200" b="0">
-                          <a:solidFill>
-                            <a:srgbClr val="000000"/>
-                          </a:solidFill>
-                          <a:latin typeface="Times New Roman"/>
-                        </a:defRPr>
-                      </a:pPr>
-                      <a:r>
-                        <a:t>(灰度)</a:t>
-                      </a:r>
-                    </a:p>
                   </a:txBody>
                   <a:tcPr anchor="ctr"/>
                 </a:tc>
@@ -8710,7 +8322,7 @@
                     <a:lstStyle/>
                     <a:p>
                       <a:pPr algn="ctr">
-                        <a:defRPr sz="1200" b="0">
+                        <a:defRPr sz="1100" b="0">
                           <a:solidFill>
                             <a:srgbClr val="000000"/>
                           </a:solidFill>
@@ -8721,19 +8333,6 @@
                         <a:t>RGB + IR</a:t>
                       </a:r>
                     </a:p>
-                    <a:p>
-                      <a:pPr algn="ctr">
-                        <a:defRPr sz="1200" b="0">
-                          <a:solidFill>
-                            <a:srgbClr val="000000"/>
-                          </a:solidFill>
-                          <a:latin typeface="Times New Roman"/>
-                        </a:defRPr>
-                      </a:pPr>
-                      <a:r>
-                        <a:t>(双模态)</a:t>
-                      </a:r>
-                    </a:p>
                   </a:txBody>
                   <a:tcPr anchor="ctr"/>
                 </a:tc>
@@ -8743,28 +8342,15 @@
                     <a:lstStyle/>
                     <a:p>
                       <a:pPr algn="ctr">
-                        <a:defRPr sz="1200" b="0">
-                          <a:solidFill>
-                            <a:srgbClr val="000000"/>
-                          </a:solidFill>
-                          <a:latin typeface="Times New Roman"/>
-                        </a:defRPr>
-                      </a:pPr>
-                      <a:r>
-                        <a:t>L8 + S2</a:t>
-                      </a:r>
-                    </a:p>
-                    <a:p>
-                      <a:pPr algn="ctr">
-                        <a:defRPr sz="1200" b="0">
-                          <a:solidFill>
-                            <a:srgbClr val="000000"/>
-                          </a:solidFill>
-                          <a:latin typeface="Times New Roman"/>
-                        </a:defRPr>
-                      </a:pPr>
-                      <a:r>
-                        <a:t>多光谱</a:t>
+                        <a:defRPr sz="1100" b="0">
+                          <a:solidFill>
+                            <a:srgbClr val="000000"/>
+                          </a:solidFill>
+                          <a:latin typeface="Times New Roman"/>
+                        </a:defRPr>
+                      </a:pPr>
+                      <a:r>
+                        <a:t>L8 + S2 多光谱</a:t>
                       </a:r>
                     </a:p>
                   </a:txBody>
@@ -8776,28 +8362,15 @@
                     <a:lstStyle/>
                     <a:p>
                       <a:pPr algn="ctr">
-                        <a:defRPr sz="1200" b="0">
-                          <a:solidFill>
-                            <a:srgbClr val="000000"/>
-                          </a:solidFill>
-                          <a:latin typeface="Times New Roman"/>
-                        </a:defRPr>
-                      </a:pPr>
-                      <a:r>
-                        <a:t>热红外 +</a:t>
-                      </a:r>
-                    </a:p>
-                    <a:p>
-                      <a:pPr algn="ctr">
-                        <a:defRPr sz="1200" b="0">
-                          <a:solidFill>
-                            <a:srgbClr val="000000"/>
-                          </a:solidFill>
-                          <a:latin typeface="Times New Roman"/>
-                        </a:defRPr>
-                      </a:pPr>
-                      <a:r>
-                        <a:t>可见光</a:t>
+                        <a:defRPr sz="1100" b="0">
+                          <a:solidFill>
+                            <a:srgbClr val="000000"/>
+                          </a:solidFill>
+                          <a:latin typeface="Times New Roman"/>
+                        </a:defRPr>
+                      </a:pPr>
+                      <a:r>
+                        <a:t>热红外 + 可见光</a:t>
                       </a:r>
                     </a:p>
                   </a:txBody>
@@ -8809,42 +8382,29 @@
                     <a:lstStyle/>
                     <a:p>
                       <a:pPr algn="ctr">
-                        <a:defRPr sz="1200" b="0">
-                          <a:solidFill>
-                            <a:srgbClr val="000000"/>
-                          </a:solidFill>
-                          <a:latin typeface="Times New Roman"/>
-                        </a:defRPr>
-                      </a:pPr>
-                      <a:r>
-                        <a:t>热红外 +</a:t>
-                      </a:r>
-                    </a:p>
-                    <a:p>
-                      <a:pPr algn="ctr">
-                        <a:defRPr sz="1200" b="0">
-                          <a:solidFill>
-                            <a:srgbClr val="000000"/>
-                          </a:solidFill>
-                          <a:latin typeface="Times New Roman"/>
-                        </a:defRPr>
-                      </a:pPr>
-                      <a:r>
-                        <a:t>可见光引导</a:t>
+                        <a:defRPr sz="1100" b="0">
+                          <a:solidFill>
+                            <a:srgbClr val="000000"/>
+                          </a:solidFill>
+                          <a:latin typeface="Times New Roman"/>
+                        </a:defRPr>
+                      </a:pPr>
+                      <a:r>
+                        <a:t>热红外 + 可见光</a:t>
                       </a:r>
                     </a:p>
                   </a:txBody>
                   <a:tcPr anchor="ctr"/>
                 </a:tc>
               </a:tr>
-              <a:tr h="566928">
-                <a:tc>
-                  <a:txBody>
-                    <a:bodyPr/>
-                    <a:lstStyle/>
-                    <a:p>
-                      <a:pPr algn="ctr">
-                        <a:defRPr sz="1200" b="0">
+              <a:tr h="530352">
+                <a:tc>
+                  <a:txBody>
+                    <a:bodyPr/>
+                    <a:lstStyle/>
+                    <a:p>
+                      <a:pPr algn="ctr">
+                        <a:defRPr sz="1100" b="0">
                           <a:solidFill>
                             <a:srgbClr val="000000"/>
                           </a:solidFill>
@@ -8864,7 +8424,7 @@
                     <a:lstStyle/>
                     <a:p>
                       <a:pPr algn="ctr">
-                        <a:defRPr sz="1200" b="0">
+                        <a:defRPr sz="1100" b="0">
                           <a:solidFill>
                             <a:srgbClr val="000000"/>
                           </a:solidFill>
@@ -8877,15 +8437,15 @@
                     </a:p>
                     <a:p>
                       <a:pPr algn="ctr">
-                        <a:defRPr sz="1200" b="0">
-                          <a:solidFill>
-                            <a:srgbClr val="000000"/>
-                          </a:solidFill>
-                          <a:latin typeface="Times New Roman"/>
-                        </a:defRPr>
-                      </a:pPr>
-                      <a:r>
-                        <a:t>LR 160×128</a:t>
+                        <a:defRPr sz="1100" b="0">
+                          <a:solidFill>
+                            <a:srgbClr val="000000"/>
+                          </a:solidFill>
+                          <a:latin typeface="Times New Roman"/>
+                        </a:defRPr>
+                      </a:pPr>
+                      <a:r>
+                        <a:t>LR×4 160×128</a:t>
                       </a:r>
                     </a:p>
                   </a:txBody>
@@ -8897,7 +8457,7 @@
                     <a:lstStyle/>
                     <a:p>
                       <a:pPr algn="ctr">
-                        <a:defRPr sz="1200" b="0">
+                        <a:defRPr sz="1100" b="0">
                           <a:solidFill>
                             <a:srgbClr val="000000"/>
                           </a:solidFill>
@@ -8917,28 +8477,15 @@
                     <a:lstStyle/>
                     <a:p>
                       <a:pPr algn="ctr">
-                        <a:defRPr sz="1200" b="0">
-                          <a:solidFill>
-                            <a:srgbClr val="000000"/>
-                          </a:solidFill>
-                          <a:latin typeface="Times New Roman"/>
-                        </a:defRPr>
-                      </a:pPr>
-                      <a:r>
-                        <a:t>LR 30m</a:t>
-                      </a:r>
-                    </a:p>
-                    <a:p>
-                      <a:pPr algn="ctr">
-                        <a:defRPr sz="1200" b="0">
-                          <a:solidFill>
-                            <a:srgbClr val="000000"/>
-                          </a:solidFill>
-                          <a:latin typeface="Times New Roman"/>
-                        </a:defRPr>
-                      </a:pPr>
-                      <a:r>
-                        <a:t>HR 10m</a:t>
+                        <a:defRPr sz="1100" b="0">
+                          <a:solidFill>
+                            <a:srgbClr val="000000"/>
+                          </a:solidFill>
+                          <a:latin typeface="Times New Roman"/>
+                        </a:defRPr>
+                      </a:pPr>
+                      <a:r>
+                        <a:t>LR 30m → HR 10m</a:t>
                       </a:r>
                     </a:p>
                   </a:txBody>
@@ -8950,7 +8497,7 @@
                     <a:lstStyle/>
                     <a:p>
                       <a:pPr algn="ctr">
-                        <a:defRPr sz="1200" b="0">
+                        <a:defRPr sz="1100" b="0">
                           <a:solidFill>
                             <a:srgbClr val="000000"/>
                           </a:solidFill>
@@ -8970,7 +8517,7 @@
                     <a:lstStyle/>
                     <a:p>
                       <a:pPr algn="ctr">
-                        <a:defRPr sz="1200" b="0">
+                        <a:defRPr sz="1100" b="0">
                           <a:solidFill>
                             <a:srgbClr val="000000"/>
                           </a:solidFill>
@@ -8983,7 +8530,7 @@
                     </a:p>
                     <a:p>
                       <a:pPr algn="ctr">
-                        <a:defRPr sz="1200" b="0">
+                        <a:defRPr sz="1100" b="0">
                           <a:solidFill>
                             <a:srgbClr val="000000"/>
                           </a:solidFill>
@@ -8998,14 +8545,14 @@
                   <a:tcPr anchor="ctr"/>
                 </a:tc>
               </a:tr>
-              <a:tr h="566928">
-                <a:tc>
-                  <a:txBody>
-                    <a:bodyPr/>
-                    <a:lstStyle/>
-                    <a:p>
-                      <a:pPr algn="ctr">
-                        <a:defRPr sz="1200" b="0">
+              <a:tr h="530352">
+                <a:tc>
+                  <a:txBody>
+                    <a:bodyPr/>
+                    <a:lstStyle/>
+                    <a:p>
+                      <a:pPr algn="ctr">
+                        <a:defRPr sz="1100" b="0">
                           <a:solidFill>
                             <a:srgbClr val="000000"/>
                           </a:solidFill>
@@ -9025,7 +8572,7 @@
                     <a:lstStyle/>
                     <a:p>
                       <a:pPr algn="ctr">
-                        <a:defRPr sz="1200" b="0">
+                        <a:defRPr sz="1100" b="0">
                           <a:solidFill>
                             <a:srgbClr val="000000"/>
                           </a:solidFill>
@@ -9045,7 +8592,7 @@
                     <a:lstStyle/>
                     <a:p>
                       <a:pPr algn="ctr">
-                        <a:defRPr sz="1200" b="0">
+                        <a:defRPr sz="1100" b="0">
                           <a:solidFill>
                             <a:srgbClr val="000000"/>
                           </a:solidFill>
@@ -9065,7 +8612,7 @@
                     <a:lstStyle/>
                     <a:p>
                       <a:pPr algn="ctr">
-                        <a:defRPr sz="1200" b="0">
+                        <a:defRPr sz="1100" b="0">
                           <a:solidFill>
                             <a:srgbClr val="000000"/>
                           </a:solidFill>
@@ -9085,7 +8632,7 @@
                     <a:lstStyle/>
                     <a:p>
                       <a:pPr algn="ctr">
-                        <a:defRPr sz="1200" b="0">
+                        <a:defRPr sz="1100" b="0">
                           <a:solidFill>
                             <a:srgbClr val="000000"/>
                           </a:solidFill>
@@ -9105,7 +8652,7 @@
                     <a:lstStyle/>
                     <a:p>
                       <a:pPr algn="ctr">
-                        <a:defRPr sz="1200" b="0">
+                        <a:defRPr sz="1100" b="0">
                           <a:solidFill>
                             <a:srgbClr val="000000"/>
                           </a:solidFill>
@@ -9120,14 +8667,14 @@
                   <a:tcPr anchor="ctr"/>
                 </a:tc>
               </a:tr>
-              <a:tr h="566928">
-                <a:tc>
-                  <a:txBody>
-                    <a:bodyPr/>
-                    <a:lstStyle/>
-                    <a:p>
-                      <a:pPr algn="ctr">
-                        <a:defRPr sz="1200" b="0">
+              <a:tr h="530352">
+                <a:tc>
+                  <a:txBody>
+                    <a:bodyPr/>
+                    <a:lstStyle/>
+                    <a:p>
+                      <a:pPr algn="ctr">
+                        <a:defRPr sz="1100" b="0">
                           <a:solidFill>
                             <a:srgbClr val="000000"/>
                           </a:solidFill>
@@ -9147,7 +8694,7 @@
                     <a:lstStyle/>
                     <a:p>
                       <a:pPr algn="ctr">
-                        <a:defRPr sz="1200" b="0">
+                        <a:defRPr sz="1100" b="0">
                           <a:solidFill>
                             <a:srgbClr val="000000"/>
                           </a:solidFill>
@@ -9167,28 +8714,15 @@
                     <a:lstStyle/>
                     <a:p>
                       <a:pPr algn="ctr">
-                        <a:defRPr sz="1200" b="0">
-                          <a:solidFill>
-                            <a:srgbClr val="000000"/>
-                          </a:solidFill>
-                          <a:latin typeface="Times New Roman"/>
-                        </a:defRPr>
-                      </a:pPr>
-                      <a:r>
-                        <a:t>1,246 张</a:t>
-                      </a:r>
-                    </a:p>
-                    <a:p>
-                      <a:pPr algn="ctr">
-                        <a:defRPr sz="1200" b="0">
-                          <a:solidFill>
-                            <a:srgbClr val="000000"/>
-                          </a:solidFill>
-                          <a:latin typeface="Times New Roman"/>
-                        </a:defRPr>
-                      </a:pPr>
-                      <a:r>
-                        <a:t>3,706 框</a:t>
+                        <a:defRPr sz="1100" b="0">
+                          <a:solidFill>
+                            <a:srgbClr val="000000"/>
+                          </a:solidFill>
+                          <a:latin typeface="Times New Roman"/>
+                        </a:defRPr>
+                      </a:pPr>
+                      <a:r>
+                        <a:t>1,246 张 / 3,706 框</a:t>
                       </a:r>
                     </a:p>
                   </a:txBody>
@@ -9200,7 +8734,7 @@
                     <a:lstStyle/>
                     <a:p>
                       <a:pPr algn="ctr">
-                        <a:defRPr sz="1200" b="0">
+                        <a:defRPr sz="1100" b="0">
                           <a:solidFill>
                             <a:srgbClr val="000000"/>
                           </a:solidFill>
@@ -9220,7 +8754,7 @@
                     <a:lstStyle/>
                     <a:p>
                       <a:pPr algn="ctr">
-                        <a:defRPr sz="1200" b="0">
+                        <a:defRPr sz="1100" b="0">
                           <a:solidFill>
                             <a:srgbClr val="000000"/>
                           </a:solidFill>
@@ -9240,29 +8774,29 @@
                     <a:lstStyle/>
                     <a:p>
                       <a:pPr algn="ctr">
-                        <a:defRPr sz="1200" b="0">
-                          <a:solidFill>
-                            <a:srgbClr val="000000"/>
-                          </a:solidFill>
-                          <a:latin typeface="Times New Roman"/>
-                        </a:defRPr>
-                      </a:pPr>
-                      <a:r>
-                        <a:t>700+200+40</a:t>
+                        <a:defRPr sz="1100" b="0">
+                          <a:solidFill>
+                            <a:srgbClr val="000000"/>
+                          </a:solidFill>
+                          <a:latin typeface="Times New Roman"/>
+                        </a:defRPr>
+                      </a:pPr>
+                      <a:r>
+                        <a:t>940 对</a:t>
                       </a:r>
                     </a:p>
                   </a:txBody>
                   <a:tcPr anchor="ctr"/>
                 </a:tc>
               </a:tr>
-              <a:tr h="566928">
-                <a:tc>
-                  <a:txBody>
-                    <a:bodyPr/>
-                    <a:lstStyle/>
-                    <a:p>
-                      <a:pPr algn="ctr">
-                        <a:defRPr sz="1200" b="0">
+              <a:tr h="530352">
+                <a:tc>
+                  <a:txBody>
+                    <a:bodyPr/>
+                    <a:lstStyle/>
+                    <a:p>
+                      <a:pPr algn="ctr">
+                        <a:defRPr sz="1100" b="0">
                           <a:solidFill>
                             <a:srgbClr val="000000"/>
                           </a:solidFill>
@@ -9288,7 +8822,7 @@
                     <a:lstStyle/>
                     <a:p>
                       <a:pPr algn="ctr">
-                        <a:defRPr sz="1200" b="0">
+                        <a:defRPr sz="1100" b="0">
                           <a:solidFill>
                             <a:srgbClr val="000000"/>
                           </a:solidFill>
@@ -9314,15 +8848,15 @@
                     <a:lstStyle/>
                     <a:p>
                       <a:pPr algn="ctr">
-                        <a:defRPr sz="1200" b="0">
-                          <a:solidFill>
-                            <a:srgbClr val="000000"/>
-                          </a:solidFill>
-                          <a:latin typeface="Times New Roman"/>
-                        </a:defRPr>
-                      </a:pPr>
-                      <a:r>
-                        <a:t>5 折 CV</a:t>
+                        <a:defRPr sz="1100" b="0">
+                          <a:solidFill>
+                            <a:srgbClr val="000000"/>
+                          </a:solidFill>
+                          <a:latin typeface="Times New Roman"/>
+                        </a:defRPr>
+                      </a:pPr>
+                      <a:r>
+                        <a:t>5 折交叉验证</a:t>
                       </a:r>
                     </a:p>
                   </a:txBody>
@@ -9340,7 +8874,7 @@
                     <a:lstStyle/>
                     <a:p>
                       <a:pPr algn="ctr">
-                        <a:defRPr sz="1200" b="0">
+                        <a:defRPr sz="1100" b="0">
                           <a:solidFill>
                             <a:srgbClr val="000000"/>
                           </a:solidFill>
@@ -9366,7 +8900,7 @@
                     <a:lstStyle/>
                     <a:p>
                       <a:pPr algn="ctr">
-                        <a:defRPr sz="1200" b="0">
+                        <a:defRPr sz="1100" b="0">
                           <a:solidFill>
                             <a:srgbClr val="000000"/>
                           </a:solidFill>
@@ -9392,7 +8926,7 @@
                     <a:lstStyle/>
                     <a:p>
                       <a:pPr algn="ctr">
-                        <a:defRPr sz="1200" b="0">
+                        <a:defRPr sz="1100" b="0">
                           <a:solidFill>
                             <a:srgbClr val="000000"/>
                           </a:solidFill>
@@ -9425,8 +8959,8 @@
         </p:nvSpPr>
         <p:spPr>
           <a:xfrm>
-            <a:off x="457200" y="5943600"/>
-            <a:ext cx="10972800" cy="365760"/>
+            <a:off x="822960" y="5943600"/>
+            <a:ext cx="10515600" cy="365760"/>
           </a:xfrm>
           <a:prstGeom prst="rect">
             <a:avLst/>
@@ -9441,17 +8975,17 @@
           <a:p>
             <a:pPr>
               <a:spcAft>
-                <a:spcPts val="600"/>
+                <a:spcPts val="400"/>
               </a:spcAft>
               <a:defRPr sz="1500">
                 <a:solidFill>
-                  <a:srgbClr val="444444"/>
+                  <a:srgbClr val="555555"/>
                 </a:solidFill>
                 <a:latin typeface="Times New Roman"/>
               </a:defRPr>
             </a:pPr>
             <a:r>
-              <a:t>五个数据集覆盖了红外遥感领域从像素级重建、目标检测、跨传感器增强、跨光谱配准到引导式超分的完整任务链。</a:t>
+              <a:t>五个数据集覆盖红外遥感领域从像素级重建、目标检测、跨传感器增强、跨光谱配准到引导式超分的完整任务链。</a:t>
             </a:r>
           </a:p>
         </p:txBody>

--- a/ppts/InfraredSR_Datasets_Overview.pptx
+++ b/ppts/InfraredSR_Datasets_Overview.pptx
@@ -5,16 +5,16 @@
     <p:sldMasterId id="2147483648" r:id="rId1"/>
   </p:sldMasterIdLst>
   <p:sldIdLst>
-    <p:sldId id="256" r:id="rId7"/>
-    <p:sldId id="257" r:id="rId8"/>
-    <p:sldId id="258" r:id="rId9"/>
-    <p:sldId id="259" r:id="rId10"/>
-    <p:sldId id="260" r:id="rId11"/>
-    <p:sldId id="261" r:id="rId12"/>
-    <p:sldId id="262" r:id="rId13"/>
-    <p:sldId id="263" r:id="rId14"/>
+    <p:sldId id="256" r:id="rId2"/>
+    <p:sldId id="257" r:id="rId3"/>
+    <p:sldId id="258" r:id="rId4"/>
+    <p:sldId id="259" r:id="rId5"/>
+    <p:sldId id="260" r:id="rId6"/>
+    <p:sldId id="261" r:id="rId7"/>
+    <p:sldId id="262" r:id="rId8"/>
+    <p:sldId id="263" r:id="rId9"/>
   </p:sldIdLst>
-  <p:sldSz cx="12191695" cy="6858000" type="screen4x3"/>
+  <p:sldSz cx="12192000" cy="6858000"/>
   <p:notesSz cx="6858000" cy="9144000"/>
   <p:defaultTextStyle>
     <a:defPPr>
@@ -111,6 +111,22 @@
       </a:defRPr>
     </a:lvl9pPr>
   </p:defaultTextStyle>
+  <p:extLst>
+    <p:ext uri="{EFAFB233-063F-42B5-8137-9DF3F51BA10A}">
+      <p15:sldGuideLst xmlns:p15="http://schemas.microsoft.com/office/powerpoint/2012/main">
+        <p15:guide id="1" orient="horz" pos="2160">
+          <p15:clr>
+            <a:srgbClr val="A4A3A4"/>
+          </p15:clr>
+        </p15:guide>
+        <p15:guide id="2" pos="2880">
+          <p15:clr>
+            <a:srgbClr val="A4A3A4"/>
+          </p15:clr>
+        </p15:guide>
+      </p15:sldGuideLst>
+    </p:ext>
+  </p:extLst>
 </p:presentation>
 </file>
 
@@ -152,10 +168,9 @@
           <a:lstStyle/>
           <a:p>
             <a:r>
-              <a:rPr lang="en-US" smtClean="0"/>
+              <a:rPr lang="en-US"/>
               <a:t>Click to edit Master title style</a:t>
             </a:r>
-            <a:endParaRPr lang="en-US"/>
           </a:p>
         </p:txBody>
       </p:sp>
@@ -271,10 +286,9 @@
           </a:lstStyle>
           <a:p>
             <a:r>
-              <a:rPr lang="en-US" smtClean="0"/>
+              <a:rPr lang="en-US"/>
               <a:t>Click to edit Master subtitle style</a:t>
             </a:r>
-            <a:endParaRPr lang="en-US"/>
           </a:p>
         </p:txBody>
       </p:sp>
@@ -295,7 +309,7 @@
           <a:p>
             <a:fld id="{5BCAD085-E8A6-8845-BD4E-CB4CCA059FC4}" type="datetimeFigureOut">
               <a:rPr lang="en-US" smtClean="0"/>
-              <a:t>1/27/13</a:t>
+              <a:t>5/12/2026</a:t>
             </a:fld>
             <a:endParaRPr lang="en-US"/>
           </a:p>
@@ -389,10 +403,9 @@
           <a:lstStyle/>
           <a:p>
             <a:r>
-              <a:rPr lang="en-US" smtClean="0"/>
+              <a:rPr lang="en-US"/>
               <a:t>Click to edit Master title style</a:t>
             </a:r>
-            <a:endParaRPr lang="en-US"/>
           </a:p>
         </p:txBody>
       </p:sp>
@@ -413,38 +426,37 @@
           <a:p>
             <a:pPr lvl="0"/>
             <a:r>
-              <a:rPr lang="en-US" smtClean="0"/>
+              <a:rPr lang="en-US"/>
               <a:t>Click to edit Master text styles</a:t>
             </a:r>
           </a:p>
           <a:p>
             <a:pPr lvl="1"/>
             <a:r>
-              <a:rPr lang="en-US" smtClean="0"/>
+              <a:rPr lang="en-US"/>
               <a:t>Second level</a:t>
             </a:r>
           </a:p>
           <a:p>
             <a:pPr lvl="2"/>
             <a:r>
-              <a:rPr lang="en-US" smtClean="0"/>
+              <a:rPr lang="en-US"/>
               <a:t>Third level</a:t>
             </a:r>
           </a:p>
           <a:p>
             <a:pPr lvl="3"/>
             <a:r>
-              <a:rPr lang="en-US" smtClean="0"/>
+              <a:rPr lang="en-US"/>
               <a:t>Fourth level</a:t>
             </a:r>
           </a:p>
           <a:p>
             <a:pPr lvl="4"/>
             <a:r>
-              <a:rPr lang="en-US" smtClean="0"/>
+              <a:rPr lang="en-US"/>
               <a:t>Fifth level</a:t>
             </a:r>
-            <a:endParaRPr lang="en-US"/>
           </a:p>
         </p:txBody>
       </p:sp>
@@ -465,7 +477,7 @@
           <a:p>
             <a:fld id="{5BCAD085-E8A6-8845-BD4E-CB4CCA059FC4}" type="datetimeFigureOut">
               <a:rPr lang="en-US" smtClean="0"/>
-              <a:t>1/27/13</a:t>
+              <a:t>5/12/2026</a:t>
             </a:fld>
             <a:endParaRPr lang="en-US"/>
           </a:p>
@@ -564,10 +576,9 @@
           <a:lstStyle/>
           <a:p>
             <a:r>
-              <a:rPr lang="en-US" smtClean="0"/>
+              <a:rPr lang="en-US"/>
               <a:t>Click to edit Master title style</a:t>
             </a:r>
-            <a:endParaRPr lang="en-US"/>
           </a:p>
         </p:txBody>
       </p:sp>
@@ -593,38 +604,37 @@
           <a:p>
             <a:pPr lvl="0"/>
             <a:r>
-              <a:rPr lang="en-US" smtClean="0"/>
+              <a:rPr lang="en-US"/>
               <a:t>Click to edit Master text styles</a:t>
             </a:r>
           </a:p>
           <a:p>
             <a:pPr lvl="1"/>
             <a:r>
-              <a:rPr lang="en-US" smtClean="0"/>
+              <a:rPr lang="en-US"/>
               <a:t>Second level</a:t>
             </a:r>
           </a:p>
           <a:p>
             <a:pPr lvl="2"/>
             <a:r>
-              <a:rPr lang="en-US" smtClean="0"/>
+              <a:rPr lang="en-US"/>
               <a:t>Third level</a:t>
             </a:r>
           </a:p>
           <a:p>
             <a:pPr lvl="3"/>
             <a:r>
-              <a:rPr lang="en-US" smtClean="0"/>
+              <a:rPr lang="en-US"/>
               <a:t>Fourth level</a:t>
             </a:r>
           </a:p>
           <a:p>
             <a:pPr lvl="4"/>
             <a:r>
-              <a:rPr lang="en-US" smtClean="0"/>
+              <a:rPr lang="en-US"/>
               <a:t>Fifth level</a:t>
             </a:r>
-            <a:endParaRPr lang="en-US"/>
           </a:p>
         </p:txBody>
       </p:sp>
@@ -645,7 +655,7 @@
           <a:p>
             <a:fld id="{5BCAD085-E8A6-8845-BD4E-CB4CCA059FC4}" type="datetimeFigureOut">
               <a:rPr lang="en-US" smtClean="0"/>
-              <a:t>1/27/13</a:t>
+              <a:t>5/12/2026</a:t>
             </a:fld>
             <a:endParaRPr lang="en-US"/>
           </a:p>
@@ -739,10 +749,9 @@
           <a:lstStyle/>
           <a:p>
             <a:r>
-              <a:rPr lang="en-US" smtClean="0"/>
+              <a:rPr lang="en-US"/>
               <a:t>Click to edit Master title style</a:t>
             </a:r>
-            <a:endParaRPr lang="en-US"/>
           </a:p>
         </p:txBody>
       </p:sp>
@@ -763,38 +772,37 @@
           <a:p>
             <a:pPr lvl="0"/>
             <a:r>
-              <a:rPr lang="en-US" smtClean="0"/>
+              <a:rPr lang="en-US"/>
               <a:t>Click to edit Master text styles</a:t>
             </a:r>
           </a:p>
           <a:p>
             <a:pPr lvl="1"/>
             <a:r>
-              <a:rPr lang="en-US" smtClean="0"/>
+              <a:rPr lang="en-US"/>
               <a:t>Second level</a:t>
             </a:r>
           </a:p>
           <a:p>
             <a:pPr lvl="2"/>
             <a:r>
-              <a:rPr lang="en-US" smtClean="0"/>
+              <a:rPr lang="en-US"/>
               <a:t>Third level</a:t>
             </a:r>
           </a:p>
           <a:p>
             <a:pPr lvl="3"/>
             <a:r>
-              <a:rPr lang="en-US" smtClean="0"/>
+              <a:rPr lang="en-US"/>
               <a:t>Fourth level</a:t>
             </a:r>
           </a:p>
           <a:p>
             <a:pPr lvl="4"/>
             <a:r>
-              <a:rPr lang="en-US" smtClean="0"/>
+              <a:rPr lang="en-US"/>
               <a:t>Fifth level</a:t>
             </a:r>
-            <a:endParaRPr lang="en-US"/>
           </a:p>
         </p:txBody>
       </p:sp>
@@ -815,7 +823,7 @@
           <a:p>
             <a:fld id="{5BCAD085-E8A6-8845-BD4E-CB4CCA059FC4}" type="datetimeFigureOut">
               <a:rPr lang="en-US" smtClean="0"/>
-              <a:t>1/27/13</a:t>
+              <a:t>5/12/2026</a:t>
             </a:fld>
             <a:endParaRPr lang="en-US"/>
           </a:p>
@@ -918,10 +926,9 @@
           </a:lstStyle>
           <a:p>
             <a:r>
-              <a:rPr lang="en-US" smtClean="0"/>
+              <a:rPr lang="en-US"/>
               <a:t>Click to edit Master title style</a:t>
             </a:r>
-            <a:endParaRPr lang="en-US"/>
           </a:p>
         </p:txBody>
       </p:sp>
@@ -1038,7 +1045,7 @@
           <a:p>
             <a:pPr lvl="0"/>
             <a:r>
-              <a:rPr lang="en-US" smtClean="0"/>
+              <a:rPr lang="en-US"/>
               <a:t>Click to edit Master text styles</a:t>
             </a:r>
           </a:p>
@@ -1061,7 +1068,7 @@
           <a:p>
             <a:fld id="{5BCAD085-E8A6-8845-BD4E-CB4CCA059FC4}" type="datetimeFigureOut">
               <a:rPr lang="en-US" smtClean="0"/>
-              <a:t>1/27/13</a:t>
+              <a:t>5/12/2026</a:t>
             </a:fld>
             <a:endParaRPr lang="en-US"/>
           </a:p>
@@ -1155,10 +1162,9 @@
           <a:lstStyle/>
           <a:p>
             <a:r>
-              <a:rPr lang="en-US" smtClean="0"/>
+              <a:rPr lang="en-US"/>
               <a:t>Click to edit Master title style</a:t>
             </a:r>
-            <a:endParaRPr lang="en-US"/>
           </a:p>
         </p:txBody>
       </p:sp>
@@ -1212,38 +1218,37 @@
           <a:p>
             <a:pPr lvl="0"/>
             <a:r>
-              <a:rPr lang="en-US" smtClean="0"/>
+              <a:rPr lang="en-US"/>
               <a:t>Click to edit Master text styles</a:t>
             </a:r>
           </a:p>
           <a:p>
             <a:pPr lvl="1"/>
             <a:r>
-              <a:rPr lang="en-US" smtClean="0"/>
+              <a:rPr lang="en-US"/>
               <a:t>Second level</a:t>
             </a:r>
           </a:p>
           <a:p>
             <a:pPr lvl="2"/>
             <a:r>
-              <a:rPr lang="en-US" smtClean="0"/>
+              <a:rPr lang="en-US"/>
               <a:t>Third level</a:t>
             </a:r>
           </a:p>
           <a:p>
             <a:pPr lvl="3"/>
             <a:r>
-              <a:rPr lang="en-US" smtClean="0"/>
+              <a:rPr lang="en-US"/>
               <a:t>Fourth level</a:t>
             </a:r>
           </a:p>
           <a:p>
             <a:pPr lvl="4"/>
             <a:r>
-              <a:rPr lang="en-US" smtClean="0"/>
+              <a:rPr lang="en-US"/>
               <a:t>Fifth level</a:t>
             </a:r>
-            <a:endParaRPr lang="en-US"/>
           </a:p>
         </p:txBody>
       </p:sp>
@@ -1297,38 +1302,37 @@
           <a:p>
             <a:pPr lvl="0"/>
             <a:r>
-              <a:rPr lang="en-US" smtClean="0"/>
+              <a:rPr lang="en-US"/>
               <a:t>Click to edit Master text styles</a:t>
             </a:r>
           </a:p>
           <a:p>
             <a:pPr lvl="1"/>
             <a:r>
-              <a:rPr lang="en-US" smtClean="0"/>
+              <a:rPr lang="en-US"/>
               <a:t>Second level</a:t>
             </a:r>
           </a:p>
           <a:p>
             <a:pPr lvl="2"/>
             <a:r>
-              <a:rPr lang="en-US" smtClean="0"/>
+              <a:rPr lang="en-US"/>
               <a:t>Third level</a:t>
             </a:r>
           </a:p>
           <a:p>
             <a:pPr lvl="3"/>
             <a:r>
-              <a:rPr lang="en-US" smtClean="0"/>
+              <a:rPr lang="en-US"/>
               <a:t>Fourth level</a:t>
             </a:r>
           </a:p>
           <a:p>
             <a:pPr lvl="4"/>
             <a:r>
-              <a:rPr lang="en-US" smtClean="0"/>
+              <a:rPr lang="en-US"/>
               <a:t>Fifth level</a:t>
             </a:r>
-            <a:endParaRPr lang="en-US"/>
           </a:p>
         </p:txBody>
       </p:sp>
@@ -1349,7 +1353,7 @@
           <a:p>
             <a:fld id="{5BCAD085-E8A6-8845-BD4E-CB4CCA059FC4}" type="datetimeFigureOut">
               <a:rPr lang="en-US" smtClean="0"/>
-              <a:t>1/27/13</a:t>
+              <a:t>5/12/2026</a:t>
             </a:fld>
             <a:endParaRPr lang="en-US"/>
           </a:p>
@@ -1447,10 +1451,9 @@
           </a:lstStyle>
           <a:p>
             <a:r>
-              <a:rPr lang="en-US" smtClean="0"/>
+              <a:rPr lang="en-US"/>
               <a:t>Click to edit Master title style</a:t>
             </a:r>
-            <a:endParaRPr lang="en-US"/>
           </a:p>
         </p:txBody>
       </p:sp>
@@ -1513,7 +1516,7 @@
           <a:p>
             <a:pPr lvl="0"/>
             <a:r>
-              <a:rPr lang="en-US" smtClean="0"/>
+              <a:rPr lang="en-US"/>
               <a:t>Click to edit Master text styles</a:t>
             </a:r>
           </a:p>
@@ -1569,38 +1572,37 @@
           <a:p>
             <a:pPr lvl="0"/>
             <a:r>
-              <a:rPr lang="en-US" smtClean="0"/>
+              <a:rPr lang="en-US"/>
               <a:t>Click to edit Master text styles</a:t>
             </a:r>
           </a:p>
           <a:p>
             <a:pPr lvl="1"/>
             <a:r>
-              <a:rPr lang="en-US" smtClean="0"/>
+              <a:rPr lang="en-US"/>
               <a:t>Second level</a:t>
             </a:r>
           </a:p>
           <a:p>
             <a:pPr lvl="2"/>
             <a:r>
-              <a:rPr lang="en-US" smtClean="0"/>
+              <a:rPr lang="en-US"/>
               <a:t>Third level</a:t>
             </a:r>
           </a:p>
           <a:p>
             <a:pPr lvl="3"/>
             <a:r>
-              <a:rPr lang="en-US" smtClean="0"/>
+              <a:rPr lang="en-US"/>
               <a:t>Fourth level</a:t>
             </a:r>
           </a:p>
           <a:p>
             <a:pPr lvl="4"/>
             <a:r>
-              <a:rPr lang="en-US" smtClean="0"/>
+              <a:rPr lang="en-US"/>
               <a:t>Fifth level</a:t>
             </a:r>
-            <a:endParaRPr lang="en-US"/>
           </a:p>
         </p:txBody>
       </p:sp>
@@ -1663,7 +1665,7 @@
           <a:p>
             <a:pPr lvl="0"/>
             <a:r>
-              <a:rPr lang="en-US" smtClean="0"/>
+              <a:rPr lang="en-US"/>
               <a:t>Click to edit Master text styles</a:t>
             </a:r>
           </a:p>
@@ -1719,38 +1721,37 @@
           <a:p>
             <a:pPr lvl="0"/>
             <a:r>
-              <a:rPr lang="en-US" smtClean="0"/>
+              <a:rPr lang="en-US"/>
               <a:t>Click to edit Master text styles</a:t>
             </a:r>
           </a:p>
           <a:p>
             <a:pPr lvl="1"/>
             <a:r>
-              <a:rPr lang="en-US" smtClean="0"/>
+              <a:rPr lang="en-US"/>
               <a:t>Second level</a:t>
             </a:r>
           </a:p>
           <a:p>
             <a:pPr lvl="2"/>
             <a:r>
-              <a:rPr lang="en-US" smtClean="0"/>
+              <a:rPr lang="en-US"/>
               <a:t>Third level</a:t>
             </a:r>
           </a:p>
           <a:p>
             <a:pPr lvl="3"/>
             <a:r>
-              <a:rPr lang="en-US" smtClean="0"/>
+              <a:rPr lang="en-US"/>
               <a:t>Fourth level</a:t>
             </a:r>
           </a:p>
           <a:p>
             <a:pPr lvl="4"/>
             <a:r>
-              <a:rPr lang="en-US" smtClean="0"/>
+              <a:rPr lang="en-US"/>
               <a:t>Fifth level</a:t>
             </a:r>
-            <a:endParaRPr lang="en-US"/>
           </a:p>
         </p:txBody>
       </p:sp>
@@ -1771,7 +1772,7 @@
           <a:p>
             <a:fld id="{5BCAD085-E8A6-8845-BD4E-CB4CCA059FC4}" type="datetimeFigureOut">
               <a:rPr lang="en-US" smtClean="0"/>
-              <a:t>1/27/13</a:t>
+              <a:t>5/12/2026</a:t>
             </a:fld>
             <a:endParaRPr lang="en-US"/>
           </a:p>
@@ -1865,10 +1866,9 @@
           <a:lstStyle/>
           <a:p>
             <a:r>
-              <a:rPr lang="en-US" smtClean="0"/>
+              <a:rPr lang="en-US"/>
               <a:t>Click to edit Master title style</a:t>
             </a:r>
-            <a:endParaRPr lang="en-US"/>
           </a:p>
         </p:txBody>
       </p:sp>
@@ -1889,7 +1889,7 @@
           <a:p>
             <a:fld id="{5BCAD085-E8A6-8845-BD4E-CB4CCA059FC4}" type="datetimeFigureOut">
               <a:rPr lang="en-US" smtClean="0"/>
-              <a:t>1/27/13</a:t>
+              <a:t>5/12/2026</a:t>
             </a:fld>
             <a:endParaRPr lang="en-US"/>
           </a:p>
@@ -1984,7 +1984,7 @@
           <a:p>
             <a:fld id="{5BCAD085-E8A6-8845-BD4E-CB4CCA059FC4}" type="datetimeFigureOut">
               <a:rPr lang="en-US" smtClean="0"/>
-              <a:t>1/27/13</a:t>
+              <a:t>5/12/2026</a:t>
             </a:fld>
             <a:endParaRPr lang="en-US"/>
           </a:p>
@@ -2087,10 +2087,9 @@
           </a:lstStyle>
           <a:p>
             <a:r>
-              <a:rPr lang="en-US" smtClean="0"/>
+              <a:rPr lang="en-US"/>
               <a:t>Click to edit Master title style</a:t>
             </a:r>
-            <a:endParaRPr lang="en-US"/>
           </a:p>
         </p:txBody>
       </p:sp>
@@ -2144,38 +2143,37 @@
           <a:p>
             <a:pPr lvl="0"/>
             <a:r>
-              <a:rPr lang="en-US" smtClean="0"/>
+              <a:rPr lang="en-US"/>
               <a:t>Click to edit Master text styles</a:t>
             </a:r>
           </a:p>
           <a:p>
             <a:pPr lvl="1"/>
             <a:r>
-              <a:rPr lang="en-US" smtClean="0"/>
+              <a:rPr lang="en-US"/>
               <a:t>Second level</a:t>
             </a:r>
           </a:p>
           <a:p>
             <a:pPr lvl="2"/>
             <a:r>
-              <a:rPr lang="en-US" smtClean="0"/>
+              <a:rPr lang="en-US"/>
               <a:t>Third level</a:t>
             </a:r>
           </a:p>
           <a:p>
             <a:pPr lvl="3"/>
             <a:r>
-              <a:rPr lang="en-US" smtClean="0"/>
+              <a:rPr lang="en-US"/>
               <a:t>Fourth level</a:t>
             </a:r>
           </a:p>
           <a:p>
             <a:pPr lvl="4"/>
             <a:r>
-              <a:rPr lang="en-US" smtClean="0"/>
+              <a:rPr lang="en-US"/>
               <a:t>Fifth level</a:t>
             </a:r>
-            <a:endParaRPr lang="en-US"/>
           </a:p>
         </p:txBody>
       </p:sp>
@@ -2238,7 +2236,7 @@
           <a:p>
             <a:pPr lvl="0"/>
             <a:r>
-              <a:rPr lang="en-US" smtClean="0"/>
+              <a:rPr lang="en-US"/>
               <a:t>Click to edit Master text styles</a:t>
             </a:r>
           </a:p>
@@ -2261,7 +2259,7 @@
           <a:p>
             <a:fld id="{5BCAD085-E8A6-8845-BD4E-CB4CCA059FC4}" type="datetimeFigureOut">
               <a:rPr lang="en-US" smtClean="0"/>
-              <a:t>1/27/13</a:t>
+              <a:t>5/12/2026</a:t>
             </a:fld>
             <a:endParaRPr lang="en-US"/>
           </a:p>
@@ -2364,10 +2362,9 @@
           </a:lstStyle>
           <a:p>
             <a:r>
-              <a:rPr lang="en-US" smtClean="0"/>
+              <a:rPr lang="en-US"/>
               <a:t>Click to edit Master title style</a:t>
             </a:r>
-            <a:endParaRPr lang="en-US"/>
           </a:p>
         </p:txBody>
       </p:sp>
@@ -2491,7 +2488,7 @@
           <a:p>
             <a:pPr lvl="0"/>
             <a:r>
-              <a:rPr lang="en-US" smtClean="0"/>
+              <a:rPr lang="en-US"/>
               <a:t>Click to edit Master text styles</a:t>
             </a:r>
           </a:p>
@@ -2514,7 +2511,7 @@
           <a:p>
             <a:fld id="{5BCAD085-E8A6-8845-BD4E-CB4CCA059FC4}" type="datetimeFigureOut">
               <a:rPr lang="en-US" smtClean="0"/>
-              <a:t>1/27/13</a:t>
+              <a:t>5/12/2026</a:t>
             </a:fld>
             <a:endParaRPr lang="en-US"/>
           </a:p>
@@ -2623,10 +2620,9 @@
           <a:lstStyle/>
           <a:p>
             <a:r>
-              <a:rPr lang="en-US" smtClean="0"/>
+              <a:rPr lang="en-US"/>
               <a:t>Click to edit Master title style</a:t>
             </a:r>
-            <a:endParaRPr lang="en-US"/>
           </a:p>
         </p:txBody>
       </p:sp>
@@ -2657,38 +2653,37 @@
           <a:p>
             <a:pPr lvl="0"/>
             <a:r>
-              <a:rPr lang="en-US" smtClean="0"/>
+              <a:rPr lang="en-US"/>
               <a:t>Click to edit Master text styles</a:t>
             </a:r>
           </a:p>
           <a:p>
             <a:pPr lvl="1"/>
             <a:r>
-              <a:rPr lang="en-US" smtClean="0"/>
+              <a:rPr lang="en-US"/>
               <a:t>Second level</a:t>
             </a:r>
           </a:p>
           <a:p>
             <a:pPr lvl="2"/>
             <a:r>
-              <a:rPr lang="en-US" smtClean="0"/>
+              <a:rPr lang="en-US"/>
               <a:t>Third level</a:t>
             </a:r>
           </a:p>
           <a:p>
             <a:pPr lvl="3"/>
             <a:r>
-              <a:rPr lang="en-US" smtClean="0"/>
+              <a:rPr lang="en-US"/>
               <a:t>Fourth level</a:t>
             </a:r>
           </a:p>
           <a:p>
             <a:pPr lvl="4"/>
             <a:r>
-              <a:rPr lang="en-US" smtClean="0"/>
+              <a:rPr lang="en-US"/>
               <a:t>Fifth level</a:t>
             </a:r>
-            <a:endParaRPr lang="en-US"/>
           </a:p>
         </p:txBody>
       </p:sp>
@@ -2727,7 +2722,7 @@
           <a:p>
             <a:fld id="{5BCAD085-E8A6-8845-BD4E-CB4CCA059FC4}" type="datetimeFigureOut">
               <a:rPr lang="en-US" smtClean="0"/>
-              <a:t>1/27/13</a:t>
+              <a:t>5/12/2026</a:t>
             </a:fld>
             <a:endParaRPr lang="en-US"/>
           </a:p>
@@ -3086,7 +3081,7 @@
 </file>
 
 <file path=ppt/slides/slide1.xml><?xml version="1.0" encoding="utf-8"?>
-<p:sld xmlns:a="http://schemas.openxmlformats.org/drawingml/2006/main" xmlns:p="http://schemas.openxmlformats.org/presentationml/2006/main" xmlns:r="http://schemas.openxmlformats.org/officeDocument/2006/relationships">
+<p:sld xmlns:a="http://schemas.openxmlformats.org/drawingml/2006/main" xmlns:r="http://schemas.openxmlformats.org/officeDocument/2006/relationships" xmlns:p="http://schemas.openxmlformats.org/presentationml/2006/main">
   <p:cSld>
     <p:bg>
       <p:bgPr>
@@ -3102,7 +3097,14 @@
         <p:cNvGrpSpPr/>
         <p:nvPr/>
       </p:nvGrpSpPr>
-      <p:grpSpPr/>
+      <p:grpSpPr>
+        <a:xfrm>
+          <a:off x="0" y="0"/>
+          <a:ext cx="0" cy="0"/>
+          <a:chOff x="0" y="0"/>
+          <a:chExt cx="0" cy="0"/>
+        </a:xfrm>
+      </p:grpSpPr>
       <p:sp>
         <p:nvSpPr>
           <p:cNvPr id="2" name="TextBox 1"/>
@@ -3203,7 +3205,7 @@
 </file>
 
 <file path=ppt/slides/slide2.xml><?xml version="1.0" encoding="utf-8"?>
-<p:sld xmlns:a="http://schemas.openxmlformats.org/drawingml/2006/main" xmlns:p="http://schemas.openxmlformats.org/presentationml/2006/main" xmlns:r="http://schemas.openxmlformats.org/officeDocument/2006/relationships">
+<p:sld xmlns:a="http://schemas.openxmlformats.org/drawingml/2006/main" xmlns:r="http://schemas.openxmlformats.org/officeDocument/2006/relationships" xmlns:p="http://schemas.openxmlformats.org/presentationml/2006/main">
   <p:cSld>
     <p:bg>
       <p:bgPr>
@@ -3219,7 +3221,14 @@
         <p:cNvGrpSpPr/>
         <p:nvPr/>
       </p:nvGrpSpPr>
-      <p:grpSpPr/>
+      <p:grpSpPr>
+        <a:xfrm>
+          <a:off x="0" y="0"/>
+          <a:ext cx="0" cy="0"/>
+          <a:chOff x="0" y="0"/>
+          <a:chExt cx="0" cy="0"/>
+        </a:xfrm>
+      </p:grpSpPr>
       <p:sp>
         <p:nvSpPr>
           <p:cNvPr id="2" name="TextBox 1"/>
@@ -3262,10 +3271,16 @@
           <p:cNvGraphicFramePr>
             <a:graphicFrameLocks noGrp="1"/>
           </p:cNvGraphicFramePr>
-          <p:nvPr/>
+          <p:nvPr>
+            <p:extLst>
+              <p:ext uri="{D42A27DB-BD31-4B8C-83A1-F6EECF244321}">
+                <p14:modId xmlns:p14="http://schemas.microsoft.com/office/powerpoint/2010/main" val="1146172572"/>
+              </p:ext>
+            </p:extLst>
+          </p:nvPr>
         </p:nvGraphicFramePr>
         <p:xfrm>
-          <a:off x="822960.0" y="1188720"/>
+          <a:off x="838200" y="1259554"/>
           <a:ext cx="10515600" cy="4498848"/>
         </p:xfrm>
         <a:graphic>
@@ -3275,11 +3290,41 @@
                 <a:tableStyleId>{5C22544A-7EE6-4342-B048-85BDC9FD1C3A}</a:tableStyleId>
               </a:tblPr>
               <a:tblGrid>
-                <a:gridCol w="1463040"/>
-                <a:gridCol w="2194560"/>
-                <a:gridCol w="2011680"/>
-                <a:gridCol w="2377440"/>
-                <a:gridCol w="2468880"/>
+                <a:gridCol w="1463040">
+                  <a:extLst>
+                    <a:ext uri="{9D8B030D-6E8A-4147-A177-3AD203B41FA5}">
+                      <a16:colId xmlns:a16="http://schemas.microsoft.com/office/drawing/2014/main" val="20000"/>
+                    </a:ext>
+                  </a:extLst>
+                </a:gridCol>
+                <a:gridCol w="2194560">
+                  <a:extLst>
+                    <a:ext uri="{9D8B030D-6E8A-4147-A177-3AD203B41FA5}">
+                      <a16:colId xmlns:a16="http://schemas.microsoft.com/office/drawing/2014/main" val="20001"/>
+                    </a:ext>
+                  </a:extLst>
+                </a:gridCol>
+                <a:gridCol w="2011680">
+                  <a:extLst>
+                    <a:ext uri="{9D8B030D-6E8A-4147-A177-3AD203B41FA5}">
+                      <a16:colId xmlns:a16="http://schemas.microsoft.com/office/drawing/2014/main" val="20002"/>
+                    </a:ext>
+                  </a:extLst>
+                </a:gridCol>
+                <a:gridCol w="2377440">
+                  <a:extLst>
+                    <a:ext uri="{9D8B030D-6E8A-4147-A177-3AD203B41FA5}">
+                      <a16:colId xmlns:a16="http://schemas.microsoft.com/office/drawing/2014/main" val="20003"/>
+                    </a:ext>
+                  </a:extLst>
+                </a:gridCol>
+                <a:gridCol w="2468880">
+                  <a:extLst>
+                    <a:ext uri="{9D8B030D-6E8A-4147-A177-3AD203B41FA5}">
+                      <a16:colId xmlns:a16="http://schemas.microsoft.com/office/drawing/2014/main" val="20004"/>
+                    </a:ext>
+                  </a:extLst>
+                </a:gridCol>
               </a:tblGrid>
               <a:tr h="749808">
                 <a:tc>
@@ -3437,6 +3482,11 @@
                     </a:lnB>
                   </a:tcPr>
                 </a:tc>
+                <a:extLst>
+                  <a:ext uri="{0D108BD9-81ED-4DB2-BD59-A6C34878D82A}">
+                    <a16:rowId xmlns:a16="http://schemas.microsoft.com/office/drawing/2014/main" val="10000"/>
+                  </a:ext>
+                </a:extLst>
               </a:tr>
               <a:tr h="749808">
                 <a:tc>
@@ -3457,7 +3507,17 @@
                       </a:r>
                     </a:p>
                   </a:txBody>
-                  <a:tcPr anchor="ctr"/>
+                  <a:tcPr anchor="ctr">
+                    <a:lnT w="9500" cap="flat" cmpd="sng" algn="ctr">
+                      <a:solidFill>
+                        <a:srgbClr val="000000"/>
+                      </a:solidFill>
+                      <a:prstDash val="solid"/>
+                      <a:round/>
+                      <a:headEnd type="none" w="med" len="med"/>
+                      <a:tailEnd type="none" w="med" len="med"/>
+                    </a:lnT>
+                  </a:tcPr>
                 </a:tc>
                 <a:tc>
                   <a:txBody>
@@ -3477,7 +3537,17 @@
                       </a:r>
                     </a:p>
                   </a:txBody>
-                  <a:tcPr anchor="ctr"/>
+                  <a:tcPr anchor="ctr">
+                    <a:lnT w="9500" cap="flat" cmpd="sng" algn="ctr">
+                      <a:solidFill>
+                        <a:srgbClr val="000000"/>
+                      </a:solidFill>
+                      <a:prstDash val="solid"/>
+                      <a:round/>
+                      <a:headEnd type="none" w="med" len="med"/>
+                      <a:tailEnd type="none" w="med" len="med"/>
+                    </a:lnT>
+                  </a:tcPr>
                 </a:tc>
                 <a:tc>
                   <a:txBody>
@@ -3510,7 +3580,17 @@
                       </a:r>
                     </a:p>
                   </a:txBody>
-                  <a:tcPr anchor="ctr"/>
+                  <a:tcPr anchor="ctr">
+                    <a:lnT w="9500" cap="flat" cmpd="sng" algn="ctr">
+                      <a:solidFill>
+                        <a:srgbClr val="000000"/>
+                      </a:solidFill>
+                      <a:prstDash val="solid"/>
+                      <a:round/>
+                      <a:headEnd type="none" w="med" len="med"/>
+                      <a:tailEnd type="none" w="med" len="med"/>
+                    </a:lnT>
+                  </a:tcPr>
                 </a:tc>
                 <a:tc>
                   <a:txBody>
@@ -3543,7 +3623,17 @@
                       </a:r>
                     </a:p>
                   </a:txBody>
-                  <a:tcPr anchor="ctr"/>
+                  <a:tcPr anchor="ctr">
+                    <a:lnT w="9500" cap="flat" cmpd="sng" algn="ctr">
+                      <a:solidFill>
+                        <a:srgbClr val="000000"/>
+                      </a:solidFill>
+                      <a:prstDash val="solid"/>
+                      <a:round/>
+                      <a:headEnd type="none" w="med" len="med"/>
+                      <a:tailEnd type="none" w="med" len="med"/>
+                    </a:lnT>
+                  </a:tcPr>
                 </a:tc>
                 <a:tc>
                   <a:txBody>
@@ -3576,8 +3666,23 @@
                       </a:r>
                     </a:p>
                   </a:txBody>
-                  <a:tcPr anchor="ctr"/>
-                </a:tc>
+                  <a:tcPr anchor="ctr">
+                    <a:lnT w="9500" cap="flat" cmpd="sng" algn="ctr">
+                      <a:solidFill>
+                        <a:srgbClr val="000000"/>
+                      </a:solidFill>
+                      <a:prstDash val="solid"/>
+                      <a:round/>
+                      <a:headEnd type="none" w="med" len="med"/>
+                      <a:tailEnd type="none" w="med" len="med"/>
+                    </a:lnT>
+                  </a:tcPr>
+                </a:tc>
+                <a:extLst>
+                  <a:ext uri="{0D108BD9-81ED-4DB2-BD59-A6C34878D82A}">
+                    <a16:rowId xmlns:a16="http://schemas.microsoft.com/office/drawing/2014/main" val="10001"/>
+                  </a:ext>
+                </a:extLst>
               </a:tr>
               <a:tr h="749808">
                 <a:tc>
@@ -3706,6 +3811,11 @@
                   </a:txBody>
                   <a:tcPr anchor="ctr"/>
                 </a:tc>
+                <a:extLst>
+                  <a:ext uri="{0D108BD9-81ED-4DB2-BD59-A6C34878D82A}">
+                    <a16:rowId xmlns:a16="http://schemas.microsoft.com/office/drawing/2014/main" val="10002"/>
+                  </a:ext>
+                </a:extLst>
               </a:tr>
               <a:tr h="749808">
                 <a:tc>
@@ -3847,6 +3957,11 @@
                   </a:txBody>
                   <a:tcPr anchor="ctr"/>
                 </a:tc>
+                <a:extLst>
+                  <a:ext uri="{0D108BD9-81ED-4DB2-BD59-A6C34878D82A}">
+                    <a16:rowId xmlns:a16="http://schemas.microsoft.com/office/drawing/2014/main" val="10003"/>
+                  </a:ext>
+                </a:extLst>
               </a:tr>
               <a:tr h="749808">
                 <a:tc>
@@ -3988,6 +4103,11 @@
                   </a:txBody>
                   <a:tcPr anchor="ctr"/>
                 </a:tc>
+                <a:extLst>
+                  <a:ext uri="{0D108BD9-81ED-4DB2-BD59-A6C34878D82A}">
+                    <a16:rowId xmlns:a16="http://schemas.microsoft.com/office/drawing/2014/main" val="10004"/>
+                  </a:ext>
+                </a:extLst>
               </a:tr>
               <a:tr h="749808">
                 <a:tc>
@@ -4147,7 +4267,20 @@
                         </a:defRPr>
                       </a:pPr>
                       <a:r>
-                        <a:t>训练 700 / 验证 200</a:t>
+                        <a:rPr dirty="0" err="1"/>
+                        <a:t>训练</a:t>
+                      </a:r>
+                      <a:r>
+                        <a:rPr dirty="0"/>
+                        <a:t> 700 / </a:t>
+                      </a:r>
+                      <a:r>
+                        <a:rPr dirty="0" err="1"/>
+                        <a:t>验证</a:t>
+                      </a:r>
+                      <a:r>
+                        <a:rPr dirty="0"/>
+                        <a:t> 200</a:t>
                       </a:r>
                     </a:p>
                     <a:p>
@@ -4160,7 +4293,12 @@
                         </a:defRPr>
                       </a:pPr>
                       <a:r>
-                        <a:t>测试 40 (×8 + ×16)</a:t>
+                        <a:rPr dirty="0" err="1"/>
+                        <a:t>测试</a:t>
+                      </a:r>
+                      <a:r>
+                        <a:rPr dirty="0"/>
+                        <a:t> 40 (×8 + ×16)</a:t>
                       </a:r>
                     </a:p>
                   </a:txBody>
@@ -4172,6 +4310,11 @@
                     </a:lnB>
                   </a:tcPr>
                 </a:tc>
+                <a:extLst>
+                  <a:ext uri="{0D108BD9-81ED-4DB2-BD59-A6C34878D82A}">
+                    <a16:rowId xmlns:a16="http://schemas.microsoft.com/office/drawing/2014/main" val="10005"/>
+                  </a:ext>
+                </a:extLst>
               </a:tr>
             </a:tbl>
           </a:graphicData>
@@ -4186,7 +4329,7 @@
 </file>
 
 <file path=ppt/slides/slide3.xml><?xml version="1.0" encoding="utf-8"?>
-<p:sld xmlns:a="http://schemas.openxmlformats.org/drawingml/2006/main" xmlns:p="http://schemas.openxmlformats.org/presentationml/2006/main" xmlns:r="http://schemas.openxmlformats.org/officeDocument/2006/relationships">
+<p:sld xmlns:a="http://schemas.openxmlformats.org/drawingml/2006/main" xmlns:r="http://schemas.openxmlformats.org/officeDocument/2006/relationships" xmlns:p="http://schemas.openxmlformats.org/presentationml/2006/main">
   <p:cSld>
     <p:bg>
       <p:bgPr>
@@ -4202,7 +4345,14 @@
         <p:cNvGrpSpPr/>
         <p:nvPr/>
       </p:nvGrpSpPr>
-      <p:grpSpPr/>
+      <p:grpSpPr>
+        <a:xfrm>
+          <a:off x="0" y="0"/>
+          <a:ext cx="0" cy="0"/>
+          <a:chOff x="0" y="0"/>
+          <a:chExt cx="0" cy="0"/>
+        </a:xfrm>
+      </p:grpSpPr>
       <p:sp>
         <p:nvSpPr>
           <p:cNvPr id="2" name="TextBox 1"/>
@@ -4521,10 +4671,16 @@
           <p:cNvGraphicFramePr>
             <a:graphicFrameLocks noGrp="1"/>
           </p:cNvGraphicFramePr>
-          <p:nvPr/>
+          <p:nvPr>
+            <p:extLst>
+              <p:ext uri="{D42A27DB-BD31-4B8C-83A1-F6EECF244321}">
+                <p14:modId xmlns:p14="http://schemas.microsoft.com/office/powerpoint/2010/main" val="1994700088"/>
+              </p:ext>
+            </p:extLst>
+          </p:nvPr>
         </p:nvGraphicFramePr>
         <p:xfrm>
-          <a:off x="3749040.0" y="5669280"/>
+          <a:off x="6995160" y="2926080"/>
           <a:ext cx="4663440" cy="1389888"/>
         </p:xfrm>
         <a:graphic>
@@ -4534,10 +4690,34 @@
                 <a:tableStyleId>{5C22544A-7EE6-4342-B048-85BDC9FD1C3A}</a:tableStyleId>
               </a:tblPr>
               <a:tblGrid>
-                <a:gridCol w="1097280"/>
-                <a:gridCol w="1188720"/>
-                <a:gridCol w="1188720"/>
-                <a:gridCol w="1188720"/>
+                <a:gridCol w="1097280">
+                  <a:extLst>
+                    <a:ext uri="{9D8B030D-6E8A-4147-A177-3AD203B41FA5}">
+                      <a16:colId xmlns:a16="http://schemas.microsoft.com/office/drawing/2014/main" val="20000"/>
+                    </a:ext>
+                  </a:extLst>
+                </a:gridCol>
+                <a:gridCol w="1188720">
+                  <a:extLst>
+                    <a:ext uri="{9D8B030D-6E8A-4147-A177-3AD203B41FA5}">
+                      <a16:colId xmlns:a16="http://schemas.microsoft.com/office/drawing/2014/main" val="20001"/>
+                    </a:ext>
+                  </a:extLst>
+                </a:gridCol>
+                <a:gridCol w="1188720">
+                  <a:extLst>
+                    <a:ext uri="{9D8B030D-6E8A-4147-A177-3AD203B41FA5}">
+                      <a16:colId xmlns:a16="http://schemas.microsoft.com/office/drawing/2014/main" val="20002"/>
+                    </a:ext>
+                  </a:extLst>
+                </a:gridCol>
+                <a:gridCol w="1188720">
+                  <a:extLst>
+                    <a:ext uri="{9D8B030D-6E8A-4147-A177-3AD203B41FA5}">
+                      <a16:colId xmlns:a16="http://schemas.microsoft.com/office/drawing/2014/main" val="20003"/>
+                    </a:ext>
+                  </a:extLst>
+                </a:gridCol>
               </a:tblGrid>
               <a:tr h="347472">
                 <a:tc>
@@ -4664,6 +4844,11 @@
                     </a:lnB>
                   </a:tcPr>
                 </a:tc>
+                <a:extLst>
+                  <a:ext uri="{0D108BD9-81ED-4DB2-BD59-A6C34878D82A}">
+                    <a16:rowId xmlns:a16="http://schemas.microsoft.com/office/drawing/2014/main" val="10000"/>
+                  </a:ext>
+                </a:extLst>
               </a:tr>
               <a:tr h="347472">
                 <a:tc>
@@ -4684,7 +4869,17 @@
                       </a:r>
                     </a:p>
                   </a:txBody>
-                  <a:tcPr anchor="ctr"/>
+                  <a:tcPr anchor="ctr">
+                    <a:lnT w="9500" cap="flat" cmpd="sng" algn="ctr">
+                      <a:solidFill>
+                        <a:srgbClr val="000000"/>
+                      </a:solidFill>
+                      <a:prstDash val="solid"/>
+                      <a:round/>
+                      <a:headEnd type="none" w="med" len="med"/>
+                      <a:tailEnd type="none" w="med" len="med"/>
+                    </a:lnT>
+                  </a:tcPr>
                 </a:tc>
                 <a:tc>
                   <a:txBody>
@@ -4704,7 +4899,17 @@
                       </a:r>
                     </a:p>
                   </a:txBody>
-                  <a:tcPr anchor="ctr"/>
+                  <a:tcPr anchor="ctr">
+                    <a:lnT w="9500" cap="flat" cmpd="sng" algn="ctr">
+                      <a:solidFill>
+                        <a:srgbClr val="000000"/>
+                      </a:solidFill>
+                      <a:prstDash val="solid"/>
+                      <a:round/>
+                      <a:headEnd type="none" w="med" len="med"/>
+                      <a:tailEnd type="none" w="med" len="med"/>
+                    </a:lnT>
+                  </a:tcPr>
                 </a:tc>
                 <a:tc>
                   <a:txBody>
@@ -4724,7 +4929,17 @@
                       </a:r>
                     </a:p>
                   </a:txBody>
-                  <a:tcPr anchor="ctr"/>
+                  <a:tcPr anchor="ctr">
+                    <a:lnT w="9500" cap="flat" cmpd="sng" algn="ctr">
+                      <a:solidFill>
+                        <a:srgbClr val="000000"/>
+                      </a:solidFill>
+                      <a:prstDash val="solid"/>
+                      <a:round/>
+                      <a:headEnd type="none" w="med" len="med"/>
+                      <a:tailEnd type="none" w="med" len="med"/>
+                    </a:lnT>
+                  </a:tcPr>
                 </a:tc>
                 <a:tc>
                   <a:txBody>
@@ -4744,8 +4959,23 @@
                       </a:r>
                     </a:p>
                   </a:txBody>
-                  <a:tcPr anchor="ctr"/>
-                </a:tc>
+                  <a:tcPr anchor="ctr">
+                    <a:lnT w="9500" cap="flat" cmpd="sng" algn="ctr">
+                      <a:solidFill>
+                        <a:srgbClr val="000000"/>
+                      </a:solidFill>
+                      <a:prstDash val="solid"/>
+                      <a:round/>
+                      <a:headEnd type="none" w="med" len="med"/>
+                      <a:tailEnd type="none" w="med" len="med"/>
+                    </a:lnT>
+                  </a:tcPr>
+                </a:tc>
+                <a:extLst>
+                  <a:ext uri="{0D108BD9-81ED-4DB2-BD59-A6C34878D82A}">
+                    <a16:rowId xmlns:a16="http://schemas.microsoft.com/office/drawing/2014/main" val="10001"/>
+                  </a:ext>
+                </a:extLst>
               </a:tr>
               <a:tr h="347472">
                 <a:tc>
@@ -4828,6 +5058,11 @@
                   </a:txBody>
                   <a:tcPr anchor="ctr"/>
                 </a:tc>
+                <a:extLst>
+                  <a:ext uri="{0D108BD9-81ED-4DB2-BD59-A6C34878D82A}">
+                    <a16:rowId xmlns:a16="http://schemas.microsoft.com/office/drawing/2014/main" val="10002"/>
+                  </a:ext>
+                </a:extLst>
               </a:tr>
               <a:tr h="347472">
                 <a:tc>
@@ -4922,6 +5157,7 @@
                         </a:defRPr>
                       </a:pPr>
                       <a:r>
+                        <a:rPr dirty="0"/>
                         <a:t>1,069</a:t>
                       </a:r>
                     </a:p>
@@ -4934,6 +5170,11 @@
                     </a:lnB>
                   </a:tcPr>
                 </a:tc>
+                <a:extLst>
+                  <a:ext uri="{0D108BD9-81ED-4DB2-BD59-A6C34878D82A}">
+                    <a16:rowId xmlns:a16="http://schemas.microsoft.com/office/drawing/2014/main" val="10003"/>
+                  </a:ext>
+                </a:extLst>
               </a:tr>
             </a:tbl>
           </a:graphicData>
@@ -4948,7 +5189,7 @@
 </file>
 
 <file path=ppt/slides/slide4.xml><?xml version="1.0" encoding="utf-8"?>
-<p:sld xmlns:a="http://schemas.openxmlformats.org/drawingml/2006/main" xmlns:p="http://schemas.openxmlformats.org/presentationml/2006/main" xmlns:r="http://schemas.openxmlformats.org/officeDocument/2006/relationships">
+<p:sld xmlns:a="http://schemas.openxmlformats.org/drawingml/2006/main" xmlns:r="http://schemas.openxmlformats.org/officeDocument/2006/relationships" xmlns:p="http://schemas.openxmlformats.org/presentationml/2006/main">
   <p:cSld>
     <p:bg>
       <p:bgPr>
@@ -4964,7 +5205,14 @@
         <p:cNvGrpSpPr/>
         <p:nvPr/>
       </p:nvGrpSpPr>
-      <p:grpSpPr/>
+      <p:grpSpPr>
+        <a:xfrm>
+          <a:off x="0" y="0"/>
+          <a:ext cx="0" cy="0"/>
+          <a:chOff x="0" y="0"/>
+          <a:chExt cx="0" cy="0"/>
+        </a:xfrm>
+      </p:grpSpPr>
       <p:sp>
         <p:nvSpPr>
           <p:cNvPr id="2" name="TextBox 1"/>
@@ -5104,7 +5352,7 @@
         </p:blipFill>
         <p:spPr>
           <a:xfrm>
-            <a:off x="1097280" y="3017520"/>
+            <a:off x="1097280" y="2631154"/>
             <a:ext cx="2286000" cy="2286000"/>
           </a:xfrm>
           <a:prstGeom prst="rect">
@@ -5120,7 +5368,7 @@
         </p:nvSpPr>
         <p:spPr>
           <a:xfrm>
-            <a:off x="1097280" y="5376672"/>
+            <a:off x="1097280" y="4990306"/>
             <a:ext cx="2286000" cy="228600"/>
           </a:xfrm>
           <a:prstGeom prst="rect">
@@ -5167,7 +5415,7 @@
         </p:blipFill>
         <p:spPr>
           <a:xfrm>
-            <a:off x="3840480" y="3017520"/>
+            <a:off x="3840480" y="2631154"/>
             <a:ext cx="2286000" cy="2286000"/>
           </a:xfrm>
           <a:prstGeom prst="rect">
@@ -5183,7 +5431,7 @@
         </p:nvSpPr>
         <p:spPr>
           <a:xfrm>
-            <a:off x="3840480" y="5376672"/>
+            <a:off x="3840480" y="4990306"/>
             <a:ext cx="2286000" cy="228600"/>
           </a:xfrm>
           <a:prstGeom prst="rect">
@@ -5220,10 +5468,16 @@
           <p:cNvGraphicFramePr>
             <a:graphicFrameLocks noGrp="1"/>
           </p:cNvGraphicFramePr>
-          <p:nvPr/>
+          <p:nvPr>
+            <p:extLst>
+              <p:ext uri="{D42A27DB-BD31-4B8C-83A1-F6EECF244321}">
+                <p14:modId xmlns:p14="http://schemas.microsoft.com/office/powerpoint/2010/main" val="3311894712"/>
+              </p:ext>
+            </p:extLst>
+          </p:nvPr>
         </p:nvGraphicFramePr>
         <p:xfrm>
-          <a:off x="2811780.0" y="5303520"/>
+          <a:off x="822960" y="5502370"/>
           <a:ext cx="6537960" cy="694944"/>
         </p:xfrm>
         <a:graphic>
@@ -5233,14 +5487,62 @@
                 <a:tableStyleId>{5C22544A-7EE6-4342-B048-85BDC9FD1C3A}</a:tableStyleId>
               </a:tblPr>
               <a:tblGrid>
-                <a:gridCol w="1097280"/>
-                <a:gridCol w="777240"/>
-                <a:gridCol w="777240"/>
-                <a:gridCol w="777240"/>
-                <a:gridCol w="777240"/>
-                <a:gridCol w="777240"/>
-                <a:gridCol w="777240"/>
-                <a:gridCol w="777240"/>
+                <a:gridCol w="1097280">
+                  <a:extLst>
+                    <a:ext uri="{9D8B030D-6E8A-4147-A177-3AD203B41FA5}">
+                      <a16:colId xmlns:a16="http://schemas.microsoft.com/office/drawing/2014/main" val="20000"/>
+                    </a:ext>
+                  </a:extLst>
+                </a:gridCol>
+                <a:gridCol w="777240">
+                  <a:extLst>
+                    <a:ext uri="{9D8B030D-6E8A-4147-A177-3AD203B41FA5}">
+                      <a16:colId xmlns:a16="http://schemas.microsoft.com/office/drawing/2014/main" val="20001"/>
+                    </a:ext>
+                  </a:extLst>
+                </a:gridCol>
+                <a:gridCol w="777240">
+                  <a:extLst>
+                    <a:ext uri="{9D8B030D-6E8A-4147-A177-3AD203B41FA5}">
+                      <a16:colId xmlns:a16="http://schemas.microsoft.com/office/drawing/2014/main" val="20002"/>
+                    </a:ext>
+                  </a:extLst>
+                </a:gridCol>
+                <a:gridCol w="777240">
+                  <a:extLst>
+                    <a:ext uri="{9D8B030D-6E8A-4147-A177-3AD203B41FA5}">
+                      <a16:colId xmlns:a16="http://schemas.microsoft.com/office/drawing/2014/main" val="20003"/>
+                    </a:ext>
+                  </a:extLst>
+                </a:gridCol>
+                <a:gridCol w="777240">
+                  <a:extLst>
+                    <a:ext uri="{9D8B030D-6E8A-4147-A177-3AD203B41FA5}">
+                      <a16:colId xmlns:a16="http://schemas.microsoft.com/office/drawing/2014/main" val="20004"/>
+                    </a:ext>
+                  </a:extLst>
+                </a:gridCol>
+                <a:gridCol w="777240">
+                  <a:extLst>
+                    <a:ext uri="{9D8B030D-6E8A-4147-A177-3AD203B41FA5}">
+                      <a16:colId xmlns:a16="http://schemas.microsoft.com/office/drawing/2014/main" val="20005"/>
+                    </a:ext>
+                  </a:extLst>
+                </a:gridCol>
+                <a:gridCol w="777240">
+                  <a:extLst>
+                    <a:ext uri="{9D8B030D-6E8A-4147-A177-3AD203B41FA5}">
+                      <a16:colId xmlns:a16="http://schemas.microsoft.com/office/drawing/2014/main" val="20006"/>
+                    </a:ext>
+                  </a:extLst>
+                </a:gridCol>
+                <a:gridCol w="777240">
+                  <a:extLst>
+                    <a:ext uri="{9D8B030D-6E8A-4147-A177-3AD203B41FA5}">
+                      <a16:colId xmlns:a16="http://schemas.microsoft.com/office/drawing/2014/main" val="20007"/>
+                    </a:ext>
+                  </a:extLst>
+                </a:gridCol>
               </a:tblGrid>
               <a:tr h="347472">
                 <a:tc>
@@ -5491,6 +5793,11 @@
                     </a:lnB>
                   </a:tcPr>
                 </a:tc>
+                <a:extLst>
+                  <a:ext uri="{0D108BD9-81ED-4DB2-BD59-A6C34878D82A}">
+                    <a16:rowId xmlns:a16="http://schemas.microsoft.com/office/drawing/2014/main" val="10000"/>
+                  </a:ext>
+                </a:extLst>
               </a:tr>
               <a:tr h="347472">
                 <a:tc>
@@ -5512,6 +5819,15 @@
                     </a:p>
                   </a:txBody>
                   <a:tcPr anchor="ctr">
+                    <a:lnT w="9500" cap="flat" cmpd="sng" algn="ctr">
+                      <a:solidFill>
+                        <a:srgbClr val="000000"/>
+                      </a:solidFill>
+                      <a:prstDash val="solid"/>
+                      <a:round/>
+                      <a:headEnd type="none" w="med" len="med"/>
+                      <a:tailEnd type="none" w="med" len="med"/>
+                    </a:lnT>
                     <a:lnB w="19000">
                       <a:solidFill>
                         <a:srgbClr val="000000"/>
@@ -5538,6 +5854,15 @@
                     </a:p>
                   </a:txBody>
                   <a:tcPr anchor="ctr">
+                    <a:lnT w="9500" cap="flat" cmpd="sng" algn="ctr">
+                      <a:solidFill>
+                        <a:srgbClr val="000000"/>
+                      </a:solidFill>
+                      <a:prstDash val="solid"/>
+                      <a:round/>
+                      <a:headEnd type="none" w="med" len="med"/>
+                      <a:tailEnd type="none" w="med" len="med"/>
+                    </a:lnT>
                     <a:lnB w="19000">
                       <a:solidFill>
                         <a:srgbClr val="000000"/>
@@ -5564,6 +5889,15 @@
                     </a:p>
                   </a:txBody>
                   <a:tcPr anchor="ctr">
+                    <a:lnT w="9500" cap="flat" cmpd="sng" algn="ctr">
+                      <a:solidFill>
+                        <a:srgbClr val="000000"/>
+                      </a:solidFill>
+                      <a:prstDash val="solid"/>
+                      <a:round/>
+                      <a:headEnd type="none" w="med" len="med"/>
+                      <a:tailEnd type="none" w="med" len="med"/>
+                    </a:lnT>
                     <a:lnB w="19000">
                       <a:solidFill>
                         <a:srgbClr val="000000"/>
@@ -5590,6 +5924,15 @@
                     </a:p>
                   </a:txBody>
                   <a:tcPr anchor="ctr">
+                    <a:lnT w="9500" cap="flat" cmpd="sng" algn="ctr">
+                      <a:solidFill>
+                        <a:srgbClr val="000000"/>
+                      </a:solidFill>
+                      <a:prstDash val="solid"/>
+                      <a:round/>
+                      <a:headEnd type="none" w="med" len="med"/>
+                      <a:tailEnd type="none" w="med" len="med"/>
+                    </a:lnT>
                     <a:lnB w="19000">
                       <a:solidFill>
                         <a:srgbClr val="000000"/>
@@ -5616,6 +5959,15 @@
                     </a:p>
                   </a:txBody>
                   <a:tcPr anchor="ctr">
+                    <a:lnT w="9500" cap="flat" cmpd="sng" algn="ctr">
+                      <a:solidFill>
+                        <a:srgbClr val="000000"/>
+                      </a:solidFill>
+                      <a:prstDash val="solid"/>
+                      <a:round/>
+                      <a:headEnd type="none" w="med" len="med"/>
+                      <a:tailEnd type="none" w="med" len="med"/>
+                    </a:lnT>
                     <a:lnB w="19000">
                       <a:solidFill>
                         <a:srgbClr val="000000"/>
@@ -5642,6 +5994,15 @@
                     </a:p>
                   </a:txBody>
                   <a:tcPr anchor="ctr">
+                    <a:lnT w="9500" cap="flat" cmpd="sng" algn="ctr">
+                      <a:solidFill>
+                        <a:srgbClr val="000000"/>
+                      </a:solidFill>
+                      <a:prstDash val="solid"/>
+                      <a:round/>
+                      <a:headEnd type="none" w="med" len="med"/>
+                      <a:tailEnd type="none" w="med" len="med"/>
+                    </a:lnT>
                     <a:lnB w="19000">
                       <a:solidFill>
                         <a:srgbClr val="000000"/>
@@ -5663,11 +6024,21 @@
                         </a:defRPr>
                       </a:pPr>
                       <a:r>
+                        <a:rPr dirty="0"/>
                         <a:t>171</a:t>
                       </a:r>
                     </a:p>
                   </a:txBody>
                   <a:tcPr anchor="ctr">
+                    <a:lnT w="9500" cap="flat" cmpd="sng" algn="ctr">
+                      <a:solidFill>
+                        <a:srgbClr val="000000"/>
+                      </a:solidFill>
+                      <a:prstDash val="solid"/>
+                      <a:round/>
+                      <a:headEnd type="none" w="med" len="med"/>
+                      <a:tailEnd type="none" w="med" len="med"/>
+                    </a:lnT>
                     <a:lnB w="19000">
                       <a:solidFill>
                         <a:srgbClr val="000000"/>
@@ -5689,11 +6060,21 @@
                         </a:defRPr>
                       </a:pPr>
                       <a:r>
+                        <a:rPr dirty="0"/>
                         <a:t>1,377</a:t>
                       </a:r>
                     </a:p>
                   </a:txBody>
                   <a:tcPr anchor="ctr">
+                    <a:lnT w="9500" cap="flat" cmpd="sng" algn="ctr">
+                      <a:solidFill>
+                        <a:srgbClr val="000000"/>
+                      </a:solidFill>
+                      <a:prstDash val="solid"/>
+                      <a:round/>
+                      <a:headEnd type="none" w="med" len="med"/>
+                      <a:tailEnd type="none" w="med" len="med"/>
+                    </a:lnT>
                     <a:lnB w="19000">
                       <a:solidFill>
                         <a:srgbClr val="000000"/>
@@ -5701,6 +6082,11 @@
                     </a:lnB>
                   </a:tcPr>
                 </a:tc>
+                <a:extLst>
+                  <a:ext uri="{0D108BD9-81ED-4DB2-BD59-A6C34878D82A}">
+                    <a16:rowId xmlns:a16="http://schemas.microsoft.com/office/drawing/2014/main" val="10001"/>
+                  </a:ext>
+                </a:extLst>
               </a:tr>
             </a:tbl>
           </a:graphicData>
@@ -5715,7 +6101,7 @@
 </file>
 
 <file path=ppt/slides/slide5.xml><?xml version="1.0" encoding="utf-8"?>
-<p:sld xmlns:a="http://schemas.openxmlformats.org/drawingml/2006/main" xmlns:p="http://schemas.openxmlformats.org/presentationml/2006/main" xmlns:r="http://schemas.openxmlformats.org/officeDocument/2006/relationships">
+<p:sld xmlns:a="http://schemas.openxmlformats.org/drawingml/2006/main" xmlns:r="http://schemas.openxmlformats.org/officeDocument/2006/relationships" xmlns:p="http://schemas.openxmlformats.org/presentationml/2006/main">
   <p:cSld>
     <p:bg>
       <p:bgPr>
@@ -5731,7 +6117,14 @@
         <p:cNvGrpSpPr/>
         <p:nvPr/>
       </p:nvGrpSpPr>
-      <p:grpSpPr/>
+      <p:grpSpPr>
+        <a:xfrm>
+          <a:off x="0" y="0"/>
+          <a:ext cx="0" cy="0"/>
+          <a:chOff x="0" y="0"/>
+          <a:chExt cx="0" cy="0"/>
+        </a:xfrm>
+      </p:grpSpPr>
       <p:sp>
         <p:nvSpPr>
           <p:cNvPr id="2" name="TextBox 1"/>
@@ -5893,10 +6286,16 @@
           <p:cNvGraphicFramePr>
             <a:graphicFrameLocks noGrp="1"/>
           </p:cNvGraphicFramePr>
-          <p:nvPr/>
+          <p:nvPr>
+            <p:extLst>
+              <p:ext uri="{D42A27DB-BD31-4B8C-83A1-F6EECF244321}">
+                <p14:modId xmlns:p14="http://schemas.microsoft.com/office/powerpoint/2010/main" val="152757719"/>
+              </p:ext>
+            </p:extLst>
+          </p:nvPr>
         </p:nvGraphicFramePr>
         <p:xfrm>
-          <a:off x="2926080.0" y="4114800"/>
+          <a:off x="822960" y="3580327"/>
           <a:ext cx="6309360" cy="1389888"/>
         </p:xfrm>
         <a:graphic>
@@ -5906,10 +6305,34 @@
                 <a:tableStyleId>{5C22544A-7EE6-4342-B048-85BDC9FD1C3A}</a:tableStyleId>
               </a:tblPr>
               <a:tblGrid>
-                <a:gridCol w="1097280"/>
-                <a:gridCol w="1097280"/>
-                <a:gridCol w="914400"/>
-                <a:gridCol w="3200400"/>
+                <a:gridCol w="1097280">
+                  <a:extLst>
+                    <a:ext uri="{9D8B030D-6E8A-4147-A177-3AD203B41FA5}">
+                      <a16:colId xmlns:a16="http://schemas.microsoft.com/office/drawing/2014/main" val="20000"/>
+                    </a:ext>
+                  </a:extLst>
+                </a:gridCol>
+                <a:gridCol w="1097280">
+                  <a:extLst>
+                    <a:ext uri="{9D8B030D-6E8A-4147-A177-3AD203B41FA5}">
+                      <a16:colId xmlns:a16="http://schemas.microsoft.com/office/drawing/2014/main" val="20001"/>
+                    </a:ext>
+                  </a:extLst>
+                </a:gridCol>
+                <a:gridCol w="914400">
+                  <a:extLst>
+                    <a:ext uri="{9D8B030D-6E8A-4147-A177-3AD203B41FA5}">
+                      <a16:colId xmlns:a16="http://schemas.microsoft.com/office/drawing/2014/main" val="20002"/>
+                    </a:ext>
+                  </a:extLst>
+                </a:gridCol>
+                <a:gridCol w="3200400">
+                  <a:extLst>
+                    <a:ext uri="{9D8B030D-6E8A-4147-A177-3AD203B41FA5}">
+                      <a16:colId xmlns:a16="http://schemas.microsoft.com/office/drawing/2014/main" val="20003"/>
+                    </a:ext>
+                  </a:extLst>
+                </a:gridCol>
               </a:tblGrid>
               <a:tr h="347472">
                 <a:tc>
@@ -6019,8 +6442,10 @@
                         </a:defRPr>
                       </a:pPr>
                       <a:r>
+                        <a:rPr dirty="0" err="1"/>
                         <a:t>说明</a:t>
                       </a:r>
+                      <a:endParaRPr dirty="0"/>
                     </a:p>
                   </a:txBody>
                   <a:tcPr anchor="ctr">
@@ -6036,6 +6461,11 @@
                     </a:lnB>
                   </a:tcPr>
                 </a:tc>
+                <a:extLst>
+                  <a:ext uri="{0D108BD9-81ED-4DB2-BD59-A6C34878D82A}">
+                    <a16:rowId xmlns:a16="http://schemas.microsoft.com/office/drawing/2014/main" val="10000"/>
+                  </a:ext>
+                </a:extLst>
               </a:tr>
               <a:tr h="347472">
                 <a:tc>
@@ -6056,7 +6486,17 @@
                       </a:r>
                     </a:p>
                   </a:txBody>
-                  <a:tcPr anchor="ctr"/>
+                  <a:tcPr anchor="ctr">
+                    <a:lnT w="9500" cap="flat" cmpd="sng" algn="ctr">
+                      <a:solidFill>
+                        <a:srgbClr val="000000"/>
+                      </a:solidFill>
+                      <a:prstDash val="solid"/>
+                      <a:round/>
+                      <a:headEnd type="none" w="med" len="med"/>
+                      <a:tailEnd type="none" w="med" len="med"/>
+                    </a:lnT>
+                  </a:tcPr>
                 </a:tc>
                 <a:tc>
                   <a:txBody>
@@ -6076,7 +6516,17 @@
                       </a:r>
                     </a:p>
                   </a:txBody>
-                  <a:tcPr anchor="ctr"/>
+                  <a:tcPr anchor="ctr">
+                    <a:lnT w="9500" cap="flat" cmpd="sng" algn="ctr">
+                      <a:solidFill>
+                        <a:srgbClr val="000000"/>
+                      </a:solidFill>
+                      <a:prstDash val="solid"/>
+                      <a:round/>
+                      <a:headEnd type="none" w="med" len="med"/>
+                      <a:tailEnd type="none" w="med" len="med"/>
+                    </a:lnT>
+                  </a:tcPr>
                 </a:tc>
                 <a:tc>
                   <a:txBody>
@@ -6096,7 +6546,17 @@
                       </a:r>
                     </a:p>
                   </a:txBody>
-                  <a:tcPr anchor="ctr"/>
+                  <a:tcPr anchor="ctr">
+                    <a:lnT w="9500" cap="flat" cmpd="sng" algn="ctr">
+                      <a:solidFill>
+                        <a:srgbClr val="000000"/>
+                      </a:solidFill>
+                      <a:prstDash val="solid"/>
+                      <a:round/>
+                      <a:headEnd type="none" w="med" len="med"/>
+                      <a:tailEnd type="none" w="med" len="med"/>
+                    </a:lnT>
+                  </a:tcPr>
                 </a:tc>
                 <a:tc>
                   <a:txBody>
@@ -6116,8 +6576,23 @@
                       </a:r>
                     </a:p>
                   </a:txBody>
-                  <a:tcPr anchor="ctr"/>
-                </a:tc>
+                  <a:tcPr anchor="ctr">
+                    <a:lnT w="9500" cap="flat" cmpd="sng" algn="ctr">
+                      <a:solidFill>
+                        <a:srgbClr val="000000"/>
+                      </a:solidFill>
+                      <a:prstDash val="solid"/>
+                      <a:round/>
+                      <a:headEnd type="none" w="med" len="med"/>
+                      <a:tailEnd type="none" w="med" len="med"/>
+                    </a:lnT>
+                  </a:tcPr>
+                </a:tc>
+                <a:extLst>
+                  <a:ext uri="{0D108BD9-81ED-4DB2-BD59-A6C34878D82A}">
+                    <a16:rowId xmlns:a16="http://schemas.microsoft.com/office/drawing/2014/main" val="10001"/>
+                  </a:ext>
+                </a:extLst>
               </a:tr>
               <a:tr h="347472">
                 <a:tc>
@@ -6200,6 +6675,11 @@
                   </a:txBody>
                   <a:tcPr anchor="ctr"/>
                 </a:tc>
+                <a:extLst>
+                  <a:ext uri="{0D108BD9-81ED-4DB2-BD59-A6C34878D82A}">
+                    <a16:rowId xmlns:a16="http://schemas.microsoft.com/office/drawing/2014/main" val="10002"/>
+                  </a:ext>
+                </a:extLst>
               </a:tr>
               <a:tr h="347472">
                 <a:tc>
@@ -6294,8 +6774,14 @@
                         </a:defRPr>
                       </a:pPr>
                       <a:r>
-                        <a:t>Landsat-8 → Sentinel-2 一一配对</a:t>
-                      </a:r>
+                        <a:rPr dirty="0"/>
+                        <a:t>Landsat-8 → Sentinel-2 </a:t>
+                      </a:r>
+                      <a:r>
+                        <a:rPr dirty="0" err="1"/>
+                        <a:t>一一配对</a:t>
+                      </a:r>
+                      <a:endParaRPr dirty="0"/>
                     </a:p>
                   </a:txBody>
                   <a:tcPr anchor="ctr">
@@ -6306,6 +6792,11 @@
                     </a:lnB>
                   </a:tcPr>
                 </a:tc>
+                <a:extLst>
+                  <a:ext uri="{0D108BD9-81ED-4DB2-BD59-A6C34878D82A}">
+                    <a16:rowId xmlns:a16="http://schemas.microsoft.com/office/drawing/2014/main" val="10003"/>
+                  </a:ext>
+                </a:extLst>
               </a:tr>
             </a:tbl>
           </a:graphicData>
@@ -6320,7 +6811,7 @@
 </file>
 
 <file path=ppt/slides/slide6.xml><?xml version="1.0" encoding="utf-8"?>
-<p:sld xmlns:a="http://schemas.openxmlformats.org/drawingml/2006/main" xmlns:p="http://schemas.openxmlformats.org/presentationml/2006/main" xmlns:r="http://schemas.openxmlformats.org/officeDocument/2006/relationships">
+<p:sld xmlns:a="http://schemas.openxmlformats.org/drawingml/2006/main" xmlns:r="http://schemas.openxmlformats.org/officeDocument/2006/relationships" xmlns:p="http://schemas.openxmlformats.org/presentationml/2006/main">
   <p:cSld>
     <p:bg>
       <p:bgPr>
@@ -6336,7 +6827,14 @@
         <p:cNvGrpSpPr/>
         <p:nvPr/>
       </p:nvGrpSpPr>
-      <p:grpSpPr/>
+      <p:grpSpPr>
+        <a:xfrm>
+          <a:off x="0" y="0"/>
+          <a:ext cx="0" cy="0"/>
+          <a:chOff x="0" y="0"/>
+          <a:chExt cx="0" cy="0"/>
+        </a:xfrm>
+      </p:grpSpPr>
       <p:sp>
         <p:nvSpPr>
           <p:cNvPr id="2" name="TextBox 1"/>
@@ -6492,7 +6990,7 @@
         </p:blipFill>
         <p:spPr>
           <a:xfrm>
-            <a:off x="1371600" y="3291840"/>
+            <a:off x="822960" y="2798064"/>
             <a:ext cx="2286000" cy="1600200"/>
           </a:xfrm>
           <a:prstGeom prst="rect">
@@ -6508,7 +7006,7 @@
         </p:nvSpPr>
         <p:spPr>
           <a:xfrm>
-            <a:off x="1371600" y="4965192"/>
+            <a:off x="822960" y="4471416"/>
             <a:ext cx="2286000" cy="228600"/>
           </a:xfrm>
           <a:prstGeom prst="rect">
@@ -6555,7 +7053,7 @@
         </p:blipFill>
         <p:spPr>
           <a:xfrm>
-            <a:off x="4114800" y="3291840"/>
+            <a:off x="3566160" y="2798064"/>
             <a:ext cx="2286000" cy="1600200"/>
           </a:xfrm>
           <a:prstGeom prst="rect">
@@ -6571,7 +7069,7 @@
         </p:nvSpPr>
         <p:spPr>
           <a:xfrm>
-            <a:off x="4114800" y="4965192"/>
+            <a:off x="3566160" y="4471416"/>
             <a:ext cx="2286000" cy="228600"/>
           </a:xfrm>
           <a:prstGeom prst="rect">
@@ -6608,10 +7106,16 @@
           <p:cNvGraphicFramePr>
             <a:graphicFrameLocks noGrp="1"/>
           </p:cNvGraphicFramePr>
-          <p:nvPr/>
+          <p:nvPr>
+            <p:extLst>
+              <p:ext uri="{D42A27DB-BD31-4B8C-83A1-F6EECF244321}">
+                <p14:modId xmlns:p14="http://schemas.microsoft.com/office/powerpoint/2010/main" val="1440541556"/>
+              </p:ext>
+            </p:extLst>
+          </p:nvPr>
         </p:nvGraphicFramePr>
         <p:xfrm>
-          <a:off x="3886200.0" y="5669280"/>
+          <a:off x="822960" y="4974336"/>
           <a:ext cx="4389120" cy="1389888"/>
         </p:xfrm>
         <a:graphic>
@@ -6621,10 +7125,34 @@
                 <a:tableStyleId>{5C22544A-7EE6-4342-B048-85BDC9FD1C3A}</a:tableStyleId>
               </a:tblPr>
               <a:tblGrid>
-                <a:gridCol w="1097280"/>
-                <a:gridCol w="1097280"/>
-                <a:gridCol w="1097280"/>
-                <a:gridCol w="1097280"/>
+                <a:gridCol w="1097280">
+                  <a:extLst>
+                    <a:ext uri="{9D8B030D-6E8A-4147-A177-3AD203B41FA5}">
+                      <a16:colId xmlns:a16="http://schemas.microsoft.com/office/drawing/2014/main" val="20000"/>
+                    </a:ext>
+                  </a:extLst>
+                </a:gridCol>
+                <a:gridCol w="1097280">
+                  <a:extLst>
+                    <a:ext uri="{9D8B030D-6E8A-4147-A177-3AD203B41FA5}">
+                      <a16:colId xmlns:a16="http://schemas.microsoft.com/office/drawing/2014/main" val="20001"/>
+                    </a:ext>
+                  </a:extLst>
+                </a:gridCol>
+                <a:gridCol w="1097280">
+                  <a:extLst>
+                    <a:ext uri="{9D8B030D-6E8A-4147-A177-3AD203B41FA5}">
+                      <a16:colId xmlns:a16="http://schemas.microsoft.com/office/drawing/2014/main" val="20002"/>
+                    </a:ext>
+                  </a:extLst>
+                </a:gridCol>
+                <a:gridCol w="1097280">
+                  <a:extLst>
+                    <a:ext uri="{9D8B030D-6E8A-4147-A177-3AD203B41FA5}">
+                      <a16:colId xmlns:a16="http://schemas.microsoft.com/office/drawing/2014/main" val="20003"/>
+                    </a:ext>
+                  </a:extLst>
+                </a:gridCol>
               </a:tblGrid>
               <a:tr h="347472">
                 <a:tc>
@@ -6751,6 +7279,11 @@
                     </a:lnB>
                   </a:tcPr>
                 </a:tc>
+                <a:extLst>
+                  <a:ext uri="{0D108BD9-81ED-4DB2-BD59-A6C34878D82A}">
+                    <a16:rowId xmlns:a16="http://schemas.microsoft.com/office/drawing/2014/main" val="10000"/>
+                  </a:ext>
+                </a:extLst>
               </a:tr>
               <a:tr h="347472">
                 <a:tc>
@@ -6771,7 +7304,17 @@
                       </a:r>
                     </a:p>
                   </a:txBody>
-                  <a:tcPr anchor="ctr"/>
+                  <a:tcPr anchor="ctr">
+                    <a:lnT w="9500" cap="flat" cmpd="sng" algn="ctr">
+                      <a:solidFill>
+                        <a:srgbClr val="000000"/>
+                      </a:solidFill>
+                      <a:prstDash val="solid"/>
+                      <a:round/>
+                      <a:headEnd type="none" w="med" len="med"/>
+                      <a:tailEnd type="none" w="med" len="med"/>
+                    </a:lnT>
+                  </a:tcPr>
                 </a:tc>
                 <a:tc>
                   <a:txBody>
@@ -6791,7 +7334,17 @@
                       </a:r>
                     </a:p>
                   </a:txBody>
-                  <a:tcPr anchor="ctr"/>
+                  <a:tcPr anchor="ctr">
+                    <a:lnT w="9500" cap="flat" cmpd="sng" algn="ctr">
+                      <a:solidFill>
+                        <a:srgbClr val="000000"/>
+                      </a:solidFill>
+                      <a:prstDash val="solid"/>
+                      <a:round/>
+                      <a:headEnd type="none" w="med" len="med"/>
+                      <a:tailEnd type="none" w="med" len="med"/>
+                    </a:lnT>
+                  </a:tcPr>
                 </a:tc>
                 <a:tc>
                   <a:txBody>
@@ -6811,7 +7364,17 @@
                       </a:r>
                     </a:p>
                   </a:txBody>
-                  <a:tcPr anchor="ctr"/>
+                  <a:tcPr anchor="ctr">
+                    <a:lnT w="9500" cap="flat" cmpd="sng" algn="ctr">
+                      <a:solidFill>
+                        <a:srgbClr val="000000"/>
+                      </a:solidFill>
+                      <a:prstDash val="solid"/>
+                      <a:round/>
+                      <a:headEnd type="none" w="med" len="med"/>
+                      <a:tailEnd type="none" w="med" len="med"/>
+                    </a:lnT>
+                  </a:tcPr>
                 </a:tc>
                 <a:tc>
                   <a:txBody>
@@ -6827,12 +7390,28 @@
                         </a:defRPr>
                       </a:pPr>
                       <a:r>
+                        <a:rPr dirty="0"/>
                         <a:t>700 对</a:t>
                       </a:r>
                     </a:p>
                   </a:txBody>
-                  <a:tcPr anchor="ctr"/>
-                </a:tc>
+                  <a:tcPr anchor="ctr">
+                    <a:lnT w="9500" cap="flat" cmpd="sng" algn="ctr">
+                      <a:solidFill>
+                        <a:srgbClr val="000000"/>
+                      </a:solidFill>
+                      <a:prstDash val="solid"/>
+                      <a:round/>
+                      <a:headEnd type="none" w="med" len="med"/>
+                      <a:tailEnd type="none" w="med" len="med"/>
+                    </a:lnT>
+                  </a:tcPr>
+                </a:tc>
+                <a:extLst>
+                  <a:ext uri="{0D108BD9-81ED-4DB2-BD59-A6C34878D82A}">
+                    <a16:rowId xmlns:a16="http://schemas.microsoft.com/office/drawing/2014/main" val="10001"/>
+                  </a:ext>
+                </a:extLst>
               </a:tr>
               <a:tr h="347472">
                 <a:tc>
@@ -6915,6 +7494,11 @@
                   </a:txBody>
                   <a:tcPr anchor="ctr"/>
                 </a:tc>
+                <a:extLst>
+                  <a:ext uri="{0D108BD9-81ED-4DB2-BD59-A6C34878D82A}">
+                    <a16:rowId xmlns:a16="http://schemas.microsoft.com/office/drawing/2014/main" val="10002"/>
+                  </a:ext>
+                </a:extLst>
               </a:tr>
               <a:tr h="347472">
                 <a:tc>
@@ -7009,6 +7593,7 @@
                         </a:defRPr>
                       </a:pPr>
                       <a:r>
+                        <a:rPr dirty="0"/>
                         <a:t>100 对</a:t>
                       </a:r>
                     </a:p>
@@ -7021,6 +7606,11 @@
                     </a:lnB>
                   </a:tcPr>
                 </a:tc>
+                <a:extLst>
+                  <a:ext uri="{0D108BD9-81ED-4DB2-BD59-A6C34878D82A}">
+                    <a16:rowId xmlns:a16="http://schemas.microsoft.com/office/drawing/2014/main" val="10003"/>
+                  </a:ext>
+                </a:extLst>
               </a:tr>
             </a:tbl>
           </a:graphicData>
@@ -7035,7 +7625,7 @@
 </file>
 
 <file path=ppt/slides/slide7.xml><?xml version="1.0" encoding="utf-8"?>
-<p:sld xmlns:a="http://schemas.openxmlformats.org/drawingml/2006/main" xmlns:p="http://schemas.openxmlformats.org/presentationml/2006/main" xmlns:r="http://schemas.openxmlformats.org/officeDocument/2006/relationships">
+<p:sld xmlns:a="http://schemas.openxmlformats.org/drawingml/2006/main" xmlns:r="http://schemas.openxmlformats.org/officeDocument/2006/relationships" xmlns:p="http://schemas.openxmlformats.org/presentationml/2006/main">
   <p:cSld>
     <p:bg>
       <p:bgPr>
@@ -7051,7 +7641,14 @@
         <p:cNvGrpSpPr/>
         <p:nvPr/>
       </p:nvGrpSpPr>
-      <p:grpSpPr/>
+      <p:grpSpPr>
+        <a:xfrm>
+          <a:off x="0" y="0"/>
+          <a:ext cx="0" cy="0"/>
+          <a:chOff x="0" y="0"/>
+          <a:chExt cx="0" cy="0"/>
+        </a:xfrm>
+      </p:grpSpPr>
       <p:sp>
         <p:nvSpPr>
           <p:cNvPr id="2" name="TextBox 1"/>
@@ -7412,8 +8009,8 @@
         </p:nvSpPr>
         <p:spPr>
           <a:xfrm>
-            <a:off x="6400800" y="3314700"/>
-            <a:ext cx="320040" cy="228600"/>
+            <a:off x="6400800" y="3314699"/>
+            <a:ext cx="1532586" cy="448055"/>
           </a:xfrm>
           <a:prstGeom prst="rect">
             <a:avLst/>
@@ -7438,6 +8035,7 @@
               </a:defRPr>
             </a:pPr>
             <a:r>
+              <a:rPr dirty="0"/>
               <a:t>LR×16</a:t>
             </a:r>
           </a:p>
@@ -7454,6 +8052,7 @@
               </a:defRPr>
             </a:pPr>
             <a:r>
+              <a:rPr dirty="0"/>
               <a:t>40×28</a:t>
             </a:r>
           </a:p>
@@ -7465,10 +8064,16 @@
           <p:cNvGraphicFramePr>
             <a:graphicFrameLocks noGrp="1"/>
           </p:cNvGraphicFramePr>
-          <p:nvPr/>
+          <p:nvPr>
+            <p:extLst>
+              <p:ext uri="{D42A27DB-BD31-4B8C-83A1-F6EECF244321}">
+                <p14:modId xmlns:p14="http://schemas.microsoft.com/office/powerpoint/2010/main" val="1399739474"/>
+              </p:ext>
+            </p:extLst>
+          </p:nvPr>
         </p:nvGraphicFramePr>
         <p:xfrm>
-          <a:off x="2286000.0" y="5029200"/>
+          <a:off x="822960" y="4958366"/>
           <a:ext cx="7589520" cy="1389888"/>
         </p:xfrm>
         <a:graphic>
@@ -7478,10 +8083,34 @@
                 <a:tableStyleId>{5C22544A-7EE6-4342-B048-85BDC9FD1C3A}</a:tableStyleId>
               </a:tblPr>
               <a:tblGrid>
-                <a:gridCol w="1097280"/>
-                <a:gridCol w="2560320"/>
-                <a:gridCol w="1645920"/>
-                <a:gridCol w="2286000"/>
+                <a:gridCol w="1097280">
+                  <a:extLst>
+                    <a:ext uri="{9D8B030D-6E8A-4147-A177-3AD203B41FA5}">
+                      <a16:colId xmlns:a16="http://schemas.microsoft.com/office/drawing/2014/main" val="20000"/>
+                    </a:ext>
+                  </a:extLst>
+                </a:gridCol>
+                <a:gridCol w="2560320">
+                  <a:extLst>
+                    <a:ext uri="{9D8B030D-6E8A-4147-A177-3AD203B41FA5}">
+                      <a16:colId xmlns:a16="http://schemas.microsoft.com/office/drawing/2014/main" val="20001"/>
+                    </a:ext>
+                  </a:extLst>
+                </a:gridCol>
+                <a:gridCol w="1645920">
+                  <a:extLst>
+                    <a:ext uri="{9D8B030D-6E8A-4147-A177-3AD203B41FA5}">
+                      <a16:colId xmlns:a16="http://schemas.microsoft.com/office/drawing/2014/main" val="20002"/>
+                    </a:ext>
+                  </a:extLst>
+                </a:gridCol>
+                <a:gridCol w="2286000">
+                  <a:extLst>
+                    <a:ext uri="{9D8B030D-6E8A-4147-A177-3AD203B41FA5}">
+                      <a16:colId xmlns:a16="http://schemas.microsoft.com/office/drawing/2014/main" val="20003"/>
+                    </a:ext>
+                  </a:extLst>
+                </a:gridCol>
               </a:tblGrid>
               <a:tr h="347472">
                 <a:tc>
@@ -7608,6 +8237,11 @@
                     </a:lnB>
                   </a:tcPr>
                 </a:tc>
+                <a:extLst>
+                  <a:ext uri="{0D108BD9-81ED-4DB2-BD59-A6C34878D82A}">
+                    <a16:rowId xmlns:a16="http://schemas.microsoft.com/office/drawing/2014/main" val="10000"/>
+                  </a:ext>
+                </a:extLst>
               </a:tr>
               <a:tr h="347472">
                 <a:tc>
@@ -7628,7 +8262,17 @@
                       </a:r>
                     </a:p>
                   </a:txBody>
-                  <a:tcPr anchor="ctr"/>
+                  <a:tcPr anchor="ctr">
+                    <a:lnT w="9500" cap="flat" cmpd="sng" algn="ctr">
+                      <a:solidFill>
+                        <a:srgbClr val="000000"/>
+                      </a:solidFill>
+                      <a:prstDash val="solid"/>
+                      <a:round/>
+                      <a:headEnd type="none" w="med" len="med"/>
+                      <a:tailEnd type="none" w="med" len="med"/>
+                    </a:lnT>
+                  </a:tcPr>
                 </a:tc>
                 <a:tc>
                   <a:txBody>
@@ -7648,7 +8292,17 @@
                       </a:r>
                     </a:p>
                   </a:txBody>
-                  <a:tcPr anchor="ctr"/>
+                  <a:tcPr anchor="ctr">
+                    <a:lnT w="9500" cap="flat" cmpd="sng" algn="ctr">
+                      <a:solidFill>
+                        <a:srgbClr val="000000"/>
+                      </a:solidFill>
+                      <a:prstDash val="solid"/>
+                      <a:round/>
+                      <a:headEnd type="none" w="med" len="med"/>
+                      <a:tailEnd type="none" w="med" len="med"/>
+                    </a:lnT>
+                  </a:tcPr>
                 </a:tc>
                 <a:tc>
                   <a:txBody>
@@ -7668,7 +8322,17 @@
                       </a:r>
                     </a:p>
                   </a:txBody>
-                  <a:tcPr anchor="ctr"/>
+                  <a:tcPr anchor="ctr">
+                    <a:lnT w="9500" cap="flat" cmpd="sng" algn="ctr">
+                      <a:solidFill>
+                        <a:srgbClr val="000000"/>
+                      </a:solidFill>
+                      <a:prstDash val="solid"/>
+                      <a:round/>
+                      <a:headEnd type="none" w="med" len="med"/>
+                      <a:tailEnd type="none" w="med" len="med"/>
+                    </a:lnT>
+                  </a:tcPr>
                 </a:tc>
                 <a:tc>
                   <a:txBody>
@@ -7688,8 +8352,23 @@
                       </a:r>
                     </a:p>
                   </a:txBody>
-                  <a:tcPr anchor="ctr"/>
-                </a:tc>
+                  <a:tcPr anchor="ctr">
+                    <a:lnT w="9500" cap="flat" cmpd="sng" algn="ctr">
+                      <a:solidFill>
+                        <a:srgbClr val="000000"/>
+                      </a:solidFill>
+                      <a:prstDash val="solid"/>
+                      <a:round/>
+                      <a:headEnd type="none" w="med" len="med"/>
+                      <a:tailEnd type="none" w="med" len="med"/>
+                    </a:lnT>
+                  </a:tcPr>
+                </a:tc>
+                <a:extLst>
+                  <a:ext uri="{0D108BD9-81ED-4DB2-BD59-A6C34878D82A}">
+                    <a16:rowId xmlns:a16="http://schemas.microsoft.com/office/drawing/2014/main" val="10001"/>
+                  </a:ext>
+                </a:extLst>
               </a:tr>
               <a:tr h="347472">
                 <a:tc>
@@ -7746,6 +8425,7 @@
                         </a:defRPr>
                       </a:pPr>
                       <a:r>
+                        <a:rPr dirty="0"/>
                         <a:t>200</a:t>
                       </a:r>
                     </a:p>
@@ -7765,10 +8445,16 @@
                           <a:latin typeface="Times New Roman"/>
                         </a:defRPr>
                       </a:pPr>
+                      <a:endParaRPr/>
                     </a:p>
                   </a:txBody>
                   <a:tcPr anchor="ctr"/>
                 </a:tc>
+                <a:extLst>
+                  <a:ext uri="{0D108BD9-81ED-4DB2-BD59-A6C34878D82A}">
+                    <a16:rowId xmlns:a16="http://schemas.microsoft.com/office/drawing/2014/main" val="10002"/>
+                  </a:ext>
+                </a:extLst>
               </a:tr>
               <a:tr h="347472">
                 <a:tc>
@@ -7863,6 +8549,7 @@
                         </a:defRPr>
                       </a:pPr>
                       <a:r>
+                        <a:rPr dirty="0"/>
                         <a:t>×8 / ×16 各 40 张</a:t>
                       </a:r>
                     </a:p>
@@ -7875,6 +8562,11 @@
                     </a:lnB>
                   </a:tcPr>
                 </a:tc>
+                <a:extLst>
+                  <a:ext uri="{0D108BD9-81ED-4DB2-BD59-A6C34878D82A}">
+                    <a16:rowId xmlns:a16="http://schemas.microsoft.com/office/drawing/2014/main" val="10003"/>
+                  </a:ext>
+                </a:extLst>
               </a:tr>
             </a:tbl>
           </a:graphicData>
@@ -7889,7 +8581,7 @@
 </file>
 
 <file path=ppt/slides/slide8.xml><?xml version="1.0" encoding="utf-8"?>
-<p:sld xmlns:a="http://schemas.openxmlformats.org/drawingml/2006/main" xmlns:p="http://schemas.openxmlformats.org/presentationml/2006/main" xmlns:r="http://schemas.openxmlformats.org/officeDocument/2006/relationships">
+<p:sld xmlns:a="http://schemas.openxmlformats.org/drawingml/2006/main" xmlns:r="http://schemas.openxmlformats.org/officeDocument/2006/relationships" xmlns:p="http://schemas.openxmlformats.org/presentationml/2006/main">
   <p:cSld>
     <p:bg>
       <p:bgPr>
@@ -7905,7 +8597,14 @@
         <p:cNvGrpSpPr/>
         <p:nvPr/>
       </p:nvGrpSpPr>
-      <p:grpSpPr/>
+      <p:grpSpPr>
+        <a:xfrm>
+          <a:off x="0" y="0"/>
+          <a:ext cx="0" cy="0"/>
+          <a:chOff x="0" y="0"/>
+          <a:chExt cx="0" cy="0"/>
+        </a:xfrm>
+      </p:grpSpPr>
       <p:sp>
         <p:nvSpPr>
           <p:cNvPr id="2" name="TextBox 1"/>
@@ -7948,10 +8647,16 @@
           <p:cNvGraphicFramePr>
             <a:graphicFrameLocks noGrp="1"/>
           </p:cNvGraphicFramePr>
-          <p:nvPr/>
+          <p:nvPr>
+            <p:extLst>
+              <p:ext uri="{D42A27DB-BD31-4B8C-83A1-F6EECF244321}">
+                <p14:modId xmlns:p14="http://schemas.microsoft.com/office/powerpoint/2010/main" val="1118213953"/>
+              </p:ext>
+            </p:extLst>
+          </p:nvPr>
         </p:nvGraphicFramePr>
         <p:xfrm>
-          <a:off x="914400.0" y="1280160"/>
+          <a:off x="929640" y="1572768"/>
           <a:ext cx="10332720" cy="3712464"/>
         </p:xfrm>
         <a:graphic>
@@ -7961,12 +8666,48 @@
                 <a:tableStyleId>{5C22544A-7EE6-4342-B048-85BDC9FD1C3A}</a:tableStyleId>
               </a:tblPr>
               <a:tblGrid>
-                <a:gridCol w="1097280"/>
-                <a:gridCol w="1737360"/>
-                <a:gridCol w="1828800"/>
-                <a:gridCol w="1828800"/>
-                <a:gridCol w="1828800"/>
-                <a:gridCol w="2011680"/>
+                <a:gridCol w="1097280">
+                  <a:extLst>
+                    <a:ext uri="{9D8B030D-6E8A-4147-A177-3AD203B41FA5}">
+                      <a16:colId xmlns:a16="http://schemas.microsoft.com/office/drawing/2014/main" val="20000"/>
+                    </a:ext>
+                  </a:extLst>
+                </a:gridCol>
+                <a:gridCol w="1737360">
+                  <a:extLst>
+                    <a:ext uri="{9D8B030D-6E8A-4147-A177-3AD203B41FA5}">
+                      <a16:colId xmlns:a16="http://schemas.microsoft.com/office/drawing/2014/main" val="20001"/>
+                    </a:ext>
+                  </a:extLst>
+                </a:gridCol>
+                <a:gridCol w="1828800">
+                  <a:extLst>
+                    <a:ext uri="{9D8B030D-6E8A-4147-A177-3AD203B41FA5}">
+                      <a16:colId xmlns:a16="http://schemas.microsoft.com/office/drawing/2014/main" val="20002"/>
+                    </a:ext>
+                  </a:extLst>
+                </a:gridCol>
+                <a:gridCol w="1828800">
+                  <a:extLst>
+                    <a:ext uri="{9D8B030D-6E8A-4147-A177-3AD203B41FA5}">
+                      <a16:colId xmlns:a16="http://schemas.microsoft.com/office/drawing/2014/main" val="20003"/>
+                    </a:ext>
+                  </a:extLst>
+                </a:gridCol>
+                <a:gridCol w="1828800">
+                  <a:extLst>
+                    <a:ext uri="{9D8B030D-6E8A-4147-A177-3AD203B41FA5}">
+                      <a16:colId xmlns:a16="http://schemas.microsoft.com/office/drawing/2014/main" val="20004"/>
+                    </a:ext>
+                  </a:extLst>
+                </a:gridCol>
+                <a:gridCol w="2011680">
+                  <a:extLst>
+                    <a:ext uri="{9D8B030D-6E8A-4147-A177-3AD203B41FA5}">
+                      <a16:colId xmlns:a16="http://schemas.microsoft.com/office/drawing/2014/main" val="20005"/>
+                    </a:ext>
+                  </a:extLst>
+                </a:gridCol>
               </a:tblGrid>
               <a:tr h="530352">
                 <a:tc>
@@ -7982,6 +8723,7 @@
                           <a:latin typeface="Times New Roman"/>
                         </a:defRPr>
                       </a:pPr>
+                      <a:endParaRPr/>
                     </a:p>
                   </a:txBody>
                   <a:tcPr anchor="ctr">
@@ -8152,6 +8894,11 @@
                     </a:lnB>
                   </a:tcPr>
                 </a:tc>
+                <a:extLst>
+                  <a:ext uri="{0D108BD9-81ED-4DB2-BD59-A6C34878D82A}">
+                    <a16:rowId xmlns:a16="http://schemas.microsoft.com/office/drawing/2014/main" val="10000"/>
+                  </a:ext>
+                </a:extLst>
               </a:tr>
               <a:tr h="530352">
                 <a:tc>
@@ -8172,7 +8919,17 @@
                       </a:r>
                     </a:p>
                   </a:txBody>
-                  <a:tcPr anchor="ctr"/>
+                  <a:tcPr anchor="ctr">
+                    <a:lnT w="9500" cap="flat" cmpd="sng" algn="ctr">
+                      <a:solidFill>
+                        <a:srgbClr val="000000"/>
+                      </a:solidFill>
+                      <a:prstDash val="solid"/>
+                      <a:round/>
+                      <a:headEnd type="none" w="med" len="med"/>
+                      <a:tailEnd type="none" w="med" len="med"/>
+                    </a:lnT>
+                  </a:tcPr>
                 </a:tc>
                 <a:tc>
                   <a:txBody>
@@ -8192,7 +8949,17 @@
                       </a:r>
                     </a:p>
                   </a:txBody>
-                  <a:tcPr anchor="ctr"/>
+                  <a:tcPr anchor="ctr">
+                    <a:lnT w="9500" cap="flat" cmpd="sng" algn="ctr">
+                      <a:solidFill>
+                        <a:srgbClr val="000000"/>
+                      </a:solidFill>
+                      <a:prstDash val="solid"/>
+                      <a:round/>
+                      <a:headEnd type="none" w="med" len="med"/>
+                      <a:tailEnd type="none" w="med" len="med"/>
+                    </a:lnT>
+                  </a:tcPr>
                 </a:tc>
                 <a:tc>
                   <a:txBody>
@@ -8212,7 +8979,17 @@
                       </a:r>
                     </a:p>
                   </a:txBody>
-                  <a:tcPr anchor="ctr"/>
+                  <a:tcPr anchor="ctr">
+                    <a:lnT w="9500" cap="flat" cmpd="sng" algn="ctr">
+                      <a:solidFill>
+                        <a:srgbClr val="000000"/>
+                      </a:solidFill>
+                      <a:prstDash val="solid"/>
+                      <a:round/>
+                      <a:headEnd type="none" w="med" len="med"/>
+                      <a:tailEnd type="none" w="med" len="med"/>
+                    </a:lnT>
+                  </a:tcPr>
                 </a:tc>
                 <a:tc>
                   <a:txBody>
@@ -8232,7 +9009,17 @@
                       </a:r>
                     </a:p>
                   </a:txBody>
-                  <a:tcPr anchor="ctr"/>
+                  <a:tcPr anchor="ctr">
+                    <a:lnT w="9500" cap="flat" cmpd="sng" algn="ctr">
+                      <a:solidFill>
+                        <a:srgbClr val="000000"/>
+                      </a:solidFill>
+                      <a:prstDash val="solid"/>
+                      <a:round/>
+                      <a:headEnd type="none" w="med" len="med"/>
+                      <a:tailEnd type="none" w="med" len="med"/>
+                    </a:lnT>
+                  </a:tcPr>
                 </a:tc>
                 <a:tc>
                   <a:txBody>
@@ -8252,7 +9039,17 @@
                       </a:r>
                     </a:p>
                   </a:txBody>
-                  <a:tcPr anchor="ctr"/>
+                  <a:tcPr anchor="ctr">
+                    <a:lnT w="9500" cap="flat" cmpd="sng" algn="ctr">
+                      <a:solidFill>
+                        <a:srgbClr val="000000"/>
+                      </a:solidFill>
+                      <a:prstDash val="solid"/>
+                      <a:round/>
+                      <a:headEnd type="none" w="med" len="med"/>
+                      <a:tailEnd type="none" w="med" len="med"/>
+                    </a:lnT>
+                  </a:tcPr>
                 </a:tc>
                 <a:tc>
                   <a:txBody>
@@ -8272,8 +9069,23 @@
                       </a:r>
                     </a:p>
                   </a:txBody>
-                  <a:tcPr anchor="ctr"/>
-                </a:tc>
+                  <a:tcPr anchor="ctr">
+                    <a:lnT w="9500" cap="flat" cmpd="sng" algn="ctr">
+                      <a:solidFill>
+                        <a:srgbClr val="000000"/>
+                      </a:solidFill>
+                      <a:prstDash val="solid"/>
+                      <a:round/>
+                      <a:headEnd type="none" w="med" len="med"/>
+                      <a:tailEnd type="none" w="med" len="med"/>
+                    </a:lnT>
+                  </a:tcPr>
+                </a:tc>
+                <a:extLst>
+                  <a:ext uri="{0D108BD9-81ED-4DB2-BD59-A6C34878D82A}">
+                    <a16:rowId xmlns:a16="http://schemas.microsoft.com/office/drawing/2014/main" val="10001"/>
+                  </a:ext>
+                </a:extLst>
               </a:tr>
               <a:tr h="530352">
                 <a:tc>
@@ -8396,6 +9208,11 @@
                   </a:txBody>
                   <a:tcPr anchor="ctr"/>
                 </a:tc>
+                <a:extLst>
+                  <a:ext uri="{0D108BD9-81ED-4DB2-BD59-A6C34878D82A}">
+                    <a16:rowId xmlns:a16="http://schemas.microsoft.com/office/drawing/2014/main" val="10002"/>
+                  </a:ext>
+                </a:extLst>
               </a:tr>
               <a:tr h="530352">
                 <a:tc>
@@ -8544,6 +9361,11 @@
                   </a:txBody>
                   <a:tcPr anchor="ctr"/>
                 </a:tc>
+                <a:extLst>
+                  <a:ext uri="{0D108BD9-81ED-4DB2-BD59-A6C34878D82A}">
+                    <a16:rowId xmlns:a16="http://schemas.microsoft.com/office/drawing/2014/main" val="10003"/>
+                  </a:ext>
+                </a:extLst>
               </a:tr>
               <a:tr h="530352">
                 <a:tc>
@@ -8666,6 +9488,11 @@
                   </a:txBody>
                   <a:tcPr anchor="ctr"/>
                 </a:tc>
+                <a:extLst>
+                  <a:ext uri="{0D108BD9-81ED-4DB2-BD59-A6C34878D82A}">
+                    <a16:rowId xmlns:a16="http://schemas.microsoft.com/office/drawing/2014/main" val="10004"/>
+                  </a:ext>
+                </a:extLst>
               </a:tr>
               <a:tr h="530352">
                 <a:tc>
@@ -8788,6 +9615,11 @@
                   </a:txBody>
                   <a:tcPr anchor="ctr"/>
                 </a:tc>
+                <a:extLst>
+                  <a:ext uri="{0D108BD9-81ED-4DB2-BD59-A6C34878D82A}">
+                    <a16:rowId xmlns:a16="http://schemas.microsoft.com/office/drawing/2014/main" val="10005"/>
+                  </a:ext>
+                </a:extLst>
               </a:tr>
               <a:tr h="530352">
                 <a:tc>
@@ -8908,7 +9740,16 @@
                         </a:defRPr>
                       </a:pPr>
                       <a:r>
-                        <a:t>train/val/test</a:t>
+                        <a:rPr dirty="0"/>
+                        <a:t>train/</a:t>
+                      </a:r>
+                      <a:r>
+                        <a:rPr dirty="0" err="1"/>
+                        <a:t>val</a:t>
+                      </a:r>
+                      <a:r>
+                        <a:rPr dirty="0"/>
+                        <a:t>/test</a:t>
                       </a:r>
                     </a:p>
                   </a:txBody>
@@ -8934,7 +9775,16 @@
                         </a:defRPr>
                       </a:pPr>
                       <a:r>
-                        <a:t>train/val/test</a:t>
+                        <a:rPr dirty="0"/>
+                        <a:t>train/</a:t>
+                      </a:r>
+                      <a:r>
+                        <a:rPr dirty="0" err="1"/>
+                        <a:t>val</a:t>
+                      </a:r>
+                      <a:r>
+                        <a:rPr dirty="0"/>
+                        <a:t>/test</a:t>
                       </a:r>
                     </a:p>
                   </a:txBody>
@@ -8946,6 +9796,11 @@
                     </a:lnB>
                   </a:tcPr>
                 </a:tc>
+                <a:extLst>
+                  <a:ext uri="{0D108BD9-81ED-4DB2-BD59-A6C34878D82A}">
+                    <a16:rowId xmlns:a16="http://schemas.microsoft.com/office/drawing/2014/main" val="10006"/>
+                  </a:ext>
+                </a:extLst>
               </a:tr>
             </a:tbl>
           </a:graphicData>
